--- a/powerpoints.pptx
+++ b/powerpoints.pptx
@@ -2,18 +2,18 @@
 <file path=ppt/presentation.xml><?xml version="1.0" encoding="utf-8"?>
 <p:presentation xmlns:p="http://schemas.openxmlformats.org/presentationml/2006/main">
   <p:sldMasterIdLst>
-    <p:sldMasterId xmlns:r="http://schemas.openxmlformats.org/officeDocument/2006/relationships" id="2147483648" r:id="R18a6c4b2995a42a0"/>
+    <p:sldMasterId xmlns:r="http://schemas.openxmlformats.org/officeDocument/2006/relationships" id="2147483648" r:id="R16fedacea6d9427b"/>
   </p:sldMasterIdLst>
   <p:notesMasterIdLst>
-    <p:notesMasterId xmlns:r="http://schemas.openxmlformats.org/officeDocument/2006/relationships" r:id="Ra48a7cffc24e47c0"/>
+    <p:notesMasterId xmlns:r="http://schemas.openxmlformats.org/officeDocument/2006/relationships" r:id="R81a89c9854c342af"/>
   </p:notesMasterIdLst>
   <p:sldIdLst>
-    <p:sldId xmlns:r="http://schemas.openxmlformats.org/officeDocument/2006/relationships" id="256" r:id="R3f1361f91aff4a22"/>
-    <p:sldId xmlns:r="http://schemas.openxmlformats.org/officeDocument/2006/relationships" id="257" r:id="Rb1c337611afa4930"/>
-    <p:sldId xmlns:r="http://schemas.openxmlformats.org/officeDocument/2006/relationships" id="258" r:id="R858e3ca0f2be4ae1"/>
-    <p:sldId xmlns:r="http://schemas.openxmlformats.org/officeDocument/2006/relationships" id="259" r:id="R4fa45ad512974c7f"/>
-    <p:sldId xmlns:r="http://schemas.openxmlformats.org/officeDocument/2006/relationships" id="260" r:id="Rc60d33caa8614055"/>
-    <p:sldId xmlns:r="http://schemas.openxmlformats.org/officeDocument/2006/relationships" id="261" r:id="R510ace87129843ad"/>
+    <p:sldId xmlns:r="http://schemas.openxmlformats.org/officeDocument/2006/relationships" id="256" r:id="Re4c7481fc1984d9d"/>
+    <p:sldId xmlns:r="http://schemas.openxmlformats.org/officeDocument/2006/relationships" id="257" r:id="R449e8f28a3044616"/>
+    <p:sldId xmlns:r="http://schemas.openxmlformats.org/officeDocument/2006/relationships" id="258" r:id="R156ed488f16045c6"/>
+    <p:sldId xmlns:r="http://schemas.openxmlformats.org/officeDocument/2006/relationships" id="259" r:id="Rea8aed404eb94821"/>
+    <p:sldId xmlns:r="http://schemas.openxmlformats.org/officeDocument/2006/relationships" id="260" r:id="Ra7715471fedb4ab3"/>
+    <p:sldId xmlns:r="http://schemas.openxmlformats.org/officeDocument/2006/relationships" id="261" r:id="Reee50bf053b54c30"/>
   </p:sldIdLst>
   <p:sldSz cx="12192000" cy="6858000"/>
   <p:notesSz cx="6858000" cy="9144000"/>
@@ -587,7 +587,7 @@
           <a:lstStyle xmlns:a="http://schemas.openxmlformats.org/drawingml/2006/main"/>
           <a:p xmlns:a="http://schemas.openxmlformats.org/drawingml/2006/main">
             <a:r>
-              <a:t>0:50-1:20. The learner can inspect a completed attempt and use course-grounded hints. The tutor mode is set by code from assessment state, then verifies allowed moves and citations. Instructors have roster and grade views, and evidence references make assessment details traceable. The student and instructor views have different access boundaries. Source: carmen-study-guide/mock-canvas/ui.py, tutor/policy.py, tutor/verifier.py, and INGEST_CONTRACT.md.</a:t>
+              <a:t>0:50-1:20. The learner can inspect a completed attempt and ask for course-grounded hints. Tutor responses can now display lecture and notes snippets, and the server verifies that each snippet appears in the retrieved material. Assessment mode and output checks continue to govern the response. Instructors have roster and grade views, and evidence references make records traceable. Source: carmen-study-guide/mock-canvas/tutor/snippets.py, tutor/service.py, tutor/policy.py, tutor/verifier.py, and INGEST_CONTRACT.md.</a:t>
             </a:r>
           </a:p>
         </p:txBody>
@@ -657,7 +657,7 @@
           <a:lstStyle xmlns:a="http://schemas.openxmlformats.org/drawingml/2006/main"/>
           <a:p xmlns:a="http://schemas.openxmlformats.org/drawingml/2006/main">
             <a:r>
-              <a:t>1:20-1:50. The local walkthrough runs on the Python FastAPI app with SQLite-backed synthetic data. The project also has server-side Supabase integration for shared analytics data. Browser reads use the logged-in session, service credentials stay on the server, and the tutor calls retrieval as the student. Answer keys are instructor-only. The local demo tokens are fixtures, not production authentication. Source: carmen-study-guide/README.md and INGEST_CONTRACT.md.</a:t>
+              <a:t>1:20-1:50. The local walkthrough runs on Python FastAPI with SQLite-backed synthetic data. Shared analytics can use Supabase. The tutor now has a Bedrock route that uses Amazon Nova and AWS credits; the Claude API remains another provider option. Assessment-mode and quiz-protection checks stay in code across the provider choice. Demo account passwords and short-lived AWS credentials stay private in local environment settings. Source: carmen-study-guide/mock-canvas/tutor/llm_bedrock.py, tutor/demo_accounts.py, README.md, and INGEST_CONTRACT.md.</a:t>
             </a:r>
           </a:p>
         </p:txBody>
@@ -797,7 +797,7 @@
           <a:lstStyle xmlns:a="http://schemas.openxmlformats.org/drawingml/2006/main"/>
           <a:p xmlns:a="http://schemas.openxmlformats.org/drawingml/2006/main">
             <a:r>
-              <a:t>2:20-2:50. The project has a local Canvas-style interface, an evidence-linked export, role-scoped views, and an integrity-aware tutor module. The local roster and quizzes are synthetic, and we are not claiming measured learning gains. Next we would connect an authorized real course, verify the mapping with its owner, then measure whether source-linked feedback helps learners correct mistakes.</a:t>
+              <a:t>2:20-2:50. The project has a local Canvas-style interface, an evidence-linked export, role-scoped views, and an integrity-aware tutor module. Tutor replies can include verified lecture and notes snippets, demo sign-in accounts are available, and Amazon Nova on Bedrock is an AWS-credit option. The local roster and assessments are synthetic; no learning-gain result is claimed. Next, connect an authorized real course and measure whether source-linked feedback helps learners correct mistakes. Source: carmen-study-guide/mock-canvas/tutor/snippets.py, tutor/demo_accounts.py, tutor/llm_bedrock.py, and INGEST_CONTRACT.md.</a:t>
             </a:r>
           </a:p>
         </p:txBody>
@@ -3240,12 +3240,12 @@
   </p:cSld>
   <p:clrMap bg1="lt1" tx1="dk1" bg2="lt2" tx2="dk2" accent1="accent1" accent2="accent2" accent3="accent3" accent4="accent4" accent5="accent5" accent6="accent6" hlink="hlink" folHlink="folHlink"/>
   <p:sldLayoutIdLst>
-    <p:sldLayoutId xmlns:r="http://schemas.openxmlformats.org/officeDocument/2006/relationships" id="2147483649" r:id="R66c645f743694816"/>
-    <p:sldLayoutId xmlns:r="http://schemas.openxmlformats.org/officeDocument/2006/relationships" id="2147483650" r:id="R2987ca914a4b4134"/>
-    <p:sldLayoutId xmlns:r="http://schemas.openxmlformats.org/officeDocument/2006/relationships" id="2147483651" r:id="Rcf6b768e47564d1c"/>
-    <p:sldLayoutId xmlns:r="http://schemas.openxmlformats.org/officeDocument/2006/relationships" id="2147483652" r:id="R3cc322ae95eb476c"/>
-    <p:sldLayoutId xmlns:r="http://schemas.openxmlformats.org/officeDocument/2006/relationships" id="2147483653" r:id="Ra62fca2ba23e4f6f"/>
-    <p:sldLayoutId xmlns:r="http://schemas.openxmlformats.org/officeDocument/2006/relationships" id="2147483654" r:id="R073cffd466be48e0"/>
+    <p:sldLayoutId xmlns:r="http://schemas.openxmlformats.org/officeDocument/2006/relationships" id="2147483649" r:id="R9ed4f8ed037746ec"/>
+    <p:sldLayoutId xmlns:r="http://schemas.openxmlformats.org/officeDocument/2006/relationships" id="2147483650" r:id="Rc370c68b63754fb1"/>
+    <p:sldLayoutId xmlns:r="http://schemas.openxmlformats.org/officeDocument/2006/relationships" id="2147483651" r:id="R844c7807c2aa4a0c"/>
+    <p:sldLayoutId xmlns:r="http://schemas.openxmlformats.org/officeDocument/2006/relationships" id="2147483652" r:id="R65bc2625d28e453e"/>
+    <p:sldLayoutId xmlns:r="http://schemas.openxmlformats.org/officeDocument/2006/relationships" id="2147483653" r:id="Rfe71c27d2af64e7a"/>
+    <p:sldLayoutId xmlns:r="http://schemas.openxmlformats.org/officeDocument/2006/relationships" id="2147483654" r:id="Rb66fb7017b294de8"/>
   </p:sldLayoutIdLst>
   <p:txStyles>
     <p:titleStyle>
@@ -3864,6 +3864,7 @@
               </a:defRPr>
             </a:defPPr>
             <a:lvl1pPr algn="l">
+              <a:buNone/>
               <a:defRPr sz="1275" b="1">
                 <a:solidFill>
                   <a:srgbClr val="BBD0DD"/>
@@ -3874,6 +3875,7 @@
               </a:defRPr>
             </a:lvl1pPr>
             <a:lvl2pPr algn="l">
+              <a:buNone/>
               <a:defRPr sz="1275" b="1">
                 <a:solidFill>
                   <a:srgbClr val="BBD0DD"/>
@@ -3884,6 +3886,7 @@
               </a:defRPr>
             </a:lvl2pPr>
             <a:lvl3pPr algn="l">
+              <a:buNone/>
               <a:defRPr sz="1275" b="1">
                 <a:solidFill>
                   <a:srgbClr val="BBD0DD"/>
@@ -3894,6 +3897,7 @@
               </a:defRPr>
             </a:lvl3pPr>
             <a:lvl4pPr algn="l">
+              <a:buNone/>
               <a:defRPr sz="1275" b="1">
                 <a:solidFill>
                   <a:srgbClr val="BBD0DD"/>
@@ -3904,6 +3908,7 @@
               </a:defRPr>
             </a:lvl4pPr>
             <a:lvl5pPr algn="l">
+              <a:buNone/>
               <a:defRPr sz="1275" b="1">
                 <a:solidFill>
                   <a:srgbClr val="BBD0DD"/>
@@ -3914,6 +3919,7 @@
               </a:defRPr>
             </a:lvl5pPr>
             <a:lvl6pPr algn="l">
+              <a:buNone/>
               <a:defRPr sz="1275" b="1">
                 <a:solidFill>
                   <a:srgbClr val="BBD0DD"/>
@@ -3924,6 +3930,7 @@
               </a:defRPr>
             </a:lvl6pPr>
             <a:lvl7pPr algn="l">
+              <a:buNone/>
               <a:defRPr sz="1275" b="1">
                 <a:solidFill>
                   <a:srgbClr val="BBD0DD"/>
@@ -3934,6 +3941,7 @@
               </a:defRPr>
             </a:lvl7pPr>
             <a:lvl8pPr algn="l">
+              <a:buNone/>
               <a:defRPr sz="1275" b="1">
                 <a:solidFill>
                   <a:srgbClr val="BBD0DD"/>
@@ -3944,6 +3952,7 @@
               </a:defRPr>
             </a:lvl8pPr>
             <a:lvl9pPr algn="l">
+              <a:buNone/>
               <a:defRPr sz="1275" b="1">
                 <a:solidFill>
                   <a:srgbClr val="BBD0DD"/>
@@ -3956,6 +3965,7 @@
           </a:lstStyle>
           <a:p xmlns:a="http://schemas.openxmlformats.org/drawingml/2006/main">
             <a:pPr algn="l">
+              <a:buNone/>
               <a:defRPr sz="1275" b="1">
                 <a:solidFill>
                   <a:srgbClr val="BBD0DD"/>
@@ -4021,6 +4031,7 @@
               </a:defRPr>
             </a:defPPr>
             <a:lvl1pPr algn="l">
+              <a:buNone/>
               <a:defRPr sz="3750" b="1">
                 <a:solidFill>
                   <a:srgbClr val="FFFFFF"/>
@@ -4031,6 +4042,7 @@
               </a:defRPr>
             </a:lvl1pPr>
             <a:lvl2pPr algn="l">
+              <a:buNone/>
               <a:defRPr sz="3750" b="1">
                 <a:solidFill>
                   <a:srgbClr val="FFFFFF"/>
@@ -4041,6 +4053,7 @@
               </a:defRPr>
             </a:lvl2pPr>
             <a:lvl3pPr algn="l">
+              <a:buNone/>
               <a:defRPr sz="3750" b="1">
                 <a:solidFill>
                   <a:srgbClr val="FFFFFF"/>
@@ -4051,6 +4064,7 @@
               </a:defRPr>
             </a:lvl3pPr>
             <a:lvl4pPr algn="l">
+              <a:buNone/>
               <a:defRPr sz="3750" b="1">
                 <a:solidFill>
                   <a:srgbClr val="FFFFFF"/>
@@ -4061,6 +4075,7 @@
               </a:defRPr>
             </a:lvl4pPr>
             <a:lvl5pPr algn="l">
+              <a:buNone/>
               <a:defRPr sz="3750" b="1">
                 <a:solidFill>
                   <a:srgbClr val="FFFFFF"/>
@@ -4071,6 +4086,7 @@
               </a:defRPr>
             </a:lvl5pPr>
             <a:lvl6pPr algn="l">
+              <a:buNone/>
               <a:defRPr sz="3750" b="1">
                 <a:solidFill>
                   <a:srgbClr val="FFFFFF"/>
@@ -4081,6 +4097,7 @@
               </a:defRPr>
             </a:lvl6pPr>
             <a:lvl7pPr algn="l">
+              <a:buNone/>
               <a:defRPr sz="3750" b="1">
                 <a:solidFill>
                   <a:srgbClr val="FFFFFF"/>
@@ -4091,6 +4108,7 @@
               </a:defRPr>
             </a:lvl7pPr>
             <a:lvl8pPr algn="l">
+              <a:buNone/>
               <a:defRPr sz="3750" b="1">
                 <a:solidFill>
                   <a:srgbClr val="FFFFFF"/>
@@ -4101,6 +4119,7 @@
               </a:defRPr>
             </a:lvl8pPr>
             <a:lvl9pPr algn="l">
+              <a:buNone/>
               <a:defRPr sz="3750" b="1">
                 <a:solidFill>
                   <a:srgbClr val="FFFFFF"/>
@@ -4113,6 +4132,7 @@
           </a:lstStyle>
           <a:p xmlns:a="http://schemas.openxmlformats.org/drawingml/2006/main">
             <a:pPr algn="l">
+              <a:buNone/>
               <a:defRPr sz="3750" b="1">
                 <a:solidFill>
                   <a:srgbClr val="FFFFFF"/>
@@ -4136,6 +4156,7 @@
           </a:p>
           <a:p xmlns:a="http://schemas.openxmlformats.org/drawingml/2006/main">
             <a:pPr algn="l">
+              <a:buNone/>
               <a:defRPr sz="3750" b="1">
                 <a:solidFill>
                   <a:srgbClr val="FFFFFF"/>
@@ -4159,6 +4180,7 @@
           </a:p>
           <a:p xmlns:a="http://schemas.openxmlformats.org/drawingml/2006/main">
             <a:pPr algn="l">
+              <a:buNone/>
               <a:defRPr sz="3750" b="1">
                 <a:solidFill>
                   <a:srgbClr val="FFFFFF"/>
@@ -4255,6 +4277,7 @@
               </a:defRPr>
             </a:defPPr>
             <a:lvl1pPr algn="l">
+              <a:buNone/>
               <a:defRPr sz="1800" b="0">
                 <a:solidFill>
                   <a:srgbClr val="DCE8EE"/>
@@ -4265,6 +4288,7 @@
               </a:defRPr>
             </a:lvl1pPr>
             <a:lvl2pPr algn="l">
+              <a:buNone/>
               <a:defRPr sz="1800" b="0">
                 <a:solidFill>
                   <a:srgbClr val="DCE8EE"/>
@@ -4275,6 +4299,7 @@
               </a:defRPr>
             </a:lvl2pPr>
             <a:lvl3pPr algn="l">
+              <a:buNone/>
               <a:defRPr sz="1800" b="0">
                 <a:solidFill>
                   <a:srgbClr val="DCE8EE"/>
@@ -4285,6 +4310,7 @@
               </a:defRPr>
             </a:lvl3pPr>
             <a:lvl4pPr algn="l">
+              <a:buNone/>
               <a:defRPr sz="1800" b="0">
                 <a:solidFill>
                   <a:srgbClr val="DCE8EE"/>
@@ -4295,6 +4321,7 @@
               </a:defRPr>
             </a:lvl4pPr>
             <a:lvl5pPr algn="l">
+              <a:buNone/>
               <a:defRPr sz="1800" b="0">
                 <a:solidFill>
                   <a:srgbClr val="DCE8EE"/>
@@ -4305,6 +4332,7 @@
               </a:defRPr>
             </a:lvl5pPr>
             <a:lvl6pPr algn="l">
+              <a:buNone/>
               <a:defRPr sz="1800" b="0">
                 <a:solidFill>
                   <a:srgbClr val="DCE8EE"/>
@@ -4315,6 +4343,7 @@
               </a:defRPr>
             </a:lvl6pPr>
             <a:lvl7pPr algn="l">
+              <a:buNone/>
               <a:defRPr sz="1800" b="0">
                 <a:solidFill>
                   <a:srgbClr val="DCE8EE"/>
@@ -4325,6 +4354,7 @@
               </a:defRPr>
             </a:lvl7pPr>
             <a:lvl8pPr algn="l">
+              <a:buNone/>
               <a:defRPr sz="1800" b="0">
                 <a:solidFill>
                   <a:srgbClr val="DCE8EE"/>
@@ -4335,6 +4365,7 @@
               </a:defRPr>
             </a:lvl8pPr>
             <a:lvl9pPr algn="l">
+              <a:buNone/>
               <a:defRPr sz="1800" b="0">
                 <a:solidFill>
                   <a:srgbClr val="DCE8EE"/>
@@ -4347,6 +4378,7 @@
           </a:lstStyle>
           <a:p xmlns:a="http://schemas.openxmlformats.org/drawingml/2006/main">
             <a:pPr algn="l">
+              <a:buNone/>
               <a:defRPr sz="1800" b="0">
                 <a:solidFill>
                   <a:srgbClr val="DCE8EE"/>
@@ -4445,6 +4477,7 @@
               </a:defRPr>
             </a:defPPr>
             <a:lvl1pPr algn="l">
+              <a:buNone/>
               <a:defRPr sz="1050" b="1">
                 <a:solidFill>
                   <a:srgbClr val="BBD0DD"/>
@@ -4455,6 +4488,7 @@
               </a:defRPr>
             </a:lvl1pPr>
             <a:lvl2pPr algn="l">
+              <a:buNone/>
               <a:defRPr sz="1050" b="1">
                 <a:solidFill>
                   <a:srgbClr val="BBD0DD"/>
@@ -4465,6 +4499,7 @@
               </a:defRPr>
             </a:lvl2pPr>
             <a:lvl3pPr algn="l">
+              <a:buNone/>
               <a:defRPr sz="1050" b="1">
                 <a:solidFill>
                   <a:srgbClr val="BBD0DD"/>
@@ -4475,6 +4510,7 @@
               </a:defRPr>
             </a:lvl3pPr>
             <a:lvl4pPr algn="l">
+              <a:buNone/>
               <a:defRPr sz="1050" b="1">
                 <a:solidFill>
                   <a:srgbClr val="BBD0DD"/>
@@ -4485,6 +4521,7 @@
               </a:defRPr>
             </a:lvl4pPr>
             <a:lvl5pPr algn="l">
+              <a:buNone/>
               <a:defRPr sz="1050" b="1">
                 <a:solidFill>
                   <a:srgbClr val="BBD0DD"/>
@@ -4495,6 +4532,7 @@
               </a:defRPr>
             </a:lvl5pPr>
             <a:lvl6pPr algn="l">
+              <a:buNone/>
               <a:defRPr sz="1050" b="1">
                 <a:solidFill>
                   <a:srgbClr val="BBD0DD"/>
@@ -4505,6 +4543,7 @@
               </a:defRPr>
             </a:lvl6pPr>
             <a:lvl7pPr algn="l">
+              <a:buNone/>
               <a:defRPr sz="1050" b="1">
                 <a:solidFill>
                   <a:srgbClr val="BBD0DD"/>
@@ -4515,6 +4554,7 @@
               </a:defRPr>
             </a:lvl7pPr>
             <a:lvl8pPr algn="l">
+              <a:buNone/>
               <a:defRPr sz="1050" b="1">
                 <a:solidFill>
                   <a:srgbClr val="BBD0DD"/>
@@ -4525,6 +4565,7 @@
               </a:defRPr>
             </a:lvl8pPr>
             <a:lvl9pPr algn="l">
+              <a:buNone/>
               <a:defRPr sz="1050" b="1">
                 <a:solidFill>
                   <a:srgbClr val="BBD0DD"/>
@@ -4537,6 +4578,7 @@
           </a:lstStyle>
           <a:p xmlns:a="http://schemas.openxmlformats.org/drawingml/2006/main">
             <a:pPr algn="l">
+              <a:buNone/>
               <a:defRPr sz="1050" b="1">
                 <a:solidFill>
                   <a:srgbClr val="BBD0DD"/>
@@ -4602,6 +4644,7 @@
               </a:defRPr>
             </a:defPPr>
             <a:lvl1pPr algn="l">
+              <a:buNone/>
               <a:defRPr sz="1650" b="1">
                 <a:solidFill>
                   <a:srgbClr val="FFFFFF"/>
@@ -4612,6 +4655,7 @@
               </a:defRPr>
             </a:lvl1pPr>
             <a:lvl2pPr algn="l">
+              <a:buNone/>
               <a:defRPr sz="1650" b="1">
                 <a:solidFill>
                   <a:srgbClr val="FFFFFF"/>
@@ -4622,6 +4666,7 @@
               </a:defRPr>
             </a:lvl2pPr>
             <a:lvl3pPr algn="l">
+              <a:buNone/>
               <a:defRPr sz="1650" b="1">
                 <a:solidFill>
                   <a:srgbClr val="FFFFFF"/>
@@ -4632,6 +4677,7 @@
               </a:defRPr>
             </a:lvl3pPr>
             <a:lvl4pPr algn="l">
+              <a:buNone/>
               <a:defRPr sz="1650" b="1">
                 <a:solidFill>
                   <a:srgbClr val="FFFFFF"/>
@@ -4642,6 +4688,7 @@
               </a:defRPr>
             </a:lvl4pPr>
             <a:lvl5pPr algn="l">
+              <a:buNone/>
               <a:defRPr sz="1650" b="1">
                 <a:solidFill>
                   <a:srgbClr val="FFFFFF"/>
@@ -4652,6 +4699,7 @@
               </a:defRPr>
             </a:lvl5pPr>
             <a:lvl6pPr algn="l">
+              <a:buNone/>
               <a:defRPr sz="1650" b="1">
                 <a:solidFill>
                   <a:srgbClr val="FFFFFF"/>
@@ -4662,6 +4710,7 @@
               </a:defRPr>
             </a:lvl6pPr>
             <a:lvl7pPr algn="l">
+              <a:buNone/>
               <a:defRPr sz="1650" b="1">
                 <a:solidFill>
                   <a:srgbClr val="FFFFFF"/>
@@ -4672,6 +4721,7 @@
               </a:defRPr>
             </a:lvl7pPr>
             <a:lvl8pPr algn="l">
+              <a:buNone/>
               <a:defRPr sz="1650" b="1">
                 <a:solidFill>
                   <a:srgbClr val="FFFFFF"/>
@@ -4682,6 +4732,7 @@
               </a:defRPr>
             </a:lvl8pPr>
             <a:lvl9pPr algn="l">
+              <a:buNone/>
               <a:defRPr sz="1650" b="1">
                 <a:solidFill>
                   <a:srgbClr val="FFFFFF"/>
@@ -4694,6 +4745,7 @@
           </a:lstStyle>
           <a:p xmlns:a="http://schemas.openxmlformats.org/drawingml/2006/main">
             <a:pPr algn="l">
+              <a:buNone/>
               <a:defRPr sz="1650" b="1">
                 <a:solidFill>
                   <a:srgbClr val="FFFFFF"/>
@@ -4717,6 +4769,7 @@
           </a:p>
           <a:p xmlns:a="http://schemas.openxmlformats.org/drawingml/2006/main">
             <a:pPr algn="l">
+              <a:buNone/>
               <a:defRPr sz="1650" b="1">
                 <a:solidFill>
                   <a:srgbClr val="FFFFFF"/>
@@ -4740,6 +4793,7 @@
           </a:p>
           <a:p xmlns:a="http://schemas.openxmlformats.org/drawingml/2006/main">
             <a:pPr algn="l">
+              <a:buNone/>
               <a:defRPr sz="1650" b="1">
                 <a:solidFill>
                   <a:srgbClr val="FFFFFF"/>
@@ -4763,6 +4817,7 @@
           </a:p>
           <a:p xmlns:a="http://schemas.openxmlformats.org/drawingml/2006/main">
             <a:pPr algn="l">
+              <a:buNone/>
               <a:defRPr sz="1650" b="1">
                 <a:solidFill>
                   <a:srgbClr val="FFFFFF"/>
@@ -4861,6 +4916,7 @@
               </a:defRPr>
             </a:defPPr>
             <a:lvl1pPr algn="l">
+              <a:buNone/>
               <a:defRPr sz="1200" b="1">
                 <a:solidFill>
                   <a:srgbClr val="FFFFFF"/>
@@ -4871,6 +4927,7 @@
               </a:defRPr>
             </a:lvl1pPr>
             <a:lvl2pPr algn="l">
+              <a:buNone/>
               <a:defRPr sz="1200" b="1">
                 <a:solidFill>
                   <a:srgbClr val="FFFFFF"/>
@@ -4881,6 +4938,7 @@
               </a:defRPr>
             </a:lvl2pPr>
             <a:lvl3pPr algn="l">
+              <a:buNone/>
               <a:defRPr sz="1200" b="1">
                 <a:solidFill>
                   <a:srgbClr val="FFFFFF"/>
@@ -4891,6 +4949,7 @@
               </a:defRPr>
             </a:lvl3pPr>
             <a:lvl4pPr algn="l">
+              <a:buNone/>
               <a:defRPr sz="1200" b="1">
                 <a:solidFill>
                   <a:srgbClr val="FFFFFF"/>
@@ -4901,6 +4960,7 @@
               </a:defRPr>
             </a:lvl4pPr>
             <a:lvl5pPr algn="l">
+              <a:buNone/>
               <a:defRPr sz="1200" b="1">
                 <a:solidFill>
                   <a:srgbClr val="FFFFFF"/>
@@ -4911,6 +4971,7 @@
               </a:defRPr>
             </a:lvl5pPr>
             <a:lvl6pPr algn="l">
+              <a:buNone/>
               <a:defRPr sz="1200" b="1">
                 <a:solidFill>
                   <a:srgbClr val="FFFFFF"/>
@@ -4921,6 +4982,7 @@
               </a:defRPr>
             </a:lvl6pPr>
             <a:lvl7pPr algn="l">
+              <a:buNone/>
               <a:defRPr sz="1200" b="1">
                 <a:solidFill>
                   <a:srgbClr val="FFFFFF"/>
@@ -4931,6 +4993,7 @@
               </a:defRPr>
             </a:lvl7pPr>
             <a:lvl8pPr algn="l">
+              <a:buNone/>
               <a:defRPr sz="1200" b="1">
                 <a:solidFill>
                   <a:srgbClr val="FFFFFF"/>
@@ -4941,6 +5004,7 @@
               </a:defRPr>
             </a:lvl8pPr>
             <a:lvl9pPr algn="l">
+              <a:buNone/>
               <a:defRPr sz="1200" b="1">
                 <a:solidFill>
                   <a:srgbClr val="FFFFFF"/>
@@ -4953,6 +5017,7 @@
           </a:lstStyle>
           <a:p xmlns:a="http://schemas.openxmlformats.org/drawingml/2006/main">
             <a:pPr algn="l">
+              <a:buNone/>
               <a:defRPr sz="1200" b="1">
                 <a:solidFill>
                   <a:srgbClr val="FFFFFF"/>
@@ -5047,6 +5112,7 @@
               </a:defRPr>
             </a:defPPr>
             <a:lvl1pPr algn="l">
+              <a:buNone/>
               <a:defRPr sz="1050" b="1">
                 <a:solidFill>
                   <a:srgbClr val="0877B9"/>
@@ -5057,6 +5123,7 @@
               </a:defRPr>
             </a:lvl1pPr>
             <a:lvl2pPr algn="l">
+              <a:buNone/>
               <a:defRPr sz="1050" b="1">
                 <a:solidFill>
                   <a:srgbClr val="0877B9"/>
@@ -5067,6 +5134,7 @@
               </a:defRPr>
             </a:lvl2pPr>
             <a:lvl3pPr algn="l">
+              <a:buNone/>
               <a:defRPr sz="1050" b="1">
                 <a:solidFill>
                   <a:srgbClr val="0877B9"/>
@@ -5077,6 +5145,7 @@
               </a:defRPr>
             </a:lvl3pPr>
             <a:lvl4pPr algn="l">
+              <a:buNone/>
               <a:defRPr sz="1050" b="1">
                 <a:solidFill>
                   <a:srgbClr val="0877B9"/>
@@ -5087,6 +5156,7 @@
               </a:defRPr>
             </a:lvl4pPr>
             <a:lvl5pPr algn="l">
+              <a:buNone/>
               <a:defRPr sz="1050" b="1">
                 <a:solidFill>
                   <a:srgbClr val="0877B9"/>
@@ -5097,6 +5167,7 @@
               </a:defRPr>
             </a:lvl5pPr>
             <a:lvl6pPr algn="l">
+              <a:buNone/>
               <a:defRPr sz="1050" b="1">
                 <a:solidFill>
                   <a:srgbClr val="0877B9"/>
@@ -5107,6 +5178,7 @@
               </a:defRPr>
             </a:lvl6pPr>
             <a:lvl7pPr algn="l">
+              <a:buNone/>
               <a:defRPr sz="1050" b="1">
                 <a:solidFill>
                   <a:srgbClr val="0877B9"/>
@@ -5117,6 +5189,7 @@
               </a:defRPr>
             </a:lvl7pPr>
             <a:lvl8pPr algn="l">
+              <a:buNone/>
               <a:defRPr sz="1050" b="1">
                 <a:solidFill>
                   <a:srgbClr val="0877B9"/>
@@ -5127,6 +5200,7 @@
               </a:defRPr>
             </a:lvl8pPr>
             <a:lvl9pPr algn="l">
+              <a:buNone/>
               <a:defRPr sz="1050" b="1">
                 <a:solidFill>
                   <a:srgbClr val="0877B9"/>
@@ -5139,6 +5213,7 @@
           </a:lstStyle>
           <a:p xmlns:a="http://schemas.openxmlformats.org/drawingml/2006/main">
             <a:pPr algn="l">
+              <a:buNone/>
               <a:defRPr sz="1050" b="1">
                 <a:solidFill>
                   <a:srgbClr val="0877B9"/>
@@ -5204,6 +5279,7 @@
               </a:defRPr>
             </a:defPPr>
             <a:lvl1pPr algn="l">
+              <a:buNone/>
               <a:defRPr sz="2850" b="1">
                 <a:solidFill>
                   <a:srgbClr val="183044"/>
@@ -5214,6 +5290,7 @@
               </a:defRPr>
             </a:lvl1pPr>
             <a:lvl2pPr algn="l">
+              <a:buNone/>
               <a:defRPr sz="2850" b="1">
                 <a:solidFill>
                   <a:srgbClr val="183044"/>
@@ -5224,6 +5301,7 @@
               </a:defRPr>
             </a:lvl2pPr>
             <a:lvl3pPr algn="l">
+              <a:buNone/>
               <a:defRPr sz="2850" b="1">
                 <a:solidFill>
                   <a:srgbClr val="183044"/>
@@ -5234,6 +5312,7 @@
               </a:defRPr>
             </a:lvl3pPr>
             <a:lvl4pPr algn="l">
+              <a:buNone/>
               <a:defRPr sz="2850" b="1">
                 <a:solidFill>
                   <a:srgbClr val="183044"/>
@@ -5244,6 +5323,7 @@
               </a:defRPr>
             </a:lvl4pPr>
             <a:lvl5pPr algn="l">
+              <a:buNone/>
               <a:defRPr sz="2850" b="1">
                 <a:solidFill>
                   <a:srgbClr val="183044"/>
@@ -5254,6 +5334,7 @@
               </a:defRPr>
             </a:lvl5pPr>
             <a:lvl6pPr algn="l">
+              <a:buNone/>
               <a:defRPr sz="2850" b="1">
                 <a:solidFill>
                   <a:srgbClr val="183044"/>
@@ -5264,6 +5345,7 @@
               </a:defRPr>
             </a:lvl6pPr>
             <a:lvl7pPr algn="l">
+              <a:buNone/>
               <a:defRPr sz="2850" b="1">
                 <a:solidFill>
                   <a:srgbClr val="183044"/>
@@ -5274,6 +5356,7 @@
               </a:defRPr>
             </a:lvl7pPr>
             <a:lvl8pPr algn="l">
+              <a:buNone/>
               <a:defRPr sz="2850" b="1">
                 <a:solidFill>
                   <a:srgbClr val="183044"/>
@@ -5284,6 +5367,7 @@
               </a:defRPr>
             </a:lvl8pPr>
             <a:lvl9pPr algn="l">
+              <a:buNone/>
               <a:defRPr sz="2850" b="1">
                 <a:solidFill>
                   <a:srgbClr val="183044"/>
@@ -5296,6 +5380,7 @@
           </a:lstStyle>
           <a:p xmlns:a="http://schemas.openxmlformats.org/drawingml/2006/main">
             <a:pPr algn="l">
+              <a:buNone/>
               <a:defRPr sz="2850" b="1">
                 <a:solidFill>
                   <a:srgbClr val="183044"/>
@@ -5392,6 +5477,7 @@
               </a:defRPr>
             </a:defPPr>
             <a:lvl1pPr algn="l">
+              <a:buNone/>
               <a:defRPr sz="900" b="1">
                 <a:solidFill>
                   <a:srgbClr val="5C6F7D"/>
@@ -5402,6 +5488,7 @@
               </a:defRPr>
             </a:lvl1pPr>
             <a:lvl2pPr algn="l">
+              <a:buNone/>
               <a:defRPr sz="900" b="1">
                 <a:solidFill>
                   <a:srgbClr val="5C6F7D"/>
@@ -5412,6 +5499,7 @@
               </a:defRPr>
             </a:lvl2pPr>
             <a:lvl3pPr algn="l">
+              <a:buNone/>
               <a:defRPr sz="900" b="1">
                 <a:solidFill>
                   <a:srgbClr val="5C6F7D"/>
@@ -5422,6 +5510,7 @@
               </a:defRPr>
             </a:lvl3pPr>
             <a:lvl4pPr algn="l">
+              <a:buNone/>
               <a:defRPr sz="900" b="1">
                 <a:solidFill>
                   <a:srgbClr val="5C6F7D"/>
@@ -5432,6 +5521,7 @@
               </a:defRPr>
             </a:lvl4pPr>
             <a:lvl5pPr algn="l">
+              <a:buNone/>
               <a:defRPr sz="900" b="1">
                 <a:solidFill>
                   <a:srgbClr val="5C6F7D"/>
@@ -5442,6 +5532,7 @@
               </a:defRPr>
             </a:lvl5pPr>
             <a:lvl6pPr algn="l">
+              <a:buNone/>
               <a:defRPr sz="900" b="1">
                 <a:solidFill>
                   <a:srgbClr val="5C6F7D"/>
@@ -5452,6 +5543,7 @@
               </a:defRPr>
             </a:lvl6pPr>
             <a:lvl7pPr algn="l">
+              <a:buNone/>
               <a:defRPr sz="900" b="1">
                 <a:solidFill>
                   <a:srgbClr val="5C6F7D"/>
@@ -5462,6 +5554,7 @@
               </a:defRPr>
             </a:lvl7pPr>
             <a:lvl8pPr algn="l">
+              <a:buNone/>
               <a:defRPr sz="900" b="1">
                 <a:solidFill>
                   <a:srgbClr val="5C6F7D"/>
@@ -5472,6 +5565,7 @@
               </a:defRPr>
             </a:lvl8pPr>
             <a:lvl9pPr algn="l">
+              <a:buNone/>
               <a:defRPr sz="900" b="1">
                 <a:solidFill>
                   <a:srgbClr val="5C6F7D"/>
@@ -5484,6 +5578,7 @@
           </a:lstStyle>
           <a:p xmlns:a="http://schemas.openxmlformats.org/drawingml/2006/main">
             <a:pPr algn="l">
+              <a:buNone/>
               <a:defRPr sz="900" b="1">
                 <a:solidFill>
                   <a:srgbClr val="5C6F7D"/>
@@ -5549,6 +5644,7 @@
               </a:defRPr>
             </a:defPPr>
             <a:lvl1pPr algn="r">
+              <a:buNone/>
               <a:defRPr sz="900" b="0">
                 <a:solidFill>
                   <a:srgbClr val="5C6F7D"/>
@@ -5559,6 +5655,7 @@
               </a:defRPr>
             </a:lvl1pPr>
             <a:lvl2pPr algn="r">
+              <a:buNone/>
               <a:defRPr sz="900" b="0">
                 <a:solidFill>
                   <a:srgbClr val="5C6F7D"/>
@@ -5569,6 +5666,7 @@
               </a:defRPr>
             </a:lvl2pPr>
             <a:lvl3pPr algn="r">
+              <a:buNone/>
               <a:defRPr sz="900" b="0">
                 <a:solidFill>
                   <a:srgbClr val="5C6F7D"/>
@@ -5579,6 +5677,7 @@
               </a:defRPr>
             </a:lvl3pPr>
             <a:lvl4pPr algn="r">
+              <a:buNone/>
               <a:defRPr sz="900" b="0">
                 <a:solidFill>
                   <a:srgbClr val="5C6F7D"/>
@@ -5589,6 +5688,7 @@
               </a:defRPr>
             </a:lvl4pPr>
             <a:lvl5pPr algn="r">
+              <a:buNone/>
               <a:defRPr sz="900" b="0">
                 <a:solidFill>
                   <a:srgbClr val="5C6F7D"/>
@@ -5599,6 +5699,7 @@
               </a:defRPr>
             </a:lvl5pPr>
             <a:lvl6pPr algn="r">
+              <a:buNone/>
               <a:defRPr sz="900" b="0">
                 <a:solidFill>
                   <a:srgbClr val="5C6F7D"/>
@@ -5609,6 +5710,7 @@
               </a:defRPr>
             </a:lvl6pPr>
             <a:lvl7pPr algn="r">
+              <a:buNone/>
               <a:defRPr sz="900" b="0">
                 <a:solidFill>
                   <a:srgbClr val="5C6F7D"/>
@@ -5619,6 +5721,7 @@
               </a:defRPr>
             </a:lvl7pPr>
             <a:lvl8pPr algn="r">
+              <a:buNone/>
               <a:defRPr sz="900" b="0">
                 <a:solidFill>
                   <a:srgbClr val="5C6F7D"/>
@@ -5629,6 +5732,7 @@
               </a:defRPr>
             </a:lvl8pPr>
             <a:lvl9pPr algn="r">
+              <a:buNone/>
               <a:defRPr sz="900" b="0">
                 <a:solidFill>
                   <a:srgbClr val="5C6F7D"/>
@@ -5641,6 +5745,7 @@
           </a:lstStyle>
           <a:p xmlns:a="http://schemas.openxmlformats.org/drawingml/2006/main">
             <a:pPr algn="r">
+              <a:buNone/>
               <a:defRPr sz="900" b="0">
                 <a:solidFill>
                   <a:srgbClr val="5C6F7D"/>
@@ -5741,6 +5846,7 @@
               </a:defRPr>
             </a:defPPr>
             <a:lvl1pPr algn="l">
+              <a:buNone/>
               <a:defRPr sz="1050" b="1">
                 <a:solidFill>
                   <a:srgbClr val="0877B9"/>
@@ -5751,6 +5857,7 @@
               </a:defRPr>
             </a:lvl1pPr>
             <a:lvl2pPr algn="l">
+              <a:buNone/>
               <a:defRPr sz="1050" b="1">
                 <a:solidFill>
                   <a:srgbClr val="0877B9"/>
@@ -5761,6 +5868,7 @@
               </a:defRPr>
             </a:lvl2pPr>
             <a:lvl3pPr algn="l">
+              <a:buNone/>
               <a:defRPr sz="1050" b="1">
                 <a:solidFill>
                   <a:srgbClr val="0877B9"/>
@@ -5771,6 +5879,7 @@
               </a:defRPr>
             </a:lvl3pPr>
             <a:lvl4pPr algn="l">
+              <a:buNone/>
               <a:defRPr sz="1050" b="1">
                 <a:solidFill>
                   <a:srgbClr val="0877B9"/>
@@ -5781,6 +5890,7 @@
               </a:defRPr>
             </a:lvl4pPr>
             <a:lvl5pPr algn="l">
+              <a:buNone/>
               <a:defRPr sz="1050" b="1">
                 <a:solidFill>
                   <a:srgbClr val="0877B9"/>
@@ -5791,6 +5901,7 @@
               </a:defRPr>
             </a:lvl5pPr>
             <a:lvl6pPr algn="l">
+              <a:buNone/>
               <a:defRPr sz="1050" b="1">
                 <a:solidFill>
                   <a:srgbClr val="0877B9"/>
@@ -5801,6 +5912,7 @@
               </a:defRPr>
             </a:lvl6pPr>
             <a:lvl7pPr algn="l">
+              <a:buNone/>
               <a:defRPr sz="1050" b="1">
                 <a:solidFill>
                   <a:srgbClr val="0877B9"/>
@@ -5811,6 +5923,7 @@
               </a:defRPr>
             </a:lvl7pPr>
             <a:lvl8pPr algn="l">
+              <a:buNone/>
               <a:defRPr sz="1050" b="1">
                 <a:solidFill>
                   <a:srgbClr val="0877B9"/>
@@ -5821,6 +5934,7 @@
               </a:defRPr>
             </a:lvl8pPr>
             <a:lvl9pPr algn="l">
+              <a:buNone/>
               <a:defRPr sz="1050" b="1">
                 <a:solidFill>
                   <a:srgbClr val="0877B9"/>
@@ -5833,6 +5947,7 @@
           </a:lstStyle>
           <a:p xmlns:a="http://schemas.openxmlformats.org/drawingml/2006/main">
             <a:pPr algn="l">
+              <a:buNone/>
               <a:defRPr sz="1050" b="1">
                 <a:solidFill>
                   <a:srgbClr val="0877B9"/>
@@ -5898,6 +6013,7 @@
               </a:defRPr>
             </a:defPPr>
             <a:lvl1pPr algn="l">
+              <a:buNone/>
               <a:defRPr sz="1575" b="0">
                 <a:solidFill>
                   <a:srgbClr val="203040"/>
@@ -5908,6 +6024,7 @@
               </a:defRPr>
             </a:lvl1pPr>
             <a:lvl2pPr algn="l">
+              <a:buNone/>
               <a:defRPr sz="1575" b="0">
                 <a:solidFill>
                   <a:srgbClr val="203040"/>
@@ -5918,6 +6035,7 @@
               </a:defRPr>
             </a:lvl2pPr>
             <a:lvl3pPr algn="l">
+              <a:buNone/>
               <a:defRPr sz="1575" b="0">
                 <a:solidFill>
                   <a:srgbClr val="203040"/>
@@ -5928,6 +6046,7 @@
               </a:defRPr>
             </a:lvl3pPr>
             <a:lvl4pPr algn="l">
+              <a:buNone/>
               <a:defRPr sz="1575" b="0">
                 <a:solidFill>
                   <a:srgbClr val="203040"/>
@@ -5938,6 +6057,7 @@
               </a:defRPr>
             </a:lvl4pPr>
             <a:lvl5pPr algn="l">
+              <a:buNone/>
               <a:defRPr sz="1575" b="0">
                 <a:solidFill>
                   <a:srgbClr val="203040"/>
@@ -5948,6 +6068,7 @@
               </a:defRPr>
             </a:lvl5pPr>
             <a:lvl6pPr algn="l">
+              <a:buNone/>
               <a:defRPr sz="1575" b="0">
                 <a:solidFill>
                   <a:srgbClr val="203040"/>
@@ -5958,6 +6079,7 @@
               </a:defRPr>
             </a:lvl6pPr>
             <a:lvl7pPr algn="l">
+              <a:buNone/>
               <a:defRPr sz="1575" b="0">
                 <a:solidFill>
                   <a:srgbClr val="203040"/>
@@ -5968,6 +6090,7 @@
               </a:defRPr>
             </a:lvl7pPr>
             <a:lvl8pPr algn="l">
+              <a:buNone/>
               <a:defRPr sz="1575" b="0">
                 <a:solidFill>
                   <a:srgbClr val="203040"/>
@@ -5978,6 +6101,7 @@
               </a:defRPr>
             </a:lvl8pPr>
             <a:lvl9pPr algn="l">
+              <a:buNone/>
               <a:defRPr sz="1575" b="0">
                 <a:solidFill>
                   <a:srgbClr val="203040"/>
@@ -5990,6 +6114,7 @@
           </a:lstStyle>
           <a:p xmlns:a="http://schemas.openxmlformats.org/drawingml/2006/main">
             <a:pPr algn="l">
+              <a:buNone/>
               <a:defRPr sz="1575" b="0">
                 <a:solidFill>
                   <a:srgbClr val="203040"/>
@@ -6013,6 +6138,7 @@
           </a:p>
           <a:p xmlns:a="http://schemas.openxmlformats.org/drawingml/2006/main">
             <a:pPr algn="l">
+              <a:buNone/>
               <a:defRPr sz="1575" b="0">
                 <a:solidFill>
                   <a:srgbClr val="203040"/>
@@ -6036,6 +6162,7 @@
           </a:p>
           <a:p xmlns:a="http://schemas.openxmlformats.org/drawingml/2006/main">
             <a:pPr algn="l">
+              <a:buNone/>
               <a:defRPr sz="1575" b="0">
                 <a:solidFill>
                   <a:srgbClr val="203040"/>
@@ -6059,6 +6186,7 @@
           </a:p>
           <a:p xmlns:a="http://schemas.openxmlformats.org/drawingml/2006/main">
             <a:pPr algn="l">
+              <a:buNone/>
               <a:defRPr sz="1575" b="0">
                 <a:solidFill>
                   <a:srgbClr val="203040"/>
@@ -6159,6 +6287,7 @@
               </a:defRPr>
             </a:defPPr>
             <a:lvl1pPr algn="l">
+              <a:buNone/>
               <a:defRPr sz="1050" b="1">
                 <a:solidFill>
                   <a:srgbClr val="BBD0DD"/>
@@ -6169,6 +6298,7 @@
               </a:defRPr>
             </a:lvl1pPr>
             <a:lvl2pPr algn="l">
+              <a:buNone/>
               <a:defRPr sz="1050" b="1">
                 <a:solidFill>
                   <a:srgbClr val="BBD0DD"/>
@@ -6179,6 +6309,7 @@
               </a:defRPr>
             </a:lvl2pPr>
             <a:lvl3pPr algn="l">
+              <a:buNone/>
               <a:defRPr sz="1050" b="1">
                 <a:solidFill>
                   <a:srgbClr val="BBD0DD"/>
@@ -6189,6 +6320,7 @@
               </a:defRPr>
             </a:lvl3pPr>
             <a:lvl4pPr algn="l">
+              <a:buNone/>
               <a:defRPr sz="1050" b="1">
                 <a:solidFill>
                   <a:srgbClr val="BBD0DD"/>
@@ -6199,6 +6331,7 @@
               </a:defRPr>
             </a:lvl4pPr>
             <a:lvl5pPr algn="l">
+              <a:buNone/>
               <a:defRPr sz="1050" b="1">
                 <a:solidFill>
                   <a:srgbClr val="BBD0DD"/>
@@ -6209,6 +6342,7 @@
               </a:defRPr>
             </a:lvl5pPr>
             <a:lvl6pPr algn="l">
+              <a:buNone/>
               <a:defRPr sz="1050" b="1">
                 <a:solidFill>
                   <a:srgbClr val="BBD0DD"/>
@@ -6219,6 +6353,7 @@
               </a:defRPr>
             </a:lvl6pPr>
             <a:lvl7pPr algn="l">
+              <a:buNone/>
               <a:defRPr sz="1050" b="1">
                 <a:solidFill>
                   <a:srgbClr val="BBD0DD"/>
@@ -6229,6 +6364,7 @@
               </a:defRPr>
             </a:lvl7pPr>
             <a:lvl8pPr algn="l">
+              <a:buNone/>
               <a:defRPr sz="1050" b="1">
                 <a:solidFill>
                   <a:srgbClr val="BBD0DD"/>
@@ -6239,6 +6375,7 @@
               </a:defRPr>
             </a:lvl8pPr>
             <a:lvl9pPr algn="l">
+              <a:buNone/>
               <a:defRPr sz="1050" b="1">
                 <a:solidFill>
                   <a:srgbClr val="BBD0DD"/>
@@ -6251,6 +6388,7 @@
           </a:lstStyle>
           <a:p xmlns:a="http://schemas.openxmlformats.org/drawingml/2006/main">
             <a:pPr algn="l">
+              <a:buNone/>
               <a:defRPr sz="1050" b="1">
                 <a:solidFill>
                   <a:srgbClr val="BBD0DD"/>
@@ -6316,6 +6454,7 @@
               </a:defRPr>
             </a:defPPr>
             <a:lvl1pPr algn="l">
+              <a:buNone/>
               <a:defRPr sz="1575" b="1">
                 <a:solidFill>
                   <a:srgbClr val="FFFFFF"/>
@@ -6326,6 +6465,7 @@
               </a:defRPr>
             </a:lvl1pPr>
             <a:lvl2pPr algn="l">
+              <a:buNone/>
               <a:defRPr sz="1575" b="1">
                 <a:solidFill>
                   <a:srgbClr val="FFFFFF"/>
@@ -6336,6 +6476,7 @@
               </a:defRPr>
             </a:lvl2pPr>
             <a:lvl3pPr algn="l">
+              <a:buNone/>
               <a:defRPr sz="1575" b="1">
                 <a:solidFill>
                   <a:srgbClr val="FFFFFF"/>
@@ -6346,6 +6487,7 @@
               </a:defRPr>
             </a:lvl3pPr>
             <a:lvl4pPr algn="l">
+              <a:buNone/>
               <a:defRPr sz="1575" b="1">
                 <a:solidFill>
                   <a:srgbClr val="FFFFFF"/>
@@ -6356,6 +6498,7 @@
               </a:defRPr>
             </a:lvl4pPr>
             <a:lvl5pPr algn="l">
+              <a:buNone/>
               <a:defRPr sz="1575" b="1">
                 <a:solidFill>
                   <a:srgbClr val="FFFFFF"/>
@@ -6366,6 +6509,7 @@
               </a:defRPr>
             </a:lvl5pPr>
             <a:lvl6pPr algn="l">
+              <a:buNone/>
               <a:defRPr sz="1575" b="1">
                 <a:solidFill>
                   <a:srgbClr val="FFFFFF"/>
@@ -6376,6 +6520,7 @@
               </a:defRPr>
             </a:lvl6pPr>
             <a:lvl7pPr algn="l">
+              <a:buNone/>
               <a:defRPr sz="1575" b="1">
                 <a:solidFill>
                   <a:srgbClr val="FFFFFF"/>
@@ -6386,6 +6531,7 @@
               </a:defRPr>
             </a:lvl7pPr>
             <a:lvl8pPr algn="l">
+              <a:buNone/>
               <a:defRPr sz="1575" b="1">
                 <a:solidFill>
                   <a:srgbClr val="FFFFFF"/>
@@ -6396,6 +6542,7 @@
               </a:defRPr>
             </a:lvl8pPr>
             <a:lvl9pPr algn="l">
+              <a:buNone/>
               <a:defRPr sz="1575" b="1">
                 <a:solidFill>
                   <a:srgbClr val="FFFFFF"/>
@@ -6408,6 +6555,7 @@
           </a:lstStyle>
           <a:p xmlns:a="http://schemas.openxmlformats.org/drawingml/2006/main">
             <a:pPr algn="l">
+              <a:buNone/>
               <a:defRPr sz="1575" b="1">
                 <a:solidFill>
                   <a:srgbClr val="FFFFFF"/>
@@ -6431,6 +6579,7 @@
           </a:p>
           <a:p xmlns:a="http://schemas.openxmlformats.org/drawingml/2006/main">
             <a:pPr algn="l">
+              <a:buNone/>
               <a:defRPr sz="1575" b="1">
                 <a:solidFill>
                   <a:srgbClr val="FFFFFF"/>
@@ -6454,6 +6603,7 @@
           </a:p>
           <a:p xmlns:a="http://schemas.openxmlformats.org/drawingml/2006/main">
             <a:pPr algn="l">
+              <a:buNone/>
               <a:defRPr sz="1575" b="1">
                 <a:solidFill>
                   <a:srgbClr val="FFFFFF"/>
@@ -6477,6 +6627,7 @@
           </a:p>
           <a:p xmlns:a="http://schemas.openxmlformats.org/drawingml/2006/main">
             <a:pPr algn="l">
+              <a:buNone/>
               <a:defRPr sz="1575" b="1">
                 <a:solidFill>
                   <a:srgbClr val="FFFFFF"/>
@@ -6577,6 +6728,7 @@
               </a:defRPr>
             </a:defPPr>
             <a:lvl1pPr algn="l">
+              <a:buNone/>
               <a:defRPr sz="1050" b="1">
                 <a:solidFill>
                   <a:srgbClr val="11834A"/>
@@ -6587,6 +6739,7 @@
               </a:defRPr>
             </a:lvl1pPr>
             <a:lvl2pPr algn="l">
+              <a:buNone/>
               <a:defRPr sz="1050" b="1">
                 <a:solidFill>
                   <a:srgbClr val="11834A"/>
@@ -6597,6 +6750,7 @@
               </a:defRPr>
             </a:lvl2pPr>
             <a:lvl3pPr algn="l">
+              <a:buNone/>
               <a:defRPr sz="1050" b="1">
                 <a:solidFill>
                   <a:srgbClr val="11834A"/>
@@ -6607,6 +6761,7 @@
               </a:defRPr>
             </a:lvl3pPr>
             <a:lvl4pPr algn="l">
+              <a:buNone/>
               <a:defRPr sz="1050" b="1">
                 <a:solidFill>
                   <a:srgbClr val="11834A"/>
@@ -6617,6 +6772,7 @@
               </a:defRPr>
             </a:lvl4pPr>
             <a:lvl5pPr algn="l">
+              <a:buNone/>
               <a:defRPr sz="1050" b="1">
                 <a:solidFill>
                   <a:srgbClr val="11834A"/>
@@ -6627,6 +6783,7 @@
               </a:defRPr>
             </a:lvl5pPr>
             <a:lvl6pPr algn="l">
+              <a:buNone/>
               <a:defRPr sz="1050" b="1">
                 <a:solidFill>
                   <a:srgbClr val="11834A"/>
@@ -6637,6 +6794,7 @@
               </a:defRPr>
             </a:lvl6pPr>
             <a:lvl7pPr algn="l">
+              <a:buNone/>
               <a:defRPr sz="1050" b="1">
                 <a:solidFill>
                   <a:srgbClr val="11834A"/>
@@ -6647,6 +6805,7 @@
               </a:defRPr>
             </a:lvl7pPr>
             <a:lvl8pPr algn="l">
+              <a:buNone/>
               <a:defRPr sz="1050" b="1">
                 <a:solidFill>
                   <a:srgbClr val="11834A"/>
@@ -6657,6 +6816,7 @@
               </a:defRPr>
             </a:lvl8pPr>
             <a:lvl9pPr algn="l">
+              <a:buNone/>
               <a:defRPr sz="1050" b="1">
                 <a:solidFill>
                   <a:srgbClr val="11834A"/>
@@ -6669,6 +6829,7 @@
           </a:lstStyle>
           <a:p xmlns:a="http://schemas.openxmlformats.org/drawingml/2006/main">
             <a:pPr algn="l">
+              <a:buNone/>
               <a:defRPr sz="1050" b="1">
                 <a:solidFill>
                   <a:srgbClr val="11834A"/>
@@ -6734,6 +6895,7 @@
               </a:defRPr>
             </a:defPPr>
             <a:lvl1pPr algn="l">
+              <a:buNone/>
               <a:defRPr sz="1575" b="0">
                 <a:solidFill>
                   <a:srgbClr val="203040"/>
@@ -6744,6 +6906,7 @@
               </a:defRPr>
             </a:lvl1pPr>
             <a:lvl2pPr algn="l">
+              <a:buNone/>
               <a:defRPr sz="1575" b="0">
                 <a:solidFill>
                   <a:srgbClr val="203040"/>
@@ -6754,6 +6917,7 @@
               </a:defRPr>
             </a:lvl2pPr>
             <a:lvl3pPr algn="l">
+              <a:buNone/>
               <a:defRPr sz="1575" b="0">
                 <a:solidFill>
                   <a:srgbClr val="203040"/>
@@ -6764,6 +6928,7 @@
               </a:defRPr>
             </a:lvl3pPr>
             <a:lvl4pPr algn="l">
+              <a:buNone/>
               <a:defRPr sz="1575" b="0">
                 <a:solidFill>
                   <a:srgbClr val="203040"/>
@@ -6774,6 +6939,7 @@
               </a:defRPr>
             </a:lvl4pPr>
             <a:lvl5pPr algn="l">
+              <a:buNone/>
               <a:defRPr sz="1575" b="0">
                 <a:solidFill>
                   <a:srgbClr val="203040"/>
@@ -6784,6 +6950,7 @@
               </a:defRPr>
             </a:lvl5pPr>
             <a:lvl6pPr algn="l">
+              <a:buNone/>
               <a:defRPr sz="1575" b="0">
                 <a:solidFill>
                   <a:srgbClr val="203040"/>
@@ -6794,6 +6961,7 @@
               </a:defRPr>
             </a:lvl6pPr>
             <a:lvl7pPr algn="l">
+              <a:buNone/>
               <a:defRPr sz="1575" b="0">
                 <a:solidFill>
                   <a:srgbClr val="203040"/>
@@ -6804,6 +6972,7 @@
               </a:defRPr>
             </a:lvl7pPr>
             <a:lvl8pPr algn="l">
+              <a:buNone/>
               <a:defRPr sz="1575" b="0">
                 <a:solidFill>
                   <a:srgbClr val="203040"/>
@@ -6814,6 +6983,7 @@
               </a:defRPr>
             </a:lvl8pPr>
             <a:lvl9pPr algn="l">
+              <a:buNone/>
               <a:defRPr sz="1575" b="0">
                 <a:solidFill>
                   <a:srgbClr val="203040"/>
@@ -6826,6 +6996,7 @@
           </a:lstStyle>
           <a:p xmlns:a="http://schemas.openxmlformats.org/drawingml/2006/main">
             <a:pPr algn="l">
+              <a:buNone/>
               <a:defRPr sz="1575" b="0">
                 <a:solidFill>
                   <a:srgbClr val="203040"/>
@@ -6849,6 +7020,7 @@
           </a:p>
           <a:p xmlns:a="http://schemas.openxmlformats.org/drawingml/2006/main">
             <a:pPr algn="l">
+              <a:buNone/>
               <a:defRPr sz="1575" b="0">
                 <a:solidFill>
                   <a:srgbClr val="203040"/>
@@ -6872,6 +7044,7 @@
           </a:p>
           <a:p xmlns:a="http://schemas.openxmlformats.org/drawingml/2006/main">
             <a:pPr algn="l">
+              <a:buNone/>
               <a:defRPr sz="1575" b="0">
                 <a:solidFill>
                   <a:srgbClr val="203040"/>
@@ -6895,6 +7068,7 @@
           </a:p>
           <a:p xmlns:a="http://schemas.openxmlformats.org/drawingml/2006/main">
             <a:pPr algn="l">
+              <a:buNone/>
               <a:defRPr sz="1575" b="0">
                 <a:solidFill>
                   <a:srgbClr val="203040"/>
@@ -7055,6 +7229,7 @@
               </a:defRPr>
             </a:defPPr>
             <a:lvl1pPr algn="l">
+              <a:buNone/>
               <a:defRPr sz="1425" b="1">
                 <a:solidFill>
                   <a:srgbClr val="203040"/>
@@ -7065,6 +7240,7 @@
               </a:defRPr>
             </a:lvl1pPr>
             <a:lvl2pPr algn="l">
+              <a:buNone/>
               <a:defRPr sz="1425" b="1">
                 <a:solidFill>
                   <a:srgbClr val="203040"/>
@@ -7075,6 +7251,7 @@
               </a:defRPr>
             </a:lvl2pPr>
             <a:lvl3pPr algn="l">
+              <a:buNone/>
               <a:defRPr sz="1425" b="1">
                 <a:solidFill>
                   <a:srgbClr val="203040"/>
@@ -7085,6 +7262,7 @@
               </a:defRPr>
             </a:lvl3pPr>
             <a:lvl4pPr algn="l">
+              <a:buNone/>
               <a:defRPr sz="1425" b="1">
                 <a:solidFill>
                   <a:srgbClr val="203040"/>
@@ -7095,6 +7273,7 @@
               </a:defRPr>
             </a:lvl4pPr>
             <a:lvl5pPr algn="l">
+              <a:buNone/>
               <a:defRPr sz="1425" b="1">
                 <a:solidFill>
                   <a:srgbClr val="203040"/>
@@ -7105,6 +7284,7 @@
               </a:defRPr>
             </a:lvl5pPr>
             <a:lvl6pPr algn="l">
+              <a:buNone/>
               <a:defRPr sz="1425" b="1">
                 <a:solidFill>
                   <a:srgbClr val="203040"/>
@@ -7115,6 +7295,7 @@
               </a:defRPr>
             </a:lvl6pPr>
             <a:lvl7pPr algn="l">
+              <a:buNone/>
               <a:defRPr sz="1425" b="1">
                 <a:solidFill>
                   <a:srgbClr val="203040"/>
@@ -7125,6 +7306,7 @@
               </a:defRPr>
             </a:lvl7pPr>
             <a:lvl8pPr algn="l">
+              <a:buNone/>
               <a:defRPr sz="1425" b="1">
                 <a:solidFill>
                   <a:srgbClr val="203040"/>
@@ -7135,6 +7317,7 @@
               </a:defRPr>
             </a:lvl8pPr>
             <a:lvl9pPr algn="l">
+              <a:buNone/>
               <a:defRPr sz="1425" b="1">
                 <a:solidFill>
                   <a:srgbClr val="203040"/>
@@ -7147,6 +7330,7 @@
           </a:lstStyle>
           <a:p xmlns:a="http://schemas.openxmlformats.org/drawingml/2006/main">
             <a:pPr algn="l">
+              <a:buNone/>
               <a:defRPr sz="1425" b="1">
                 <a:solidFill>
                   <a:srgbClr val="203040"/>
@@ -7241,6 +7425,7 @@
               </a:defRPr>
             </a:defPPr>
             <a:lvl1pPr algn="l">
+              <a:buNone/>
               <a:defRPr sz="1050" b="1">
                 <a:solidFill>
                   <a:srgbClr val="BBD0DD"/>
@@ -7251,6 +7436,7 @@
               </a:defRPr>
             </a:lvl1pPr>
             <a:lvl2pPr algn="l">
+              <a:buNone/>
               <a:defRPr sz="1050" b="1">
                 <a:solidFill>
                   <a:srgbClr val="BBD0DD"/>
@@ -7261,6 +7447,7 @@
               </a:defRPr>
             </a:lvl2pPr>
             <a:lvl3pPr algn="l">
+              <a:buNone/>
               <a:defRPr sz="1050" b="1">
                 <a:solidFill>
                   <a:srgbClr val="BBD0DD"/>
@@ -7271,6 +7458,7 @@
               </a:defRPr>
             </a:lvl3pPr>
             <a:lvl4pPr algn="l">
+              <a:buNone/>
               <a:defRPr sz="1050" b="1">
                 <a:solidFill>
                   <a:srgbClr val="BBD0DD"/>
@@ -7281,6 +7469,7 @@
               </a:defRPr>
             </a:lvl4pPr>
             <a:lvl5pPr algn="l">
+              <a:buNone/>
               <a:defRPr sz="1050" b="1">
                 <a:solidFill>
                   <a:srgbClr val="BBD0DD"/>
@@ -7291,6 +7480,7 @@
               </a:defRPr>
             </a:lvl5pPr>
             <a:lvl6pPr algn="l">
+              <a:buNone/>
               <a:defRPr sz="1050" b="1">
                 <a:solidFill>
                   <a:srgbClr val="BBD0DD"/>
@@ -7301,6 +7491,7 @@
               </a:defRPr>
             </a:lvl6pPr>
             <a:lvl7pPr algn="l">
+              <a:buNone/>
               <a:defRPr sz="1050" b="1">
                 <a:solidFill>
                   <a:srgbClr val="BBD0DD"/>
@@ -7311,6 +7502,7 @@
               </a:defRPr>
             </a:lvl7pPr>
             <a:lvl8pPr algn="l">
+              <a:buNone/>
               <a:defRPr sz="1050" b="1">
                 <a:solidFill>
                   <a:srgbClr val="BBD0DD"/>
@@ -7321,6 +7513,7 @@
               </a:defRPr>
             </a:lvl8pPr>
             <a:lvl9pPr algn="l">
+              <a:buNone/>
               <a:defRPr sz="1050" b="1">
                 <a:solidFill>
                   <a:srgbClr val="BBD0DD"/>
@@ -7333,6 +7526,7 @@
           </a:lstStyle>
           <a:p xmlns:a="http://schemas.openxmlformats.org/drawingml/2006/main">
             <a:pPr algn="l">
+              <a:buNone/>
               <a:defRPr sz="1050" b="1">
                 <a:solidFill>
                   <a:srgbClr val="BBD0DD"/>
@@ -7398,6 +7592,7 @@
               </a:defRPr>
             </a:defPPr>
             <a:lvl1pPr algn="l">
+              <a:buNone/>
               <a:defRPr sz="2850" b="1">
                 <a:solidFill>
                   <a:srgbClr val="FFFFFF"/>
@@ -7408,6 +7603,7 @@
               </a:defRPr>
             </a:lvl1pPr>
             <a:lvl2pPr algn="l">
+              <a:buNone/>
               <a:defRPr sz="2850" b="1">
                 <a:solidFill>
                   <a:srgbClr val="FFFFFF"/>
@@ -7418,6 +7614,7 @@
               </a:defRPr>
             </a:lvl2pPr>
             <a:lvl3pPr algn="l">
+              <a:buNone/>
               <a:defRPr sz="2850" b="1">
                 <a:solidFill>
                   <a:srgbClr val="FFFFFF"/>
@@ -7428,6 +7625,7 @@
               </a:defRPr>
             </a:lvl3pPr>
             <a:lvl4pPr algn="l">
+              <a:buNone/>
               <a:defRPr sz="2850" b="1">
                 <a:solidFill>
                   <a:srgbClr val="FFFFFF"/>
@@ -7438,6 +7636,7 @@
               </a:defRPr>
             </a:lvl4pPr>
             <a:lvl5pPr algn="l">
+              <a:buNone/>
               <a:defRPr sz="2850" b="1">
                 <a:solidFill>
                   <a:srgbClr val="FFFFFF"/>
@@ -7448,6 +7647,7 @@
               </a:defRPr>
             </a:lvl5pPr>
             <a:lvl6pPr algn="l">
+              <a:buNone/>
               <a:defRPr sz="2850" b="1">
                 <a:solidFill>
                   <a:srgbClr val="FFFFFF"/>
@@ -7458,6 +7658,7 @@
               </a:defRPr>
             </a:lvl6pPr>
             <a:lvl7pPr algn="l">
+              <a:buNone/>
               <a:defRPr sz="2850" b="1">
                 <a:solidFill>
                   <a:srgbClr val="FFFFFF"/>
@@ -7468,6 +7669,7 @@
               </a:defRPr>
             </a:lvl7pPr>
             <a:lvl8pPr algn="l">
+              <a:buNone/>
               <a:defRPr sz="2850" b="1">
                 <a:solidFill>
                   <a:srgbClr val="FFFFFF"/>
@@ -7478,6 +7680,7 @@
               </a:defRPr>
             </a:lvl8pPr>
             <a:lvl9pPr algn="l">
+              <a:buNone/>
               <a:defRPr sz="2850" b="1">
                 <a:solidFill>
                   <a:srgbClr val="FFFFFF"/>
@@ -7490,6 +7693,7 @@
           </a:lstStyle>
           <a:p xmlns:a="http://schemas.openxmlformats.org/drawingml/2006/main">
             <a:pPr algn="l">
+              <a:buNone/>
               <a:defRPr sz="2850" b="1">
                 <a:solidFill>
                   <a:srgbClr val="FFFFFF"/>
@@ -7586,6 +7790,7 @@
               </a:defRPr>
             </a:defPPr>
             <a:lvl1pPr algn="l">
+              <a:buNone/>
               <a:defRPr sz="900" b="1">
                 <a:solidFill>
                   <a:srgbClr val="AFC7D7"/>
@@ -7596,6 +7801,7 @@
               </a:defRPr>
             </a:lvl1pPr>
             <a:lvl2pPr algn="l">
+              <a:buNone/>
               <a:defRPr sz="900" b="1">
                 <a:solidFill>
                   <a:srgbClr val="AFC7D7"/>
@@ -7606,6 +7812,7 @@
               </a:defRPr>
             </a:lvl2pPr>
             <a:lvl3pPr algn="l">
+              <a:buNone/>
               <a:defRPr sz="900" b="1">
                 <a:solidFill>
                   <a:srgbClr val="AFC7D7"/>
@@ -7616,6 +7823,7 @@
               </a:defRPr>
             </a:lvl3pPr>
             <a:lvl4pPr algn="l">
+              <a:buNone/>
               <a:defRPr sz="900" b="1">
                 <a:solidFill>
                   <a:srgbClr val="AFC7D7"/>
@@ -7626,6 +7834,7 @@
               </a:defRPr>
             </a:lvl4pPr>
             <a:lvl5pPr algn="l">
+              <a:buNone/>
               <a:defRPr sz="900" b="1">
                 <a:solidFill>
                   <a:srgbClr val="AFC7D7"/>
@@ -7636,6 +7845,7 @@
               </a:defRPr>
             </a:lvl5pPr>
             <a:lvl6pPr algn="l">
+              <a:buNone/>
               <a:defRPr sz="900" b="1">
                 <a:solidFill>
                   <a:srgbClr val="AFC7D7"/>
@@ -7646,6 +7856,7 @@
               </a:defRPr>
             </a:lvl6pPr>
             <a:lvl7pPr algn="l">
+              <a:buNone/>
               <a:defRPr sz="900" b="1">
                 <a:solidFill>
                   <a:srgbClr val="AFC7D7"/>
@@ -7656,6 +7867,7 @@
               </a:defRPr>
             </a:lvl7pPr>
             <a:lvl8pPr algn="l">
+              <a:buNone/>
               <a:defRPr sz="900" b="1">
                 <a:solidFill>
                   <a:srgbClr val="AFC7D7"/>
@@ -7666,6 +7878,7 @@
               </a:defRPr>
             </a:lvl8pPr>
             <a:lvl9pPr algn="l">
+              <a:buNone/>
               <a:defRPr sz="900" b="1">
                 <a:solidFill>
                   <a:srgbClr val="AFC7D7"/>
@@ -7678,6 +7891,7 @@
           </a:lstStyle>
           <a:p xmlns:a="http://schemas.openxmlformats.org/drawingml/2006/main">
             <a:pPr algn="l">
+              <a:buNone/>
               <a:defRPr sz="900" b="1">
                 <a:solidFill>
                   <a:srgbClr val="AFC7D7"/>
@@ -7743,6 +7957,7 @@
               </a:defRPr>
             </a:defPPr>
             <a:lvl1pPr algn="r">
+              <a:buNone/>
               <a:defRPr sz="900" b="0">
                 <a:solidFill>
                   <a:srgbClr val="AFC7D7"/>
@@ -7753,6 +7968,7 @@
               </a:defRPr>
             </a:lvl1pPr>
             <a:lvl2pPr algn="r">
+              <a:buNone/>
               <a:defRPr sz="900" b="0">
                 <a:solidFill>
                   <a:srgbClr val="AFC7D7"/>
@@ -7763,6 +7979,7 @@
               </a:defRPr>
             </a:lvl2pPr>
             <a:lvl3pPr algn="r">
+              <a:buNone/>
               <a:defRPr sz="900" b="0">
                 <a:solidFill>
                   <a:srgbClr val="AFC7D7"/>
@@ -7773,6 +7990,7 @@
               </a:defRPr>
             </a:lvl3pPr>
             <a:lvl4pPr algn="r">
+              <a:buNone/>
               <a:defRPr sz="900" b="0">
                 <a:solidFill>
                   <a:srgbClr val="AFC7D7"/>
@@ -7783,6 +8001,7 @@
               </a:defRPr>
             </a:lvl4pPr>
             <a:lvl5pPr algn="r">
+              <a:buNone/>
               <a:defRPr sz="900" b="0">
                 <a:solidFill>
                   <a:srgbClr val="AFC7D7"/>
@@ -7793,6 +8012,7 @@
               </a:defRPr>
             </a:lvl5pPr>
             <a:lvl6pPr algn="r">
+              <a:buNone/>
               <a:defRPr sz="900" b="0">
                 <a:solidFill>
                   <a:srgbClr val="AFC7D7"/>
@@ -7803,6 +8023,7 @@
               </a:defRPr>
             </a:lvl6pPr>
             <a:lvl7pPr algn="r">
+              <a:buNone/>
               <a:defRPr sz="900" b="0">
                 <a:solidFill>
                   <a:srgbClr val="AFC7D7"/>
@@ -7813,6 +8034,7 @@
               </a:defRPr>
             </a:lvl7pPr>
             <a:lvl8pPr algn="r">
+              <a:buNone/>
               <a:defRPr sz="900" b="0">
                 <a:solidFill>
                   <a:srgbClr val="AFC7D7"/>
@@ -7823,6 +8045,7 @@
               </a:defRPr>
             </a:lvl8pPr>
             <a:lvl9pPr algn="r">
+              <a:buNone/>
               <a:defRPr sz="900" b="0">
                 <a:solidFill>
                   <a:srgbClr val="AFC7D7"/>
@@ -7835,6 +8058,7 @@
           </a:lstStyle>
           <a:p xmlns:a="http://schemas.openxmlformats.org/drawingml/2006/main">
             <a:pPr algn="r">
+              <a:buNone/>
               <a:defRPr sz="900" b="0">
                 <a:solidFill>
                   <a:srgbClr val="AFC7D7"/>
@@ -7933,6 +8157,7 @@
               </a:defRPr>
             </a:defPPr>
             <a:lvl1pPr algn="l">
+              <a:buNone/>
               <a:defRPr sz="1050" b="1">
                 <a:solidFill>
                   <a:srgbClr val="BBD0DD"/>
@@ -7943,6 +8168,7 @@
               </a:defRPr>
             </a:lvl1pPr>
             <a:lvl2pPr algn="l">
+              <a:buNone/>
               <a:defRPr sz="1050" b="1">
                 <a:solidFill>
                   <a:srgbClr val="BBD0DD"/>
@@ -7953,6 +8179,7 @@
               </a:defRPr>
             </a:lvl2pPr>
             <a:lvl3pPr algn="l">
+              <a:buNone/>
               <a:defRPr sz="1050" b="1">
                 <a:solidFill>
                   <a:srgbClr val="BBD0DD"/>
@@ -7963,6 +8190,7 @@
               </a:defRPr>
             </a:lvl3pPr>
             <a:lvl4pPr algn="l">
+              <a:buNone/>
               <a:defRPr sz="1050" b="1">
                 <a:solidFill>
                   <a:srgbClr val="BBD0DD"/>
@@ -7973,6 +8201,7 @@
               </a:defRPr>
             </a:lvl4pPr>
             <a:lvl5pPr algn="l">
+              <a:buNone/>
               <a:defRPr sz="1050" b="1">
                 <a:solidFill>
                   <a:srgbClr val="BBD0DD"/>
@@ -7983,6 +8212,7 @@
               </a:defRPr>
             </a:lvl5pPr>
             <a:lvl6pPr algn="l">
+              <a:buNone/>
               <a:defRPr sz="1050" b="1">
                 <a:solidFill>
                   <a:srgbClr val="BBD0DD"/>
@@ -7993,6 +8223,7 @@
               </a:defRPr>
             </a:lvl6pPr>
             <a:lvl7pPr algn="l">
+              <a:buNone/>
               <a:defRPr sz="1050" b="1">
                 <a:solidFill>
                   <a:srgbClr val="BBD0DD"/>
@@ -8003,6 +8234,7 @@
               </a:defRPr>
             </a:lvl7pPr>
             <a:lvl8pPr algn="l">
+              <a:buNone/>
               <a:defRPr sz="1050" b="1">
                 <a:solidFill>
                   <a:srgbClr val="BBD0DD"/>
@@ -8013,6 +8245,7 @@
               </a:defRPr>
             </a:lvl8pPr>
             <a:lvl9pPr algn="l">
+              <a:buNone/>
               <a:defRPr sz="1050" b="1">
                 <a:solidFill>
                   <a:srgbClr val="BBD0DD"/>
@@ -8025,6 +8258,7 @@
           </a:lstStyle>
           <a:p xmlns:a="http://schemas.openxmlformats.org/drawingml/2006/main">
             <a:pPr algn="l">
+              <a:buNone/>
               <a:defRPr sz="1050" b="1">
                 <a:solidFill>
                   <a:srgbClr val="BBD0DD"/>
@@ -8090,6 +8324,7 @@
               </a:defRPr>
             </a:defPPr>
             <a:lvl1pPr algn="l">
+              <a:buNone/>
               <a:defRPr sz="1875" b="1">
                 <a:solidFill>
                   <a:srgbClr val="FFFFFF"/>
@@ -8100,6 +8335,7 @@
               </a:defRPr>
             </a:lvl1pPr>
             <a:lvl2pPr algn="l">
+              <a:buNone/>
               <a:defRPr sz="1875" b="1">
                 <a:solidFill>
                   <a:srgbClr val="FFFFFF"/>
@@ -8110,6 +8346,7 @@
               </a:defRPr>
             </a:lvl2pPr>
             <a:lvl3pPr algn="l">
+              <a:buNone/>
               <a:defRPr sz="1875" b="1">
                 <a:solidFill>
                   <a:srgbClr val="FFFFFF"/>
@@ -8120,6 +8357,7 @@
               </a:defRPr>
             </a:lvl3pPr>
             <a:lvl4pPr algn="l">
+              <a:buNone/>
               <a:defRPr sz="1875" b="1">
                 <a:solidFill>
                   <a:srgbClr val="FFFFFF"/>
@@ -8130,6 +8368,7 @@
               </a:defRPr>
             </a:lvl4pPr>
             <a:lvl5pPr algn="l">
+              <a:buNone/>
               <a:defRPr sz="1875" b="1">
                 <a:solidFill>
                   <a:srgbClr val="FFFFFF"/>
@@ -8140,6 +8379,7 @@
               </a:defRPr>
             </a:lvl5pPr>
             <a:lvl6pPr algn="l">
+              <a:buNone/>
               <a:defRPr sz="1875" b="1">
                 <a:solidFill>
                   <a:srgbClr val="FFFFFF"/>
@@ -8150,6 +8390,7 @@
               </a:defRPr>
             </a:lvl6pPr>
             <a:lvl7pPr algn="l">
+              <a:buNone/>
               <a:defRPr sz="1875" b="1">
                 <a:solidFill>
                   <a:srgbClr val="FFFFFF"/>
@@ -8160,6 +8401,7 @@
               </a:defRPr>
             </a:lvl7pPr>
             <a:lvl8pPr algn="l">
+              <a:buNone/>
               <a:defRPr sz="1875" b="1">
                 <a:solidFill>
                   <a:srgbClr val="FFFFFF"/>
@@ -8170,6 +8412,7 @@
               </a:defRPr>
             </a:lvl8pPr>
             <a:lvl9pPr algn="l">
+              <a:buNone/>
               <a:defRPr sz="1875" b="1">
                 <a:solidFill>
                   <a:srgbClr val="FFFFFF"/>
@@ -8182,6 +8425,7 @@
           </a:lstStyle>
           <a:p xmlns:a="http://schemas.openxmlformats.org/drawingml/2006/main">
             <a:pPr algn="l">
+              <a:buNone/>
               <a:defRPr sz="1875" b="1">
                 <a:solidFill>
                   <a:srgbClr val="FFFFFF"/>
@@ -8280,6 +8524,7 @@
               </a:defRPr>
             </a:defPPr>
             <a:lvl1pPr algn="l">
+              <a:buNone/>
               <a:defRPr sz="1350" b="0">
                 <a:solidFill>
                   <a:srgbClr val="E3EDF2"/>
@@ -8290,6 +8535,7 @@
               </a:defRPr>
             </a:lvl1pPr>
             <a:lvl2pPr algn="l">
+              <a:buNone/>
               <a:defRPr sz="1350" b="0">
                 <a:solidFill>
                   <a:srgbClr val="E3EDF2"/>
@@ -8300,6 +8546,7 @@
               </a:defRPr>
             </a:lvl2pPr>
             <a:lvl3pPr algn="l">
+              <a:buNone/>
               <a:defRPr sz="1350" b="0">
                 <a:solidFill>
                   <a:srgbClr val="E3EDF2"/>
@@ -8310,6 +8557,7 @@
               </a:defRPr>
             </a:lvl3pPr>
             <a:lvl4pPr algn="l">
+              <a:buNone/>
               <a:defRPr sz="1350" b="0">
                 <a:solidFill>
                   <a:srgbClr val="E3EDF2"/>
@@ -8320,6 +8568,7 @@
               </a:defRPr>
             </a:lvl4pPr>
             <a:lvl5pPr algn="l">
+              <a:buNone/>
               <a:defRPr sz="1350" b="0">
                 <a:solidFill>
                   <a:srgbClr val="E3EDF2"/>
@@ -8330,6 +8579,7 @@
               </a:defRPr>
             </a:lvl5pPr>
             <a:lvl6pPr algn="l">
+              <a:buNone/>
               <a:defRPr sz="1350" b="0">
                 <a:solidFill>
                   <a:srgbClr val="E3EDF2"/>
@@ -8340,6 +8590,7 @@
               </a:defRPr>
             </a:lvl6pPr>
             <a:lvl7pPr algn="l">
+              <a:buNone/>
               <a:defRPr sz="1350" b="0">
                 <a:solidFill>
                   <a:srgbClr val="E3EDF2"/>
@@ -8350,6 +8601,7 @@
               </a:defRPr>
             </a:lvl7pPr>
             <a:lvl8pPr algn="l">
+              <a:buNone/>
               <a:defRPr sz="1350" b="0">
                 <a:solidFill>
                   <a:srgbClr val="E3EDF2"/>
@@ -8360,6 +8612,7 @@
               </a:defRPr>
             </a:lvl8pPr>
             <a:lvl9pPr algn="l">
+              <a:buNone/>
               <a:defRPr sz="1350" b="0">
                 <a:solidFill>
                   <a:srgbClr val="E3EDF2"/>
@@ -8372,6 +8625,7 @@
           </a:lstStyle>
           <a:p xmlns:a="http://schemas.openxmlformats.org/drawingml/2006/main">
             <a:pPr algn="l">
+              <a:buNone/>
               <a:defRPr sz="1350" b="0">
                 <a:solidFill>
                   <a:srgbClr val="E3EDF2"/>
@@ -8470,6 +8724,7 @@
               </a:defRPr>
             </a:defPPr>
             <a:lvl1pPr algn="l">
+              <a:buNone/>
               <a:defRPr sz="1350" b="0">
                 <a:solidFill>
                   <a:srgbClr val="E3EDF2"/>
@@ -8480,6 +8735,7 @@
               </a:defRPr>
             </a:lvl1pPr>
             <a:lvl2pPr algn="l">
+              <a:buNone/>
               <a:defRPr sz="1350" b="0">
                 <a:solidFill>
                   <a:srgbClr val="E3EDF2"/>
@@ -8490,6 +8746,7 @@
               </a:defRPr>
             </a:lvl2pPr>
             <a:lvl3pPr algn="l">
+              <a:buNone/>
               <a:defRPr sz="1350" b="0">
                 <a:solidFill>
                   <a:srgbClr val="E3EDF2"/>
@@ -8500,6 +8757,7 @@
               </a:defRPr>
             </a:lvl3pPr>
             <a:lvl4pPr algn="l">
+              <a:buNone/>
               <a:defRPr sz="1350" b="0">
                 <a:solidFill>
                   <a:srgbClr val="E3EDF2"/>
@@ -8510,6 +8768,7 @@
               </a:defRPr>
             </a:lvl4pPr>
             <a:lvl5pPr algn="l">
+              <a:buNone/>
               <a:defRPr sz="1350" b="0">
                 <a:solidFill>
                   <a:srgbClr val="E3EDF2"/>
@@ -8520,6 +8779,7 @@
               </a:defRPr>
             </a:lvl5pPr>
             <a:lvl6pPr algn="l">
+              <a:buNone/>
               <a:defRPr sz="1350" b="0">
                 <a:solidFill>
                   <a:srgbClr val="E3EDF2"/>
@@ -8530,6 +8790,7 @@
               </a:defRPr>
             </a:lvl6pPr>
             <a:lvl7pPr algn="l">
+              <a:buNone/>
               <a:defRPr sz="1350" b="0">
                 <a:solidFill>
                   <a:srgbClr val="E3EDF2"/>
@@ -8540,6 +8801,7 @@
               </a:defRPr>
             </a:lvl7pPr>
             <a:lvl8pPr algn="l">
+              <a:buNone/>
               <a:defRPr sz="1350" b="0">
                 <a:solidFill>
                   <a:srgbClr val="E3EDF2"/>
@@ -8550,6 +8812,7 @@
               </a:defRPr>
             </a:lvl8pPr>
             <a:lvl9pPr algn="l">
+              <a:buNone/>
               <a:defRPr sz="1350" b="0">
                 <a:solidFill>
                   <a:srgbClr val="E3EDF2"/>
@@ -8562,6 +8825,7 @@
           </a:lstStyle>
           <a:p xmlns:a="http://schemas.openxmlformats.org/drawingml/2006/main">
             <a:pPr algn="l">
+              <a:buNone/>
               <a:defRPr sz="1350" b="0">
                 <a:solidFill>
                   <a:srgbClr val="E3EDF2"/>
@@ -8660,6 +8924,7 @@
               </a:defRPr>
             </a:defPPr>
             <a:lvl1pPr algn="l">
+              <a:buNone/>
               <a:defRPr sz="1350" b="0">
                 <a:solidFill>
                   <a:srgbClr val="E3EDF2"/>
@@ -8670,6 +8935,7 @@
               </a:defRPr>
             </a:lvl1pPr>
             <a:lvl2pPr algn="l">
+              <a:buNone/>
               <a:defRPr sz="1350" b="0">
                 <a:solidFill>
                   <a:srgbClr val="E3EDF2"/>
@@ -8680,6 +8946,7 @@
               </a:defRPr>
             </a:lvl2pPr>
             <a:lvl3pPr algn="l">
+              <a:buNone/>
               <a:defRPr sz="1350" b="0">
                 <a:solidFill>
                   <a:srgbClr val="E3EDF2"/>
@@ -8690,6 +8957,7 @@
               </a:defRPr>
             </a:lvl3pPr>
             <a:lvl4pPr algn="l">
+              <a:buNone/>
               <a:defRPr sz="1350" b="0">
                 <a:solidFill>
                   <a:srgbClr val="E3EDF2"/>
@@ -8700,6 +8968,7 @@
               </a:defRPr>
             </a:lvl4pPr>
             <a:lvl5pPr algn="l">
+              <a:buNone/>
               <a:defRPr sz="1350" b="0">
                 <a:solidFill>
                   <a:srgbClr val="E3EDF2"/>
@@ -8710,6 +8979,7 @@
               </a:defRPr>
             </a:lvl5pPr>
             <a:lvl6pPr algn="l">
+              <a:buNone/>
               <a:defRPr sz="1350" b="0">
                 <a:solidFill>
                   <a:srgbClr val="E3EDF2"/>
@@ -8720,6 +8990,7 @@
               </a:defRPr>
             </a:lvl6pPr>
             <a:lvl7pPr algn="l">
+              <a:buNone/>
               <a:defRPr sz="1350" b="0">
                 <a:solidFill>
                   <a:srgbClr val="E3EDF2"/>
@@ -8730,6 +9001,7 @@
               </a:defRPr>
             </a:lvl7pPr>
             <a:lvl8pPr algn="l">
+              <a:buNone/>
               <a:defRPr sz="1350" b="0">
                 <a:solidFill>
                   <a:srgbClr val="E3EDF2"/>
@@ -8740,6 +9012,7 @@
               </a:defRPr>
             </a:lvl8pPr>
             <a:lvl9pPr algn="l">
+              <a:buNone/>
               <a:defRPr sz="1350" b="0">
                 <a:solidFill>
                   <a:srgbClr val="E3EDF2"/>
@@ -8752,6 +9025,7 @@
           </a:lstStyle>
           <a:p xmlns:a="http://schemas.openxmlformats.org/drawingml/2006/main">
             <a:pPr algn="l">
+              <a:buNone/>
               <a:defRPr sz="1350" b="0">
                 <a:solidFill>
                   <a:srgbClr val="E3EDF2"/>
@@ -8770,7 +9044,7 @@
                 <a:ea typeface="Arial"/>
                 <a:cs typeface="Arial"/>
               </a:rPr>
-              <a:t>Ask for hints grounded in course material</a:t>
+              <a:t>Tutor includes verified lecture and notes snippets</a:t>
             </a:r>
           </a:p>
         </p:txBody>
@@ -8850,6 +9124,7 @@
               </a:defRPr>
             </a:defPPr>
             <a:lvl1pPr algn="l">
+              <a:buNone/>
               <a:defRPr sz="1050" b="1">
                 <a:solidFill>
                   <a:srgbClr val="BBD0DD"/>
@@ -8860,6 +9135,7 @@
               </a:defRPr>
             </a:lvl1pPr>
             <a:lvl2pPr algn="l">
+              <a:buNone/>
               <a:defRPr sz="1050" b="1">
                 <a:solidFill>
                   <a:srgbClr val="BBD0DD"/>
@@ -8870,6 +9146,7 @@
               </a:defRPr>
             </a:lvl2pPr>
             <a:lvl3pPr algn="l">
+              <a:buNone/>
               <a:defRPr sz="1050" b="1">
                 <a:solidFill>
                   <a:srgbClr val="BBD0DD"/>
@@ -8880,6 +9157,7 @@
               </a:defRPr>
             </a:lvl3pPr>
             <a:lvl4pPr algn="l">
+              <a:buNone/>
               <a:defRPr sz="1050" b="1">
                 <a:solidFill>
                   <a:srgbClr val="BBD0DD"/>
@@ -8890,6 +9168,7 @@
               </a:defRPr>
             </a:lvl4pPr>
             <a:lvl5pPr algn="l">
+              <a:buNone/>
               <a:defRPr sz="1050" b="1">
                 <a:solidFill>
                   <a:srgbClr val="BBD0DD"/>
@@ -8900,6 +9179,7 @@
               </a:defRPr>
             </a:lvl5pPr>
             <a:lvl6pPr algn="l">
+              <a:buNone/>
               <a:defRPr sz="1050" b="1">
                 <a:solidFill>
                   <a:srgbClr val="BBD0DD"/>
@@ -8910,6 +9190,7 @@
               </a:defRPr>
             </a:lvl6pPr>
             <a:lvl7pPr algn="l">
+              <a:buNone/>
               <a:defRPr sz="1050" b="1">
                 <a:solidFill>
                   <a:srgbClr val="BBD0DD"/>
@@ -8920,6 +9201,7 @@
               </a:defRPr>
             </a:lvl7pPr>
             <a:lvl8pPr algn="l">
+              <a:buNone/>
               <a:defRPr sz="1050" b="1">
                 <a:solidFill>
                   <a:srgbClr val="BBD0DD"/>
@@ -8930,6 +9212,7 @@
               </a:defRPr>
             </a:lvl8pPr>
             <a:lvl9pPr algn="l">
+              <a:buNone/>
               <a:defRPr sz="1050" b="1">
                 <a:solidFill>
                   <a:srgbClr val="BBD0DD"/>
@@ -8942,6 +9225,7 @@
           </a:lstStyle>
           <a:p xmlns:a="http://schemas.openxmlformats.org/drawingml/2006/main">
             <a:pPr algn="l">
+              <a:buNone/>
               <a:defRPr sz="1050" b="1">
                 <a:solidFill>
                   <a:srgbClr val="BBD0DD"/>
@@ -9007,6 +9291,7 @@
               </a:defRPr>
             </a:defPPr>
             <a:lvl1pPr algn="l">
+              <a:buNone/>
               <a:defRPr sz="1875" b="1">
                 <a:solidFill>
                   <a:srgbClr val="FFFFFF"/>
@@ -9017,6 +9302,7 @@
               </a:defRPr>
             </a:lvl1pPr>
             <a:lvl2pPr algn="l">
+              <a:buNone/>
               <a:defRPr sz="1875" b="1">
                 <a:solidFill>
                   <a:srgbClr val="FFFFFF"/>
@@ -9027,6 +9313,7 @@
               </a:defRPr>
             </a:lvl2pPr>
             <a:lvl3pPr algn="l">
+              <a:buNone/>
               <a:defRPr sz="1875" b="1">
                 <a:solidFill>
                   <a:srgbClr val="FFFFFF"/>
@@ -9037,6 +9324,7 @@
               </a:defRPr>
             </a:lvl3pPr>
             <a:lvl4pPr algn="l">
+              <a:buNone/>
               <a:defRPr sz="1875" b="1">
                 <a:solidFill>
                   <a:srgbClr val="FFFFFF"/>
@@ -9047,6 +9335,7 @@
               </a:defRPr>
             </a:lvl4pPr>
             <a:lvl5pPr algn="l">
+              <a:buNone/>
               <a:defRPr sz="1875" b="1">
                 <a:solidFill>
                   <a:srgbClr val="FFFFFF"/>
@@ -9057,6 +9346,7 @@
               </a:defRPr>
             </a:lvl5pPr>
             <a:lvl6pPr algn="l">
+              <a:buNone/>
               <a:defRPr sz="1875" b="1">
                 <a:solidFill>
                   <a:srgbClr val="FFFFFF"/>
@@ -9067,6 +9357,7 @@
               </a:defRPr>
             </a:lvl6pPr>
             <a:lvl7pPr algn="l">
+              <a:buNone/>
               <a:defRPr sz="1875" b="1">
                 <a:solidFill>
                   <a:srgbClr val="FFFFFF"/>
@@ -9077,6 +9368,7 @@
               </a:defRPr>
             </a:lvl7pPr>
             <a:lvl8pPr algn="l">
+              <a:buNone/>
               <a:defRPr sz="1875" b="1">
                 <a:solidFill>
                   <a:srgbClr val="FFFFFF"/>
@@ -9087,6 +9379,7 @@
               </a:defRPr>
             </a:lvl8pPr>
             <a:lvl9pPr algn="l">
+              <a:buNone/>
               <a:defRPr sz="1875" b="1">
                 <a:solidFill>
                   <a:srgbClr val="FFFFFF"/>
@@ -9099,6 +9392,7 @@
           </a:lstStyle>
           <a:p xmlns:a="http://schemas.openxmlformats.org/drawingml/2006/main">
             <a:pPr algn="l">
+              <a:buNone/>
               <a:defRPr sz="1875" b="1">
                 <a:solidFill>
                   <a:srgbClr val="FFFFFF"/>
@@ -9197,6 +9491,7 @@
               </a:defRPr>
             </a:defPPr>
             <a:lvl1pPr algn="l">
+              <a:buNone/>
               <a:defRPr sz="1350" b="0">
                 <a:solidFill>
                   <a:srgbClr val="E3EDF2"/>
@@ -9207,6 +9502,7 @@
               </a:defRPr>
             </a:lvl1pPr>
             <a:lvl2pPr algn="l">
+              <a:buNone/>
               <a:defRPr sz="1350" b="0">
                 <a:solidFill>
                   <a:srgbClr val="E3EDF2"/>
@@ -9217,6 +9513,7 @@
               </a:defRPr>
             </a:lvl2pPr>
             <a:lvl3pPr algn="l">
+              <a:buNone/>
               <a:defRPr sz="1350" b="0">
                 <a:solidFill>
                   <a:srgbClr val="E3EDF2"/>
@@ -9227,6 +9524,7 @@
               </a:defRPr>
             </a:lvl3pPr>
             <a:lvl4pPr algn="l">
+              <a:buNone/>
               <a:defRPr sz="1350" b="0">
                 <a:solidFill>
                   <a:srgbClr val="E3EDF2"/>
@@ -9237,6 +9535,7 @@
               </a:defRPr>
             </a:lvl4pPr>
             <a:lvl5pPr algn="l">
+              <a:buNone/>
               <a:defRPr sz="1350" b="0">
                 <a:solidFill>
                   <a:srgbClr val="E3EDF2"/>
@@ -9247,6 +9546,7 @@
               </a:defRPr>
             </a:lvl5pPr>
             <a:lvl6pPr algn="l">
+              <a:buNone/>
               <a:defRPr sz="1350" b="0">
                 <a:solidFill>
                   <a:srgbClr val="E3EDF2"/>
@@ -9257,6 +9557,7 @@
               </a:defRPr>
             </a:lvl6pPr>
             <a:lvl7pPr algn="l">
+              <a:buNone/>
               <a:defRPr sz="1350" b="0">
                 <a:solidFill>
                   <a:srgbClr val="E3EDF2"/>
@@ -9267,6 +9568,7 @@
               </a:defRPr>
             </a:lvl7pPr>
             <a:lvl8pPr algn="l">
+              <a:buNone/>
               <a:defRPr sz="1350" b="0">
                 <a:solidFill>
                   <a:srgbClr val="E3EDF2"/>
@@ -9277,6 +9579,7 @@
               </a:defRPr>
             </a:lvl8pPr>
             <a:lvl9pPr algn="l">
+              <a:buNone/>
               <a:defRPr sz="1350" b="0">
                 <a:solidFill>
                   <a:srgbClr val="E3EDF2"/>
@@ -9289,6 +9592,7 @@
           </a:lstStyle>
           <a:p xmlns:a="http://schemas.openxmlformats.org/drawingml/2006/main">
             <a:pPr algn="l">
+              <a:buNone/>
               <a:defRPr sz="1350" b="0">
                 <a:solidFill>
                   <a:srgbClr val="E3EDF2"/>
@@ -9387,6 +9691,7 @@
               </a:defRPr>
             </a:defPPr>
             <a:lvl1pPr algn="l">
+              <a:buNone/>
               <a:defRPr sz="1350" b="0">
                 <a:solidFill>
                   <a:srgbClr val="E3EDF2"/>
@@ -9397,6 +9702,7 @@
               </a:defRPr>
             </a:lvl1pPr>
             <a:lvl2pPr algn="l">
+              <a:buNone/>
               <a:defRPr sz="1350" b="0">
                 <a:solidFill>
                   <a:srgbClr val="E3EDF2"/>
@@ -9407,6 +9713,7 @@
               </a:defRPr>
             </a:lvl2pPr>
             <a:lvl3pPr algn="l">
+              <a:buNone/>
               <a:defRPr sz="1350" b="0">
                 <a:solidFill>
                   <a:srgbClr val="E3EDF2"/>
@@ -9417,6 +9724,7 @@
               </a:defRPr>
             </a:lvl3pPr>
             <a:lvl4pPr algn="l">
+              <a:buNone/>
               <a:defRPr sz="1350" b="0">
                 <a:solidFill>
                   <a:srgbClr val="E3EDF2"/>
@@ -9427,6 +9735,7 @@
               </a:defRPr>
             </a:lvl4pPr>
             <a:lvl5pPr algn="l">
+              <a:buNone/>
               <a:defRPr sz="1350" b="0">
                 <a:solidFill>
                   <a:srgbClr val="E3EDF2"/>
@@ -9437,6 +9746,7 @@
               </a:defRPr>
             </a:lvl5pPr>
             <a:lvl6pPr algn="l">
+              <a:buNone/>
               <a:defRPr sz="1350" b="0">
                 <a:solidFill>
                   <a:srgbClr val="E3EDF2"/>
@@ -9447,6 +9757,7 @@
               </a:defRPr>
             </a:lvl6pPr>
             <a:lvl7pPr algn="l">
+              <a:buNone/>
               <a:defRPr sz="1350" b="0">
                 <a:solidFill>
                   <a:srgbClr val="E3EDF2"/>
@@ -9457,6 +9768,7 @@
               </a:defRPr>
             </a:lvl7pPr>
             <a:lvl8pPr algn="l">
+              <a:buNone/>
               <a:defRPr sz="1350" b="0">
                 <a:solidFill>
                   <a:srgbClr val="E3EDF2"/>
@@ -9467,6 +9779,7 @@
               </a:defRPr>
             </a:lvl8pPr>
             <a:lvl9pPr algn="l">
+              <a:buNone/>
               <a:defRPr sz="1350" b="0">
                 <a:solidFill>
                   <a:srgbClr val="E3EDF2"/>
@@ -9479,6 +9792,7 @@
           </a:lstStyle>
           <a:p xmlns:a="http://schemas.openxmlformats.org/drawingml/2006/main">
             <a:pPr algn="l">
+              <a:buNone/>
               <a:defRPr sz="1350" b="0">
                 <a:solidFill>
                   <a:srgbClr val="E3EDF2"/>
@@ -9577,6 +9891,7 @@
               </a:defRPr>
             </a:defPPr>
             <a:lvl1pPr algn="l">
+              <a:buNone/>
               <a:defRPr sz="1350" b="0">
                 <a:solidFill>
                   <a:srgbClr val="E3EDF2"/>
@@ -9587,6 +9902,7 @@
               </a:defRPr>
             </a:lvl1pPr>
             <a:lvl2pPr algn="l">
+              <a:buNone/>
               <a:defRPr sz="1350" b="0">
                 <a:solidFill>
                   <a:srgbClr val="E3EDF2"/>
@@ -9597,6 +9913,7 @@
               </a:defRPr>
             </a:lvl2pPr>
             <a:lvl3pPr algn="l">
+              <a:buNone/>
               <a:defRPr sz="1350" b="0">
                 <a:solidFill>
                   <a:srgbClr val="E3EDF2"/>
@@ -9607,6 +9924,7 @@
               </a:defRPr>
             </a:lvl3pPr>
             <a:lvl4pPr algn="l">
+              <a:buNone/>
               <a:defRPr sz="1350" b="0">
                 <a:solidFill>
                   <a:srgbClr val="E3EDF2"/>
@@ -9617,6 +9935,7 @@
               </a:defRPr>
             </a:lvl4pPr>
             <a:lvl5pPr algn="l">
+              <a:buNone/>
               <a:defRPr sz="1350" b="0">
                 <a:solidFill>
                   <a:srgbClr val="E3EDF2"/>
@@ -9627,6 +9946,7 @@
               </a:defRPr>
             </a:lvl5pPr>
             <a:lvl6pPr algn="l">
+              <a:buNone/>
               <a:defRPr sz="1350" b="0">
                 <a:solidFill>
                   <a:srgbClr val="E3EDF2"/>
@@ -9637,6 +9957,7 @@
               </a:defRPr>
             </a:lvl6pPr>
             <a:lvl7pPr algn="l">
+              <a:buNone/>
               <a:defRPr sz="1350" b="0">
                 <a:solidFill>
                   <a:srgbClr val="E3EDF2"/>
@@ -9647,6 +9968,7 @@
               </a:defRPr>
             </a:lvl7pPr>
             <a:lvl8pPr algn="l">
+              <a:buNone/>
               <a:defRPr sz="1350" b="0">
                 <a:solidFill>
                   <a:srgbClr val="E3EDF2"/>
@@ -9657,6 +9979,7 @@
               </a:defRPr>
             </a:lvl8pPr>
             <a:lvl9pPr algn="l">
+              <a:buNone/>
               <a:defRPr sz="1350" b="0">
                 <a:solidFill>
                   <a:srgbClr val="E3EDF2"/>
@@ -9669,6 +9992,7 @@
           </a:lstStyle>
           <a:p xmlns:a="http://schemas.openxmlformats.org/drawingml/2006/main">
             <a:pPr algn="l">
+              <a:buNone/>
               <a:defRPr sz="1350" b="0">
                 <a:solidFill>
                   <a:srgbClr val="E3EDF2"/>
@@ -9734,6 +10058,7 @@
               </a:defRPr>
             </a:defPPr>
             <a:lvl1pPr algn="ctr">
+              <a:buNone/>
               <a:defRPr sz="1350" b="0">
                 <a:solidFill>
                   <a:srgbClr val="DCE8EE"/>
@@ -9744,6 +10069,7 @@
               </a:defRPr>
             </a:lvl1pPr>
             <a:lvl2pPr algn="ctr">
+              <a:buNone/>
               <a:defRPr sz="1350" b="0">
                 <a:solidFill>
                   <a:srgbClr val="DCE8EE"/>
@@ -9754,6 +10080,7 @@
               </a:defRPr>
             </a:lvl2pPr>
             <a:lvl3pPr algn="ctr">
+              <a:buNone/>
               <a:defRPr sz="1350" b="0">
                 <a:solidFill>
                   <a:srgbClr val="DCE8EE"/>
@@ -9764,6 +10091,7 @@
               </a:defRPr>
             </a:lvl3pPr>
             <a:lvl4pPr algn="ctr">
+              <a:buNone/>
               <a:defRPr sz="1350" b="0">
                 <a:solidFill>
                   <a:srgbClr val="DCE8EE"/>
@@ -9774,6 +10102,7 @@
               </a:defRPr>
             </a:lvl4pPr>
             <a:lvl5pPr algn="ctr">
+              <a:buNone/>
               <a:defRPr sz="1350" b="0">
                 <a:solidFill>
                   <a:srgbClr val="DCE8EE"/>
@@ -9784,6 +10113,7 @@
               </a:defRPr>
             </a:lvl5pPr>
             <a:lvl6pPr algn="ctr">
+              <a:buNone/>
               <a:defRPr sz="1350" b="0">
                 <a:solidFill>
                   <a:srgbClr val="DCE8EE"/>
@@ -9794,6 +10124,7 @@
               </a:defRPr>
             </a:lvl6pPr>
             <a:lvl7pPr algn="ctr">
+              <a:buNone/>
               <a:defRPr sz="1350" b="0">
                 <a:solidFill>
                   <a:srgbClr val="DCE8EE"/>
@@ -9804,6 +10135,7 @@
               </a:defRPr>
             </a:lvl7pPr>
             <a:lvl8pPr algn="ctr">
+              <a:buNone/>
               <a:defRPr sz="1350" b="0">
                 <a:solidFill>
                   <a:srgbClr val="DCE8EE"/>
@@ -9814,6 +10146,7 @@
               </a:defRPr>
             </a:lvl8pPr>
             <a:lvl9pPr algn="ctr">
+              <a:buNone/>
               <a:defRPr sz="1350" b="0">
                 <a:solidFill>
                   <a:srgbClr val="DCE8EE"/>
@@ -9826,6 +10159,7 @@
           </a:lstStyle>
           <a:p xmlns:a="http://schemas.openxmlformats.org/drawingml/2006/main">
             <a:pPr algn="ctr">
+              <a:buNone/>
               <a:defRPr sz="1350" b="0">
                 <a:solidFill>
                   <a:srgbClr val="DCE8EE"/>
@@ -9844,7 +10178,7 @@
                 <a:ea typeface="Arial"/>
                 <a:cs typeface="Arial"/>
               </a:rPr>
-              <a:t>The tutor uses a student session, retrieved course sources, assessment modes, and output checks before showing a reply.</a:t>
+              <a:t>Tutor snippets are checked against retrieved material; student-session retrieval and assessment checks still govern replies.</a:t>
             </a:r>
           </a:p>
         </p:txBody>
@@ -9920,6 +10254,7 @@
               </a:defRPr>
             </a:defPPr>
             <a:lvl1pPr algn="l">
+              <a:buNone/>
               <a:defRPr sz="1050" b="1">
                 <a:solidFill>
                   <a:srgbClr val="0877B9"/>
@@ -9930,6 +10265,7 @@
               </a:defRPr>
             </a:lvl1pPr>
             <a:lvl2pPr algn="l">
+              <a:buNone/>
               <a:defRPr sz="1050" b="1">
                 <a:solidFill>
                   <a:srgbClr val="0877B9"/>
@@ -9940,6 +10276,7 @@
               </a:defRPr>
             </a:lvl2pPr>
             <a:lvl3pPr algn="l">
+              <a:buNone/>
               <a:defRPr sz="1050" b="1">
                 <a:solidFill>
                   <a:srgbClr val="0877B9"/>
@@ -9950,6 +10287,7 @@
               </a:defRPr>
             </a:lvl3pPr>
             <a:lvl4pPr algn="l">
+              <a:buNone/>
               <a:defRPr sz="1050" b="1">
                 <a:solidFill>
                   <a:srgbClr val="0877B9"/>
@@ -9960,6 +10298,7 @@
               </a:defRPr>
             </a:lvl4pPr>
             <a:lvl5pPr algn="l">
+              <a:buNone/>
               <a:defRPr sz="1050" b="1">
                 <a:solidFill>
                   <a:srgbClr val="0877B9"/>
@@ -9970,6 +10309,7 @@
               </a:defRPr>
             </a:lvl5pPr>
             <a:lvl6pPr algn="l">
+              <a:buNone/>
               <a:defRPr sz="1050" b="1">
                 <a:solidFill>
                   <a:srgbClr val="0877B9"/>
@@ -9980,6 +10320,7 @@
               </a:defRPr>
             </a:lvl6pPr>
             <a:lvl7pPr algn="l">
+              <a:buNone/>
               <a:defRPr sz="1050" b="1">
                 <a:solidFill>
                   <a:srgbClr val="0877B9"/>
@@ -9990,6 +10331,7 @@
               </a:defRPr>
             </a:lvl7pPr>
             <a:lvl8pPr algn="l">
+              <a:buNone/>
               <a:defRPr sz="1050" b="1">
                 <a:solidFill>
                   <a:srgbClr val="0877B9"/>
@@ -10000,6 +10342,7 @@
               </a:defRPr>
             </a:lvl8pPr>
             <a:lvl9pPr algn="l">
+              <a:buNone/>
               <a:defRPr sz="1050" b="1">
                 <a:solidFill>
                   <a:srgbClr val="0877B9"/>
@@ -10012,6 +10355,7 @@
           </a:lstStyle>
           <a:p xmlns:a="http://schemas.openxmlformats.org/drawingml/2006/main">
             <a:pPr algn="l">
+              <a:buNone/>
               <a:defRPr sz="1050" b="1">
                 <a:solidFill>
                   <a:srgbClr val="0877B9"/>
@@ -10077,6 +10421,7 @@
               </a:defRPr>
             </a:defPPr>
             <a:lvl1pPr algn="l">
+              <a:buNone/>
               <a:defRPr sz="2850" b="1">
                 <a:solidFill>
                   <a:srgbClr val="183044"/>
@@ -10087,6 +10432,7 @@
               </a:defRPr>
             </a:lvl1pPr>
             <a:lvl2pPr algn="l">
+              <a:buNone/>
               <a:defRPr sz="2850" b="1">
                 <a:solidFill>
                   <a:srgbClr val="183044"/>
@@ -10097,6 +10443,7 @@
               </a:defRPr>
             </a:lvl2pPr>
             <a:lvl3pPr algn="l">
+              <a:buNone/>
               <a:defRPr sz="2850" b="1">
                 <a:solidFill>
                   <a:srgbClr val="183044"/>
@@ -10107,6 +10454,7 @@
               </a:defRPr>
             </a:lvl3pPr>
             <a:lvl4pPr algn="l">
+              <a:buNone/>
               <a:defRPr sz="2850" b="1">
                 <a:solidFill>
                   <a:srgbClr val="183044"/>
@@ -10117,6 +10465,7 @@
               </a:defRPr>
             </a:lvl4pPr>
             <a:lvl5pPr algn="l">
+              <a:buNone/>
               <a:defRPr sz="2850" b="1">
                 <a:solidFill>
                   <a:srgbClr val="183044"/>
@@ -10127,6 +10476,7 @@
               </a:defRPr>
             </a:lvl5pPr>
             <a:lvl6pPr algn="l">
+              <a:buNone/>
               <a:defRPr sz="2850" b="1">
                 <a:solidFill>
                   <a:srgbClr val="183044"/>
@@ -10137,6 +10487,7 @@
               </a:defRPr>
             </a:lvl6pPr>
             <a:lvl7pPr algn="l">
+              <a:buNone/>
               <a:defRPr sz="2850" b="1">
                 <a:solidFill>
                   <a:srgbClr val="183044"/>
@@ -10147,6 +10498,7 @@
               </a:defRPr>
             </a:lvl7pPr>
             <a:lvl8pPr algn="l">
+              <a:buNone/>
               <a:defRPr sz="2850" b="1">
                 <a:solidFill>
                   <a:srgbClr val="183044"/>
@@ -10157,6 +10509,7 @@
               </a:defRPr>
             </a:lvl8pPr>
             <a:lvl9pPr algn="l">
+              <a:buNone/>
               <a:defRPr sz="2850" b="1">
                 <a:solidFill>
                   <a:srgbClr val="183044"/>
@@ -10169,6 +10522,7 @@
           </a:lstStyle>
           <a:p xmlns:a="http://schemas.openxmlformats.org/drawingml/2006/main">
             <a:pPr algn="l">
+              <a:buNone/>
               <a:defRPr sz="2850" b="1">
                 <a:solidFill>
                   <a:srgbClr val="183044"/>
@@ -10265,6 +10619,7 @@
               </a:defRPr>
             </a:defPPr>
             <a:lvl1pPr algn="l">
+              <a:buNone/>
               <a:defRPr sz="900" b="1">
                 <a:solidFill>
                   <a:srgbClr val="5C6F7D"/>
@@ -10275,6 +10630,7 @@
               </a:defRPr>
             </a:lvl1pPr>
             <a:lvl2pPr algn="l">
+              <a:buNone/>
               <a:defRPr sz="900" b="1">
                 <a:solidFill>
                   <a:srgbClr val="5C6F7D"/>
@@ -10285,6 +10641,7 @@
               </a:defRPr>
             </a:lvl2pPr>
             <a:lvl3pPr algn="l">
+              <a:buNone/>
               <a:defRPr sz="900" b="1">
                 <a:solidFill>
                   <a:srgbClr val="5C6F7D"/>
@@ -10295,6 +10652,7 @@
               </a:defRPr>
             </a:lvl3pPr>
             <a:lvl4pPr algn="l">
+              <a:buNone/>
               <a:defRPr sz="900" b="1">
                 <a:solidFill>
                   <a:srgbClr val="5C6F7D"/>
@@ -10305,6 +10663,7 @@
               </a:defRPr>
             </a:lvl4pPr>
             <a:lvl5pPr algn="l">
+              <a:buNone/>
               <a:defRPr sz="900" b="1">
                 <a:solidFill>
                   <a:srgbClr val="5C6F7D"/>
@@ -10315,6 +10674,7 @@
               </a:defRPr>
             </a:lvl5pPr>
             <a:lvl6pPr algn="l">
+              <a:buNone/>
               <a:defRPr sz="900" b="1">
                 <a:solidFill>
                   <a:srgbClr val="5C6F7D"/>
@@ -10325,6 +10685,7 @@
               </a:defRPr>
             </a:lvl6pPr>
             <a:lvl7pPr algn="l">
+              <a:buNone/>
               <a:defRPr sz="900" b="1">
                 <a:solidFill>
                   <a:srgbClr val="5C6F7D"/>
@@ -10335,6 +10696,7 @@
               </a:defRPr>
             </a:lvl7pPr>
             <a:lvl8pPr algn="l">
+              <a:buNone/>
               <a:defRPr sz="900" b="1">
                 <a:solidFill>
                   <a:srgbClr val="5C6F7D"/>
@@ -10345,6 +10707,7 @@
               </a:defRPr>
             </a:lvl8pPr>
             <a:lvl9pPr algn="l">
+              <a:buNone/>
               <a:defRPr sz="900" b="1">
                 <a:solidFill>
                   <a:srgbClr val="5C6F7D"/>
@@ -10357,6 +10720,7 @@
           </a:lstStyle>
           <a:p xmlns:a="http://schemas.openxmlformats.org/drawingml/2006/main">
             <a:pPr algn="l">
+              <a:buNone/>
               <a:defRPr sz="900" b="1">
                 <a:solidFill>
                   <a:srgbClr val="5C6F7D"/>
@@ -10422,6 +10786,7 @@
               </a:defRPr>
             </a:defPPr>
             <a:lvl1pPr algn="r">
+              <a:buNone/>
               <a:defRPr sz="900" b="0">
                 <a:solidFill>
                   <a:srgbClr val="5C6F7D"/>
@@ -10432,6 +10797,7 @@
               </a:defRPr>
             </a:lvl1pPr>
             <a:lvl2pPr algn="r">
+              <a:buNone/>
               <a:defRPr sz="900" b="0">
                 <a:solidFill>
                   <a:srgbClr val="5C6F7D"/>
@@ -10442,6 +10808,7 @@
               </a:defRPr>
             </a:lvl2pPr>
             <a:lvl3pPr algn="r">
+              <a:buNone/>
               <a:defRPr sz="900" b="0">
                 <a:solidFill>
                   <a:srgbClr val="5C6F7D"/>
@@ -10452,6 +10819,7 @@
               </a:defRPr>
             </a:lvl3pPr>
             <a:lvl4pPr algn="r">
+              <a:buNone/>
               <a:defRPr sz="900" b="0">
                 <a:solidFill>
                   <a:srgbClr val="5C6F7D"/>
@@ -10462,6 +10830,7 @@
               </a:defRPr>
             </a:lvl4pPr>
             <a:lvl5pPr algn="r">
+              <a:buNone/>
               <a:defRPr sz="900" b="0">
                 <a:solidFill>
                   <a:srgbClr val="5C6F7D"/>
@@ -10472,6 +10841,7 @@
               </a:defRPr>
             </a:lvl5pPr>
             <a:lvl6pPr algn="r">
+              <a:buNone/>
               <a:defRPr sz="900" b="0">
                 <a:solidFill>
                   <a:srgbClr val="5C6F7D"/>
@@ -10482,6 +10852,7 @@
               </a:defRPr>
             </a:lvl6pPr>
             <a:lvl7pPr algn="r">
+              <a:buNone/>
               <a:defRPr sz="900" b="0">
                 <a:solidFill>
                   <a:srgbClr val="5C6F7D"/>
@@ -10492,6 +10863,7 @@
               </a:defRPr>
             </a:lvl7pPr>
             <a:lvl8pPr algn="r">
+              <a:buNone/>
               <a:defRPr sz="900" b="0">
                 <a:solidFill>
                   <a:srgbClr val="5C6F7D"/>
@@ -10502,6 +10874,7 @@
               </a:defRPr>
             </a:lvl8pPr>
             <a:lvl9pPr algn="r">
+              <a:buNone/>
               <a:defRPr sz="900" b="0">
                 <a:solidFill>
                   <a:srgbClr val="5C6F7D"/>
@@ -10514,6 +10887,7 @@
           </a:lstStyle>
           <a:p xmlns:a="http://schemas.openxmlformats.org/drawingml/2006/main">
             <a:pPr algn="r">
+              <a:buNone/>
               <a:defRPr sz="900" b="0">
                 <a:solidFill>
                   <a:srgbClr val="5C6F7D"/>
@@ -10614,6 +10988,7 @@
               </a:defRPr>
             </a:defPPr>
             <a:lvl1pPr algn="l">
+              <a:buNone/>
               <a:defRPr sz="1050" b="1">
                 <a:solidFill>
                   <a:srgbClr val="0877B9"/>
@@ -10624,6 +10999,7 @@
               </a:defRPr>
             </a:lvl1pPr>
             <a:lvl2pPr algn="l">
+              <a:buNone/>
               <a:defRPr sz="1050" b="1">
                 <a:solidFill>
                   <a:srgbClr val="0877B9"/>
@@ -10634,6 +11010,7 @@
               </a:defRPr>
             </a:lvl2pPr>
             <a:lvl3pPr algn="l">
+              <a:buNone/>
               <a:defRPr sz="1050" b="1">
                 <a:solidFill>
                   <a:srgbClr val="0877B9"/>
@@ -10644,6 +11021,7 @@
               </a:defRPr>
             </a:lvl3pPr>
             <a:lvl4pPr algn="l">
+              <a:buNone/>
               <a:defRPr sz="1050" b="1">
                 <a:solidFill>
                   <a:srgbClr val="0877B9"/>
@@ -10654,6 +11032,7 @@
               </a:defRPr>
             </a:lvl4pPr>
             <a:lvl5pPr algn="l">
+              <a:buNone/>
               <a:defRPr sz="1050" b="1">
                 <a:solidFill>
                   <a:srgbClr val="0877B9"/>
@@ -10664,6 +11043,7 @@
               </a:defRPr>
             </a:lvl5pPr>
             <a:lvl6pPr algn="l">
+              <a:buNone/>
               <a:defRPr sz="1050" b="1">
                 <a:solidFill>
                   <a:srgbClr val="0877B9"/>
@@ -10674,6 +11054,7 @@
               </a:defRPr>
             </a:lvl6pPr>
             <a:lvl7pPr algn="l">
+              <a:buNone/>
               <a:defRPr sz="1050" b="1">
                 <a:solidFill>
                   <a:srgbClr val="0877B9"/>
@@ -10684,6 +11065,7 @@
               </a:defRPr>
             </a:lvl7pPr>
             <a:lvl8pPr algn="l">
+              <a:buNone/>
               <a:defRPr sz="1050" b="1">
                 <a:solidFill>
                   <a:srgbClr val="0877B9"/>
@@ -10694,6 +11076,7 @@
               </a:defRPr>
             </a:lvl8pPr>
             <a:lvl9pPr algn="l">
+              <a:buNone/>
               <a:defRPr sz="1050" b="1">
                 <a:solidFill>
                   <a:srgbClr val="0877B9"/>
@@ -10706,6 +11089,7 @@
           </a:lstStyle>
           <a:p xmlns:a="http://schemas.openxmlformats.org/drawingml/2006/main">
             <a:pPr algn="l">
+              <a:buNone/>
               <a:defRPr sz="1050" b="1">
                 <a:solidFill>
                   <a:srgbClr val="0877B9"/>
@@ -10771,6 +11155,7 @@
               </a:defRPr>
             </a:defPPr>
             <a:lvl1pPr algn="l">
+              <a:buNone/>
               <a:defRPr sz="1875" b="1">
                 <a:solidFill>
                   <a:srgbClr val="183044"/>
@@ -10781,6 +11166,7 @@
               </a:defRPr>
             </a:lvl1pPr>
             <a:lvl2pPr algn="l">
+              <a:buNone/>
               <a:defRPr sz="1875" b="1">
                 <a:solidFill>
                   <a:srgbClr val="183044"/>
@@ -10791,6 +11177,7 @@
               </a:defRPr>
             </a:lvl2pPr>
             <a:lvl3pPr algn="l">
+              <a:buNone/>
               <a:defRPr sz="1875" b="1">
                 <a:solidFill>
                   <a:srgbClr val="183044"/>
@@ -10801,6 +11188,7 @@
               </a:defRPr>
             </a:lvl3pPr>
             <a:lvl4pPr algn="l">
+              <a:buNone/>
               <a:defRPr sz="1875" b="1">
                 <a:solidFill>
                   <a:srgbClr val="183044"/>
@@ -10811,6 +11199,7 @@
               </a:defRPr>
             </a:lvl4pPr>
             <a:lvl5pPr algn="l">
+              <a:buNone/>
               <a:defRPr sz="1875" b="1">
                 <a:solidFill>
                   <a:srgbClr val="183044"/>
@@ -10821,6 +11210,7 @@
               </a:defRPr>
             </a:lvl5pPr>
             <a:lvl6pPr algn="l">
+              <a:buNone/>
               <a:defRPr sz="1875" b="1">
                 <a:solidFill>
                   <a:srgbClr val="183044"/>
@@ -10831,6 +11221,7 @@
               </a:defRPr>
             </a:lvl6pPr>
             <a:lvl7pPr algn="l">
+              <a:buNone/>
               <a:defRPr sz="1875" b="1">
                 <a:solidFill>
                   <a:srgbClr val="183044"/>
@@ -10841,6 +11232,7 @@
               </a:defRPr>
             </a:lvl7pPr>
             <a:lvl8pPr algn="l">
+              <a:buNone/>
               <a:defRPr sz="1875" b="1">
                 <a:solidFill>
                   <a:srgbClr val="183044"/>
@@ -10851,6 +11243,7 @@
               </a:defRPr>
             </a:lvl8pPr>
             <a:lvl9pPr algn="l">
+              <a:buNone/>
               <a:defRPr sz="1875" b="1">
                 <a:solidFill>
                   <a:srgbClr val="183044"/>
@@ -10863,6 +11256,7 @@
           </a:lstStyle>
           <a:p xmlns:a="http://schemas.openxmlformats.org/drawingml/2006/main">
             <a:pPr algn="l">
+              <a:buNone/>
               <a:defRPr sz="1875" b="1">
                 <a:solidFill>
                   <a:srgbClr val="183044"/>
@@ -10928,6 +11322,7 @@
               </a:defRPr>
             </a:defPPr>
             <a:lvl1pPr algn="l">
+              <a:buNone/>
               <a:defRPr sz="1275" b="0">
                 <a:solidFill>
                   <a:srgbClr val="5C6F7D"/>
@@ -10938,6 +11333,7 @@
               </a:defRPr>
             </a:lvl1pPr>
             <a:lvl2pPr algn="l">
+              <a:buNone/>
               <a:defRPr sz="1275" b="0">
                 <a:solidFill>
                   <a:srgbClr val="5C6F7D"/>
@@ -10948,6 +11344,7 @@
               </a:defRPr>
             </a:lvl2pPr>
             <a:lvl3pPr algn="l">
+              <a:buNone/>
               <a:defRPr sz="1275" b="0">
                 <a:solidFill>
                   <a:srgbClr val="5C6F7D"/>
@@ -10958,6 +11355,7 @@
               </a:defRPr>
             </a:lvl3pPr>
             <a:lvl4pPr algn="l">
+              <a:buNone/>
               <a:defRPr sz="1275" b="0">
                 <a:solidFill>
                   <a:srgbClr val="5C6F7D"/>
@@ -10968,6 +11366,7 @@
               </a:defRPr>
             </a:lvl4pPr>
             <a:lvl5pPr algn="l">
+              <a:buNone/>
               <a:defRPr sz="1275" b="0">
                 <a:solidFill>
                   <a:srgbClr val="5C6F7D"/>
@@ -10978,6 +11377,7 @@
               </a:defRPr>
             </a:lvl5pPr>
             <a:lvl6pPr algn="l">
+              <a:buNone/>
               <a:defRPr sz="1275" b="0">
                 <a:solidFill>
                   <a:srgbClr val="5C6F7D"/>
@@ -10988,6 +11388,7 @@
               </a:defRPr>
             </a:lvl6pPr>
             <a:lvl7pPr algn="l">
+              <a:buNone/>
               <a:defRPr sz="1275" b="0">
                 <a:solidFill>
                   <a:srgbClr val="5C6F7D"/>
@@ -10998,6 +11399,7 @@
               </a:defRPr>
             </a:lvl7pPr>
             <a:lvl8pPr algn="l">
+              <a:buNone/>
               <a:defRPr sz="1275" b="0">
                 <a:solidFill>
                   <a:srgbClr val="5C6F7D"/>
@@ -11008,6 +11410,7 @@
               </a:defRPr>
             </a:lvl8pPr>
             <a:lvl9pPr algn="l">
+              <a:buNone/>
               <a:defRPr sz="1275" b="0">
                 <a:solidFill>
                   <a:srgbClr val="5C6F7D"/>
@@ -11020,6 +11423,7 @@
           </a:lstStyle>
           <a:p xmlns:a="http://schemas.openxmlformats.org/drawingml/2006/main">
             <a:pPr algn="l">
+              <a:buNone/>
               <a:defRPr sz="1275" b="0">
                 <a:solidFill>
                   <a:srgbClr val="5C6F7D"/>
@@ -11043,6 +11447,7 @@
           </a:p>
           <a:p xmlns:a="http://schemas.openxmlformats.org/drawingml/2006/main">
             <a:pPr algn="l">
+              <a:buNone/>
               <a:defRPr sz="1275" b="0">
                 <a:solidFill>
                   <a:srgbClr val="5C6F7D"/>
@@ -11143,6 +11548,7 @@
               </a:defRPr>
             </a:defPPr>
             <a:lvl1pPr algn="l">
+              <a:buNone/>
               <a:defRPr sz="1050" b="1">
                 <a:solidFill>
                   <a:srgbClr val="BBD0DD"/>
@@ -11153,6 +11559,7 @@
               </a:defRPr>
             </a:lvl1pPr>
             <a:lvl2pPr algn="l">
+              <a:buNone/>
               <a:defRPr sz="1050" b="1">
                 <a:solidFill>
                   <a:srgbClr val="BBD0DD"/>
@@ -11163,6 +11570,7 @@
               </a:defRPr>
             </a:lvl2pPr>
             <a:lvl3pPr algn="l">
+              <a:buNone/>
               <a:defRPr sz="1050" b="1">
                 <a:solidFill>
                   <a:srgbClr val="BBD0DD"/>
@@ -11173,6 +11581,7 @@
               </a:defRPr>
             </a:lvl3pPr>
             <a:lvl4pPr algn="l">
+              <a:buNone/>
               <a:defRPr sz="1050" b="1">
                 <a:solidFill>
                   <a:srgbClr val="BBD0DD"/>
@@ -11183,6 +11592,7 @@
               </a:defRPr>
             </a:lvl4pPr>
             <a:lvl5pPr algn="l">
+              <a:buNone/>
               <a:defRPr sz="1050" b="1">
                 <a:solidFill>
                   <a:srgbClr val="BBD0DD"/>
@@ -11193,6 +11603,7 @@
               </a:defRPr>
             </a:lvl5pPr>
             <a:lvl6pPr algn="l">
+              <a:buNone/>
               <a:defRPr sz="1050" b="1">
                 <a:solidFill>
                   <a:srgbClr val="BBD0DD"/>
@@ -11203,6 +11614,7 @@
               </a:defRPr>
             </a:lvl6pPr>
             <a:lvl7pPr algn="l">
+              <a:buNone/>
               <a:defRPr sz="1050" b="1">
                 <a:solidFill>
                   <a:srgbClr val="BBD0DD"/>
@@ -11213,6 +11625,7 @@
               </a:defRPr>
             </a:lvl7pPr>
             <a:lvl8pPr algn="l">
+              <a:buNone/>
               <a:defRPr sz="1050" b="1">
                 <a:solidFill>
                   <a:srgbClr val="BBD0DD"/>
@@ -11223,6 +11636,7 @@
               </a:defRPr>
             </a:lvl8pPr>
             <a:lvl9pPr algn="l">
+              <a:buNone/>
               <a:defRPr sz="1050" b="1">
                 <a:solidFill>
                   <a:srgbClr val="BBD0DD"/>
@@ -11235,6 +11649,7 @@
           </a:lstStyle>
           <a:p xmlns:a="http://schemas.openxmlformats.org/drawingml/2006/main">
             <a:pPr algn="l">
+              <a:buNone/>
               <a:defRPr sz="1050" b="1">
                 <a:solidFill>
                   <a:srgbClr val="BBD0DD"/>
@@ -11300,6 +11715,7 @@
               </a:defRPr>
             </a:defPPr>
             <a:lvl1pPr algn="l">
+              <a:buNone/>
               <a:defRPr sz="1875" b="1">
                 <a:solidFill>
                   <a:srgbClr val="FFFFFF"/>
@@ -11310,6 +11726,7 @@
               </a:defRPr>
             </a:lvl1pPr>
             <a:lvl2pPr algn="l">
+              <a:buNone/>
               <a:defRPr sz="1875" b="1">
                 <a:solidFill>
                   <a:srgbClr val="FFFFFF"/>
@@ -11320,6 +11737,7 @@
               </a:defRPr>
             </a:lvl2pPr>
             <a:lvl3pPr algn="l">
+              <a:buNone/>
               <a:defRPr sz="1875" b="1">
                 <a:solidFill>
                   <a:srgbClr val="FFFFFF"/>
@@ -11330,6 +11748,7 @@
               </a:defRPr>
             </a:lvl3pPr>
             <a:lvl4pPr algn="l">
+              <a:buNone/>
               <a:defRPr sz="1875" b="1">
                 <a:solidFill>
                   <a:srgbClr val="FFFFFF"/>
@@ -11340,6 +11759,7 @@
               </a:defRPr>
             </a:lvl4pPr>
             <a:lvl5pPr algn="l">
+              <a:buNone/>
               <a:defRPr sz="1875" b="1">
                 <a:solidFill>
                   <a:srgbClr val="FFFFFF"/>
@@ -11350,6 +11770,7 @@
               </a:defRPr>
             </a:lvl5pPr>
             <a:lvl6pPr algn="l">
+              <a:buNone/>
               <a:defRPr sz="1875" b="1">
                 <a:solidFill>
                   <a:srgbClr val="FFFFFF"/>
@@ -11360,6 +11781,7 @@
               </a:defRPr>
             </a:lvl6pPr>
             <a:lvl7pPr algn="l">
+              <a:buNone/>
               <a:defRPr sz="1875" b="1">
                 <a:solidFill>
                   <a:srgbClr val="FFFFFF"/>
@@ -11370,6 +11792,7 @@
               </a:defRPr>
             </a:lvl7pPr>
             <a:lvl8pPr algn="l">
+              <a:buNone/>
               <a:defRPr sz="1875" b="1">
                 <a:solidFill>
                   <a:srgbClr val="FFFFFF"/>
@@ -11380,6 +11803,7 @@
               </a:defRPr>
             </a:lvl8pPr>
             <a:lvl9pPr algn="l">
+              <a:buNone/>
               <a:defRPr sz="1875" b="1">
                 <a:solidFill>
                   <a:srgbClr val="FFFFFF"/>
@@ -11392,6 +11816,7 @@
           </a:lstStyle>
           <a:p xmlns:a="http://schemas.openxmlformats.org/drawingml/2006/main">
             <a:pPr algn="l">
+              <a:buNone/>
               <a:defRPr sz="1875" b="1">
                 <a:solidFill>
                   <a:srgbClr val="FFFFFF"/>
@@ -11457,6 +11882,7 @@
               </a:defRPr>
             </a:defPPr>
             <a:lvl1pPr algn="l">
+              <a:buNone/>
               <a:defRPr sz="1275" b="0">
                 <a:solidFill>
                   <a:srgbClr val="DCE8EE"/>
@@ -11467,6 +11893,7 @@
               </a:defRPr>
             </a:lvl1pPr>
             <a:lvl2pPr algn="l">
+              <a:buNone/>
               <a:defRPr sz="1275" b="0">
                 <a:solidFill>
                   <a:srgbClr val="DCE8EE"/>
@@ -11477,6 +11904,7 @@
               </a:defRPr>
             </a:lvl2pPr>
             <a:lvl3pPr algn="l">
+              <a:buNone/>
               <a:defRPr sz="1275" b="0">
                 <a:solidFill>
                   <a:srgbClr val="DCE8EE"/>
@@ -11487,6 +11915,7 @@
               </a:defRPr>
             </a:lvl3pPr>
             <a:lvl4pPr algn="l">
+              <a:buNone/>
               <a:defRPr sz="1275" b="0">
                 <a:solidFill>
                   <a:srgbClr val="DCE8EE"/>
@@ -11497,6 +11926,7 @@
               </a:defRPr>
             </a:lvl4pPr>
             <a:lvl5pPr algn="l">
+              <a:buNone/>
               <a:defRPr sz="1275" b="0">
                 <a:solidFill>
                   <a:srgbClr val="DCE8EE"/>
@@ -11507,6 +11937,7 @@
               </a:defRPr>
             </a:lvl5pPr>
             <a:lvl6pPr algn="l">
+              <a:buNone/>
               <a:defRPr sz="1275" b="0">
                 <a:solidFill>
                   <a:srgbClr val="DCE8EE"/>
@@ -11517,6 +11948,7 @@
               </a:defRPr>
             </a:lvl6pPr>
             <a:lvl7pPr algn="l">
+              <a:buNone/>
               <a:defRPr sz="1275" b="0">
                 <a:solidFill>
                   <a:srgbClr val="DCE8EE"/>
@@ -11527,6 +11959,7 @@
               </a:defRPr>
             </a:lvl7pPr>
             <a:lvl8pPr algn="l">
+              <a:buNone/>
               <a:defRPr sz="1275" b="0">
                 <a:solidFill>
                   <a:srgbClr val="DCE8EE"/>
@@ -11537,6 +11970,7 @@
               </a:defRPr>
             </a:lvl8pPr>
             <a:lvl9pPr algn="l">
+              <a:buNone/>
               <a:defRPr sz="1275" b="0">
                 <a:solidFill>
                   <a:srgbClr val="DCE8EE"/>
@@ -11549,6 +11983,7 @@
           </a:lstStyle>
           <a:p xmlns:a="http://schemas.openxmlformats.org/drawingml/2006/main">
             <a:pPr algn="l">
+              <a:buNone/>
               <a:defRPr sz="1275" b="0">
                 <a:solidFill>
                   <a:srgbClr val="DCE8EE"/>
@@ -11572,6 +12007,7 @@
           </a:p>
           <a:p xmlns:a="http://schemas.openxmlformats.org/drawingml/2006/main">
             <a:pPr algn="l">
+              <a:buNone/>
               <a:defRPr sz="1275" b="0">
                 <a:solidFill>
                   <a:srgbClr val="DCE8EE"/>
@@ -11672,6 +12108,7 @@
               </a:defRPr>
             </a:defPPr>
             <a:lvl1pPr algn="l">
+              <a:buNone/>
               <a:defRPr sz="1050" b="1">
                 <a:solidFill>
                   <a:srgbClr val="0877B9"/>
@@ -11682,6 +12119,7 @@
               </a:defRPr>
             </a:lvl1pPr>
             <a:lvl2pPr algn="l">
+              <a:buNone/>
               <a:defRPr sz="1050" b="1">
                 <a:solidFill>
                   <a:srgbClr val="0877B9"/>
@@ -11692,6 +12130,7 @@
               </a:defRPr>
             </a:lvl2pPr>
             <a:lvl3pPr algn="l">
+              <a:buNone/>
               <a:defRPr sz="1050" b="1">
                 <a:solidFill>
                   <a:srgbClr val="0877B9"/>
@@ -11702,6 +12141,7 @@
               </a:defRPr>
             </a:lvl3pPr>
             <a:lvl4pPr algn="l">
+              <a:buNone/>
               <a:defRPr sz="1050" b="1">
                 <a:solidFill>
                   <a:srgbClr val="0877B9"/>
@@ -11712,6 +12152,7 @@
               </a:defRPr>
             </a:lvl4pPr>
             <a:lvl5pPr algn="l">
+              <a:buNone/>
               <a:defRPr sz="1050" b="1">
                 <a:solidFill>
                   <a:srgbClr val="0877B9"/>
@@ -11722,6 +12163,7 @@
               </a:defRPr>
             </a:lvl5pPr>
             <a:lvl6pPr algn="l">
+              <a:buNone/>
               <a:defRPr sz="1050" b="1">
                 <a:solidFill>
                   <a:srgbClr val="0877B9"/>
@@ -11732,6 +12174,7 @@
               </a:defRPr>
             </a:lvl6pPr>
             <a:lvl7pPr algn="l">
+              <a:buNone/>
               <a:defRPr sz="1050" b="1">
                 <a:solidFill>
                   <a:srgbClr val="0877B9"/>
@@ -11742,6 +12185,7 @@
               </a:defRPr>
             </a:lvl7pPr>
             <a:lvl8pPr algn="l">
+              <a:buNone/>
               <a:defRPr sz="1050" b="1">
                 <a:solidFill>
                   <a:srgbClr val="0877B9"/>
@@ -11752,6 +12196,7 @@
               </a:defRPr>
             </a:lvl8pPr>
             <a:lvl9pPr algn="l">
+              <a:buNone/>
               <a:defRPr sz="1050" b="1">
                 <a:solidFill>
                   <a:srgbClr val="0877B9"/>
@@ -11764,6 +12209,7 @@
           </a:lstStyle>
           <a:p xmlns:a="http://schemas.openxmlformats.org/drawingml/2006/main">
             <a:pPr algn="l">
+              <a:buNone/>
               <a:defRPr sz="1050" b="1">
                 <a:solidFill>
                   <a:srgbClr val="0877B9"/>
@@ -11829,6 +12275,7 @@
               </a:defRPr>
             </a:defPPr>
             <a:lvl1pPr algn="l">
+              <a:buNone/>
               <a:defRPr sz="1875" b="1">
                 <a:solidFill>
                   <a:srgbClr val="183044"/>
@@ -11839,6 +12286,7 @@
               </a:defRPr>
             </a:lvl1pPr>
             <a:lvl2pPr algn="l">
+              <a:buNone/>
               <a:defRPr sz="1875" b="1">
                 <a:solidFill>
                   <a:srgbClr val="183044"/>
@@ -11849,6 +12297,7 @@
               </a:defRPr>
             </a:lvl2pPr>
             <a:lvl3pPr algn="l">
+              <a:buNone/>
               <a:defRPr sz="1875" b="1">
                 <a:solidFill>
                   <a:srgbClr val="183044"/>
@@ -11859,6 +12308,7 @@
               </a:defRPr>
             </a:lvl3pPr>
             <a:lvl4pPr algn="l">
+              <a:buNone/>
               <a:defRPr sz="1875" b="1">
                 <a:solidFill>
                   <a:srgbClr val="183044"/>
@@ -11869,6 +12319,7 @@
               </a:defRPr>
             </a:lvl4pPr>
             <a:lvl5pPr algn="l">
+              <a:buNone/>
               <a:defRPr sz="1875" b="1">
                 <a:solidFill>
                   <a:srgbClr val="183044"/>
@@ -11879,6 +12330,7 @@
               </a:defRPr>
             </a:lvl5pPr>
             <a:lvl6pPr algn="l">
+              <a:buNone/>
               <a:defRPr sz="1875" b="1">
                 <a:solidFill>
                   <a:srgbClr val="183044"/>
@@ -11889,6 +12341,7 @@
               </a:defRPr>
             </a:lvl6pPr>
             <a:lvl7pPr algn="l">
+              <a:buNone/>
               <a:defRPr sz="1875" b="1">
                 <a:solidFill>
                   <a:srgbClr val="183044"/>
@@ -11899,6 +12352,7 @@
               </a:defRPr>
             </a:lvl7pPr>
             <a:lvl8pPr algn="l">
+              <a:buNone/>
               <a:defRPr sz="1875" b="1">
                 <a:solidFill>
                   <a:srgbClr val="183044"/>
@@ -11909,6 +12363,7 @@
               </a:defRPr>
             </a:lvl8pPr>
             <a:lvl9pPr algn="l">
+              <a:buNone/>
               <a:defRPr sz="1875" b="1">
                 <a:solidFill>
                   <a:srgbClr val="183044"/>
@@ -11921,6 +12376,7 @@
           </a:lstStyle>
           <a:p xmlns:a="http://schemas.openxmlformats.org/drawingml/2006/main">
             <a:pPr algn="l">
+              <a:buNone/>
               <a:defRPr sz="1875" b="1">
                 <a:solidFill>
                   <a:srgbClr val="183044"/>
@@ -11986,6 +12442,7 @@
               </a:defRPr>
             </a:defPPr>
             <a:lvl1pPr algn="l">
+              <a:buNone/>
               <a:defRPr sz="1275" b="0">
                 <a:solidFill>
                   <a:srgbClr val="5C6F7D"/>
@@ -11996,6 +12453,7 @@
               </a:defRPr>
             </a:lvl1pPr>
             <a:lvl2pPr algn="l">
+              <a:buNone/>
               <a:defRPr sz="1275" b="0">
                 <a:solidFill>
                   <a:srgbClr val="5C6F7D"/>
@@ -12006,6 +12464,7 @@
               </a:defRPr>
             </a:lvl2pPr>
             <a:lvl3pPr algn="l">
+              <a:buNone/>
               <a:defRPr sz="1275" b="0">
                 <a:solidFill>
                   <a:srgbClr val="5C6F7D"/>
@@ -12016,6 +12475,7 @@
               </a:defRPr>
             </a:lvl3pPr>
             <a:lvl4pPr algn="l">
+              <a:buNone/>
               <a:defRPr sz="1275" b="0">
                 <a:solidFill>
                   <a:srgbClr val="5C6F7D"/>
@@ -12026,6 +12486,7 @@
               </a:defRPr>
             </a:lvl4pPr>
             <a:lvl5pPr algn="l">
+              <a:buNone/>
               <a:defRPr sz="1275" b="0">
                 <a:solidFill>
                   <a:srgbClr val="5C6F7D"/>
@@ -12036,6 +12497,7 @@
               </a:defRPr>
             </a:lvl5pPr>
             <a:lvl6pPr algn="l">
+              <a:buNone/>
               <a:defRPr sz="1275" b="0">
                 <a:solidFill>
                   <a:srgbClr val="5C6F7D"/>
@@ -12046,6 +12508,7 @@
               </a:defRPr>
             </a:lvl6pPr>
             <a:lvl7pPr algn="l">
+              <a:buNone/>
               <a:defRPr sz="1275" b="0">
                 <a:solidFill>
                   <a:srgbClr val="5C6F7D"/>
@@ -12056,6 +12519,7 @@
               </a:defRPr>
             </a:lvl7pPr>
             <a:lvl8pPr algn="l">
+              <a:buNone/>
               <a:defRPr sz="1275" b="0">
                 <a:solidFill>
                   <a:srgbClr val="5C6F7D"/>
@@ -12066,6 +12530,7 @@
               </a:defRPr>
             </a:lvl8pPr>
             <a:lvl9pPr algn="l">
+              <a:buNone/>
               <a:defRPr sz="1275" b="0">
                 <a:solidFill>
                   <a:srgbClr val="5C6F7D"/>
@@ -12078,6 +12543,7 @@
           </a:lstStyle>
           <a:p xmlns:a="http://schemas.openxmlformats.org/drawingml/2006/main">
             <a:pPr algn="l">
+              <a:buNone/>
               <a:defRPr sz="1275" b="0">
                 <a:solidFill>
                   <a:srgbClr val="5C6F7D"/>
@@ -12101,6 +12567,7 @@
           </a:p>
           <a:p xmlns:a="http://schemas.openxmlformats.org/drawingml/2006/main">
             <a:pPr algn="l">
+              <a:buNone/>
               <a:defRPr sz="1275" b="0">
                 <a:solidFill>
                   <a:srgbClr val="5C6F7D"/>
@@ -12261,6 +12728,7 @@
               </a:defRPr>
             </a:defPPr>
             <a:lvl1pPr algn="l">
+              <a:buNone/>
               <a:defRPr sz="1050" b="1">
                 <a:solidFill>
                   <a:srgbClr val="0877B9"/>
@@ -12271,6 +12739,7 @@
               </a:defRPr>
             </a:lvl1pPr>
             <a:lvl2pPr algn="l">
+              <a:buNone/>
               <a:defRPr sz="1050" b="1">
                 <a:solidFill>
                   <a:srgbClr val="0877B9"/>
@@ -12281,6 +12750,7 @@
               </a:defRPr>
             </a:lvl2pPr>
             <a:lvl3pPr algn="l">
+              <a:buNone/>
               <a:defRPr sz="1050" b="1">
                 <a:solidFill>
                   <a:srgbClr val="0877B9"/>
@@ -12291,6 +12761,7 @@
               </a:defRPr>
             </a:lvl3pPr>
             <a:lvl4pPr algn="l">
+              <a:buNone/>
               <a:defRPr sz="1050" b="1">
                 <a:solidFill>
                   <a:srgbClr val="0877B9"/>
@@ -12301,6 +12772,7 @@
               </a:defRPr>
             </a:lvl4pPr>
             <a:lvl5pPr algn="l">
+              <a:buNone/>
               <a:defRPr sz="1050" b="1">
                 <a:solidFill>
                   <a:srgbClr val="0877B9"/>
@@ -12311,6 +12783,7 @@
               </a:defRPr>
             </a:lvl5pPr>
             <a:lvl6pPr algn="l">
+              <a:buNone/>
               <a:defRPr sz="1050" b="1">
                 <a:solidFill>
                   <a:srgbClr val="0877B9"/>
@@ -12321,6 +12794,7 @@
               </a:defRPr>
             </a:lvl6pPr>
             <a:lvl7pPr algn="l">
+              <a:buNone/>
               <a:defRPr sz="1050" b="1">
                 <a:solidFill>
                   <a:srgbClr val="0877B9"/>
@@ -12331,6 +12805,7 @@
               </a:defRPr>
             </a:lvl7pPr>
             <a:lvl8pPr algn="l">
+              <a:buNone/>
               <a:defRPr sz="1050" b="1">
                 <a:solidFill>
                   <a:srgbClr val="0877B9"/>
@@ -12341,6 +12816,7 @@
               </a:defRPr>
             </a:lvl8pPr>
             <a:lvl9pPr algn="l">
+              <a:buNone/>
               <a:defRPr sz="1050" b="1">
                 <a:solidFill>
                   <a:srgbClr val="0877B9"/>
@@ -12353,6 +12829,7 @@
           </a:lstStyle>
           <a:p xmlns:a="http://schemas.openxmlformats.org/drawingml/2006/main">
             <a:pPr algn="l">
+              <a:buNone/>
               <a:defRPr sz="1050" b="1">
                 <a:solidFill>
                   <a:srgbClr val="0877B9"/>
@@ -12418,6 +12895,7 @@
               </a:defRPr>
             </a:defPPr>
             <a:lvl1pPr algn="l">
+              <a:buNone/>
               <a:defRPr sz="1275" b="0">
                 <a:solidFill>
                   <a:srgbClr val="203040"/>
@@ -12428,6 +12906,7 @@
               </a:defRPr>
             </a:lvl1pPr>
             <a:lvl2pPr algn="l">
+              <a:buNone/>
               <a:defRPr sz="1275" b="0">
                 <a:solidFill>
                   <a:srgbClr val="203040"/>
@@ -12438,6 +12917,7 @@
               </a:defRPr>
             </a:lvl2pPr>
             <a:lvl3pPr algn="l">
+              <a:buNone/>
               <a:defRPr sz="1275" b="0">
                 <a:solidFill>
                   <a:srgbClr val="203040"/>
@@ -12448,6 +12928,7 @@
               </a:defRPr>
             </a:lvl3pPr>
             <a:lvl4pPr algn="l">
+              <a:buNone/>
               <a:defRPr sz="1275" b="0">
                 <a:solidFill>
                   <a:srgbClr val="203040"/>
@@ -12458,6 +12939,7 @@
               </a:defRPr>
             </a:lvl4pPr>
             <a:lvl5pPr algn="l">
+              <a:buNone/>
               <a:defRPr sz="1275" b="0">
                 <a:solidFill>
                   <a:srgbClr val="203040"/>
@@ -12468,6 +12950,7 @@
               </a:defRPr>
             </a:lvl5pPr>
             <a:lvl6pPr algn="l">
+              <a:buNone/>
               <a:defRPr sz="1275" b="0">
                 <a:solidFill>
                   <a:srgbClr val="203040"/>
@@ -12478,6 +12961,7 @@
               </a:defRPr>
             </a:lvl6pPr>
             <a:lvl7pPr algn="l">
+              <a:buNone/>
               <a:defRPr sz="1275" b="0">
                 <a:solidFill>
                   <a:srgbClr val="203040"/>
@@ -12488,6 +12972,7 @@
               </a:defRPr>
             </a:lvl7pPr>
             <a:lvl8pPr algn="l">
+              <a:buNone/>
               <a:defRPr sz="1275" b="0">
                 <a:solidFill>
                   <a:srgbClr val="203040"/>
@@ -12498,6 +12983,7 @@
               </a:defRPr>
             </a:lvl8pPr>
             <a:lvl9pPr algn="l">
+              <a:buNone/>
               <a:defRPr sz="1275" b="0">
                 <a:solidFill>
                   <a:srgbClr val="203040"/>
@@ -12510,6 +12996,7 @@
           </a:lstStyle>
           <a:p xmlns:a="http://schemas.openxmlformats.org/drawingml/2006/main">
             <a:pPr algn="l">
+              <a:buNone/>
               <a:defRPr sz="1275" b="0">
                 <a:solidFill>
                   <a:srgbClr val="203040"/>
@@ -12575,6 +13062,7 @@
               </a:defRPr>
             </a:defPPr>
             <a:lvl1pPr algn="l">
+              <a:buNone/>
               <a:defRPr sz="1275" b="0">
                 <a:solidFill>
                   <a:srgbClr val="203040"/>
@@ -12585,6 +13073,7 @@
               </a:defRPr>
             </a:lvl1pPr>
             <a:lvl2pPr algn="l">
+              <a:buNone/>
               <a:defRPr sz="1275" b="0">
                 <a:solidFill>
                   <a:srgbClr val="203040"/>
@@ -12595,6 +13084,7 @@
               </a:defRPr>
             </a:lvl2pPr>
             <a:lvl3pPr algn="l">
+              <a:buNone/>
               <a:defRPr sz="1275" b="0">
                 <a:solidFill>
                   <a:srgbClr val="203040"/>
@@ -12605,6 +13095,7 @@
               </a:defRPr>
             </a:lvl3pPr>
             <a:lvl4pPr algn="l">
+              <a:buNone/>
               <a:defRPr sz="1275" b="0">
                 <a:solidFill>
                   <a:srgbClr val="203040"/>
@@ -12615,6 +13106,7 @@
               </a:defRPr>
             </a:lvl4pPr>
             <a:lvl5pPr algn="l">
+              <a:buNone/>
               <a:defRPr sz="1275" b="0">
                 <a:solidFill>
                   <a:srgbClr val="203040"/>
@@ -12625,6 +13117,7 @@
               </a:defRPr>
             </a:lvl5pPr>
             <a:lvl6pPr algn="l">
+              <a:buNone/>
               <a:defRPr sz="1275" b="0">
                 <a:solidFill>
                   <a:srgbClr val="203040"/>
@@ -12635,6 +13128,7 @@
               </a:defRPr>
             </a:lvl6pPr>
             <a:lvl7pPr algn="l">
+              <a:buNone/>
               <a:defRPr sz="1275" b="0">
                 <a:solidFill>
                   <a:srgbClr val="203040"/>
@@ -12645,6 +13139,7 @@
               </a:defRPr>
             </a:lvl7pPr>
             <a:lvl8pPr algn="l">
+              <a:buNone/>
               <a:defRPr sz="1275" b="0">
                 <a:solidFill>
                   <a:srgbClr val="203040"/>
@@ -12655,6 +13150,7 @@
               </a:defRPr>
             </a:lvl8pPr>
             <a:lvl9pPr algn="l">
+              <a:buNone/>
               <a:defRPr sz="1275" b="0">
                 <a:solidFill>
                   <a:srgbClr val="203040"/>
@@ -12667,6 +13163,7 @@
           </a:lstStyle>
           <a:p xmlns:a="http://schemas.openxmlformats.org/drawingml/2006/main">
             <a:pPr algn="l">
+              <a:buNone/>
               <a:defRPr sz="1275" b="0">
                 <a:solidFill>
                   <a:srgbClr val="203040"/>
@@ -12732,6 +13229,7 @@
               </a:defRPr>
             </a:defPPr>
             <a:lvl1pPr algn="l">
+              <a:buNone/>
               <a:defRPr sz="1275" b="0">
                 <a:solidFill>
                   <a:srgbClr val="203040"/>
@@ -12742,6 +13240,7 @@
               </a:defRPr>
             </a:lvl1pPr>
             <a:lvl2pPr algn="l">
+              <a:buNone/>
               <a:defRPr sz="1275" b="0">
                 <a:solidFill>
                   <a:srgbClr val="203040"/>
@@ -12752,6 +13251,7 @@
               </a:defRPr>
             </a:lvl2pPr>
             <a:lvl3pPr algn="l">
+              <a:buNone/>
               <a:defRPr sz="1275" b="0">
                 <a:solidFill>
                   <a:srgbClr val="203040"/>
@@ -12762,6 +13262,7 @@
               </a:defRPr>
             </a:lvl3pPr>
             <a:lvl4pPr algn="l">
+              <a:buNone/>
               <a:defRPr sz="1275" b="0">
                 <a:solidFill>
                   <a:srgbClr val="203040"/>
@@ -12772,6 +13273,7 @@
               </a:defRPr>
             </a:lvl4pPr>
             <a:lvl5pPr algn="l">
+              <a:buNone/>
               <a:defRPr sz="1275" b="0">
                 <a:solidFill>
                   <a:srgbClr val="203040"/>
@@ -12782,6 +13284,7 @@
               </a:defRPr>
             </a:lvl5pPr>
             <a:lvl6pPr algn="l">
+              <a:buNone/>
               <a:defRPr sz="1275" b="0">
                 <a:solidFill>
                   <a:srgbClr val="203040"/>
@@ -12792,6 +13295,7 @@
               </a:defRPr>
             </a:lvl6pPr>
             <a:lvl7pPr algn="l">
+              <a:buNone/>
               <a:defRPr sz="1275" b="0">
                 <a:solidFill>
                   <a:srgbClr val="203040"/>
@@ -12802,6 +13306,7 @@
               </a:defRPr>
             </a:lvl7pPr>
             <a:lvl8pPr algn="l">
+              <a:buNone/>
               <a:defRPr sz="1275" b="0">
                 <a:solidFill>
                   <a:srgbClr val="203040"/>
@@ -12812,6 +13317,7 @@
               </a:defRPr>
             </a:lvl8pPr>
             <a:lvl9pPr algn="l">
+              <a:buNone/>
               <a:defRPr sz="1275" b="0">
                 <a:solidFill>
                   <a:srgbClr val="203040"/>
@@ -12824,6 +13330,7 @@
           </a:lstStyle>
           <a:p xmlns:a="http://schemas.openxmlformats.org/drawingml/2006/main">
             <a:pPr algn="l">
+              <a:buNone/>
               <a:defRPr sz="1275" b="0">
                 <a:solidFill>
                   <a:srgbClr val="203040"/>
@@ -12889,6 +13396,7 @@
               </a:defRPr>
             </a:defPPr>
             <a:lvl1pPr algn="l">
+              <a:buNone/>
               <a:defRPr sz="1275" b="0">
                 <a:solidFill>
                   <a:srgbClr val="203040"/>
@@ -12899,6 +13407,7 @@
               </a:defRPr>
             </a:lvl1pPr>
             <a:lvl2pPr algn="l">
+              <a:buNone/>
               <a:defRPr sz="1275" b="0">
                 <a:solidFill>
                   <a:srgbClr val="203040"/>
@@ -12909,6 +13418,7 @@
               </a:defRPr>
             </a:lvl2pPr>
             <a:lvl3pPr algn="l">
+              <a:buNone/>
               <a:defRPr sz="1275" b="0">
                 <a:solidFill>
                   <a:srgbClr val="203040"/>
@@ -12919,6 +13429,7 @@
               </a:defRPr>
             </a:lvl3pPr>
             <a:lvl4pPr algn="l">
+              <a:buNone/>
               <a:defRPr sz="1275" b="0">
                 <a:solidFill>
                   <a:srgbClr val="203040"/>
@@ -12929,6 +13440,7 @@
               </a:defRPr>
             </a:lvl4pPr>
             <a:lvl5pPr algn="l">
+              <a:buNone/>
               <a:defRPr sz="1275" b="0">
                 <a:solidFill>
                   <a:srgbClr val="203040"/>
@@ -12939,6 +13451,7 @@
               </a:defRPr>
             </a:lvl5pPr>
             <a:lvl6pPr algn="l">
+              <a:buNone/>
               <a:defRPr sz="1275" b="0">
                 <a:solidFill>
                   <a:srgbClr val="203040"/>
@@ -12949,6 +13462,7 @@
               </a:defRPr>
             </a:lvl6pPr>
             <a:lvl7pPr algn="l">
+              <a:buNone/>
               <a:defRPr sz="1275" b="0">
                 <a:solidFill>
                   <a:srgbClr val="203040"/>
@@ -12959,6 +13473,7 @@
               </a:defRPr>
             </a:lvl7pPr>
             <a:lvl8pPr algn="l">
+              <a:buNone/>
               <a:defRPr sz="1275" b="0">
                 <a:solidFill>
                   <a:srgbClr val="203040"/>
@@ -12969,6 +13484,7 @@
               </a:defRPr>
             </a:lvl8pPr>
             <a:lvl9pPr algn="l">
+              <a:buNone/>
               <a:defRPr sz="1275" b="0">
                 <a:solidFill>
                   <a:srgbClr val="203040"/>
@@ -12981,6 +13497,7 @@
           </a:lstStyle>
           <a:p xmlns:a="http://schemas.openxmlformats.org/drawingml/2006/main">
             <a:pPr algn="l">
+              <a:buNone/>
               <a:defRPr sz="1275" b="0">
                 <a:solidFill>
                   <a:srgbClr val="203040"/>
@@ -13046,6 +13563,7 @@
               </a:defRPr>
             </a:defPPr>
             <a:lvl1pPr algn="l">
+              <a:buNone/>
               <a:defRPr sz="1200" b="0">
                 <a:solidFill>
                   <a:srgbClr val="5C6F7D"/>
@@ -13056,6 +13574,7 @@
               </a:defRPr>
             </a:lvl1pPr>
             <a:lvl2pPr algn="l">
+              <a:buNone/>
               <a:defRPr sz="1200" b="0">
                 <a:solidFill>
                   <a:srgbClr val="5C6F7D"/>
@@ -13066,6 +13585,7 @@
               </a:defRPr>
             </a:lvl2pPr>
             <a:lvl3pPr algn="l">
+              <a:buNone/>
               <a:defRPr sz="1200" b="0">
                 <a:solidFill>
                   <a:srgbClr val="5C6F7D"/>
@@ -13076,6 +13596,7 @@
               </a:defRPr>
             </a:lvl3pPr>
             <a:lvl4pPr algn="l">
+              <a:buNone/>
               <a:defRPr sz="1200" b="0">
                 <a:solidFill>
                   <a:srgbClr val="5C6F7D"/>
@@ -13086,6 +13607,7 @@
               </a:defRPr>
             </a:lvl4pPr>
             <a:lvl5pPr algn="l">
+              <a:buNone/>
               <a:defRPr sz="1200" b="0">
                 <a:solidFill>
                   <a:srgbClr val="5C6F7D"/>
@@ -13096,6 +13618,7 @@
               </a:defRPr>
             </a:lvl5pPr>
             <a:lvl6pPr algn="l">
+              <a:buNone/>
               <a:defRPr sz="1200" b="0">
                 <a:solidFill>
                   <a:srgbClr val="5C6F7D"/>
@@ -13106,6 +13629,7 @@
               </a:defRPr>
             </a:lvl6pPr>
             <a:lvl7pPr algn="l">
+              <a:buNone/>
               <a:defRPr sz="1200" b="0">
                 <a:solidFill>
                   <a:srgbClr val="5C6F7D"/>
@@ -13116,6 +13640,7 @@
               </a:defRPr>
             </a:lvl7pPr>
             <a:lvl8pPr algn="l">
+              <a:buNone/>
               <a:defRPr sz="1200" b="0">
                 <a:solidFill>
                   <a:srgbClr val="5C6F7D"/>
@@ -13126,6 +13651,7 @@
               </a:defRPr>
             </a:lvl8pPr>
             <a:lvl9pPr algn="l">
+              <a:buNone/>
               <a:defRPr sz="1200" b="0">
                 <a:solidFill>
                   <a:srgbClr val="5C6F7D"/>
@@ -13138,6 +13664,7 @@
           </a:lstStyle>
           <a:p xmlns:a="http://schemas.openxmlformats.org/drawingml/2006/main">
             <a:pPr algn="l">
+              <a:buNone/>
               <a:defRPr sz="1200" b="0">
                 <a:solidFill>
                   <a:srgbClr val="5C6F7D"/>
@@ -13156,7 +13683,7 @@
                 <a:ea typeface="Arial"/>
                 <a:cs typeface="Arial"/>
               </a:rPr>
-              <a:t>The local demo uses synthetic records and demo tokens. Shared Supabase and tutor flows require course and provider configuration.</a:t>
+              <a:t>Faster tutor replies. Amazon Nova on Bedrock can use AWS credits instead of the Claude API; quiz-protection checks stay in code.</a:t>
             </a:r>
           </a:p>
         </p:txBody>
@@ -13232,6 +13759,7 @@
               </a:defRPr>
             </a:defPPr>
             <a:lvl1pPr algn="l">
+              <a:buNone/>
               <a:defRPr sz="1050" b="1">
                 <a:solidFill>
                   <a:srgbClr val="BBD0DD"/>
@@ -13242,6 +13770,7 @@
               </a:defRPr>
             </a:lvl1pPr>
             <a:lvl2pPr algn="l">
+              <a:buNone/>
               <a:defRPr sz="1050" b="1">
                 <a:solidFill>
                   <a:srgbClr val="BBD0DD"/>
@@ -13252,6 +13781,7 @@
               </a:defRPr>
             </a:lvl2pPr>
             <a:lvl3pPr algn="l">
+              <a:buNone/>
               <a:defRPr sz="1050" b="1">
                 <a:solidFill>
                   <a:srgbClr val="BBD0DD"/>
@@ -13262,6 +13792,7 @@
               </a:defRPr>
             </a:lvl3pPr>
             <a:lvl4pPr algn="l">
+              <a:buNone/>
               <a:defRPr sz="1050" b="1">
                 <a:solidFill>
                   <a:srgbClr val="BBD0DD"/>
@@ -13272,6 +13803,7 @@
               </a:defRPr>
             </a:lvl4pPr>
             <a:lvl5pPr algn="l">
+              <a:buNone/>
               <a:defRPr sz="1050" b="1">
                 <a:solidFill>
                   <a:srgbClr val="BBD0DD"/>
@@ -13282,6 +13814,7 @@
               </a:defRPr>
             </a:lvl5pPr>
             <a:lvl6pPr algn="l">
+              <a:buNone/>
               <a:defRPr sz="1050" b="1">
                 <a:solidFill>
                   <a:srgbClr val="BBD0DD"/>
@@ -13292,6 +13825,7 @@
               </a:defRPr>
             </a:lvl6pPr>
             <a:lvl7pPr algn="l">
+              <a:buNone/>
               <a:defRPr sz="1050" b="1">
                 <a:solidFill>
                   <a:srgbClr val="BBD0DD"/>
@@ -13302,6 +13836,7 @@
               </a:defRPr>
             </a:lvl7pPr>
             <a:lvl8pPr algn="l">
+              <a:buNone/>
               <a:defRPr sz="1050" b="1">
                 <a:solidFill>
                   <a:srgbClr val="BBD0DD"/>
@@ -13312,6 +13847,7 @@
               </a:defRPr>
             </a:lvl8pPr>
             <a:lvl9pPr algn="l">
+              <a:buNone/>
               <a:defRPr sz="1050" b="1">
                 <a:solidFill>
                   <a:srgbClr val="BBD0DD"/>
@@ -13324,6 +13860,7 @@
           </a:lstStyle>
           <a:p xmlns:a="http://schemas.openxmlformats.org/drawingml/2006/main">
             <a:pPr algn="l">
+              <a:buNone/>
               <a:defRPr sz="1050" b="1">
                 <a:solidFill>
                   <a:srgbClr val="BBD0DD"/>
@@ -13389,6 +13926,7 @@
               </a:defRPr>
             </a:defPPr>
             <a:lvl1pPr algn="l">
+              <a:buNone/>
               <a:defRPr sz="2850" b="1">
                 <a:solidFill>
                   <a:srgbClr val="FFFFFF"/>
@@ -13399,6 +13937,7 @@
               </a:defRPr>
             </a:lvl1pPr>
             <a:lvl2pPr algn="l">
+              <a:buNone/>
               <a:defRPr sz="2850" b="1">
                 <a:solidFill>
                   <a:srgbClr val="FFFFFF"/>
@@ -13409,6 +13948,7 @@
               </a:defRPr>
             </a:lvl2pPr>
             <a:lvl3pPr algn="l">
+              <a:buNone/>
               <a:defRPr sz="2850" b="1">
                 <a:solidFill>
                   <a:srgbClr val="FFFFFF"/>
@@ -13419,6 +13959,7 @@
               </a:defRPr>
             </a:lvl3pPr>
             <a:lvl4pPr algn="l">
+              <a:buNone/>
               <a:defRPr sz="2850" b="1">
                 <a:solidFill>
                   <a:srgbClr val="FFFFFF"/>
@@ -13429,6 +13970,7 @@
               </a:defRPr>
             </a:lvl4pPr>
             <a:lvl5pPr algn="l">
+              <a:buNone/>
               <a:defRPr sz="2850" b="1">
                 <a:solidFill>
                   <a:srgbClr val="FFFFFF"/>
@@ -13439,6 +13981,7 @@
               </a:defRPr>
             </a:lvl5pPr>
             <a:lvl6pPr algn="l">
+              <a:buNone/>
               <a:defRPr sz="2850" b="1">
                 <a:solidFill>
                   <a:srgbClr val="FFFFFF"/>
@@ -13449,6 +13992,7 @@
               </a:defRPr>
             </a:lvl6pPr>
             <a:lvl7pPr algn="l">
+              <a:buNone/>
               <a:defRPr sz="2850" b="1">
                 <a:solidFill>
                   <a:srgbClr val="FFFFFF"/>
@@ -13459,6 +14003,7 @@
               </a:defRPr>
             </a:lvl7pPr>
             <a:lvl8pPr algn="l">
+              <a:buNone/>
               <a:defRPr sz="2850" b="1">
                 <a:solidFill>
                   <a:srgbClr val="FFFFFF"/>
@@ -13469,6 +14014,7 @@
               </a:defRPr>
             </a:lvl8pPr>
             <a:lvl9pPr algn="l">
+              <a:buNone/>
               <a:defRPr sz="2850" b="1">
                 <a:solidFill>
                   <a:srgbClr val="FFFFFF"/>
@@ -13481,6 +14027,7 @@
           </a:lstStyle>
           <a:p xmlns:a="http://schemas.openxmlformats.org/drawingml/2006/main">
             <a:pPr algn="l">
+              <a:buNone/>
               <a:defRPr sz="2850" b="1">
                 <a:solidFill>
                   <a:srgbClr val="FFFFFF"/>
@@ -13577,6 +14124,7 @@
               </a:defRPr>
             </a:defPPr>
             <a:lvl1pPr algn="l">
+              <a:buNone/>
               <a:defRPr sz="900" b="1">
                 <a:solidFill>
                   <a:srgbClr val="AFC7D7"/>
@@ -13587,6 +14135,7 @@
               </a:defRPr>
             </a:lvl1pPr>
             <a:lvl2pPr algn="l">
+              <a:buNone/>
               <a:defRPr sz="900" b="1">
                 <a:solidFill>
                   <a:srgbClr val="AFC7D7"/>
@@ -13597,6 +14146,7 @@
               </a:defRPr>
             </a:lvl2pPr>
             <a:lvl3pPr algn="l">
+              <a:buNone/>
               <a:defRPr sz="900" b="1">
                 <a:solidFill>
                   <a:srgbClr val="AFC7D7"/>
@@ -13607,6 +14157,7 @@
               </a:defRPr>
             </a:lvl3pPr>
             <a:lvl4pPr algn="l">
+              <a:buNone/>
               <a:defRPr sz="900" b="1">
                 <a:solidFill>
                   <a:srgbClr val="AFC7D7"/>
@@ -13617,6 +14168,7 @@
               </a:defRPr>
             </a:lvl4pPr>
             <a:lvl5pPr algn="l">
+              <a:buNone/>
               <a:defRPr sz="900" b="1">
                 <a:solidFill>
                   <a:srgbClr val="AFC7D7"/>
@@ -13627,6 +14179,7 @@
               </a:defRPr>
             </a:lvl5pPr>
             <a:lvl6pPr algn="l">
+              <a:buNone/>
               <a:defRPr sz="900" b="1">
                 <a:solidFill>
                   <a:srgbClr val="AFC7D7"/>
@@ -13637,6 +14190,7 @@
               </a:defRPr>
             </a:lvl6pPr>
             <a:lvl7pPr algn="l">
+              <a:buNone/>
               <a:defRPr sz="900" b="1">
                 <a:solidFill>
                   <a:srgbClr val="AFC7D7"/>
@@ -13647,6 +14201,7 @@
               </a:defRPr>
             </a:lvl7pPr>
             <a:lvl8pPr algn="l">
+              <a:buNone/>
               <a:defRPr sz="900" b="1">
                 <a:solidFill>
                   <a:srgbClr val="AFC7D7"/>
@@ -13657,6 +14212,7 @@
               </a:defRPr>
             </a:lvl8pPr>
             <a:lvl9pPr algn="l">
+              <a:buNone/>
               <a:defRPr sz="900" b="1">
                 <a:solidFill>
                   <a:srgbClr val="AFC7D7"/>
@@ -13669,6 +14225,7 @@
           </a:lstStyle>
           <a:p xmlns:a="http://schemas.openxmlformats.org/drawingml/2006/main">
             <a:pPr algn="l">
+              <a:buNone/>
               <a:defRPr sz="900" b="1">
                 <a:solidFill>
                   <a:srgbClr val="AFC7D7"/>
@@ -13734,6 +14291,7 @@
               </a:defRPr>
             </a:defPPr>
             <a:lvl1pPr algn="r">
+              <a:buNone/>
               <a:defRPr sz="900" b="0">
                 <a:solidFill>
                   <a:srgbClr val="AFC7D7"/>
@@ -13744,6 +14302,7 @@
               </a:defRPr>
             </a:lvl1pPr>
             <a:lvl2pPr algn="r">
+              <a:buNone/>
               <a:defRPr sz="900" b="0">
                 <a:solidFill>
                   <a:srgbClr val="AFC7D7"/>
@@ -13754,6 +14313,7 @@
               </a:defRPr>
             </a:lvl2pPr>
             <a:lvl3pPr algn="r">
+              <a:buNone/>
               <a:defRPr sz="900" b="0">
                 <a:solidFill>
                   <a:srgbClr val="AFC7D7"/>
@@ -13764,6 +14324,7 @@
               </a:defRPr>
             </a:lvl3pPr>
             <a:lvl4pPr algn="r">
+              <a:buNone/>
               <a:defRPr sz="900" b="0">
                 <a:solidFill>
                   <a:srgbClr val="AFC7D7"/>
@@ -13774,6 +14335,7 @@
               </a:defRPr>
             </a:lvl4pPr>
             <a:lvl5pPr algn="r">
+              <a:buNone/>
               <a:defRPr sz="900" b="0">
                 <a:solidFill>
                   <a:srgbClr val="AFC7D7"/>
@@ -13784,6 +14346,7 @@
               </a:defRPr>
             </a:lvl5pPr>
             <a:lvl6pPr algn="r">
+              <a:buNone/>
               <a:defRPr sz="900" b="0">
                 <a:solidFill>
                   <a:srgbClr val="AFC7D7"/>
@@ -13794,6 +14357,7 @@
               </a:defRPr>
             </a:lvl6pPr>
             <a:lvl7pPr algn="r">
+              <a:buNone/>
               <a:defRPr sz="900" b="0">
                 <a:solidFill>
                   <a:srgbClr val="AFC7D7"/>
@@ -13804,6 +14368,7 @@
               </a:defRPr>
             </a:lvl7pPr>
             <a:lvl8pPr algn="r">
+              <a:buNone/>
               <a:defRPr sz="900" b="0">
                 <a:solidFill>
                   <a:srgbClr val="AFC7D7"/>
@@ -13814,6 +14379,7 @@
               </a:defRPr>
             </a:lvl8pPr>
             <a:lvl9pPr algn="r">
+              <a:buNone/>
               <a:defRPr sz="900" b="0">
                 <a:solidFill>
                   <a:srgbClr val="AFC7D7"/>
@@ -13826,6 +14392,7 @@
           </a:lstStyle>
           <a:p xmlns:a="http://schemas.openxmlformats.org/drawingml/2006/main">
             <a:pPr algn="r">
+              <a:buNone/>
               <a:defRPr sz="900" b="0">
                 <a:solidFill>
                   <a:srgbClr val="AFC7D7"/>
@@ -13891,6 +14458,7 @@
               </a:defRPr>
             </a:defPPr>
             <a:lvl1pPr algn="l">
+              <a:buNone/>
               <a:defRPr sz="1350" b="0">
                 <a:solidFill>
                   <a:srgbClr val="DCE8EE"/>
@@ -13901,6 +14469,7 @@
               </a:defRPr>
             </a:lvl1pPr>
             <a:lvl2pPr algn="l">
+              <a:buNone/>
               <a:defRPr sz="1350" b="0">
                 <a:solidFill>
                   <a:srgbClr val="DCE8EE"/>
@@ -13911,6 +14480,7 @@
               </a:defRPr>
             </a:lvl2pPr>
             <a:lvl3pPr algn="l">
+              <a:buNone/>
               <a:defRPr sz="1350" b="0">
                 <a:solidFill>
                   <a:srgbClr val="DCE8EE"/>
@@ -13921,6 +14491,7 @@
               </a:defRPr>
             </a:lvl3pPr>
             <a:lvl4pPr algn="l">
+              <a:buNone/>
               <a:defRPr sz="1350" b="0">
                 <a:solidFill>
                   <a:srgbClr val="DCE8EE"/>
@@ -13931,6 +14502,7 @@
               </a:defRPr>
             </a:lvl4pPr>
             <a:lvl5pPr algn="l">
+              <a:buNone/>
               <a:defRPr sz="1350" b="0">
                 <a:solidFill>
                   <a:srgbClr val="DCE8EE"/>
@@ -13941,6 +14513,7 @@
               </a:defRPr>
             </a:lvl5pPr>
             <a:lvl6pPr algn="l">
+              <a:buNone/>
               <a:defRPr sz="1350" b="0">
                 <a:solidFill>
                   <a:srgbClr val="DCE8EE"/>
@@ -13951,6 +14524,7 @@
               </a:defRPr>
             </a:lvl6pPr>
             <a:lvl7pPr algn="l">
+              <a:buNone/>
               <a:defRPr sz="1350" b="0">
                 <a:solidFill>
                   <a:srgbClr val="DCE8EE"/>
@@ -13961,6 +14535,7 @@
               </a:defRPr>
             </a:lvl7pPr>
             <a:lvl8pPr algn="l">
+              <a:buNone/>
               <a:defRPr sz="1350" b="0">
                 <a:solidFill>
                   <a:srgbClr val="DCE8EE"/>
@@ -13971,6 +14546,7 @@
               </a:defRPr>
             </a:lvl8pPr>
             <a:lvl9pPr algn="l">
+              <a:buNone/>
               <a:defRPr sz="1350" b="0">
                 <a:solidFill>
                   <a:srgbClr val="DCE8EE"/>
@@ -13983,6 +14559,7 @@
           </a:lstStyle>
           <a:p xmlns:a="http://schemas.openxmlformats.org/drawingml/2006/main">
             <a:pPr algn="l">
+              <a:buNone/>
               <a:defRPr sz="1350" b="0">
                 <a:solidFill>
                   <a:srgbClr val="DCE8EE"/>
@@ -14048,6 +14625,7 @@
               </a:defRPr>
             </a:defPPr>
             <a:lvl1pPr algn="l">
+              <a:buNone/>
               <a:defRPr sz="975" b="1">
                 <a:solidFill>
                   <a:srgbClr val="BBD0DD"/>
@@ -14058,6 +14636,7 @@
               </a:defRPr>
             </a:lvl1pPr>
             <a:lvl2pPr algn="l">
+              <a:buNone/>
               <a:defRPr sz="975" b="1">
                 <a:solidFill>
                   <a:srgbClr val="BBD0DD"/>
@@ -14068,6 +14647,7 @@
               </a:defRPr>
             </a:lvl2pPr>
             <a:lvl3pPr algn="l">
+              <a:buNone/>
               <a:defRPr sz="975" b="1">
                 <a:solidFill>
                   <a:srgbClr val="BBD0DD"/>
@@ -14078,6 +14658,7 @@
               </a:defRPr>
             </a:lvl3pPr>
             <a:lvl4pPr algn="l">
+              <a:buNone/>
               <a:defRPr sz="975" b="1">
                 <a:solidFill>
                   <a:srgbClr val="BBD0DD"/>
@@ -14088,6 +14669,7 @@
               </a:defRPr>
             </a:lvl4pPr>
             <a:lvl5pPr algn="l">
+              <a:buNone/>
               <a:defRPr sz="975" b="1">
                 <a:solidFill>
                   <a:srgbClr val="BBD0DD"/>
@@ -14098,6 +14680,7 @@
               </a:defRPr>
             </a:lvl5pPr>
             <a:lvl6pPr algn="l">
+              <a:buNone/>
               <a:defRPr sz="975" b="1">
                 <a:solidFill>
                   <a:srgbClr val="BBD0DD"/>
@@ -14108,6 +14691,7 @@
               </a:defRPr>
             </a:lvl6pPr>
             <a:lvl7pPr algn="l">
+              <a:buNone/>
               <a:defRPr sz="975" b="1">
                 <a:solidFill>
                   <a:srgbClr val="BBD0DD"/>
@@ -14118,6 +14702,7 @@
               </a:defRPr>
             </a:lvl7pPr>
             <a:lvl8pPr algn="l">
+              <a:buNone/>
               <a:defRPr sz="975" b="1">
                 <a:solidFill>
                   <a:srgbClr val="BBD0DD"/>
@@ -14128,6 +14713,7 @@
               </a:defRPr>
             </a:lvl8pPr>
             <a:lvl9pPr algn="l">
+              <a:buNone/>
               <a:defRPr sz="975" b="1">
                 <a:solidFill>
                   <a:srgbClr val="BBD0DD"/>
@@ -14140,6 +14726,7 @@
           </a:lstStyle>
           <a:p xmlns:a="http://schemas.openxmlformats.org/drawingml/2006/main">
             <a:pPr algn="l">
+              <a:buNone/>
               <a:defRPr sz="975" b="1">
                 <a:solidFill>
                   <a:srgbClr val="BBD0DD"/>
@@ -14168,7 +14755,7 @@
           <p:cNvPr id="8" name="">
             <a:extLst xmlns:a="http://schemas.openxmlformats.org/drawingml/2006/main">
               <a:ext uri="{FF2B5EF4-FFF2-40B4-BE49-F238E27FC236}">
-                <a16:creationId xmlns:a16="http://schemas.microsoft.com/office/drawing/2014/main" id="{3ED1A31E-0BCE-495E-82CE-E90F09C98D86}"/>
+                <a16:creationId xmlns:a16="http://schemas.microsoft.com/office/drawing/2014/main" id="{C13F06DB-B8DB-4F66-A212-5E748B61391E}"/>
               </a:ext>
             </a:extLst>
           </p:cNvPr>
@@ -14178,7 +14765,7 @@
           <p:nvPr/>
         </p:nvPicPr>
         <p:blipFill>
-          <a:blip xmlns:r="http://schemas.openxmlformats.org/officeDocument/2006/relationships" xmlns:a="http://schemas.openxmlformats.org/drawingml/2006/main" r:embed="R841aad975c1d4b87"/>
+          <a:blip xmlns:r="http://schemas.openxmlformats.org/officeDocument/2006/relationships" xmlns:a="http://schemas.openxmlformats.org/drawingml/2006/main" r:embed="Rd8c69d21ec1241fe"/>
           <a:srcRect xmlns:a="http://schemas.openxmlformats.org/drawingml/2006/main" l="21500" t="13000" r="24500" b="28000"/>
           <a:stretch xmlns:a="http://schemas.openxmlformats.org/drawingml/2006/main"/>
         </p:blipFill>
@@ -14302,6 +14889,7 @@
               </a:defRPr>
             </a:defPPr>
             <a:lvl1pPr algn="ctr">
+              <a:buNone/>
               <a:defRPr sz="975" b="1">
                 <a:solidFill>
                   <a:srgbClr val="FFFFFF"/>
@@ -14312,6 +14900,7 @@
               </a:defRPr>
             </a:lvl1pPr>
             <a:lvl2pPr algn="ctr">
+              <a:buNone/>
               <a:defRPr sz="975" b="1">
                 <a:solidFill>
                   <a:srgbClr val="FFFFFF"/>
@@ -14322,6 +14911,7 @@
               </a:defRPr>
             </a:lvl2pPr>
             <a:lvl3pPr algn="ctr">
+              <a:buNone/>
               <a:defRPr sz="975" b="1">
                 <a:solidFill>
                   <a:srgbClr val="FFFFFF"/>
@@ -14332,6 +14922,7 @@
               </a:defRPr>
             </a:lvl3pPr>
             <a:lvl4pPr algn="ctr">
+              <a:buNone/>
               <a:defRPr sz="975" b="1">
                 <a:solidFill>
                   <a:srgbClr val="FFFFFF"/>
@@ -14342,6 +14933,7 @@
               </a:defRPr>
             </a:lvl4pPr>
             <a:lvl5pPr algn="ctr">
+              <a:buNone/>
               <a:defRPr sz="975" b="1">
                 <a:solidFill>
                   <a:srgbClr val="FFFFFF"/>
@@ -14352,6 +14944,7 @@
               </a:defRPr>
             </a:lvl5pPr>
             <a:lvl6pPr algn="ctr">
+              <a:buNone/>
               <a:defRPr sz="975" b="1">
                 <a:solidFill>
                   <a:srgbClr val="FFFFFF"/>
@@ -14362,6 +14955,7 @@
               </a:defRPr>
             </a:lvl6pPr>
             <a:lvl7pPr algn="ctr">
+              <a:buNone/>
               <a:defRPr sz="975" b="1">
                 <a:solidFill>
                   <a:srgbClr val="FFFFFF"/>
@@ -14372,6 +14966,7 @@
               </a:defRPr>
             </a:lvl7pPr>
             <a:lvl8pPr algn="ctr">
+              <a:buNone/>
               <a:defRPr sz="975" b="1">
                 <a:solidFill>
                   <a:srgbClr val="FFFFFF"/>
@@ -14382,6 +14977,7 @@
               </a:defRPr>
             </a:lvl8pPr>
             <a:lvl9pPr algn="ctr">
+              <a:buNone/>
               <a:defRPr sz="975" b="1">
                 <a:solidFill>
                   <a:srgbClr val="FFFFFF"/>
@@ -14394,6 +14990,7 @@
           </a:lstStyle>
           <a:p xmlns:a="http://schemas.openxmlformats.org/drawingml/2006/main">
             <a:pPr algn="ctr">
+              <a:buNone/>
               <a:defRPr sz="975" b="1">
                 <a:solidFill>
                   <a:srgbClr val="FFFFFF"/>
@@ -14459,6 +15056,7 @@
               </a:defRPr>
             </a:defPPr>
             <a:lvl1pPr algn="l">
+              <a:buNone/>
               <a:defRPr sz="1275" b="1">
                 <a:solidFill>
                   <a:srgbClr val="FFFFFF"/>
@@ -14469,6 +15067,7 @@
               </a:defRPr>
             </a:lvl1pPr>
             <a:lvl2pPr algn="l">
+              <a:buNone/>
               <a:defRPr sz="1275" b="1">
                 <a:solidFill>
                   <a:srgbClr val="FFFFFF"/>
@@ -14479,6 +15078,7 @@
               </a:defRPr>
             </a:lvl2pPr>
             <a:lvl3pPr algn="l">
+              <a:buNone/>
               <a:defRPr sz="1275" b="1">
                 <a:solidFill>
                   <a:srgbClr val="FFFFFF"/>
@@ -14489,6 +15089,7 @@
               </a:defRPr>
             </a:lvl3pPr>
             <a:lvl4pPr algn="l">
+              <a:buNone/>
               <a:defRPr sz="1275" b="1">
                 <a:solidFill>
                   <a:srgbClr val="FFFFFF"/>
@@ -14499,6 +15100,7 @@
               </a:defRPr>
             </a:lvl4pPr>
             <a:lvl5pPr algn="l">
+              <a:buNone/>
               <a:defRPr sz="1275" b="1">
                 <a:solidFill>
                   <a:srgbClr val="FFFFFF"/>
@@ -14509,6 +15111,7 @@
               </a:defRPr>
             </a:lvl5pPr>
             <a:lvl6pPr algn="l">
+              <a:buNone/>
               <a:defRPr sz="1275" b="1">
                 <a:solidFill>
                   <a:srgbClr val="FFFFFF"/>
@@ -14519,6 +15122,7 @@
               </a:defRPr>
             </a:lvl6pPr>
             <a:lvl7pPr algn="l">
+              <a:buNone/>
               <a:defRPr sz="1275" b="1">
                 <a:solidFill>
                   <a:srgbClr val="FFFFFF"/>
@@ -14529,6 +15133,7 @@
               </a:defRPr>
             </a:lvl7pPr>
             <a:lvl8pPr algn="l">
+              <a:buNone/>
               <a:defRPr sz="1275" b="1">
                 <a:solidFill>
                   <a:srgbClr val="FFFFFF"/>
@@ -14539,6 +15144,7 @@
               </a:defRPr>
             </a:lvl8pPr>
             <a:lvl9pPr algn="l">
+              <a:buNone/>
               <a:defRPr sz="1275" b="1">
                 <a:solidFill>
                   <a:srgbClr val="FFFFFF"/>
@@ -14551,6 +15157,7 @@
           </a:lstStyle>
           <a:p xmlns:a="http://schemas.openxmlformats.org/drawingml/2006/main">
             <a:pPr algn="l">
+              <a:buNone/>
               <a:defRPr sz="1275" b="1">
                 <a:solidFill>
                   <a:srgbClr val="FFFFFF"/>
@@ -14616,6 +15223,7 @@
               </a:defRPr>
             </a:defPPr>
             <a:lvl1pPr algn="l">
+              <a:buNone/>
               <a:defRPr sz="975" b="1">
                 <a:solidFill>
                   <a:srgbClr val="BBD0DD"/>
@@ -14626,6 +15234,7 @@
               </a:defRPr>
             </a:lvl1pPr>
             <a:lvl2pPr algn="l">
+              <a:buNone/>
               <a:defRPr sz="975" b="1">
                 <a:solidFill>
                   <a:srgbClr val="BBD0DD"/>
@@ -14636,6 +15245,7 @@
               </a:defRPr>
             </a:lvl2pPr>
             <a:lvl3pPr algn="l">
+              <a:buNone/>
               <a:defRPr sz="975" b="1">
                 <a:solidFill>
                   <a:srgbClr val="BBD0DD"/>
@@ -14646,6 +15256,7 @@
               </a:defRPr>
             </a:lvl3pPr>
             <a:lvl4pPr algn="l">
+              <a:buNone/>
               <a:defRPr sz="975" b="1">
                 <a:solidFill>
                   <a:srgbClr val="BBD0DD"/>
@@ -14656,6 +15267,7 @@
               </a:defRPr>
             </a:lvl4pPr>
             <a:lvl5pPr algn="l">
+              <a:buNone/>
               <a:defRPr sz="975" b="1">
                 <a:solidFill>
                   <a:srgbClr val="BBD0DD"/>
@@ -14666,6 +15278,7 @@
               </a:defRPr>
             </a:lvl5pPr>
             <a:lvl6pPr algn="l">
+              <a:buNone/>
               <a:defRPr sz="975" b="1">
                 <a:solidFill>
                   <a:srgbClr val="BBD0DD"/>
@@ -14676,6 +15289,7 @@
               </a:defRPr>
             </a:lvl6pPr>
             <a:lvl7pPr algn="l">
+              <a:buNone/>
               <a:defRPr sz="975" b="1">
                 <a:solidFill>
                   <a:srgbClr val="BBD0DD"/>
@@ -14686,6 +15300,7 @@
               </a:defRPr>
             </a:lvl7pPr>
             <a:lvl8pPr algn="l">
+              <a:buNone/>
               <a:defRPr sz="975" b="1">
                 <a:solidFill>
                   <a:srgbClr val="BBD0DD"/>
@@ -14696,6 +15311,7 @@
               </a:defRPr>
             </a:lvl8pPr>
             <a:lvl9pPr algn="l">
+              <a:buNone/>
               <a:defRPr sz="975" b="1">
                 <a:solidFill>
                   <a:srgbClr val="BBD0DD"/>
@@ -14708,6 +15324,7 @@
           </a:lstStyle>
           <a:p xmlns:a="http://schemas.openxmlformats.org/drawingml/2006/main">
             <a:pPr algn="l">
+              <a:buNone/>
               <a:defRPr sz="975" b="1">
                 <a:solidFill>
                   <a:srgbClr val="BBD0DD"/>
@@ -14736,7 +15353,7 @@
           <p:cNvPr id="14" name="">
             <a:extLst xmlns:a="http://schemas.openxmlformats.org/drawingml/2006/main">
               <a:ext uri="{FF2B5EF4-FFF2-40B4-BE49-F238E27FC236}">
-                <a16:creationId xmlns:a16="http://schemas.microsoft.com/office/drawing/2014/main" id="{8E4AA383-467C-4674-9F6F-ACD07CF5CC5C}"/>
+                <a16:creationId xmlns:a16="http://schemas.microsoft.com/office/drawing/2014/main" id="{10D0A87E-DCC2-4F61-96E2-D6241452584F}"/>
               </a:ext>
             </a:extLst>
           </p:cNvPr>
@@ -14746,7 +15363,7 @@
           <p:nvPr/>
         </p:nvPicPr>
         <p:blipFill>
-          <a:blip xmlns:r="http://schemas.openxmlformats.org/officeDocument/2006/relationships" xmlns:a="http://schemas.openxmlformats.org/drawingml/2006/main" r:embed="Rf10e2d97c06b49db"/>
+          <a:blip xmlns:r="http://schemas.openxmlformats.org/officeDocument/2006/relationships" xmlns:a="http://schemas.openxmlformats.org/drawingml/2006/main" r:embed="Rbd6ba1cd08314f67"/>
           <a:srcRect xmlns:a="http://schemas.openxmlformats.org/drawingml/2006/main" l="20500" t="29000" r="18000" b="10000"/>
           <a:stretch xmlns:a="http://schemas.openxmlformats.org/drawingml/2006/main"/>
         </p:blipFill>
@@ -14870,6 +15487,7 @@
               </a:defRPr>
             </a:defPPr>
             <a:lvl1pPr algn="ctr">
+              <a:buNone/>
               <a:defRPr sz="975" b="1">
                 <a:solidFill>
                   <a:srgbClr val="FFFFFF"/>
@@ -14880,6 +15498,7 @@
               </a:defRPr>
             </a:lvl1pPr>
             <a:lvl2pPr algn="ctr">
+              <a:buNone/>
               <a:defRPr sz="975" b="1">
                 <a:solidFill>
                   <a:srgbClr val="FFFFFF"/>
@@ -14890,6 +15509,7 @@
               </a:defRPr>
             </a:lvl2pPr>
             <a:lvl3pPr algn="ctr">
+              <a:buNone/>
               <a:defRPr sz="975" b="1">
                 <a:solidFill>
                   <a:srgbClr val="FFFFFF"/>
@@ -14900,6 +15520,7 @@
               </a:defRPr>
             </a:lvl3pPr>
             <a:lvl4pPr algn="ctr">
+              <a:buNone/>
               <a:defRPr sz="975" b="1">
                 <a:solidFill>
                   <a:srgbClr val="FFFFFF"/>
@@ -14910,6 +15531,7 @@
               </a:defRPr>
             </a:lvl4pPr>
             <a:lvl5pPr algn="ctr">
+              <a:buNone/>
               <a:defRPr sz="975" b="1">
                 <a:solidFill>
                   <a:srgbClr val="FFFFFF"/>
@@ -14920,6 +15542,7 @@
               </a:defRPr>
             </a:lvl5pPr>
             <a:lvl6pPr algn="ctr">
+              <a:buNone/>
               <a:defRPr sz="975" b="1">
                 <a:solidFill>
                   <a:srgbClr val="FFFFFF"/>
@@ -14930,6 +15553,7 @@
               </a:defRPr>
             </a:lvl6pPr>
             <a:lvl7pPr algn="ctr">
+              <a:buNone/>
               <a:defRPr sz="975" b="1">
                 <a:solidFill>
                   <a:srgbClr val="FFFFFF"/>
@@ -14940,6 +15564,7 @@
               </a:defRPr>
             </a:lvl7pPr>
             <a:lvl8pPr algn="ctr">
+              <a:buNone/>
               <a:defRPr sz="975" b="1">
                 <a:solidFill>
                   <a:srgbClr val="FFFFFF"/>
@@ -14950,6 +15575,7 @@
               </a:defRPr>
             </a:lvl8pPr>
             <a:lvl9pPr algn="ctr">
+              <a:buNone/>
               <a:defRPr sz="975" b="1">
                 <a:solidFill>
                   <a:srgbClr val="FFFFFF"/>
@@ -14962,6 +15588,7 @@
           </a:lstStyle>
           <a:p xmlns:a="http://schemas.openxmlformats.org/drawingml/2006/main">
             <a:pPr algn="ctr">
+              <a:buNone/>
               <a:defRPr sz="975" b="1">
                 <a:solidFill>
                   <a:srgbClr val="FFFFFF"/>
@@ -15027,6 +15654,7 @@
               </a:defRPr>
             </a:defPPr>
             <a:lvl1pPr algn="l">
+              <a:buNone/>
               <a:defRPr sz="1275" b="1">
                 <a:solidFill>
                   <a:srgbClr val="FFFFFF"/>
@@ -15037,6 +15665,7 @@
               </a:defRPr>
             </a:lvl1pPr>
             <a:lvl2pPr algn="l">
+              <a:buNone/>
               <a:defRPr sz="1275" b="1">
                 <a:solidFill>
                   <a:srgbClr val="FFFFFF"/>
@@ -15047,6 +15676,7 @@
               </a:defRPr>
             </a:lvl2pPr>
             <a:lvl3pPr algn="l">
+              <a:buNone/>
               <a:defRPr sz="1275" b="1">
                 <a:solidFill>
                   <a:srgbClr val="FFFFFF"/>
@@ -15057,6 +15687,7 @@
               </a:defRPr>
             </a:lvl3pPr>
             <a:lvl4pPr algn="l">
+              <a:buNone/>
               <a:defRPr sz="1275" b="1">
                 <a:solidFill>
                   <a:srgbClr val="FFFFFF"/>
@@ -15067,6 +15698,7 @@
               </a:defRPr>
             </a:lvl4pPr>
             <a:lvl5pPr algn="l">
+              <a:buNone/>
               <a:defRPr sz="1275" b="1">
                 <a:solidFill>
                   <a:srgbClr val="FFFFFF"/>
@@ -15077,6 +15709,7 @@
               </a:defRPr>
             </a:lvl5pPr>
             <a:lvl6pPr algn="l">
+              <a:buNone/>
               <a:defRPr sz="1275" b="1">
                 <a:solidFill>
                   <a:srgbClr val="FFFFFF"/>
@@ -15087,6 +15720,7 @@
               </a:defRPr>
             </a:lvl6pPr>
             <a:lvl7pPr algn="l">
+              <a:buNone/>
               <a:defRPr sz="1275" b="1">
                 <a:solidFill>
                   <a:srgbClr val="FFFFFF"/>
@@ -15097,6 +15731,7 @@
               </a:defRPr>
             </a:lvl7pPr>
             <a:lvl8pPr algn="l">
+              <a:buNone/>
               <a:defRPr sz="1275" b="1">
                 <a:solidFill>
                   <a:srgbClr val="FFFFFF"/>
@@ -15107,6 +15742,7 @@
               </a:defRPr>
             </a:lvl8pPr>
             <a:lvl9pPr algn="l">
+              <a:buNone/>
               <a:defRPr sz="1275" b="1">
                 <a:solidFill>
                   <a:srgbClr val="FFFFFF"/>
@@ -15119,6 +15755,7 @@
           </a:lstStyle>
           <a:p xmlns:a="http://schemas.openxmlformats.org/drawingml/2006/main">
             <a:pPr algn="l">
+              <a:buNone/>
               <a:defRPr sz="1275" b="1">
                 <a:solidFill>
                   <a:srgbClr val="FFFFFF"/>
@@ -15184,6 +15821,7 @@
               </a:defRPr>
             </a:defPPr>
             <a:lvl1pPr algn="l">
+              <a:buNone/>
               <a:defRPr sz="975" b="1">
                 <a:solidFill>
                   <a:srgbClr val="BBD0DD"/>
@@ -15194,6 +15832,7 @@
               </a:defRPr>
             </a:lvl1pPr>
             <a:lvl2pPr algn="l">
+              <a:buNone/>
               <a:defRPr sz="975" b="1">
                 <a:solidFill>
                   <a:srgbClr val="BBD0DD"/>
@@ -15204,6 +15843,7 @@
               </a:defRPr>
             </a:lvl2pPr>
             <a:lvl3pPr algn="l">
+              <a:buNone/>
               <a:defRPr sz="975" b="1">
                 <a:solidFill>
                   <a:srgbClr val="BBD0DD"/>
@@ -15214,6 +15854,7 @@
               </a:defRPr>
             </a:lvl3pPr>
             <a:lvl4pPr algn="l">
+              <a:buNone/>
               <a:defRPr sz="975" b="1">
                 <a:solidFill>
                   <a:srgbClr val="BBD0DD"/>
@@ -15224,6 +15865,7 @@
               </a:defRPr>
             </a:lvl4pPr>
             <a:lvl5pPr algn="l">
+              <a:buNone/>
               <a:defRPr sz="975" b="1">
                 <a:solidFill>
                   <a:srgbClr val="BBD0DD"/>
@@ -15234,6 +15876,7 @@
               </a:defRPr>
             </a:lvl5pPr>
             <a:lvl6pPr algn="l">
+              <a:buNone/>
               <a:defRPr sz="975" b="1">
                 <a:solidFill>
                   <a:srgbClr val="BBD0DD"/>
@@ -15244,6 +15887,7 @@
               </a:defRPr>
             </a:lvl6pPr>
             <a:lvl7pPr algn="l">
+              <a:buNone/>
               <a:defRPr sz="975" b="1">
                 <a:solidFill>
                   <a:srgbClr val="BBD0DD"/>
@@ -15254,6 +15898,7 @@
               </a:defRPr>
             </a:lvl7pPr>
             <a:lvl8pPr algn="l">
+              <a:buNone/>
               <a:defRPr sz="975" b="1">
                 <a:solidFill>
                   <a:srgbClr val="BBD0DD"/>
@@ -15264,6 +15909,7 @@
               </a:defRPr>
             </a:lvl8pPr>
             <a:lvl9pPr algn="l">
+              <a:buNone/>
               <a:defRPr sz="975" b="1">
                 <a:solidFill>
                   <a:srgbClr val="BBD0DD"/>
@@ -15276,6 +15922,7 @@
           </a:lstStyle>
           <a:p xmlns:a="http://schemas.openxmlformats.org/drawingml/2006/main">
             <a:pPr algn="l">
+              <a:buNone/>
               <a:defRPr sz="975" b="1">
                 <a:solidFill>
                   <a:srgbClr val="BBD0DD"/>
@@ -15304,7 +15951,7 @@
           <p:cNvPr id="20" name="">
             <a:extLst xmlns:a="http://schemas.openxmlformats.org/drawingml/2006/main">
               <a:ext uri="{FF2B5EF4-FFF2-40B4-BE49-F238E27FC236}">
-                <a16:creationId xmlns:a16="http://schemas.microsoft.com/office/drawing/2014/main" id="{0353C0FC-1B37-4A26-847C-8905086C1652}"/>
+                <a16:creationId xmlns:a16="http://schemas.microsoft.com/office/drawing/2014/main" id="{44190EDE-433B-4A27-A776-13CB3158CF1E}"/>
               </a:ext>
             </a:extLst>
           </p:cNvPr>
@@ -15314,7 +15961,7 @@
           <p:nvPr/>
         </p:nvPicPr>
         <p:blipFill>
-          <a:blip xmlns:r="http://schemas.openxmlformats.org/officeDocument/2006/relationships" xmlns:a="http://schemas.openxmlformats.org/drawingml/2006/main" r:embed="R7358f999c03b4e4d"/>
+          <a:blip xmlns:r="http://schemas.openxmlformats.org/officeDocument/2006/relationships" xmlns:a="http://schemas.openxmlformats.org/drawingml/2006/main" r:embed="R3174fe8f08fb4b51"/>
           <a:srcRect xmlns:a="http://schemas.openxmlformats.org/drawingml/2006/main" l="59000" t="39000" r="0" b="18000"/>
           <a:stretch xmlns:a="http://schemas.openxmlformats.org/drawingml/2006/main"/>
         </p:blipFill>
@@ -15438,6 +16085,7 @@
               </a:defRPr>
             </a:defPPr>
             <a:lvl1pPr algn="ctr">
+              <a:buNone/>
               <a:defRPr sz="975" b="1">
                 <a:solidFill>
                   <a:srgbClr val="FFFFFF"/>
@@ -15448,6 +16096,7 @@
               </a:defRPr>
             </a:lvl1pPr>
             <a:lvl2pPr algn="ctr">
+              <a:buNone/>
               <a:defRPr sz="975" b="1">
                 <a:solidFill>
                   <a:srgbClr val="FFFFFF"/>
@@ -15458,6 +16107,7 @@
               </a:defRPr>
             </a:lvl2pPr>
             <a:lvl3pPr algn="ctr">
+              <a:buNone/>
               <a:defRPr sz="975" b="1">
                 <a:solidFill>
                   <a:srgbClr val="FFFFFF"/>
@@ -15468,6 +16118,7 @@
               </a:defRPr>
             </a:lvl3pPr>
             <a:lvl4pPr algn="ctr">
+              <a:buNone/>
               <a:defRPr sz="975" b="1">
                 <a:solidFill>
                   <a:srgbClr val="FFFFFF"/>
@@ -15478,6 +16129,7 @@
               </a:defRPr>
             </a:lvl4pPr>
             <a:lvl5pPr algn="ctr">
+              <a:buNone/>
               <a:defRPr sz="975" b="1">
                 <a:solidFill>
                   <a:srgbClr val="FFFFFF"/>
@@ -15488,6 +16140,7 @@
               </a:defRPr>
             </a:lvl5pPr>
             <a:lvl6pPr algn="ctr">
+              <a:buNone/>
               <a:defRPr sz="975" b="1">
                 <a:solidFill>
                   <a:srgbClr val="FFFFFF"/>
@@ -15498,6 +16151,7 @@
               </a:defRPr>
             </a:lvl6pPr>
             <a:lvl7pPr algn="ctr">
+              <a:buNone/>
               <a:defRPr sz="975" b="1">
                 <a:solidFill>
                   <a:srgbClr val="FFFFFF"/>
@@ -15508,6 +16162,7 @@
               </a:defRPr>
             </a:lvl7pPr>
             <a:lvl8pPr algn="ctr">
+              <a:buNone/>
               <a:defRPr sz="975" b="1">
                 <a:solidFill>
                   <a:srgbClr val="FFFFFF"/>
@@ -15518,6 +16173,7 @@
               </a:defRPr>
             </a:lvl8pPr>
             <a:lvl9pPr algn="ctr">
+              <a:buNone/>
               <a:defRPr sz="975" b="1">
                 <a:solidFill>
                   <a:srgbClr val="FFFFFF"/>
@@ -15530,6 +16186,7 @@
           </a:lstStyle>
           <a:p xmlns:a="http://schemas.openxmlformats.org/drawingml/2006/main">
             <a:pPr algn="ctr">
+              <a:buNone/>
               <a:defRPr sz="975" b="1">
                 <a:solidFill>
                   <a:srgbClr val="FFFFFF"/>
@@ -15595,6 +16252,7 @@
               </a:defRPr>
             </a:defPPr>
             <a:lvl1pPr algn="l">
+              <a:buNone/>
               <a:defRPr sz="1275" b="1">
                 <a:solidFill>
                   <a:srgbClr val="FFFFFF"/>
@@ -15605,6 +16263,7 @@
               </a:defRPr>
             </a:lvl1pPr>
             <a:lvl2pPr algn="l">
+              <a:buNone/>
               <a:defRPr sz="1275" b="1">
                 <a:solidFill>
                   <a:srgbClr val="FFFFFF"/>
@@ -15615,6 +16274,7 @@
               </a:defRPr>
             </a:lvl2pPr>
             <a:lvl3pPr algn="l">
+              <a:buNone/>
               <a:defRPr sz="1275" b="1">
                 <a:solidFill>
                   <a:srgbClr val="FFFFFF"/>
@@ -15625,6 +16285,7 @@
               </a:defRPr>
             </a:lvl3pPr>
             <a:lvl4pPr algn="l">
+              <a:buNone/>
               <a:defRPr sz="1275" b="1">
                 <a:solidFill>
                   <a:srgbClr val="FFFFFF"/>
@@ -15635,6 +16296,7 @@
               </a:defRPr>
             </a:lvl4pPr>
             <a:lvl5pPr algn="l">
+              <a:buNone/>
               <a:defRPr sz="1275" b="1">
                 <a:solidFill>
                   <a:srgbClr val="FFFFFF"/>
@@ -15645,6 +16307,7 @@
               </a:defRPr>
             </a:lvl5pPr>
             <a:lvl6pPr algn="l">
+              <a:buNone/>
               <a:defRPr sz="1275" b="1">
                 <a:solidFill>
                   <a:srgbClr val="FFFFFF"/>
@@ -15655,6 +16318,7 @@
               </a:defRPr>
             </a:lvl6pPr>
             <a:lvl7pPr algn="l">
+              <a:buNone/>
               <a:defRPr sz="1275" b="1">
                 <a:solidFill>
                   <a:srgbClr val="FFFFFF"/>
@@ -15665,6 +16329,7 @@
               </a:defRPr>
             </a:lvl7pPr>
             <a:lvl8pPr algn="l">
+              <a:buNone/>
               <a:defRPr sz="1275" b="1">
                 <a:solidFill>
                   <a:srgbClr val="FFFFFF"/>
@@ -15675,6 +16340,7 @@
               </a:defRPr>
             </a:lvl8pPr>
             <a:lvl9pPr algn="l">
+              <a:buNone/>
               <a:defRPr sz="1275" b="1">
                 <a:solidFill>
                   <a:srgbClr val="FFFFFF"/>
@@ -15687,6 +16353,7 @@
           </a:lstStyle>
           <a:p xmlns:a="http://schemas.openxmlformats.org/drawingml/2006/main">
             <a:pPr algn="l">
+              <a:buNone/>
               <a:defRPr sz="1275" b="1">
                 <a:solidFill>
                   <a:srgbClr val="FFFFFF"/>
@@ -15752,6 +16419,7 @@
               </a:defRPr>
             </a:defPPr>
             <a:lvl1pPr algn="l">
+              <a:buNone/>
               <a:defRPr sz="1200" b="0">
                 <a:solidFill>
                   <a:srgbClr val="BBD0DD"/>
@@ -15762,6 +16430,7 @@
               </a:defRPr>
             </a:lvl1pPr>
             <a:lvl2pPr algn="l">
+              <a:buNone/>
               <a:defRPr sz="1200" b="0">
                 <a:solidFill>
                   <a:srgbClr val="BBD0DD"/>
@@ -15772,6 +16441,7 @@
               </a:defRPr>
             </a:lvl2pPr>
             <a:lvl3pPr algn="l">
+              <a:buNone/>
               <a:defRPr sz="1200" b="0">
                 <a:solidFill>
                   <a:srgbClr val="BBD0DD"/>
@@ -15782,6 +16452,7 @@
               </a:defRPr>
             </a:lvl3pPr>
             <a:lvl4pPr algn="l">
+              <a:buNone/>
               <a:defRPr sz="1200" b="0">
                 <a:solidFill>
                   <a:srgbClr val="BBD0DD"/>
@@ -15792,6 +16463,7 @@
               </a:defRPr>
             </a:lvl4pPr>
             <a:lvl5pPr algn="l">
+              <a:buNone/>
               <a:defRPr sz="1200" b="0">
                 <a:solidFill>
                   <a:srgbClr val="BBD0DD"/>
@@ -15802,6 +16474,7 @@
               </a:defRPr>
             </a:lvl5pPr>
             <a:lvl6pPr algn="l">
+              <a:buNone/>
               <a:defRPr sz="1200" b="0">
                 <a:solidFill>
                   <a:srgbClr val="BBD0DD"/>
@@ -15812,6 +16485,7 @@
               </a:defRPr>
             </a:lvl6pPr>
             <a:lvl7pPr algn="l">
+              <a:buNone/>
               <a:defRPr sz="1200" b="0">
                 <a:solidFill>
                   <a:srgbClr val="BBD0DD"/>
@@ -15822,6 +16496,7 @@
               </a:defRPr>
             </a:lvl7pPr>
             <a:lvl8pPr algn="l">
+              <a:buNone/>
               <a:defRPr sz="1200" b="0">
                 <a:solidFill>
                   <a:srgbClr val="BBD0DD"/>
@@ -15832,6 +16507,7 @@
               </a:defRPr>
             </a:lvl8pPr>
             <a:lvl9pPr algn="l">
+              <a:buNone/>
               <a:defRPr sz="1200" b="0">
                 <a:solidFill>
                   <a:srgbClr val="BBD0DD"/>
@@ -15844,6 +16520,7 @@
           </a:lstStyle>
           <a:p xmlns:a="http://schemas.openxmlformats.org/drawingml/2006/main">
             <a:pPr algn="l">
+              <a:buNone/>
               <a:defRPr sz="1200" b="0">
                 <a:solidFill>
                   <a:srgbClr val="BBD0DD"/>
@@ -15909,6 +16586,7 @@
               </a:defRPr>
             </a:defPPr>
             <a:lvl1pPr algn="r">
+              <a:buNone/>
               <a:defRPr sz="1200" b="1">
                 <a:solidFill>
                   <a:srgbClr val="FFFFFF"/>
@@ -15919,6 +16597,7 @@
               </a:defRPr>
             </a:lvl1pPr>
             <a:lvl2pPr algn="r">
+              <a:buNone/>
               <a:defRPr sz="1200" b="1">
                 <a:solidFill>
                   <a:srgbClr val="FFFFFF"/>
@@ -15929,6 +16608,7 @@
               </a:defRPr>
             </a:lvl2pPr>
             <a:lvl3pPr algn="r">
+              <a:buNone/>
               <a:defRPr sz="1200" b="1">
                 <a:solidFill>
                   <a:srgbClr val="FFFFFF"/>
@@ -15939,6 +16619,7 @@
               </a:defRPr>
             </a:lvl3pPr>
             <a:lvl4pPr algn="r">
+              <a:buNone/>
               <a:defRPr sz="1200" b="1">
                 <a:solidFill>
                   <a:srgbClr val="FFFFFF"/>
@@ -15949,6 +16630,7 @@
               </a:defRPr>
             </a:lvl4pPr>
             <a:lvl5pPr algn="r">
+              <a:buNone/>
               <a:defRPr sz="1200" b="1">
                 <a:solidFill>
                   <a:srgbClr val="FFFFFF"/>
@@ -15959,6 +16641,7 @@
               </a:defRPr>
             </a:lvl5pPr>
             <a:lvl6pPr algn="r">
+              <a:buNone/>
               <a:defRPr sz="1200" b="1">
                 <a:solidFill>
                   <a:srgbClr val="FFFFFF"/>
@@ -15969,6 +16652,7 @@
               </a:defRPr>
             </a:lvl6pPr>
             <a:lvl7pPr algn="r">
+              <a:buNone/>
               <a:defRPr sz="1200" b="1">
                 <a:solidFill>
                   <a:srgbClr val="FFFFFF"/>
@@ -15979,6 +16663,7 @@
               </a:defRPr>
             </a:lvl7pPr>
             <a:lvl8pPr algn="r">
+              <a:buNone/>
               <a:defRPr sz="1200" b="1">
                 <a:solidFill>
                   <a:srgbClr val="FFFFFF"/>
@@ -15989,6 +16674,7 @@
               </a:defRPr>
             </a:lvl8pPr>
             <a:lvl9pPr algn="r">
+              <a:buNone/>
               <a:defRPr sz="1200" b="1">
                 <a:solidFill>
                   <a:srgbClr val="FFFFFF"/>
@@ -16001,6 +16687,7 @@
           </a:lstStyle>
           <a:p xmlns:a="http://schemas.openxmlformats.org/drawingml/2006/main">
             <a:pPr algn="r">
+              <a:buNone/>
               <a:defRPr sz="1200" b="1">
                 <a:solidFill>
                   <a:srgbClr val="FFFFFF"/>
@@ -16095,6 +16782,7 @@
               </a:defRPr>
             </a:defPPr>
             <a:lvl1pPr algn="l">
+              <a:buNone/>
               <a:defRPr sz="1050" b="1">
                 <a:solidFill>
                   <a:srgbClr val="0877B9"/>
@@ -16105,6 +16793,7 @@
               </a:defRPr>
             </a:lvl1pPr>
             <a:lvl2pPr algn="l">
+              <a:buNone/>
               <a:defRPr sz="1050" b="1">
                 <a:solidFill>
                   <a:srgbClr val="0877B9"/>
@@ -16115,6 +16804,7 @@
               </a:defRPr>
             </a:lvl2pPr>
             <a:lvl3pPr algn="l">
+              <a:buNone/>
               <a:defRPr sz="1050" b="1">
                 <a:solidFill>
                   <a:srgbClr val="0877B9"/>
@@ -16125,6 +16815,7 @@
               </a:defRPr>
             </a:lvl3pPr>
             <a:lvl4pPr algn="l">
+              <a:buNone/>
               <a:defRPr sz="1050" b="1">
                 <a:solidFill>
                   <a:srgbClr val="0877B9"/>
@@ -16135,6 +16826,7 @@
               </a:defRPr>
             </a:lvl4pPr>
             <a:lvl5pPr algn="l">
+              <a:buNone/>
               <a:defRPr sz="1050" b="1">
                 <a:solidFill>
                   <a:srgbClr val="0877B9"/>
@@ -16145,6 +16837,7 @@
               </a:defRPr>
             </a:lvl5pPr>
             <a:lvl6pPr algn="l">
+              <a:buNone/>
               <a:defRPr sz="1050" b="1">
                 <a:solidFill>
                   <a:srgbClr val="0877B9"/>
@@ -16155,6 +16848,7 @@
               </a:defRPr>
             </a:lvl6pPr>
             <a:lvl7pPr algn="l">
+              <a:buNone/>
               <a:defRPr sz="1050" b="1">
                 <a:solidFill>
                   <a:srgbClr val="0877B9"/>
@@ -16165,6 +16859,7 @@
               </a:defRPr>
             </a:lvl7pPr>
             <a:lvl8pPr algn="l">
+              <a:buNone/>
               <a:defRPr sz="1050" b="1">
                 <a:solidFill>
                   <a:srgbClr val="0877B9"/>
@@ -16175,6 +16870,7 @@
               </a:defRPr>
             </a:lvl8pPr>
             <a:lvl9pPr algn="l">
+              <a:buNone/>
               <a:defRPr sz="1050" b="1">
                 <a:solidFill>
                   <a:srgbClr val="0877B9"/>
@@ -16187,6 +16883,7 @@
           </a:lstStyle>
           <a:p xmlns:a="http://schemas.openxmlformats.org/drawingml/2006/main">
             <a:pPr algn="l">
+              <a:buNone/>
               <a:defRPr sz="1050" b="1">
                 <a:solidFill>
                   <a:srgbClr val="0877B9"/>
@@ -16252,6 +16949,7 @@
               </a:defRPr>
             </a:defPPr>
             <a:lvl1pPr algn="l">
+              <a:buNone/>
               <a:defRPr sz="2850" b="1">
                 <a:solidFill>
                   <a:srgbClr val="183044"/>
@@ -16262,6 +16960,7 @@
               </a:defRPr>
             </a:lvl1pPr>
             <a:lvl2pPr algn="l">
+              <a:buNone/>
               <a:defRPr sz="2850" b="1">
                 <a:solidFill>
                   <a:srgbClr val="183044"/>
@@ -16272,6 +16971,7 @@
               </a:defRPr>
             </a:lvl2pPr>
             <a:lvl3pPr algn="l">
+              <a:buNone/>
               <a:defRPr sz="2850" b="1">
                 <a:solidFill>
                   <a:srgbClr val="183044"/>
@@ -16282,6 +16982,7 @@
               </a:defRPr>
             </a:lvl3pPr>
             <a:lvl4pPr algn="l">
+              <a:buNone/>
               <a:defRPr sz="2850" b="1">
                 <a:solidFill>
                   <a:srgbClr val="183044"/>
@@ -16292,6 +16993,7 @@
               </a:defRPr>
             </a:lvl4pPr>
             <a:lvl5pPr algn="l">
+              <a:buNone/>
               <a:defRPr sz="2850" b="1">
                 <a:solidFill>
                   <a:srgbClr val="183044"/>
@@ -16302,6 +17004,7 @@
               </a:defRPr>
             </a:lvl5pPr>
             <a:lvl6pPr algn="l">
+              <a:buNone/>
               <a:defRPr sz="2850" b="1">
                 <a:solidFill>
                   <a:srgbClr val="183044"/>
@@ -16312,6 +17015,7 @@
               </a:defRPr>
             </a:lvl6pPr>
             <a:lvl7pPr algn="l">
+              <a:buNone/>
               <a:defRPr sz="2850" b="1">
                 <a:solidFill>
                   <a:srgbClr val="183044"/>
@@ -16322,6 +17026,7 @@
               </a:defRPr>
             </a:lvl7pPr>
             <a:lvl8pPr algn="l">
+              <a:buNone/>
               <a:defRPr sz="2850" b="1">
                 <a:solidFill>
                   <a:srgbClr val="183044"/>
@@ -16332,6 +17037,7 @@
               </a:defRPr>
             </a:lvl8pPr>
             <a:lvl9pPr algn="l">
+              <a:buNone/>
               <a:defRPr sz="2850" b="1">
                 <a:solidFill>
                   <a:srgbClr val="183044"/>
@@ -16344,6 +17050,7 @@
           </a:lstStyle>
           <a:p xmlns:a="http://schemas.openxmlformats.org/drawingml/2006/main">
             <a:pPr algn="l">
+              <a:buNone/>
               <a:defRPr sz="2850" b="1">
                 <a:solidFill>
                   <a:srgbClr val="183044"/>
@@ -16440,6 +17147,7 @@
               </a:defRPr>
             </a:defPPr>
             <a:lvl1pPr algn="l">
+              <a:buNone/>
               <a:defRPr sz="900" b="1">
                 <a:solidFill>
                   <a:srgbClr val="5C6F7D"/>
@@ -16450,6 +17158,7 @@
               </a:defRPr>
             </a:lvl1pPr>
             <a:lvl2pPr algn="l">
+              <a:buNone/>
               <a:defRPr sz="900" b="1">
                 <a:solidFill>
                   <a:srgbClr val="5C6F7D"/>
@@ -16460,6 +17169,7 @@
               </a:defRPr>
             </a:lvl2pPr>
             <a:lvl3pPr algn="l">
+              <a:buNone/>
               <a:defRPr sz="900" b="1">
                 <a:solidFill>
                   <a:srgbClr val="5C6F7D"/>
@@ -16470,6 +17180,7 @@
               </a:defRPr>
             </a:lvl3pPr>
             <a:lvl4pPr algn="l">
+              <a:buNone/>
               <a:defRPr sz="900" b="1">
                 <a:solidFill>
                   <a:srgbClr val="5C6F7D"/>
@@ -16480,6 +17191,7 @@
               </a:defRPr>
             </a:lvl4pPr>
             <a:lvl5pPr algn="l">
+              <a:buNone/>
               <a:defRPr sz="900" b="1">
                 <a:solidFill>
                   <a:srgbClr val="5C6F7D"/>
@@ -16490,6 +17202,7 @@
               </a:defRPr>
             </a:lvl5pPr>
             <a:lvl6pPr algn="l">
+              <a:buNone/>
               <a:defRPr sz="900" b="1">
                 <a:solidFill>
                   <a:srgbClr val="5C6F7D"/>
@@ -16500,6 +17213,7 @@
               </a:defRPr>
             </a:lvl6pPr>
             <a:lvl7pPr algn="l">
+              <a:buNone/>
               <a:defRPr sz="900" b="1">
                 <a:solidFill>
                   <a:srgbClr val="5C6F7D"/>
@@ -16510,6 +17224,7 @@
               </a:defRPr>
             </a:lvl7pPr>
             <a:lvl8pPr algn="l">
+              <a:buNone/>
               <a:defRPr sz="900" b="1">
                 <a:solidFill>
                   <a:srgbClr val="5C6F7D"/>
@@ -16520,6 +17235,7 @@
               </a:defRPr>
             </a:lvl8pPr>
             <a:lvl9pPr algn="l">
+              <a:buNone/>
               <a:defRPr sz="900" b="1">
                 <a:solidFill>
                   <a:srgbClr val="5C6F7D"/>
@@ -16532,6 +17248,7 @@
           </a:lstStyle>
           <a:p xmlns:a="http://schemas.openxmlformats.org/drawingml/2006/main">
             <a:pPr algn="l">
+              <a:buNone/>
               <a:defRPr sz="900" b="1">
                 <a:solidFill>
                   <a:srgbClr val="5C6F7D"/>
@@ -16597,6 +17314,7 @@
               </a:defRPr>
             </a:defPPr>
             <a:lvl1pPr algn="r">
+              <a:buNone/>
               <a:defRPr sz="900" b="0">
                 <a:solidFill>
                   <a:srgbClr val="5C6F7D"/>
@@ -16607,6 +17325,7 @@
               </a:defRPr>
             </a:lvl1pPr>
             <a:lvl2pPr algn="r">
+              <a:buNone/>
               <a:defRPr sz="900" b="0">
                 <a:solidFill>
                   <a:srgbClr val="5C6F7D"/>
@@ -16617,6 +17336,7 @@
               </a:defRPr>
             </a:lvl2pPr>
             <a:lvl3pPr algn="r">
+              <a:buNone/>
               <a:defRPr sz="900" b="0">
                 <a:solidFill>
                   <a:srgbClr val="5C6F7D"/>
@@ -16627,6 +17347,7 @@
               </a:defRPr>
             </a:lvl3pPr>
             <a:lvl4pPr algn="r">
+              <a:buNone/>
               <a:defRPr sz="900" b="0">
                 <a:solidFill>
                   <a:srgbClr val="5C6F7D"/>
@@ -16637,6 +17358,7 @@
               </a:defRPr>
             </a:lvl4pPr>
             <a:lvl5pPr algn="r">
+              <a:buNone/>
               <a:defRPr sz="900" b="0">
                 <a:solidFill>
                   <a:srgbClr val="5C6F7D"/>
@@ -16647,6 +17369,7 @@
               </a:defRPr>
             </a:lvl5pPr>
             <a:lvl6pPr algn="r">
+              <a:buNone/>
               <a:defRPr sz="900" b="0">
                 <a:solidFill>
                   <a:srgbClr val="5C6F7D"/>
@@ -16657,6 +17380,7 @@
               </a:defRPr>
             </a:lvl6pPr>
             <a:lvl7pPr algn="r">
+              <a:buNone/>
               <a:defRPr sz="900" b="0">
                 <a:solidFill>
                   <a:srgbClr val="5C6F7D"/>
@@ -16667,6 +17391,7 @@
               </a:defRPr>
             </a:lvl7pPr>
             <a:lvl8pPr algn="r">
+              <a:buNone/>
               <a:defRPr sz="900" b="0">
                 <a:solidFill>
                   <a:srgbClr val="5C6F7D"/>
@@ -16677,6 +17402,7 @@
               </a:defRPr>
             </a:lvl8pPr>
             <a:lvl9pPr algn="r">
+              <a:buNone/>
               <a:defRPr sz="900" b="0">
                 <a:solidFill>
                   <a:srgbClr val="5C6F7D"/>
@@ -16689,6 +17415,7 @@
           </a:lstStyle>
           <a:p xmlns:a="http://schemas.openxmlformats.org/drawingml/2006/main">
             <a:pPr algn="r">
+              <a:buNone/>
               <a:defRPr sz="900" b="0">
                 <a:solidFill>
                   <a:srgbClr val="5C6F7D"/>
@@ -16822,6 +17549,7 @@
               </a:defRPr>
             </a:defPPr>
             <a:lvl1pPr algn="l">
+              <a:buNone/>
               <a:defRPr sz="1050" b="1">
                 <a:solidFill>
                   <a:srgbClr val="0877B9"/>
@@ -16832,6 +17560,7 @@
               </a:defRPr>
             </a:lvl1pPr>
             <a:lvl2pPr algn="l">
+              <a:buNone/>
               <a:defRPr sz="1050" b="1">
                 <a:solidFill>
                   <a:srgbClr val="0877B9"/>
@@ -16842,6 +17571,7 @@
               </a:defRPr>
             </a:lvl2pPr>
             <a:lvl3pPr algn="l">
+              <a:buNone/>
               <a:defRPr sz="1050" b="1">
                 <a:solidFill>
                   <a:srgbClr val="0877B9"/>
@@ -16852,6 +17582,7 @@
               </a:defRPr>
             </a:lvl3pPr>
             <a:lvl4pPr algn="l">
+              <a:buNone/>
               <a:defRPr sz="1050" b="1">
                 <a:solidFill>
                   <a:srgbClr val="0877B9"/>
@@ -16862,6 +17593,7 @@
               </a:defRPr>
             </a:lvl4pPr>
             <a:lvl5pPr algn="l">
+              <a:buNone/>
               <a:defRPr sz="1050" b="1">
                 <a:solidFill>
                   <a:srgbClr val="0877B9"/>
@@ -16872,6 +17604,7 @@
               </a:defRPr>
             </a:lvl5pPr>
             <a:lvl6pPr algn="l">
+              <a:buNone/>
               <a:defRPr sz="1050" b="1">
                 <a:solidFill>
                   <a:srgbClr val="0877B9"/>
@@ -16882,6 +17615,7 @@
               </a:defRPr>
             </a:lvl6pPr>
             <a:lvl7pPr algn="l">
+              <a:buNone/>
               <a:defRPr sz="1050" b="1">
                 <a:solidFill>
                   <a:srgbClr val="0877B9"/>
@@ -16892,6 +17626,7 @@
               </a:defRPr>
             </a:lvl7pPr>
             <a:lvl8pPr algn="l">
+              <a:buNone/>
               <a:defRPr sz="1050" b="1">
                 <a:solidFill>
                   <a:srgbClr val="0877B9"/>
@@ -16902,6 +17637,7 @@
               </a:defRPr>
             </a:lvl8pPr>
             <a:lvl9pPr algn="l">
+              <a:buNone/>
               <a:defRPr sz="1050" b="1">
                 <a:solidFill>
                   <a:srgbClr val="0877B9"/>
@@ -16914,6 +17650,7 @@
           </a:lstStyle>
           <a:p xmlns:a="http://schemas.openxmlformats.org/drawingml/2006/main">
             <a:pPr algn="l">
+              <a:buNone/>
               <a:defRPr sz="1050" b="1">
                 <a:solidFill>
                   <a:srgbClr val="0877B9"/>
@@ -17012,6 +17749,7 @@
               </a:defRPr>
             </a:defPPr>
             <a:lvl1pPr algn="l">
+              <a:buNone/>
               <a:defRPr sz="1275" b="0">
                 <a:solidFill>
                   <a:srgbClr val="203040"/>
@@ -17022,6 +17760,7 @@
               </a:defRPr>
             </a:lvl1pPr>
             <a:lvl2pPr algn="l">
+              <a:buNone/>
               <a:defRPr sz="1275" b="0">
                 <a:solidFill>
                   <a:srgbClr val="203040"/>
@@ -17032,6 +17771,7 @@
               </a:defRPr>
             </a:lvl2pPr>
             <a:lvl3pPr algn="l">
+              <a:buNone/>
               <a:defRPr sz="1275" b="0">
                 <a:solidFill>
                   <a:srgbClr val="203040"/>
@@ -17042,6 +17782,7 @@
               </a:defRPr>
             </a:lvl3pPr>
             <a:lvl4pPr algn="l">
+              <a:buNone/>
               <a:defRPr sz="1275" b="0">
                 <a:solidFill>
                   <a:srgbClr val="203040"/>
@@ -17052,6 +17793,7 @@
               </a:defRPr>
             </a:lvl4pPr>
             <a:lvl5pPr algn="l">
+              <a:buNone/>
               <a:defRPr sz="1275" b="0">
                 <a:solidFill>
                   <a:srgbClr val="203040"/>
@@ -17062,6 +17804,7 @@
               </a:defRPr>
             </a:lvl5pPr>
             <a:lvl6pPr algn="l">
+              <a:buNone/>
               <a:defRPr sz="1275" b="0">
                 <a:solidFill>
                   <a:srgbClr val="203040"/>
@@ -17072,6 +17815,7 @@
               </a:defRPr>
             </a:lvl6pPr>
             <a:lvl7pPr algn="l">
+              <a:buNone/>
               <a:defRPr sz="1275" b="0">
                 <a:solidFill>
                   <a:srgbClr val="203040"/>
@@ -17082,6 +17826,7 @@
               </a:defRPr>
             </a:lvl7pPr>
             <a:lvl8pPr algn="l">
+              <a:buNone/>
               <a:defRPr sz="1275" b="0">
                 <a:solidFill>
                   <a:srgbClr val="203040"/>
@@ -17092,6 +17837,7 @@
               </a:defRPr>
             </a:lvl8pPr>
             <a:lvl9pPr algn="l">
+              <a:buNone/>
               <a:defRPr sz="1275" b="0">
                 <a:solidFill>
                   <a:srgbClr val="203040"/>
@@ -17104,6 +17850,7 @@
           </a:lstStyle>
           <a:p xmlns:a="http://schemas.openxmlformats.org/drawingml/2006/main">
             <a:pPr algn="l">
+              <a:buNone/>
               <a:defRPr sz="1275" b="0">
                 <a:solidFill>
                   <a:srgbClr val="203040"/>
@@ -17202,6 +17949,7 @@
               </a:defRPr>
             </a:defPPr>
             <a:lvl1pPr algn="l">
+              <a:buNone/>
               <a:defRPr sz="1275" b="0">
                 <a:solidFill>
                   <a:srgbClr val="203040"/>
@@ -17212,6 +17960,7 @@
               </a:defRPr>
             </a:lvl1pPr>
             <a:lvl2pPr algn="l">
+              <a:buNone/>
               <a:defRPr sz="1275" b="0">
                 <a:solidFill>
                   <a:srgbClr val="203040"/>
@@ -17222,6 +17971,7 @@
               </a:defRPr>
             </a:lvl2pPr>
             <a:lvl3pPr algn="l">
+              <a:buNone/>
               <a:defRPr sz="1275" b="0">
                 <a:solidFill>
                   <a:srgbClr val="203040"/>
@@ -17232,6 +17982,7 @@
               </a:defRPr>
             </a:lvl3pPr>
             <a:lvl4pPr algn="l">
+              <a:buNone/>
               <a:defRPr sz="1275" b="0">
                 <a:solidFill>
                   <a:srgbClr val="203040"/>
@@ -17242,6 +17993,7 @@
               </a:defRPr>
             </a:lvl4pPr>
             <a:lvl5pPr algn="l">
+              <a:buNone/>
               <a:defRPr sz="1275" b="0">
                 <a:solidFill>
                   <a:srgbClr val="203040"/>
@@ -17252,6 +18004,7 @@
               </a:defRPr>
             </a:lvl5pPr>
             <a:lvl6pPr algn="l">
+              <a:buNone/>
               <a:defRPr sz="1275" b="0">
                 <a:solidFill>
                   <a:srgbClr val="203040"/>
@@ -17262,6 +18015,7 @@
               </a:defRPr>
             </a:lvl6pPr>
             <a:lvl7pPr algn="l">
+              <a:buNone/>
               <a:defRPr sz="1275" b="0">
                 <a:solidFill>
                   <a:srgbClr val="203040"/>
@@ -17272,6 +18026,7 @@
               </a:defRPr>
             </a:lvl7pPr>
             <a:lvl8pPr algn="l">
+              <a:buNone/>
               <a:defRPr sz="1275" b="0">
                 <a:solidFill>
                   <a:srgbClr val="203040"/>
@@ -17282,6 +18037,7 @@
               </a:defRPr>
             </a:lvl8pPr>
             <a:lvl9pPr algn="l">
+              <a:buNone/>
               <a:defRPr sz="1275" b="0">
                 <a:solidFill>
                   <a:srgbClr val="203040"/>
@@ -17294,6 +18050,7 @@
           </a:lstStyle>
           <a:p xmlns:a="http://schemas.openxmlformats.org/drawingml/2006/main">
             <a:pPr algn="l">
+              <a:buNone/>
               <a:defRPr sz="1275" b="0">
                 <a:solidFill>
                   <a:srgbClr val="203040"/>
@@ -17392,6 +18149,7 @@
               </a:defRPr>
             </a:defPPr>
             <a:lvl1pPr algn="l">
+              <a:buNone/>
               <a:defRPr sz="1275" b="0">
                 <a:solidFill>
                   <a:srgbClr val="203040"/>
@@ -17402,6 +18160,7 @@
               </a:defRPr>
             </a:lvl1pPr>
             <a:lvl2pPr algn="l">
+              <a:buNone/>
               <a:defRPr sz="1275" b="0">
                 <a:solidFill>
                   <a:srgbClr val="203040"/>
@@ -17412,6 +18171,7 @@
               </a:defRPr>
             </a:lvl2pPr>
             <a:lvl3pPr algn="l">
+              <a:buNone/>
               <a:defRPr sz="1275" b="0">
                 <a:solidFill>
                   <a:srgbClr val="203040"/>
@@ -17422,6 +18182,7 @@
               </a:defRPr>
             </a:lvl3pPr>
             <a:lvl4pPr algn="l">
+              <a:buNone/>
               <a:defRPr sz="1275" b="0">
                 <a:solidFill>
                   <a:srgbClr val="203040"/>
@@ -17432,6 +18193,7 @@
               </a:defRPr>
             </a:lvl4pPr>
             <a:lvl5pPr algn="l">
+              <a:buNone/>
               <a:defRPr sz="1275" b="0">
                 <a:solidFill>
                   <a:srgbClr val="203040"/>
@@ -17442,6 +18204,7 @@
               </a:defRPr>
             </a:lvl5pPr>
             <a:lvl6pPr algn="l">
+              <a:buNone/>
               <a:defRPr sz="1275" b="0">
                 <a:solidFill>
                   <a:srgbClr val="203040"/>
@@ -17452,6 +18215,7 @@
               </a:defRPr>
             </a:lvl6pPr>
             <a:lvl7pPr algn="l">
+              <a:buNone/>
               <a:defRPr sz="1275" b="0">
                 <a:solidFill>
                   <a:srgbClr val="203040"/>
@@ -17462,6 +18226,7 @@
               </a:defRPr>
             </a:lvl7pPr>
             <a:lvl8pPr algn="l">
+              <a:buNone/>
               <a:defRPr sz="1275" b="0">
                 <a:solidFill>
                   <a:srgbClr val="203040"/>
@@ -17472,6 +18237,7 @@
               </a:defRPr>
             </a:lvl8pPr>
             <a:lvl9pPr algn="l">
+              <a:buNone/>
               <a:defRPr sz="1275" b="0">
                 <a:solidFill>
                   <a:srgbClr val="203040"/>
@@ -17484,6 +18250,7 @@
           </a:lstStyle>
           <a:p xmlns:a="http://schemas.openxmlformats.org/drawingml/2006/main">
             <a:pPr algn="l">
+              <a:buNone/>
               <a:defRPr sz="1275" b="0">
                 <a:solidFill>
                   <a:srgbClr val="203040"/>
@@ -17582,6 +18349,7 @@
               </a:defRPr>
             </a:defPPr>
             <a:lvl1pPr algn="l">
+              <a:buNone/>
               <a:defRPr sz="1275" b="0">
                 <a:solidFill>
                   <a:srgbClr val="203040"/>
@@ -17592,6 +18360,7 @@
               </a:defRPr>
             </a:lvl1pPr>
             <a:lvl2pPr algn="l">
+              <a:buNone/>
               <a:defRPr sz="1275" b="0">
                 <a:solidFill>
                   <a:srgbClr val="203040"/>
@@ -17602,6 +18371,7 @@
               </a:defRPr>
             </a:lvl2pPr>
             <a:lvl3pPr algn="l">
+              <a:buNone/>
               <a:defRPr sz="1275" b="0">
                 <a:solidFill>
                   <a:srgbClr val="203040"/>
@@ -17612,6 +18382,7 @@
               </a:defRPr>
             </a:lvl3pPr>
             <a:lvl4pPr algn="l">
+              <a:buNone/>
               <a:defRPr sz="1275" b="0">
                 <a:solidFill>
                   <a:srgbClr val="203040"/>
@@ -17622,6 +18393,7 @@
               </a:defRPr>
             </a:lvl4pPr>
             <a:lvl5pPr algn="l">
+              <a:buNone/>
               <a:defRPr sz="1275" b="0">
                 <a:solidFill>
                   <a:srgbClr val="203040"/>
@@ -17632,6 +18404,7 @@
               </a:defRPr>
             </a:lvl5pPr>
             <a:lvl6pPr algn="l">
+              <a:buNone/>
               <a:defRPr sz="1275" b="0">
                 <a:solidFill>
                   <a:srgbClr val="203040"/>
@@ -17642,6 +18415,7 @@
               </a:defRPr>
             </a:lvl6pPr>
             <a:lvl7pPr algn="l">
+              <a:buNone/>
               <a:defRPr sz="1275" b="0">
                 <a:solidFill>
                   <a:srgbClr val="203040"/>
@@ -17652,6 +18426,7 @@
               </a:defRPr>
             </a:lvl7pPr>
             <a:lvl8pPr algn="l">
+              <a:buNone/>
               <a:defRPr sz="1275" b="0">
                 <a:solidFill>
                   <a:srgbClr val="203040"/>
@@ -17662,6 +18437,7 @@
               </a:defRPr>
             </a:lvl8pPr>
             <a:lvl9pPr algn="l">
+              <a:buNone/>
               <a:defRPr sz="1275" b="0">
                 <a:solidFill>
                   <a:srgbClr val="203040"/>
@@ -17674,6 +18450,7 @@
           </a:lstStyle>
           <a:p xmlns:a="http://schemas.openxmlformats.org/drawingml/2006/main">
             <a:pPr algn="l">
+              <a:buNone/>
               <a:defRPr sz="1275" b="0">
                 <a:solidFill>
                   <a:srgbClr val="203040"/>
@@ -17692,7 +18469,7 @@
                 <a:ea typeface="Arial"/>
                 <a:cs typeface="Arial"/>
               </a:rPr>
-              <a:t>Integrity-aware, course-grounded tutor module</a:t>
+              <a:t>Tutor snippets, demo sign-ins, and Bedrock option added</a:t>
             </a:r>
           </a:p>
         </p:txBody>
@@ -17739,6 +18516,7 @@
               </a:defRPr>
             </a:defPPr>
             <a:lvl1pPr algn="l">
+              <a:buNone/>
               <a:defRPr sz="1050" b="1">
                 <a:solidFill>
                   <a:srgbClr val="0877B9"/>
@@ -17749,6 +18527,7 @@
               </a:defRPr>
             </a:lvl1pPr>
             <a:lvl2pPr algn="l">
+              <a:buNone/>
               <a:defRPr sz="1050" b="1">
                 <a:solidFill>
                   <a:srgbClr val="0877B9"/>
@@ -17759,6 +18538,7 @@
               </a:defRPr>
             </a:lvl2pPr>
             <a:lvl3pPr algn="l">
+              <a:buNone/>
               <a:defRPr sz="1050" b="1">
                 <a:solidFill>
                   <a:srgbClr val="0877B9"/>
@@ -17769,6 +18549,7 @@
               </a:defRPr>
             </a:lvl3pPr>
             <a:lvl4pPr algn="l">
+              <a:buNone/>
               <a:defRPr sz="1050" b="1">
                 <a:solidFill>
                   <a:srgbClr val="0877B9"/>
@@ -17779,6 +18560,7 @@
               </a:defRPr>
             </a:lvl4pPr>
             <a:lvl5pPr algn="l">
+              <a:buNone/>
               <a:defRPr sz="1050" b="1">
                 <a:solidFill>
                   <a:srgbClr val="0877B9"/>
@@ -17789,6 +18571,7 @@
               </a:defRPr>
             </a:lvl5pPr>
             <a:lvl6pPr algn="l">
+              <a:buNone/>
               <a:defRPr sz="1050" b="1">
                 <a:solidFill>
                   <a:srgbClr val="0877B9"/>
@@ -17799,6 +18582,7 @@
               </a:defRPr>
             </a:lvl6pPr>
             <a:lvl7pPr algn="l">
+              <a:buNone/>
               <a:defRPr sz="1050" b="1">
                 <a:solidFill>
                   <a:srgbClr val="0877B9"/>
@@ -17809,6 +18593,7 @@
               </a:defRPr>
             </a:lvl7pPr>
             <a:lvl8pPr algn="l">
+              <a:buNone/>
               <a:defRPr sz="1050" b="1">
                 <a:solidFill>
                   <a:srgbClr val="0877B9"/>
@@ -17819,6 +18604,7 @@
               </a:defRPr>
             </a:lvl8pPr>
             <a:lvl9pPr algn="l">
+              <a:buNone/>
               <a:defRPr sz="1050" b="1">
                 <a:solidFill>
                   <a:srgbClr val="0877B9"/>
@@ -17831,6 +18617,7 @@
           </a:lstStyle>
           <a:p xmlns:a="http://schemas.openxmlformats.org/drawingml/2006/main">
             <a:pPr algn="l">
+              <a:buNone/>
               <a:defRPr sz="1050" b="1">
                 <a:solidFill>
                   <a:srgbClr val="0877B9"/>
@@ -17896,6 +18683,7 @@
               </a:defRPr>
             </a:defPPr>
             <a:lvl1pPr algn="l">
+              <a:buNone/>
               <a:defRPr sz="1725" b="1">
                 <a:solidFill>
                   <a:srgbClr val="183044"/>
@@ -17906,6 +18694,7 @@
               </a:defRPr>
             </a:lvl1pPr>
             <a:lvl2pPr algn="l">
+              <a:buNone/>
               <a:defRPr sz="1725" b="1">
                 <a:solidFill>
                   <a:srgbClr val="183044"/>
@@ -17916,6 +18705,7 @@
               </a:defRPr>
             </a:lvl2pPr>
             <a:lvl3pPr algn="l">
+              <a:buNone/>
               <a:defRPr sz="1725" b="1">
                 <a:solidFill>
                   <a:srgbClr val="183044"/>
@@ -17926,6 +18716,7 @@
               </a:defRPr>
             </a:lvl3pPr>
             <a:lvl4pPr algn="l">
+              <a:buNone/>
               <a:defRPr sz="1725" b="1">
                 <a:solidFill>
                   <a:srgbClr val="183044"/>
@@ -17936,6 +18727,7 @@
               </a:defRPr>
             </a:lvl4pPr>
             <a:lvl5pPr algn="l">
+              <a:buNone/>
               <a:defRPr sz="1725" b="1">
                 <a:solidFill>
                   <a:srgbClr val="183044"/>
@@ -17946,6 +18738,7 @@
               </a:defRPr>
             </a:lvl5pPr>
             <a:lvl6pPr algn="l">
+              <a:buNone/>
               <a:defRPr sz="1725" b="1">
                 <a:solidFill>
                   <a:srgbClr val="183044"/>
@@ -17956,6 +18749,7 @@
               </a:defRPr>
             </a:lvl6pPr>
             <a:lvl7pPr algn="l">
+              <a:buNone/>
               <a:defRPr sz="1725" b="1">
                 <a:solidFill>
                   <a:srgbClr val="183044"/>
@@ -17966,6 +18760,7 @@
               </a:defRPr>
             </a:lvl7pPr>
             <a:lvl8pPr algn="l">
+              <a:buNone/>
               <a:defRPr sz="1725" b="1">
                 <a:solidFill>
                   <a:srgbClr val="183044"/>
@@ -17976,6 +18771,7 @@
               </a:defRPr>
             </a:lvl8pPr>
             <a:lvl9pPr algn="l">
+              <a:buNone/>
               <a:defRPr sz="1725" b="1">
                 <a:solidFill>
                   <a:srgbClr val="183044"/>
@@ -17988,6 +18784,7 @@
           </a:lstStyle>
           <a:p xmlns:a="http://schemas.openxmlformats.org/drawingml/2006/main">
             <a:pPr algn="l">
+              <a:buNone/>
               <a:defRPr sz="1725" b="1">
                 <a:solidFill>
                   <a:srgbClr val="183044"/>
@@ -18053,6 +18850,7 @@
               </a:defRPr>
             </a:defPPr>
             <a:lvl1pPr algn="l">
+              <a:buNone/>
               <a:defRPr sz="1275" b="0">
                 <a:solidFill>
                   <a:srgbClr val="5C6F7D"/>
@@ -18063,6 +18861,7 @@
               </a:defRPr>
             </a:lvl1pPr>
             <a:lvl2pPr algn="l">
+              <a:buNone/>
               <a:defRPr sz="1275" b="0">
                 <a:solidFill>
                   <a:srgbClr val="5C6F7D"/>
@@ -18073,6 +18872,7 @@
               </a:defRPr>
             </a:lvl2pPr>
             <a:lvl3pPr algn="l">
+              <a:buNone/>
               <a:defRPr sz="1275" b="0">
                 <a:solidFill>
                   <a:srgbClr val="5C6F7D"/>
@@ -18083,6 +18883,7 @@
               </a:defRPr>
             </a:lvl3pPr>
             <a:lvl4pPr algn="l">
+              <a:buNone/>
               <a:defRPr sz="1275" b="0">
                 <a:solidFill>
                   <a:srgbClr val="5C6F7D"/>
@@ -18093,6 +18894,7 @@
               </a:defRPr>
             </a:lvl4pPr>
             <a:lvl5pPr algn="l">
+              <a:buNone/>
               <a:defRPr sz="1275" b="0">
                 <a:solidFill>
                   <a:srgbClr val="5C6F7D"/>
@@ -18103,6 +18905,7 @@
               </a:defRPr>
             </a:lvl5pPr>
             <a:lvl6pPr algn="l">
+              <a:buNone/>
               <a:defRPr sz="1275" b="0">
                 <a:solidFill>
                   <a:srgbClr val="5C6F7D"/>
@@ -18113,6 +18916,7 @@
               </a:defRPr>
             </a:lvl6pPr>
             <a:lvl7pPr algn="l">
+              <a:buNone/>
               <a:defRPr sz="1275" b="0">
                 <a:solidFill>
                   <a:srgbClr val="5C6F7D"/>
@@ -18123,6 +18927,7 @@
               </a:defRPr>
             </a:lvl7pPr>
             <a:lvl8pPr algn="l">
+              <a:buNone/>
               <a:defRPr sz="1275" b="0">
                 <a:solidFill>
                   <a:srgbClr val="5C6F7D"/>
@@ -18133,6 +18938,7 @@
               </a:defRPr>
             </a:lvl8pPr>
             <a:lvl9pPr algn="l">
+              <a:buNone/>
               <a:defRPr sz="1275" b="0">
                 <a:solidFill>
                   <a:srgbClr val="5C6F7D"/>
@@ -18145,6 +18951,7 @@
           </a:lstStyle>
           <a:p xmlns:a="http://schemas.openxmlformats.org/drawingml/2006/main">
             <a:pPr algn="l">
+              <a:buNone/>
               <a:defRPr sz="1275" b="0">
                 <a:solidFill>
                   <a:srgbClr val="5C6F7D"/>
@@ -18243,6 +19050,7 @@
               </a:defRPr>
             </a:defPPr>
             <a:lvl1pPr algn="ctr">
+              <a:buNone/>
               <a:defRPr sz="1275" b="1">
                 <a:solidFill>
                   <a:srgbClr val="FFFFFF"/>
@@ -18253,6 +19061,7 @@
               </a:defRPr>
             </a:lvl1pPr>
             <a:lvl2pPr algn="ctr">
+              <a:buNone/>
               <a:defRPr sz="1275" b="1">
                 <a:solidFill>
                   <a:srgbClr val="FFFFFF"/>
@@ -18263,6 +19072,7 @@
               </a:defRPr>
             </a:lvl2pPr>
             <a:lvl3pPr algn="ctr">
+              <a:buNone/>
               <a:defRPr sz="1275" b="1">
                 <a:solidFill>
                   <a:srgbClr val="FFFFFF"/>
@@ -18273,6 +19083,7 @@
               </a:defRPr>
             </a:lvl3pPr>
             <a:lvl4pPr algn="ctr">
+              <a:buNone/>
               <a:defRPr sz="1275" b="1">
                 <a:solidFill>
                   <a:srgbClr val="FFFFFF"/>
@@ -18283,6 +19094,7 @@
               </a:defRPr>
             </a:lvl4pPr>
             <a:lvl5pPr algn="ctr">
+              <a:buNone/>
               <a:defRPr sz="1275" b="1">
                 <a:solidFill>
                   <a:srgbClr val="FFFFFF"/>
@@ -18293,6 +19105,7 @@
               </a:defRPr>
             </a:lvl5pPr>
             <a:lvl6pPr algn="ctr">
+              <a:buNone/>
               <a:defRPr sz="1275" b="1">
                 <a:solidFill>
                   <a:srgbClr val="FFFFFF"/>
@@ -18303,6 +19116,7 @@
               </a:defRPr>
             </a:lvl6pPr>
             <a:lvl7pPr algn="ctr">
+              <a:buNone/>
               <a:defRPr sz="1275" b="1">
                 <a:solidFill>
                   <a:srgbClr val="FFFFFF"/>
@@ -18313,6 +19127,7 @@
               </a:defRPr>
             </a:lvl7pPr>
             <a:lvl8pPr algn="ctr">
+              <a:buNone/>
               <a:defRPr sz="1275" b="1">
                 <a:solidFill>
                   <a:srgbClr val="FFFFFF"/>
@@ -18323,6 +19138,7 @@
               </a:defRPr>
             </a:lvl8pPr>
             <a:lvl9pPr algn="ctr">
+              <a:buNone/>
               <a:defRPr sz="1275" b="1">
                 <a:solidFill>
                   <a:srgbClr val="FFFFFF"/>
@@ -18335,6 +19151,7 @@
           </a:lstStyle>
           <a:p xmlns:a="http://schemas.openxmlformats.org/drawingml/2006/main">
             <a:pPr algn="ctr">
+              <a:buNone/>
               <a:defRPr sz="1275" b="1">
                 <a:solidFill>
                   <a:srgbClr val="FFFFFF"/>

--- a/powerpoints.pptx
+++ b/powerpoints.pptx
@@ -2,18 +2,18 @@
 <file path=ppt/presentation.xml><?xml version="1.0" encoding="utf-8"?>
 <p:presentation xmlns:p="http://schemas.openxmlformats.org/presentationml/2006/main">
   <p:sldMasterIdLst>
-    <p:sldMasterId xmlns:r="http://schemas.openxmlformats.org/officeDocument/2006/relationships" id="2147483648" r:id="R16fedacea6d9427b"/>
+    <p:sldMasterId xmlns:r="http://schemas.openxmlformats.org/officeDocument/2006/relationships" id="2147483648" r:id="R18a6c4b2995a42a0"/>
   </p:sldMasterIdLst>
   <p:notesMasterIdLst>
-    <p:notesMasterId xmlns:r="http://schemas.openxmlformats.org/officeDocument/2006/relationships" r:id="R81a89c9854c342af"/>
+    <p:notesMasterId xmlns:r="http://schemas.openxmlformats.org/officeDocument/2006/relationships" r:id="Ra48a7cffc24e47c0"/>
   </p:notesMasterIdLst>
   <p:sldIdLst>
-    <p:sldId xmlns:r="http://schemas.openxmlformats.org/officeDocument/2006/relationships" id="256" r:id="Re4c7481fc1984d9d"/>
-    <p:sldId xmlns:r="http://schemas.openxmlformats.org/officeDocument/2006/relationships" id="257" r:id="R449e8f28a3044616"/>
-    <p:sldId xmlns:r="http://schemas.openxmlformats.org/officeDocument/2006/relationships" id="258" r:id="R156ed488f16045c6"/>
-    <p:sldId xmlns:r="http://schemas.openxmlformats.org/officeDocument/2006/relationships" id="259" r:id="Rea8aed404eb94821"/>
-    <p:sldId xmlns:r="http://schemas.openxmlformats.org/officeDocument/2006/relationships" id="260" r:id="Ra7715471fedb4ab3"/>
-    <p:sldId xmlns:r="http://schemas.openxmlformats.org/officeDocument/2006/relationships" id="261" r:id="Reee50bf053b54c30"/>
+    <p:sldId xmlns:r="http://schemas.openxmlformats.org/officeDocument/2006/relationships" id="256" r:id="R3f1361f91aff4a22"/>
+    <p:sldId xmlns:r="http://schemas.openxmlformats.org/officeDocument/2006/relationships" id="257" r:id="Rb1c337611afa4930"/>
+    <p:sldId xmlns:r="http://schemas.openxmlformats.org/officeDocument/2006/relationships" id="258" r:id="R858e3ca0f2be4ae1"/>
+    <p:sldId xmlns:r="http://schemas.openxmlformats.org/officeDocument/2006/relationships" id="259" r:id="R4fa45ad512974c7f"/>
+    <p:sldId xmlns:r="http://schemas.openxmlformats.org/officeDocument/2006/relationships" id="260" r:id="Rc60d33caa8614055"/>
+    <p:sldId xmlns:r="http://schemas.openxmlformats.org/officeDocument/2006/relationships" id="261" r:id="R510ace87129843ad"/>
   </p:sldIdLst>
   <p:sldSz cx="12192000" cy="6858000"/>
   <p:notesSz cx="6858000" cy="9144000"/>
@@ -587,7 +587,7 @@
           <a:lstStyle xmlns:a="http://schemas.openxmlformats.org/drawingml/2006/main"/>
           <a:p xmlns:a="http://schemas.openxmlformats.org/drawingml/2006/main">
             <a:r>
-              <a:t>0:50-1:20. The learner can inspect a completed attempt and ask for course-grounded hints. Tutor responses can now display lecture and notes snippets, and the server verifies that each snippet appears in the retrieved material. Assessment mode and output checks continue to govern the response. Instructors have roster and grade views, and evidence references make records traceable. Source: carmen-study-guide/mock-canvas/tutor/snippets.py, tutor/service.py, tutor/policy.py, tutor/verifier.py, and INGEST_CONTRACT.md.</a:t>
+              <a:t>0:50-1:20. The learner can inspect a completed attempt and use course-grounded hints. The tutor mode is set by code from assessment state, then verifies allowed moves and citations. Instructors have roster and grade views, and evidence references make assessment details traceable. The student and instructor views have different access boundaries. Source: carmen-study-guide/mock-canvas/ui.py, tutor/policy.py, tutor/verifier.py, and INGEST_CONTRACT.md.</a:t>
             </a:r>
           </a:p>
         </p:txBody>
@@ -657,7 +657,7 @@
           <a:lstStyle xmlns:a="http://schemas.openxmlformats.org/drawingml/2006/main"/>
           <a:p xmlns:a="http://schemas.openxmlformats.org/drawingml/2006/main">
             <a:r>
-              <a:t>1:20-1:50. The local walkthrough runs on Python FastAPI with SQLite-backed synthetic data. Shared analytics can use Supabase. The tutor now has a Bedrock route that uses Amazon Nova and AWS credits; the Claude API remains another provider option. Assessment-mode and quiz-protection checks stay in code across the provider choice. Demo account passwords and short-lived AWS credentials stay private in local environment settings. Source: carmen-study-guide/mock-canvas/tutor/llm_bedrock.py, tutor/demo_accounts.py, README.md, and INGEST_CONTRACT.md.</a:t>
+              <a:t>1:20-1:50. The local walkthrough runs on the Python FastAPI app with SQLite-backed synthetic data. The project also has server-side Supabase integration for shared analytics data. Browser reads use the logged-in session, service credentials stay on the server, and the tutor calls retrieval as the student. Answer keys are instructor-only. The local demo tokens are fixtures, not production authentication. Source: carmen-study-guide/README.md and INGEST_CONTRACT.md.</a:t>
             </a:r>
           </a:p>
         </p:txBody>
@@ -797,7 +797,7 @@
           <a:lstStyle xmlns:a="http://schemas.openxmlformats.org/drawingml/2006/main"/>
           <a:p xmlns:a="http://schemas.openxmlformats.org/drawingml/2006/main">
             <a:r>
-              <a:t>2:20-2:50. The project has a local Canvas-style interface, an evidence-linked export, role-scoped views, and an integrity-aware tutor module. Tutor replies can include verified lecture and notes snippets, demo sign-in accounts are available, and Amazon Nova on Bedrock is an AWS-credit option. The local roster and assessments are synthetic; no learning-gain result is claimed. Next, connect an authorized real course and measure whether source-linked feedback helps learners correct mistakes. Source: carmen-study-guide/mock-canvas/tutor/snippets.py, tutor/demo_accounts.py, tutor/llm_bedrock.py, and INGEST_CONTRACT.md.</a:t>
+              <a:t>2:20-2:50. The project has a local Canvas-style interface, an evidence-linked export, role-scoped views, and an integrity-aware tutor module. The local roster and quizzes are synthetic, and we are not claiming measured learning gains. Next we would connect an authorized real course, verify the mapping with its owner, then measure whether source-linked feedback helps learners correct mistakes.</a:t>
             </a:r>
           </a:p>
         </p:txBody>
@@ -3240,12 +3240,12 @@
   </p:cSld>
   <p:clrMap bg1="lt1" tx1="dk1" bg2="lt2" tx2="dk2" accent1="accent1" accent2="accent2" accent3="accent3" accent4="accent4" accent5="accent5" accent6="accent6" hlink="hlink" folHlink="folHlink"/>
   <p:sldLayoutIdLst>
-    <p:sldLayoutId xmlns:r="http://schemas.openxmlformats.org/officeDocument/2006/relationships" id="2147483649" r:id="R9ed4f8ed037746ec"/>
-    <p:sldLayoutId xmlns:r="http://schemas.openxmlformats.org/officeDocument/2006/relationships" id="2147483650" r:id="Rc370c68b63754fb1"/>
-    <p:sldLayoutId xmlns:r="http://schemas.openxmlformats.org/officeDocument/2006/relationships" id="2147483651" r:id="R844c7807c2aa4a0c"/>
-    <p:sldLayoutId xmlns:r="http://schemas.openxmlformats.org/officeDocument/2006/relationships" id="2147483652" r:id="R65bc2625d28e453e"/>
-    <p:sldLayoutId xmlns:r="http://schemas.openxmlformats.org/officeDocument/2006/relationships" id="2147483653" r:id="Rfe71c27d2af64e7a"/>
-    <p:sldLayoutId xmlns:r="http://schemas.openxmlformats.org/officeDocument/2006/relationships" id="2147483654" r:id="Rb66fb7017b294de8"/>
+    <p:sldLayoutId xmlns:r="http://schemas.openxmlformats.org/officeDocument/2006/relationships" id="2147483649" r:id="R66c645f743694816"/>
+    <p:sldLayoutId xmlns:r="http://schemas.openxmlformats.org/officeDocument/2006/relationships" id="2147483650" r:id="R2987ca914a4b4134"/>
+    <p:sldLayoutId xmlns:r="http://schemas.openxmlformats.org/officeDocument/2006/relationships" id="2147483651" r:id="Rcf6b768e47564d1c"/>
+    <p:sldLayoutId xmlns:r="http://schemas.openxmlformats.org/officeDocument/2006/relationships" id="2147483652" r:id="R3cc322ae95eb476c"/>
+    <p:sldLayoutId xmlns:r="http://schemas.openxmlformats.org/officeDocument/2006/relationships" id="2147483653" r:id="Ra62fca2ba23e4f6f"/>
+    <p:sldLayoutId xmlns:r="http://schemas.openxmlformats.org/officeDocument/2006/relationships" id="2147483654" r:id="R073cffd466be48e0"/>
   </p:sldLayoutIdLst>
   <p:txStyles>
     <p:titleStyle>
@@ -3864,7 +3864,6 @@
               </a:defRPr>
             </a:defPPr>
             <a:lvl1pPr algn="l">
-              <a:buNone/>
               <a:defRPr sz="1275" b="1">
                 <a:solidFill>
                   <a:srgbClr val="BBD0DD"/>
@@ -3875,7 +3874,6 @@
               </a:defRPr>
             </a:lvl1pPr>
             <a:lvl2pPr algn="l">
-              <a:buNone/>
               <a:defRPr sz="1275" b="1">
                 <a:solidFill>
                   <a:srgbClr val="BBD0DD"/>
@@ -3886,7 +3884,6 @@
               </a:defRPr>
             </a:lvl2pPr>
             <a:lvl3pPr algn="l">
-              <a:buNone/>
               <a:defRPr sz="1275" b="1">
                 <a:solidFill>
                   <a:srgbClr val="BBD0DD"/>
@@ -3897,7 +3894,6 @@
               </a:defRPr>
             </a:lvl3pPr>
             <a:lvl4pPr algn="l">
-              <a:buNone/>
               <a:defRPr sz="1275" b="1">
                 <a:solidFill>
                   <a:srgbClr val="BBD0DD"/>
@@ -3908,7 +3904,6 @@
               </a:defRPr>
             </a:lvl4pPr>
             <a:lvl5pPr algn="l">
-              <a:buNone/>
               <a:defRPr sz="1275" b="1">
                 <a:solidFill>
                   <a:srgbClr val="BBD0DD"/>
@@ -3919,7 +3914,6 @@
               </a:defRPr>
             </a:lvl5pPr>
             <a:lvl6pPr algn="l">
-              <a:buNone/>
               <a:defRPr sz="1275" b="1">
                 <a:solidFill>
                   <a:srgbClr val="BBD0DD"/>
@@ -3930,7 +3924,6 @@
               </a:defRPr>
             </a:lvl6pPr>
             <a:lvl7pPr algn="l">
-              <a:buNone/>
               <a:defRPr sz="1275" b="1">
                 <a:solidFill>
                   <a:srgbClr val="BBD0DD"/>
@@ -3941,7 +3934,6 @@
               </a:defRPr>
             </a:lvl7pPr>
             <a:lvl8pPr algn="l">
-              <a:buNone/>
               <a:defRPr sz="1275" b="1">
                 <a:solidFill>
                   <a:srgbClr val="BBD0DD"/>
@@ -3952,7 +3944,6 @@
               </a:defRPr>
             </a:lvl8pPr>
             <a:lvl9pPr algn="l">
-              <a:buNone/>
               <a:defRPr sz="1275" b="1">
                 <a:solidFill>
                   <a:srgbClr val="BBD0DD"/>
@@ -3965,7 +3956,6 @@
           </a:lstStyle>
           <a:p xmlns:a="http://schemas.openxmlformats.org/drawingml/2006/main">
             <a:pPr algn="l">
-              <a:buNone/>
               <a:defRPr sz="1275" b="1">
                 <a:solidFill>
                   <a:srgbClr val="BBD0DD"/>
@@ -4031,7 +4021,6 @@
               </a:defRPr>
             </a:defPPr>
             <a:lvl1pPr algn="l">
-              <a:buNone/>
               <a:defRPr sz="3750" b="1">
                 <a:solidFill>
                   <a:srgbClr val="FFFFFF"/>
@@ -4042,7 +4031,6 @@
               </a:defRPr>
             </a:lvl1pPr>
             <a:lvl2pPr algn="l">
-              <a:buNone/>
               <a:defRPr sz="3750" b="1">
                 <a:solidFill>
                   <a:srgbClr val="FFFFFF"/>
@@ -4053,7 +4041,6 @@
               </a:defRPr>
             </a:lvl2pPr>
             <a:lvl3pPr algn="l">
-              <a:buNone/>
               <a:defRPr sz="3750" b="1">
                 <a:solidFill>
                   <a:srgbClr val="FFFFFF"/>
@@ -4064,7 +4051,6 @@
               </a:defRPr>
             </a:lvl3pPr>
             <a:lvl4pPr algn="l">
-              <a:buNone/>
               <a:defRPr sz="3750" b="1">
                 <a:solidFill>
                   <a:srgbClr val="FFFFFF"/>
@@ -4075,7 +4061,6 @@
               </a:defRPr>
             </a:lvl4pPr>
             <a:lvl5pPr algn="l">
-              <a:buNone/>
               <a:defRPr sz="3750" b="1">
                 <a:solidFill>
                   <a:srgbClr val="FFFFFF"/>
@@ -4086,7 +4071,6 @@
               </a:defRPr>
             </a:lvl5pPr>
             <a:lvl6pPr algn="l">
-              <a:buNone/>
               <a:defRPr sz="3750" b="1">
                 <a:solidFill>
                   <a:srgbClr val="FFFFFF"/>
@@ -4097,7 +4081,6 @@
               </a:defRPr>
             </a:lvl6pPr>
             <a:lvl7pPr algn="l">
-              <a:buNone/>
               <a:defRPr sz="3750" b="1">
                 <a:solidFill>
                   <a:srgbClr val="FFFFFF"/>
@@ -4108,7 +4091,6 @@
               </a:defRPr>
             </a:lvl7pPr>
             <a:lvl8pPr algn="l">
-              <a:buNone/>
               <a:defRPr sz="3750" b="1">
                 <a:solidFill>
                   <a:srgbClr val="FFFFFF"/>
@@ -4119,7 +4101,6 @@
               </a:defRPr>
             </a:lvl8pPr>
             <a:lvl9pPr algn="l">
-              <a:buNone/>
               <a:defRPr sz="3750" b="1">
                 <a:solidFill>
                   <a:srgbClr val="FFFFFF"/>
@@ -4132,7 +4113,6 @@
           </a:lstStyle>
           <a:p xmlns:a="http://schemas.openxmlformats.org/drawingml/2006/main">
             <a:pPr algn="l">
-              <a:buNone/>
               <a:defRPr sz="3750" b="1">
                 <a:solidFill>
                   <a:srgbClr val="FFFFFF"/>
@@ -4156,7 +4136,6 @@
           </a:p>
           <a:p xmlns:a="http://schemas.openxmlformats.org/drawingml/2006/main">
             <a:pPr algn="l">
-              <a:buNone/>
               <a:defRPr sz="3750" b="1">
                 <a:solidFill>
                   <a:srgbClr val="FFFFFF"/>
@@ -4180,7 +4159,6 @@
           </a:p>
           <a:p xmlns:a="http://schemas.openxmlformats.org/drawingml/2006/main">
             <a:pPr algn="l">
-              <a:buNone/>
               <a:defRPr sz="3750" b="1">
                 <a:solidFill>
                   <a:srgbClr val="FFFFFF"/>
@@ -4277,7 +4255,6 @@
               </a:defRPr>
             </a:defPPr>
             <a:lvl1pPr algn="l">
-              <a:buNone/>
               <a:defRPr sz="1800" b="0">
                 <a:solidFill>
                   <a:srgbClr val="DCE8EE"/>
@@ -4288,7 +4265,6 @@
               </a:defRPr>
             </a:lvl1pPr>
             <a:lvl2pPr algn="l">
-              <a:buNone/>
               <a:defRPr sz="1800" b="0">
                 <a:solidFill>
                   <a:srgbClr val="DCE8EE"/>
@@ -4299,7 +4275,6 @@
               </a:defRPr>
             </a:lvl2pPr>
             <a:lvl3pPr algn="l">
-              <a:buNone/>
               <a:defRPr sz="1800" b="0">
                 <a:solidFill>
                   <a:srgbClr val="DCE8EE"/>
@@ -4310,7 +4285,6 @@
               </a:defRPr>
             </a:lvl3pPr>
             <a:lvl4pPr algn="l">
-              <a:buNone/>
               <a:defRPr sz="1800" b="0">
                 <a:solidFill>
                   <a:srgbClr val="DCE8EE"/>
@@ -4321,7 +4295,6 @@
               </a:defRPr>
             </a:lvl4pPr>
             <a:lvl5pPr algn="l">
-              <a:buNone/>
               <a:defRPr sz="1800" b="0">
                 <a:solidFill>
                   <a:srgbClr val="DCE8EE"/>
@@ -4332,7 +4305,6 @@
               </a:defRPr>
             </a:lvl5pPr>
             <a:lvl6pPr algn="l">
-              <a:buNone/>
               <a:defRPr sz="1800" b="0">
                 <a:solidFill>
                   <a:srgbClr val="DCE8EE"/>
@@ -4343,7 +4315,6 @@
               </a:defRPr>
             </a:lvl6pPr>
             <a:lvl7pPr algn="l">
-              <a:buNone/>
               <a:defRPr sz="1800" b="0">
                 <a:solidFill>
                   <a:srgbClr val="DCE8EE"/>
@@ -4354,7 +4325,6 @@
               </a:defRPr>
             </a:lvl7pPr>
             <a:lvl8pPr algn="l">
-              <a:buNone/>
               <a:defRPr sz="1800" b="0">
                 <a:solidFill>
                   <a:srgbClr val="DCE8EE"/>
@@ -4365,7 +4335,6 @@
               </a:defRPr>
             </a:lvl8pPr>
             <a:lvl9pPr algn="l">
-              <a:buNone/>
               <a:defRPr sz="1800" b="0">
                 <a:solidFill>
                   <a:srgbClr val="DCE8EE"/>
@@ -4378,7 +4347,6 @@
           </a:lstStyle>
           <a:p xmlns:a="http://schemas.openxmlformats.org/drawingml/2006/main">
             <a:pPr algn="l">
-              <a:buNone/>
               <a:defRPr sz="1800" b="0">
                 <a:solidFill>
                   <a:srgbClr val="DCE8EE"/>
@@ -4477,7 +4445,6 @@
               </a:defRPr>
             </a:defPPr>
             <a:lvl1pPr algn="l">
-              <a:buNone/>
               <a:defRPr sz="1050" b="1">
                 <a:solidFill>
                   <a:srgbClr val="BBD0DD"/>
@@ -4488,7 +4455,6 @@
               </a:defRPr>
             </a:lvl1pPr>
             <a:lvl2pPr algn="l">
-              <a:buNone/>
               <a:defRPr sz="1050" b="1">
                 <a:solidFill>
                   <a:srgbClr val="BBD0DD"/>
@@ -4499,7 +4465,6 @@
               </a:defRPr>
             </a:lvl2pPr>
             <a:lvl3pPr algn="l">
-              <a:buNone/>
               <a:defRPr sz="1050" b="1">
                 <a:solidFill>
                   <a:srgbClr val="BBD0DD"/>
@@ -4510,7 +4475,6 @@
               </a:defRPr>
             </a:lvl3pPr>
             <a:lvl4pPr algn="l">
-              <a:buNone/>
               <a:defRPr sz="1050" b="1">
                 <a:solidFill>
                   <a:srgbClr val="BBD0DD"/>
@@ -4521,7 +4485,6 @@
               </a:defRPr>
             </a:lvl4pPr>
             <a:lvl5pPr algn="l">
-              <a:buNone/>
               <a:defRPr sz="1050" b="1">
                 <a:solidFill>
                   <a:srgbClr val="BBD0DD"/>
@@ -4532,7 +4495,6 @@
               </a:defRPr>
             </a:lvl5pPr>
             <a:lvl6pPr algn="l">
-              <a:buNone/>
               <a:defRPr sz="1050" b="1">
                 <a:solidFill>
                   <a:srgbClr val="BBD0DD"/>
@@ -4543,7 +4505,6 @@
               </a:defRPr>
             </a:lvl6pPr>
             <a:lvl7pPr algn="l">
-              <a:buNone/>
               <a:defRPr sz="1050" b="1">
                 <a:solidFill>
                   <a:srgbClr val="BBD0DD"/>
@@ -4554,7 +4515,6 @@
               </a:defRPr>
             </a:lvl7pPr>
             <a:lvl8pPr algn="l">
-              <a:buNone/>
               <a:defRPr sz="1050" b="1">
                 <a:solidFill>
                   <a:srgbClr val="BBD0DD"/>
@@ -4565,7 +4525,6 @@
               </a:defRPr>
             </a:lvl8pPr>
             <a:lvl9pPr algn="l">
-              <a:buNone/>
               <a:defRPr sz="1050" b="1">
                 <a:solidFill>
                   <a:srgbClr val="BBD0DD"/>
@@ -4578,7 +4537,6 @@
           </a:lstStyle>
           <a:p xmlns:a="http://schemas.openxmlformats.org/drawingml/2006/main">
             <a:pPr algn="l">
-              <a:buNone/>
               <a:defRPr sz="1050" b="1">
                 <a:solidFill>
                   <a:srgbClr val="BBD0DD"/>
@@ -4644,7 +4602,6 @@
               </a:defRPr>
             </a:defPPr>
             <a:lvl1pPr algn="l">
-              <a:buNone/>
               <a:defRPr sz="1650" b="1">
                 <a:solidFill>
                   <a:srgbClr val="FFFFFF"/>
@@ -4655,7 +4612,6 @@
               </a:defRPr>
             </a:lvl1pPr>
             <a:lvl2pPr algn="l">
-              <a:buNone/>
               <a:defRPr sz="1650" b="1">
                 <a:solidFill>
                   <a:srgbClr val="FFFFFF"/>
@@ -4666,7 +4622,6 @@
               </a:defRPr>
             </a:lvl2pPr>
             <a:lvl3pPr algn="l">
-              <a:buNone/>
               <a:defRPr sz="1650" b="1">
                 <a:solidFill>
                   <a:srgbClr val="FFFFFF"/>
@@ -4677,7 +4632,6 @@
               </a:defRPr>
             </a:lvl3pPr>
             <a:lvl4pPr algn="l">
-              <a:buNone/>
               <a:defRPr sz="1650" b="1">
                 <a:solidFill>
                   <a:srgbClr val="FFFFFF"/>
@@ -4688,7 +4642,6 @@
               </a:defRPr>
             </a:lvl4pPr>
             <a:lvl5pPr algn="l">
-              <a:buNone/>
               <a:defRPr sz="1650" b="1">
                 <a:solidFill>
                   <a:srgbClr val="FFFFFF"/>
@@ -4699,7 +4652,6 @@
               </a:defRPr>
             </a:lvl5pPr>
             <a:lvl6pPr algn="l">
-              <a:buNone/>
               <a:defRPr sz="1650" b="1">
                 <a:solidFill>
                   <a:srgbClr val="FFFFFF"/>
@@ -4710,7 +4662,6 @@
               </a:defRPr>
             </a:lvl6pPr>
             <a:lvl7pPr algn="l">
-              <a:buNone/>
               <a:defRPr sz="1650" b="1">
                 <a:solidFill>
                   <a:srgbClr val="FFFFFF"/>
@@ -4721,7 +4672,6 @@
               </a:defRPr>
             </a:lvl7pPr>
             <a:lvl8pPr algn="l">
-              <a:buNone/>
               <a:defRPr sz="1650" b="1">
                 <a:solidFill>
                   <a:srgbClr val="FFFFFF"/>
@@ -4732,7 +4682,6 @@
               </a:defRPr>
             </a:lvl8pPr>
             <a:lvl9pPr algn="l">
-              <a:buNone/>
               <a:defRPr sz="1650" b="1">
                 <a:solidFill>
                   <a:srgbClr val="FFFFFF"/>
@@ -4745,7 +4694,6 @@
           </a:lstStyle>
           <a:p xmlns:a="http://schemas.openxmlformats.org/drawingml/2006/main">
             <a:pPr algn="l">
-              <a:buNone/>
               <a:defRPr sz="1650" b="1">
                 <a:solidFill>
                   <a:srgbClr val="FFFFFF"/>
@@ -4769,7 +4717,6 @@
           </a:p>
           <a:p xmlns:a="http://schemas.openxmlformats.org/drawingml/2006/main">
             <a:pPr algn="l">
-              <a:buNone/>
               <a:defRPr sz="1650" b="1">
                 <a:solidFill>
                   <a:srgbClr val="FFFFFF"/>
@@ -4793,7 +4740,6 @@
           </a:p>
           <a:p xmlns:a="http://schemas.openxmlformats.org/drawingml/2006/main">
             <a:pPr algn="l">
-              <a:buNone/>
               <a:defRPr sz="1650" b="1">
                 <a:solidFill>
                   <a:srgbClr val="FFFFFF"/>
@@ -4817,7 +4763,6 @@
           </a:p>
           <a:p xmlns:a="http://schemas.openxmlformats.org/drawingml/2006/main">
             <a:pPr algn="l">
-              <a:buNone/>
               <a:defRPr sz="1650" b="1">
                 <a:solidFill>
                   <a:srgbClr val="FFFFFF"/>
@@ -4916,7 +4861,6 @@
               </a:defRPr>
             </a:defPPr>
             <a:lvl1pPr algn="l">
-              <a:buNone/>
               <a:defRPr sz="1200" b="1">
                 <a:solidFill>
                   <a:srgbClr val="FFFFFF"/>
@@ -4927,7 +4871,6 @@
               </a:defRPr>
             </a:lvl1pPr>
             <a:lvl2pPr algn="l">
-              <a:buNone/>
               <a:defRPr sz="1200" b="1">
                 <a:solidFill>
                   <a:srgbClr val="FFFFFF"/>
@@ -4938,7 +4881,6 @@
               </a:defRPr>
             </a:lvl2pPr>
             <a:lvl3pPr algn="l">
-              <a:buNone/>
               <a:defRPr sz="1200" b="1">
                 <a:solidFill>
                   <a:srgbClr val="FFFFFF"/>
@@ -4949,7 +4891,6 @@
               </a:defRPr>
             </a:lvl3pPr>
             <a:lvl4pPr algn="l">
-              <a:buNone/>
               <a:defRPr sz="1200" b="1">
                 <a:solidFill>
                   <a:srgbClr val="FFFFFF"/>
@@ -4960,7 +4901,6 @@
               </a:defRPr>
             </a:lvl4pPr>
             <a:lvl5pPr algn="l">
-              <a:buNone/>
               <a:defRPr sz="1200" b="1">
                 <a:solidFill>
                   <a:srgbClr val="FFFFFF"/>
@@ -4971,7 +4911,6 @@
               </a:defRPr>
             </a:lvl5pPr>
             <a:lvl6pPr algn="l">
-              <a:buNone/>
               <a:defRPr sz="1200" b="1">
                 <a:solidFill>
                   <a:srgbClr val="FFFFFF"/>
@@ -4982,7 +4921,6 @@
               </a:defRPr>
             </a:lvl6pPr>
             <a:lvl7pPr algn="l">
-              <a:buNone/>
               <a:defRPr sz="1200" b="1">
                 <a:solidFill>
                   <a:srgbClr val="FFFFFF"/>
@@ -4993,7 +4931,6 @@
               </a:defRPr>
             </a:lvl7pPr>
             <a:lvl8pPr algn="l">
-              <a:buNone/>
               <a:defRPr sz="1200" b="1">
                 <a:solidFill>
                   <a:srgbClr val="FFFFFF"/>
@@ -5004,7 +4941,6 @@
               </a:defRPr>
             </a:lvl8pPr>
             <a:lvl9pPr algn="l">
-              <a:buNone/>
               <a:defRPr sz="1200" b="1">
                 <a:solidFill>
                   <a:srgbClr val="FFFFFF"/>
@@ -5017,7 +4953,6 @@
           </a:lstStyle>
           <a:p xmlns:a="http://schemas.openxmlformats.org/drawingml/2006/main">
             <a:pPr algn="l">
-              <a:buNone/>
               <a:defRPr sz="1200" b="1">
                 <a:solidFill>
                   <a:srgbClr val="FFFFFF"/>
@@ -5112,7 +5047,6 @@
               </a:defRPr>
             </a:defPPr>
             <a:lvl1pPr algn="l">
-              <a:buNone/>
               <a:defRPr sz="1050" b="1">
                 <a:solidFill>
                   <a:srgbClr val="0877B9"/>
@@ -5123,7 +5057,6 @@
               </a:defRPr>
             </a:lvl1pPr>
             <a:lvl2pPr algn="l">
-              <a:buNone/>
               <a:defRPr sz="1050" b="1">
                 <a:solidFill>
                   <a:srgbClr val="0877B9"/>
@@ -5134,7 +5067,6 @@
               </a:defRPr>
             </a:lvl2pPr>
             <a:lvl3pPr algn="l">
-              <a:buNone/>
               <a:defRPr sz="1050" b="1">
                 <a:solidFill>
                   <a:srgbClr val="0877B9"/>
@@ -5145,7 +5077,6 @@
               </a:defRPr>
             </a:lvl3pPr>
             <a:lvl4pPr algn="l">
-              <a:buNone/>
               <a:defRPr sz="1050" b="1">
                 <a:solidFill>
                   <a:srgbClr val="0877B9"/>
@@ -5156,7 +5087,6 @@
               </a:defRPr>
             </a:lvl4pPr>
             <a:lvl5pPr algn="l">
-              <a:buNone/>
               <a:defRPr sz="1050" b="1">
                 <a:solidFill>
                   <a:srgbClr val="0877B9"/>
@@ -5167,7 +5097,6 @@
               </a:defRPr>
             </a:lvl5pPr>
             <a:lvl6pPr algn="l">
-              <a:buNone/>
               <a:defRPr sz="1050" b="1">
                 <a:solidFill>
                   <a:srgbClr val="0877B9"/>
@@ -5178,7 +5107,6 @@
               </a:defRPr>
             </a:lvl6pPr>
             <a:lvl7pPr algn="l">
-              <a:buNone/>
               <a:defRPr sz="1050" b="1">
                 <a:solidFill>
                   <a:srgbClr val="0877B9"/>
@@ -5189,7 +5117,6 @@
               </a:defRPr>
             </a:lvl7pPr>
             <a:lvl8pPr algn="l">
-              <a:buNone/>
               <a:defRPr sz="1050" b="1">
                 <a:solidFill>
                   <a:srgbClr val="0877B9"/>
@@ -5200,7 +5127,6 @@
               </a:defRPr>
             </a:lvl8pPr>
             <a:lvl9pPr algn="l">
-              <a:buNone/>
               <a:defRPr sz="1050" b="1">
                 <a:solidFill>
                   <a:srgbClr val="0877B9"/>
@@ -5213,7 +5139,6 @@
           </a:lstStyle>
           <a:p xmlns:a="http://schemas.openxmlformats.org/drawingml/2006/main">
             <a:pPr algn="l">
-              <a:buNone/>
               <a:defRPr sz="1050" b="1">
                 <a:solidFill>
                   <a:srgbClr val="0877B9"/>
@@ -5279,7 +5204,6 @@
               </a:defRPr>
             </a:defPPr>
             <a:lvl1pPr algn="l">
-              <a:buNone/>
               <a:defRPr sz="2850" b="1">
                 <a:solidFill>
                   <a:srgbClr val="183044"/>
@@ -5290,7 +5214,6 @@
               </a:defRPr>
             </a:lvl1pPr>
             <a:lvl2pPr algn="l">
-              <a:buNone/>
               <a:defRPr sz="2850" b="1">
                 <a:solidFill>
                   <a:srgbClr val="183044"/>
@@ -5301,7 +5224,6 @@
               </a:defRPr>
             </a:lvl2pPr>
             <a:lvl3pPr algn="l">
-              <a:buNone/>
               <a:defRPr sz="2850" b="1">
                 <a:solidFill>
                   <a:srgbClr val="183044"/>
@@ -5312,7 +5234,6 @@
               </a:defRPr>
             </a:lvl3pPr>
             <a:lvl4pPr algn="l">
-              <a:buNone/>
               <a:defRPr sz="2850" b="1">
                 <a:solidFill>
                   <a:srgbClr val="183044"/>
@@ -5323,7 +5244,6 @@
               </a:defRPr>
             </a:lvl4pPr>
             <a:lvl5pPr algn="l">
-              <a:buNone/>
               <a:defRPr sz="2850" b="1">
                 <a:solidFill>
                   <a:srgbClr val="183044"/>
@@ -5334,7 +5254,6 @@
               </a:defRPr>
             </a:lvl5pPr>
             <a:lvl6pPr algn="l">
-              <a:buNone/>
               <a:defRPr sz="2850" b="1">
                 <a:solidFill>
                   <a:srgbClr val="183044"/>
@@ -5345,7 +5264,6 @@
               </a:defRPr>
             </a:lvl6pPr>
             <a:lvl7pPr algn="l">
-              <a:buNone/>
               <a:defRPr sz="2850" b="1">
                 <a:solidFill>
                   <a:srgbClr val="183044"/>
@@ -5356,7 +5274,6 @@
               </a:defRPr>
             </a:lvl7pPr>
             <a:lvl8pPr algn="l">
-              <a:buNone/>
               <a:defRPr sz="2850" b="1">
                 <a:solidFill>
                   <a:srgbClr val="183044"/>
@@ -5367,7 +5284,6 @@
               </a:defRPr>
             </a:lvl8pPr>
             <a:lvl9pPr algn="l">
-              <a:buNone/>
               <a:defRPr sz="2850" b="1">
                 <a:solidFill>
                   <a:srgbClr val="183044"/>
@@ -5380,7 +5296,6 @@
           </a:lstStyle>
           <a:p xmlns:a="http://schemas.openxmlformats.org/drawingml/2006/main">
             <a:pPr algn="l">
-              <a:buNone/>
               <a:defRPr sz="2850" b="1">
                 <a:solidFill>
                   <a:srgbClr val="183044"/>
@@ -5477,7 +5392,6 @@
               </a:defRPr>
             </a:defPPr>
             <a:lvl1pPr algn="l">
-              <a:buNone/>
               <a:defRPr sz="900" b="1">
                 <a:solidFill>
                   <a:srgbClr val="5C6F7D"/>
@@ -5488,7 +5402,6 @@
               </a:defRPr>
             </a:lvl1pPr>
             <a:lvl2pPr algn="l">
-              <a:buNone/>
               <a:defRPr sz="900" b="1">
                 <a:solidFill>
                   <a:srgbClr val="5C6F7D"/>
@@ -5499,7 +5412,6 @@
               </a:defRPr>
             </a:lvl2pPr>
             <a:lvl3pPr algn="l">
-              <a:buNone/>
               <a:defRPr sz="900" b="1">
                 <a:solidFill>
                   <a:srgbClr val="5C6F7D"/>
@@ -5510,7 +5422,6 @@
               </a:defRPr>
             </a:lvl3pPr>
             <a:lvl4pPr algn="l">
-              <a:buNone/>
               <a:defRPr sz="900" b="1">
                 <a:solidFill>
                   <a:srgbClr val="5C6F7D"/>
@@ -5521,7 +5432,6 @@
               </a:defRPr>
             </a:lvl4pPr>
             <a:lvl5pPr algn="l">
-              <a:buNone/>
               <a:defRPr sz="900" b="1">
                 <a:solidFill>
                   <a:srgbClr val="5C6F7D"/>
@@ -5532,7 +5442,6 @@
               </a:defRPr>
             </a:lvl5pPr>
             <a:lvl6pPr algn="l">
-              <a:buNone/>
               <a:defRPr sz="900" b="1">
                 <a:solidFill>
                   <a:srgbClr val="5C6F7D"/>
@@ -5543,7 +5452,6 @@
               </a:defRPr>
             </a:lvl6pPr>
             <a:lvl7pPr algn="l">
-              <a:buNone/>
               <a:defRPr sz="900" b="1">
                 <a:solidFill>
                   <a:srgbClr val="5C6F7D"/>
@@ -5554,7 +5462,6 @@
               </a:defRPr>
             </a:lvl7pPr>
             <a:lvl8pPr algn="l">
-              <a:buNone/>
               <a:defRPr sz="900" b="1">
                 <a:solidFill>
                   <a:srgbClr val="5C6F7D"/>
@@ -5565,7 +5472,6 @@
               </a:defRPr>
             </a:lvl8pPr>
             <a:lvl9pPr algn="l">
-              <a:buNone/>
               <a:defRPr sz="900" b="1">
                 <a:solidFill>
                   <a:srgbClr val="5C6F7D"/>
@@ -5578,7 +5484,6 @@
           </a:lstStyle>
           <a:p xmlns:a="http://schemas.openxmlformats.org/drawingml/2006/main">
             <a:pPr algn="l">
-              <a:buNone/>
               <a:defRPr sz="900" b="1">
                 <a:solidFill>
                   <a:srgbClr val="5C6F7D"/>
@@ -5644,7 +5549,6 @@
               </a:defRPr>
             </a:defPPr>
             <a:lvl1pPr algn="r">
-              <a:buNone/>
               <a:defRPr sz="900" b="0">
                 <a:solidFill>
                   <a:srgbClr val="5C6F7D"/>
@@ -5655,7 +5559,6 @@
               </a:defRPr>
             </a:lvl1pPr>
             <a:lvl2pPr algn="r">
-              <a:buNone/>
               <a:defRPr sz="900" b="0">
                 <a:solidFill>
                   <a:srgbClr val="5C6F7D"/>
@@ -5666,7 +5569,6 @@
               </a:defRPr>
             </a:lvl2pPr>
             <a:lvl3pPr algn="r">
-              <a:buNone/>
               <a:defRPr sz="900" b="0">
                 <a:solidFill>
                   <a:srgbClr val="5C6F7D"/>
@@ -5677,7 +5579,6 @@
               </a:defRPr>
             </a:lvl3pPr>
             <a:lvl4pPr algn="r">
-              <a:buNone/>
               <a:defRPr sz="900" b="0">
                 <a:solidFill>
                   <a:srgbClr val="5C6F7D"/>
@@ -5688,7 +5589,6 @@
               </a:defRPr>
             </a:lvl4pPr>
             <a:lvl5pPr algn="r">
-              <a:buNone/>
               <a:defRPr sz="900" b="0">
                 <a:solidFill>
                   <a:srgbClr val="5C6F7D"/>
@@ -5699,7 +5599,6 @@
               </a:defRPr>
             </a:lvl5pPr>
             <a:lvl6pPr algn="r">
-              <a:buNone/>
               <a:defRPr sz="900" b="0">
                 <a:solidFill>
                   <a:srgbClr val="5C6F7D"/>
@@ -5710,7 +5609,6 @@
               </a:defRPr>
             </a:lvl6pPr>
             <a:lvl7pPr algn="r">
-              <a:buNone/>
               <a:defRPr sz="900" b="0">
                 <a:solidFill>
                   <a:srgbClr val="5C6F7D"/>
@@ -5721,7 +5619,6 @@
               </a:defRPr>
             </a:lvl7pPr>
             <a:lvl8pPr algn="r">
-              <a:buNone/>
               <a:defRPr sz="900" b="0">
                 <a:solidFill>
                   <a:srgbClr val="5C6F7D"/>
@@ -5732,7 +5629,6 @@
               </a:defRPr>
             </a:lvl8pPr>
             <a:lvl9pPr algn="r">
-              <a:buNone/>
               <a:defRPr sz="900" b="0">
                 <a:solidFill>
                   <a:srgbClr val="5C6F7D"/>
@@ -5745,7 +5641,6 @@
           </a:lstStyle>
           <a:p xmlns:a="http://schemas.openxmlformats.org/drawingml/2006/main">
             <a:pPr algn="r">
-              <a:buNone/>
               <a:defRPr sz="900" b="0">
                 <a:solidFill>
                   <a:srgbClr val="5C6F7D"/>
@@ -5846,7 +5741,6 @@
               </a:defRPr>
             </a:defPPr>
             <a:lvl1pPr algn="l">
-              <a:buNone/>
               <a:defRPr sz="1050" b="1">
                 <a:solidFill>
                   <a:srgbClr val="0877B9"/>
@@ -5857,7 +5751,6 @@
               </a:defRPr>
             </a:lvl1pPr>
             <a:lvl2pPr algn="l">
-              <a:buNone/>
               <a:defRPr sz="1050" b="1">
                 <a:solidFill>
                   <a:srgbClr val="0877B9"/>
@@ -5868,7 +5761,6 @@
               </a:defRPr>
             </a:lvl2pPr>
             <a:lvl3pPr algn="l">
-              <a:buNone/>
               <a:defRPr sz="1050" b="1">
                 <a:solidFill>
                   <a:srgbClr val="0877B9"/>
@@ -5879,7 +5771,6 @@
               </a:defRPr>
             </a:lvl3pPr>
             <a:lvl4pPr algn="l">
-              <a:buNone/>
               <a:defRPr sz="1050" b="1">
                 <a:solidFill>
                   <a:srgbClr val="0877B9"/>
@@ -5890,7 +5781,6 @@
               </a:defRPr>
             </a:lvl4pPr>
             <a:lvl5pPr algn="l">
-              <a:buNone/>
               <a:defRPr sz="1050" b="1">
                 <a:solidFill>
                   <a:srgbClr val="0877B9"/>
@@ -5901,7 +5791,6 @@
               </a:defRPr>
             </a:lvl5pPr>
             <a:lvl6pPr algn="l">
-              <a:buNone/>
               <a:defRPr sz="1050" b="1">
                 <a:solidFill>
                   <a:srgbClr val="0877B9"/>
@@ -5912,7 +5801,6 @@
               </a:defRPr>
             </a:lvl6pPr>
             <a:lvl7pPr algn="l">
-              <a:buNone/>
               <a:defRPr sz="1050" b="1">
                 <a:solidFill>
                   <a:srgbClr val="0877B9"/>
@@ -5923,7 +5811,6 @@
               </a:defRPr>
             </a:lvl7pPr>
             <a:lvl8pPr algn="l">
-              <a:buNone/>
               <a:defRPr sz="1050" b="1">
                 <a:solidFill>
                   <a:srgbClr val="0877B9"/>
@@ -5934,7 +5821,6 @@
               </a:defRPr>
             </a:lvl8pPr>
             <a:lvl9pPr algn="l">
-              <a:buNone/>
               <a:defRPr sz="1050" b="1">
                 <a:solidFill>
                   <a:srgbClr val="0877B9"/>
@@ -5947,7 +5833,6 @@
           </a:lstStyle>
           <a:p xmlns:a="http://schemas.openxmlformats.org/drawingml/2006/main">
             <a:pPr algn="l">
-              <a:buNone/>
               <a:defRPr sz="1050" b="1">
                 <a:solidFill>
                   <a:srgbClr val="0877B9"/>
@@ -6013,7 +5898,6 @@
               </a:defRPr>
             </a:defPPr>
             <a:lvl1pPr algn="l">
-              <a:buNone/>
               <a:defRPr sz="1575" b="0">
                 <a:solidFill>
                   <a:srgbClr val="203040"/>
@@ -6024,7 +5908,6 @@
               </a:defRPr>
             </a:lvl1pPr>
             <a:lvl2pPr algn="l">
-              <a:buNone/>
               <a:defRPr sz="1575" b="0">
                 <a:solidFill>
                   <a:srgbClr val="203040"/>
@@ -6035,7 +5918,6 @@
               </a:defRPr>
             </a:lvl2pPr>
             <a:lvl3pPr algn="l">
-              <a:buNone/>
               <a:defRPr sz="1575" b="0">
                 <a:solidFill>
                   <a:srgbClr val="203040"/>
@@ -6046,7 +5928,6 @@
               </a:defRPr>
             </a:lvl3pPr>
             <a:lvl4pPr algn="l">
-              <a:buNone/>
               <a:defRPr sz="1575" b="0">
                 <a:solidFill>
                   <a:srgbClr val="203040"/>
@@ -6057,7 +5938,6 @@
               </a:defRPr>
             </a:lvl4pPr>
             <a:lvl5pPr algn="l">
-              <a:buNone/>
               <a:defRPr sz="1575" b="0">
                 <a:solidFill>
                   <a:srgbClr val="203040"/>
@@ -6068,7 +5948,6 @@
               </a:defRPr>
             </a:lvl5pPr>
             <a:lvl6pPr algn="l">
-              <a:buNone/>
               <a:defRPr sz="1575" b="0">
                 <a:solidFill>
                   <a:srgbClr val="203040"/>
@@ -6079,7 +5958,6 @@
               </a:defRPr>
             </a:lvl6pPr>
             <a:lvl7pPr algn="l">
-              <a:buNone/>
               <a:defRPr sz="1575" b="0">
                 <a:solidFill>
                   <a:srgbClr val="203040"/>
@@ -6090,7 +5968,6 @@
               </a:defRPr>
             </a:lvl7pPr>
             <a:lvl8pPr algn="l">
-              <a:buNone/>
               <a:defRPr sz="1575" b="0">
                 <a:solidFill>
                   <a:srgbClr val="203040"/>
@@ -6101,7 +5978,6 @@
               </a:defRPr>
             </a:lvl8pPr>
             <a:lvl9pPr algn="l">
-              <a:buNone/>
               <a:defRPr sz="1575" b="0">
                 <a:solidFill>
                   <a:srgbClr val="203040"/>
@@ -6114,7 +5990,6 @@
           </a:lstStyle>
           <a:p xmlns:a="http://schemas.openxmlformats.org/drawingml/2006/main">
             <a:pPr algn="l">
-              <a:buNone/>
               <a:defRPr sz="1575" b="0">
                 <a:solidFill>
                   <a:srgbClr val="203040"/>
@@ -6138,7 +6013,6 @@
           </a:p>
           <a:p xmlns:a="http://schemas.openxmlformats.org/drawingml/2006/main">
             <a:pPr algn="l">
-              <a:buNone/>
               <a:defRPr sz="1575" b="0">
                 <a:solidFill>
                   <a:srgbClr val="203040"/>
@@ -6162,7 +6036,6 @@
           </a:p>
           <a:p xmlns:a="http://schemas.openxmlformats.org/drawingml/2006/main">
             <a:pPr algn="l">
-              <a:buNone/>
               <a:defRPr sz="1575" b="0">
                 <a:solidFill>
                   <a:srgbClr val="203040"/>
@@ -6186,7 +6059,6 @@
           </a:p>
           <a:p xmlns:a="http://schemas.openxmlformats.org/drawingml/2006/main">
             <a:pPr algn="l">
-              <a:buNone/>
               <a:defRPr sz="1575" b="0">
                 <a:solidFill>
                   <a:srgbClr val="203040"/>
@@ -6287,7 +6159,6 @@
               </a:defRPr>
             </a:defPPr>
             <a:lvl1pPr algn="l">
-              <a:buNone/>
               <a:defRPr sz="1050" b="1">
                 <a:solidFill>
                   <a:srgbClr val="BBD0DD"/>
@@ -6298,7 +6169,6 @@
               </a:defRPr>
             </a:lvl1pPr>
             <a:lvl2pPr algn="l">
-              <a:buNone/>
               <a:defRPr sz="1050" b="1">
                 <a:solidFill>
                   <a:srgbClr val="BBD0DD"/>
@@ -6309,7 +6179,6 @@
               </a:defRPr>
             </a:lvl2pPr>
             <a:lvl3pPr algn="l">
-              <a:buNone/>
               <a:defRPr sz="1050" b="1">
                 <a:solidFill>
                   <a:srgbClr val="BBD0DD"/>
@@ -6320,7 +6189,6 @@
               </a:defRPr>
             </a:lvl3pPr>
             <a:lvl4pPr algn="l">
-              <a:buNone/>
               <a:defRPr sz="1050" b="1">
                 <a:solidFill>
                   <a:srgbClr val="BBD0DD"/>
@@ -6331,7 +6199,6 @@
               </a:defRPr>
             </a:lvl4pPr>
             <a:lvl5pPr algn="l">
-              <a:buNone/>
               <a:defRPr sz="1050" b="1">
                 <a:solidFill>
                   <a:srgbClr val="BBD0DD"/>
@@ -6342,7 +6209,6 @@
               </a:defRPr>
             </a:lvl5pPr>
             <a:lvl6pPr algn="l">
-              <a:buNone/>
               <a:defRPr sz="1050" b="1">
                 <a:solidFill>
                   <a:srgbClr val="BBD0DD"/>
@@ -6353,7 +6219,6 @@
               </a:defRPr>
             </a:lvl6pPr>
             <a:lvl7pPr algn="l">
-              <a:buNone/>
               <a:defRPr sz="1050" b="1">
                 <a:solidFill>
                   <a:srgbClr val="BBD0DD"/>
@@ -6364,7 +6229,6 @@
               </a:defRPr>
             </a:lvl7pPr>
             <a:lvl8pPr algn="l">
-              <a:buNone/>
               <a:defRPr sz="1050" b="1">
                 <a:solidFill>
                   <a:srgbClr val="BBD0DD"/>
@@ -6375,7 +6239,6 @@
               </a:defRPr>
             </a:lvl8pPr>
             <a:lvl9pPr algn="l">
-              <a:buNone/>
               <a:defRPr sz="1050" b="1">
                 <a:solidFill>
                   <a:srgbClr val="BBD0DD"/>
@@ -6388,7 +6251,6 @@
           </a:lstStyle>
           <a:p xmlns:a="http://schemas.openxmlformats.org/drawingml/2006/main">
             <a:pPr algn="l">
-              <a:buNone/>
               <a:defRPr sz="1050" b="1">
                 <a:solidFill>
                   <a:srgbClr val="BBD0DD"/>
@@ -6454,7 +6316,6 @@
               </a:defRPr>
             </a:defPPr>
             <a:lvl1pPr algn="l">
-              <a:buNone/>
               <a:defRPr sz="1575" b="1">
                 <a:solidFill>
                   <a:srgbClr val="FFFFFF"/>
@@ -6465,7 +6326,6 @@
               </a:defRPr>
             </a:lvl1pPr>
             <a:lvl2pPr algn="l">
-              <a:buNone/>
               <a:defRPr sz="1575" b="1">
                 <a:solidFill>
                   <a:srgbClr val="FFFFFF"/>
@@ -6476,7 +6336,6 @@
               </a:defRPr>
             </a:lvl2pPr>
             <a:lvl3pPr algn="l">
-              <a:buNone/>
               <a:defRPr sz="1575" b="1">
                 <a:solidFill>
                   <a:srgbClr val="FFFFFF"/>
@@ -6487,7 +6346,6 @@
               </a:defRPr>
             </a:lvl3pPr>
             <a:lvl4pPr algn="l">
-              <a:buNone/>
               <a:defRPr sz="1575" b="1">
                 <a:solidFill>
                   <a:srgbClr val="FFFFFF"/>
@@ -6498,7 +6356,6 @@
               </a:defRPr>
             </a:lvl4pPr>
             <a:lvl5pPr algn="l">
-              <a:buNone/>
               <a:defRPr sz="1575" b="1">
                 <a:solidFill>
                   <a:srgbClr val="FFFFFF"/>
@@ -6509,7 +6366,6 @@
               </a:defRPr>
             </a:lvl5pPr>
             <a:lvl6pPr algn="l">
-              <a:buNone/>
               <a:defRPr sz="1575" b="1">
                 <a:solidFill>
                   <a:srgbClr val="FFFFFF"/>
@@ -6520,7 +6376,6 @@
               </a:defRPr>
             </a:lvl6pPr>
             <a:lvl7pPr algn="l">
-              <a:buNone/>
               <a:defRPr sz="1575" b="1">
                 <a:solidFill>
                   <a:srgbClr val="FFFFFF"/>
@@ -6531,7 +6386,6 @@
               </a:defRPr>
             </a:lvl7pPr>
             <a:lvl8pPr algn="l">
-              <a:buNone/>
               <a:defRPr sz="1575" b="1">
                 <a:solidFill>
                   <a:srgbClr val="FFFFFF"/>
@@ -6542,7 +6396,6 @@
               </a:defRPr>
             </a:lvl8pPr>
             <a:lvl9pPr algn="l">
-              <a:buNone/>
               <a:defRPr sz="1575" b="1">
                 <a:solidFill>
                   <a:srgbClr val="FFFFFF"/>
@@ -6555,7 +6408,6 @@
           </a:lstStyle>
           <a:p xmlns:a="http://schemas.openxmlformats.org/drawingml/2006/main">
             <a:pPr algn="l">
-              <a:buNone/>
               <a:defRPr sz="1575" b="1">
                 <a:solidFill>
                   <a:srgbClr val="FFFFFF"/>
@@ -6579,7 +6431,6 @@
           </a:p>
           <a:p xmlns:a="http://schemas.openxmlformats.org/drawingml/2006/main">
             <a:pPr algn="l">
-              <a:buNone/>
               <a:defRPr sz="1575" b="1">
                 <a:solidFill>
                   <a:srgbClr val="FFFFFF"/>
@@ -6603,7 +6454,6 @@
           </a:p>
           <a:p xmlns:a="http://schemas.openxmlformats.org/drawingml/2006/main">
             <a:pPr algn="l">
-              <a:buNone/>
               <a:defRPr sz="1575" b="1">
                 <a:solidFill>
                   <a:srgbClr val="FFFFFF"/>
@@ -6627,7 +6477,6 @@
           </a:p>
           <a:p xmlns:a="http://schemas.openxmlformats.org/drawingml/2006/main">
             <a:pPr algn="l">
-              <a:buNone/>
               <a:defRPr sz="1575" b="1">
                 <a:solidFill>
                   <a:srgbClr val="FFFFFF"/>
@@ -6728,7 +6577,6 @@
               </a:defRPr>
             </a:defPPr>
             <a:lvl1pPr algn="l">
-              <a:buNone/>
               <a:defRPr sz="1050" b="1">
                 <a:solidFill>
                   <a:srgbClr val="11834A"/>
@@ -6739,7 +6587,6 @@
               </a:defRPr>
             </a:lvl1pPr>
             <a:lvl2pPr algn="l">
-              <a:buNone/>
               <a:defRPr sz="1050" b="1">
                 <a:solidFill>
                   <a:srgbClr val="11834A"/>
@@ -6750,7 +6597,6 @@
               </a:defRPr>
             </a:lvl2pPr>
             <a:lvl3pPr algn="l">
-              <a:buNone/>
               <a:defRPr sz="1050" b="1">
                 <a:solidFill>
                   <a:srgbClr val="11834A"/>
@@ -6761,7 +6607,6 @@
               </a:defRPr>
             </a:lvl3pPr>
             <a:lvl4pPr algn="l">
-              <a:buNone/>
               <a:defRPr sz="1050" b="1">
                 <a:solidFill>
                   <a:srgbClr val="11834A"/>
@@ -6772,7 +6617,6 @@
               </a:defRPr>
             </a:lvl4pPr>
             <a:lvl5pPr algn="l">
-              <a:buNone/>
               <a:defRPr sz="1050" b="1">
                 <a:solidFill>
                   <a:srgbClr val="11834A"/>
@@ -6783,7 +6627,6 @@
               </a:defRPr>
             </a:lvl5pPr>
             <a:lvl6pPr algn="l">
-              <a:buNone/>
               <a:defRPr sz="1050" b="1">
                 <a:solidFill>
                   <a:srgbClr val="11834A"/>
@@ -6794,7 +6637,6 @@
               </a:defRPr>
             </a:lvl6pPr>
             <a:lvl7pPr algn="l">
-              <a:buNone/>
               <a:defRPr sz="1050" b="1">
                 <a:solidFill>
                   <a:srgbClr val="11834A"/>
@@ -6805,7 +6647,6 @@
               </a:defRPr>
             </a:lvl7pPr>
             <a:lvl8pPr algn="l">
-              <a:buNone/>
               <a:defRPr sz="1050" b="1">
                 <a:solidFill>
                   <a:srgbClr val="11834A"/>
@@ -6816,7 +6657,6 @@
               </a:defRPr>
             </a:lvl8pPr>
             <a:lvl9pPr algn="l">
-              <a:buNone/>
               <a:defRPr sz="1050" b="1">
                 <a:solidFill>
                   <a:srgbClr val="11834A"/>
@@ -6829,7 +6669,6 @@
           </a:lstStyle>
           <a:p xmlns:a="http://schemas.openxmlformats.org/drawingml/2006/main">
             <a:pPr algn="l">
-              <a:buNone/>
               <a:defRPr sz="1050" b="1">
                 <a:solidFill>
                   <a:srgbClr val="11834A"/>
@@ -6895,7 +6734,6 @@
               </a:defRPr>
             </a:defPPr>
             <a:lvl1pPr algn="l">
-              <a:buNone/>
               <a:defRPr sz="1575" b="0">
                 <a:solidFill>
                   <a:srgbClr val="203040"/>
@@ -6906,7 +6744,6 @@
               </a:defRPr>
             </a:lvl1pPr>
             <a:lvl2pPr algn="l">
-              <a:buNone/>
               <a:defRPr sz="1575" b="0">
                 <a:solidFill>
                   <a:srgbClr val="203040"/>
@@ -6917,7 +6754,6 @@
               </a:defRPr>
             </a:lvl2pPr>
             <a:lvl3pPr algn="l">
-              <a:buNone/>
               <a:defRPr sz="1575" b="0">
                 <a:solidFill>
                   <a:srgbClr val="203040"/>
@@ -6928,7 +6764,6 @@
               </a:defRPr>
             </a:lvl3pPr>
             <a:lvl4pPr algn="l">
-              <a:buNone/>
               <a:defRPr sz="1575" b="0">
                 <a:solidFill>
                   <a:srgbClr val="203040"/>
@@ -6939,7 +6774,6 @@
               </a:defRPr>
             </a:lvl4pPr>
             <a:lvl5pPr algn="l">
-              <a:buNone/>
               <a:defRPr sz="1575" b="0">
                 <a:solidFill>
                   <a:srgbClr val="203040"/>
@@ -6950,7 +6784,6 @@
               </a:defRPr>
             </a:lvl5pPr>
             <a:lvl6pPr algn="l">
-              <a:buNone/>
               <a:defRPr sz="1575" b="0">
                 <a:solidFill>
                   <a:srgbClr val="203040"/>
@@ -6961,7 +6794,6 @@
               </a:defRPr>
             </a:lvl6pPr>
             <a:lvl7pPr algn="l">
-              <a:buNone/>
               <a:defRPr sz="1575" b="0">
                 <a:solidFill>
                   <a:srgbClr val="203040"/>
@@ -6972,7 +6804,6 @@
               </a:defRPr>
             </a:lvl7pPr>
             <a:lvl8pPr algn="l">
-              <a:buNone/>
               <a:defRPr sz="1575" b="0">
                 <a:solidFill>
                   <a:srgbClr val="203040"/>
@@ -6983,7 +6814,6 @@
               </a:defRPr>
             </a:lvl8pPr>
             <a:lvl9pPr algn="l">
-              <a:buNone/>
               <a:defRPr sz="1575" b="0">
                 <a:solidFill>
                   <a:srgbClr val="203040"/>
@@ -6996,7 +6826,6 @@
           </a:lstStyle>
           <a:p xmlns:a="http://schemas.openxmlformats.org/drawingml/2006/main">
             <a:pPr algn="l">
-              <a:buNone/>
               <a:defRPr sz="1575" b="0">
                 <a:solidFill>
                   <a:srgbClr val="203040"/>
@@ -7020,7 +6849,6 @@
           </a:p>
           <a:p xmlns:a="http://schemas.openxmlformats.org/drawingml/2006/main">
             <a:pPr algn="l">
-              <a:buNone/>
               <a:defRPr sz="1575" b="0">
                 <a:solidFill>
                   <a:srgbClr val="203040"/>
@@ -7044,7 +6872,6 @@
           </a:p>
           <a:p xmlns:a="http://schemas.openxmlformats.org/drawingml/2006/main">
             <a:pPr algn="l">
-              <a:buNone/>
               <a:defRPr sz="1575" b="0">
                 <a:solidFill>
                   <a:srgbClr val="203040"/>
@@ -7068,7 +6895,6 @@
           </a:p>
           <a:p xmlns:a="http://schemas.openxmlformats.org/drawingml/2006/main">
             <a:pPr algn="l">
-              <a:buNone/>
               <a:defRPr sz="1575" b="0">
                 <a:solidFill>
                   <a:srgbClr val="203040"/>
@@ -7229,7 +7055,6 @@
               </a:defRPr>
             </a:defPPr>
             <a:lvl1pPr algn="l">
-              <a:buNone/>
               <a:defRPr sz="1425" b="1">
                 <a:solidFill>
                   <a:srgbClr val="203040"/>
@@ -7240,7 +7065,6 @@
               </a:defRPr>
             </a:lvl1pPr>
             <a:lvl2pPr algn="l">
-              <a:buNone/>
               <a:defRPr sz="1425" b="1">
                 <a:solidFill>
                   <a:srgbClr val="203040"/>
@@ -7251,7 +7075,6 @@
               </a:defRPr>
             </a:lvl2pPr>
             <a:lvl3pPr algn="l">
-              <a:buNone/>
               <a:defRPr sz="1425" b="1">
                 <a:solidFill>
                   <a:srgbClr val="203040"/>
@@ -7262,7 +7085,6 @@
               </a:defRPr>
             </a:lvl3pPr>
             <a:lvl4pPr algn="l">
-              <a:buNone/>
               <a:defRPr sz="1425" b="1">
                 <a:solidFill>
                   <a:srgbClr val="203040"/>
@@ -7273,7 +7095,6 @@
               </a:defRPr>
             </a:lvl4pPr>
             <a:lvl5pPr algn="l">
-              <a:buNone/>
               <a:defRPr sz="1425" b="1">
                 <a:solidFill>
                   <a:srgbClr val="203040"/>
@@ -7284,7 +7105,6 @@
               </a:defRPr>
             </a:lvl5pPr>
             <a:lvl6pPr algn="l">
-              <a:buNone/>
               <a:defRPr sz="1425" b="1">
                 <a:solidFill>
                   <a:srgbClr val="203040"/>
@@ -7295,7 +7115,6 @@
               </a:defRPr>
             </a:lvl6pPr>
             <a:lvl7pPr algn="l">
-              <a:buNone/>
               <a:defRPr sz="1425" b="1">
                 <a:solidFill>
                   <a:srgbClr val="203040"/>
@@ -7306,7 +7125,6 @@
               </a:defRPr>
             </a:lvl7pPr>
             <a:lvl8pPr algn="l">
-              <a:buNone/>
               <a:defRPr sz="1425" b="1">
                 <a:solidFill>
                   <a:srgbClr val="203040"/>
@@ -7317,7 +7135,6 @@
               </a:defRPr>
             </a:lvl8pPr>
             <a:lvl9pPr algn="l">
-              <a:buNone/>
               <a:defRPr sz="1425" b="1">
                 <a:solidFill>
                   <a:srgbClr val="203040"/>
@@ -7330,7 +7147,6 @@
           </a:lstStyle>
           <a:p xmlns:a="http://schemas.openxmlformats.org/drawingml/2006/main">
             <a:pPr algn="l">
-              <a:buNone/>
               <a:defRPr sz="1425" b="1">
                 <a:solidFill>
                   <a:srgbClr val="203040"/>
@@ -7425,7 +7241,6 @@
               </a:defRPr>
             </a:defPPr>
             <a:lvl1pPr algn="l">
-              <a:buNone/>
               <a:defRPr sz="1050" b="1">
                 <a:solidFill>
                   <a:srgbClr val="BBD0DD"/>
@@ -7436,7 +7251,6 @@
               </a:defRPr>
             </a:lvl1pPr>
             <a:lvl2pPr algn="l">
-              <a:buNone/>
               <a:defRPr sz="1050" b="1">
                 <a:solidFill>
                   <a:srgbClr val="BBD0DD"/>
@@ -7447,7 +7261,6 @@
               </a:defRPr>
             </a:lvl2pPr>
             <a:lvl3pPr algn="l">
-              <a:buNone/>
               <a:defRPr sz="1050" b="1">
                 <a:solidFill>
                   <a:srgbClr val="BBD0DD"/>
@@ -7458,7 +7271,6 @@
               </a:defRPr>
             </a:lvl3pPr>
             <a:lvl4pPr algn="l">
-              <a:buNone/>
               <a:defRPr sz="1050" b="1">
                 <a:solidFill>
                   <a:srgbClr val="BBD0DD"/>
@@ -7469,7 +7281,6 @@
               </a:defRPr>
             </a:lvl4pPr>
             <a:lvl5pPr algn="l">
-              <a:buNone/>
               <a:defRPr sz="1050" b="1">
                 <a:solidFill>
                   <a:srgbClr val="BBD0DD"/>
@@ -7480,7 +7291,6 @@
               </a:defRPr>
             </a:lvl5pPr>
             <a:lvl6pPr algn="l">
-              <a:buNone/>
               <a:defRPr sz="1050" b="1">
                 <a:solidFill>
                   <a:srgbClr val="BBD0DD"/>
@@ -7491,7 +7301,6 @@
               </a:defRPr>
             </a:lvl6pPr>
             <a:lvl7pPr algn="l">
-              <a:buNone/>
               <a:defRPr sz="1050" b="1">
                 <a:solidFill>
                   <a:srgbClr val="BBD0DD"/>
@@ -7502,7 +7311,6 @@
               </a:defRPr>
             </a:lvl7pPr>
             <a:lvl8pPr algn="l">
-              <a:buNone/>
               <a:defRPr sz="1050" b="1">
                 <a:solidFill>
                   <a:srgbClr val="BBD0DD"/>
@@ -7513,7 +7321,6 @@
               </a:defRPr>
             </a:lvl8pPr>
             <a:lvl9pPr algn="l">
-              <a:buNone/>
               <a:defRPr sz="1050" b="1">
                 <a:solidFill>
                   <a:srgbClr val="BBD0DD"/>
@@ -7526,7 +7333,6 @@
           </a:lstStyle>
           <a:p xmlns:a="http://schemas.openxmlformats.org/drawingml/2006/main">
             <a:pPr algn="l">
-              <a:buNone/>
               <a:defRPr sz="1050" b="1">
                 <a:solidFill>
                   <a:srgbClr val="BBD0DD"/>
@@ -7592,7 +7398,6 @@
               </a:defRPr>
             </a:defPPr>
             <a:lvl1pPr algn="l">
-              <a:buNone/>
               <a:defRPr sz="2850" b="1">
                 <a:solidFill>
                   <a:srgbClr val="FFFFFF"/>
@@ -7603,7 +7408,6 @@
               </a:defRPr>
             </a:lvl1pPr>
             <a:lvl2pPr algn="l">
-              <a:buNone/>
               <a:defRPr sz="2850" b="1">
                 <a:solidFill>
                   <a:srgbClr val="FFFFFF"/>
@@ -7614,7 +7418,6 @@
               </a:defRPr>
             </a:lvl2pPr>
             <a:lvl3pPr algn="l">
-              <a:buNone/>
               <a:defRPr sz="2850" b="1">
                 <a:solidFill>
                   <a:srgbClr val="FFFFFF"/>
@@ -7625,7 +7428,6 @@
               </a:defRPr>
             </a:lvl3pPr>
             <a:lvl4pPr algn="l">
-              <a:buNone/>
               <a:defRPr sz="2850" b="1">
                 <a:solidFill>
                   <a:srgbClr val="FFFFFF"/>
@@ -7636,7 +7438,6 @@
               </a:defRPr>
             </a:lvl4pPr>
             <a:lvl5pPr algn="l">
-              <a:buNone/>
               <a:defRPr sz="2850" b="1">
                 <a:solidFill>
                   <a:srgbClr val="FFFFFF"/>
@@ -7647,7 +7448,6 @@
               </a:defRPr>
             </a:lvl5pPr>
             <a:lvl6pPr algn="l">
-              <a:buNone/>
               <a:defRPr sz="2850" b="1">
                 <a:solidFill>
                   <a:srgbClr val="FFFFFF"/>
@@ -7658,7 +7458,6 @@
               </a:defRPr>
             </a:lvl6pPr>
             <a:lvl7pPr algn="l">
-              <a:buNone/>
               <a:defRPr sz="2850" b="1">
                 <a:solidFill>
                   <a:srgbClr val="FFFFFF"/>
@@ -7669,7 +7468,6 @@
               </a:defRPr>
             </a:lvl7pPr>
             <a:lvl8pPr algn="l">
-              <a:buNone/>
               <a:defRPr sz="2850" b="1">
                 <a:solidFill>
                   <a:srgbClr val="FFFFFF"/>
@@ -7680,7 +7478,6 @@
               </a:defRPr>
             </a:lvl8pPr>
             <a:lvl9pPr algn="l">
-              <a:buNone/>
               <a:defRPr sz="2850" b="1">
                 <a:solidFill>
                   <a:srgbClr val="FFFFFF"/>
@@ -7693,7 +7490,6 @@
           </a:lstStyle>
           <a:p xmlns:a="http://schemas.openxmlformats.org/drawingml/2006/main">
             <a:pPr algn="l">
-              <a:buNone/>
               <a:defRPr sz="2850" b="1">
                 <a:solidFill>
                   <a:srgbClr val="FFFFFF"/>
@@ -7790,7 +7586,6 @@
               </a:defRPr>
             </a:defPPr>
             <a:lvl1pPr algn="l">
-              <a:buNone/>
               <a:defRPr sz="900" b="1">
                 <a:solidFill>
                   <a:srgbClr val="AFC7D7"/>
@@ -7801,7 +7596,6 @@
               </a:defRPr>
             </a:lvl1pPr>
             <a:lvl2pPr algn="l">
-              <a:buNone/>
               <a:defRPr sz="900" b="1">
                 <a:solidFill>
                   <a:srgbClr val="AFC7D7"/>
@@ -7812,7 +7606,6 @@
               </a:defRPr>
             </a:lvl2pPr>
             <a:lvl3pPr algn="l">
-              <a:buNone/>
               <a:defRPr sz="900" b="1">
                 <a:solidFill>
                   <a:srgbClr val="AFC7D7"/>
@@ -7823,7 +7616,6 @@
               </a:defRPr>
             </a:lvl3pPr>
             <a:lvl4pPr algn="l">
-              <a:buNone/>
               <a:defRPr sz="900" b="1">
                 <a:solidFill>
                   <a:srgbClr val="AFC7D7"/>
@@ -7834,7 +7626,6 @@
               </a:defRPr>
             </a:lvl4pPr>
             <a:lvl5pPr algn="l">
-              <a:buNone/>
               <a:defRPr sz="900" b="1">
                 <a:solidFill>
                   <a:srgbClr val="AFC7D7"/>
@@ -7845,7 +7636,6 @@
               </a:defRPr>
             </a:lvl5pPr>
             <a:lvl6pPr algn="l">
-              <a:buNone/>
               <a:defRPr sz="900" b="1">
                 <a:solidFill>
                   <a:srgbClr val="AFC7D7"/>
@@ -7856,7 +7646,6 @@
               </a:defRPr>
             </a:lvl6pPr>
             <a:lvl7pPr algn="l">
-              <a:buNone/>
               <a:defRPr sz="900" b="1">
                 <a:solidFill>
                   <a:srgbClr val="AFC7D7"/>
@@ -7867,7 +7656,6 @@
               </a:defRPr>
             </a:lvl7pPr>
             <a:lvl8pPr algn="l">
-              <a:buNone/>
               <a:defRPr sz="900" b="1">
                 <a:solidFill>
                   <a:srgbClr val="AFC7D7"/>
@@ -7878,7 +7666,6 @@
               </a:defRPr>
             </a:lvl8pPr>
             <a:lvl9pPr algn="l">
-              <a:buNone/>
               <a:defRPr sz="900" b="1">
                 <a:solidFill>
                   <a:srgbClr val="AFC7D7"/>
@@ -7891,7 +7678,6 @@
           </a:lstStyle>
           <a:p xmlns:a="http://schemas.openxmlformats.org/drawingml/2006/main">
             <a:pPr algn="l">
-              <a:buNone/>
               <a:defRPr sz="900" b="1">
                 <a:solidFill>
                   <a:srgbClr val="AFC7D7"/>
@@ -7957,7 +7743,6 @@
               </a:defRPr>
             </a:defPPr>
             <a:lvl1pPr algn="r">
-              <a:buNone/>
               <a:defRPr sz="900" b="0">
                 <a:solidFill>
                   <a:srgbClr val="AFC7D7"/>
@@ -7968,7 +7753,6 @@
               </a:defRPr>
             </a:lvl1pPr>
             <a:lvl2pPr algn="r">
-              <a:buNone/>
               <a:defRPr sz="900" b="0">
                 <a:solidFill>
                   <a:srgbClr val="AFC7D7"/>
@@ -7979,7 +7763,6 @@
               </a:defRPr>
             </a:lvl2pPr>
             <a:lvl3pPr algn="r">
-              <a:buNone/>
               <a:defRPr sz="900" b="0">
                 <a:solidFill>
                   <a:srgbClr val="AFC7D7"/>
@@ -7990,7 +7773,6 @@
               </a:defRPr>
             </a:lvl3pPr>
             <a:lvl4pPr algn="r">
-              <a:buNone/>
               <a:defRPr sz="900" b="0">
                 <a:solidFill>
                   <a:srgbClr val="AFC7D7"/>
@@ -8001,7 +7783,6 @@
               </a:defRPr>
             </a:lvl4pPr>
             <a:lvl5pPr algn="r">
-              <a:buNone/>
               <a:defRPr sz="900" b="0">
                 <a:solidFill>
                   <a:srgbClr val="AFC7D7"/>
@@ -8012,7 +7793,6 @@
               </a:defRPr>
             </a:lvl5pPr>
             <a:lvl6pPr algn="r">
-              <a:buNone/>
               <a:defRPr sz="900" b="0">
                 <a:solidFill>
                   <a:srgbClr val="AFC7D7"/>
@@ -8023,7 +7803,6 @@
               </a:defRPr>
             </a:lvl6pPr>
             <a:lvl7pPr algn="r">
-              <a:buNone/>
               <a:defRPr sz="900" b="0">
                 <a:solidFill>
                   <a:srgbClr val="AFC7D7"/>
@@ -8034,7 +7813,6 @@
               </a:defRPr>
             </a:lvl7pPr>
             <a:lvl8pPr algn="r">
-              <a:buNone/>
               <a:defRPr sz="900" b="0">
                 <a:solidFill>
                   <a:srgbClr val="AFC7D7"/>
@@ -8045,7 +7823,6 @@
               </a:defRPr>
             </a:lvl8pPr>
             <a:lvl9pPr algn="r">
-              <a:buNone/>
               <a:defRPr sz="900" b="0">
                 <a:solidFill>
                   <a:srgbClr val="AFC7D7"/>
@@ -8058,7 +7835,6 @@
           </a:lstStyle>
           <a:p xmlns:a="http://schemas.openxmlformats.org/drawingml/2006/main">
             <a:pPr algn="r">
-              <a:buNone/>
               <a:defRPr sz="900" b="0">
                 <a:solidFill>
                   <a:srgbClr val="AFC7D7"/>
@@ -8157,7 +7933,6 @@
               </a:defRPr>
             </a:defPPr>
             <a:lvl1pPr algn="l">
-              <a:buNone/>
               <a:defRPr sz="1050" b="1">
                 <a:solidFill>
                   <a:srgbClr val="BBD0DD"/>
@@ -8168,7 +7943,6 @@
               </a:defRPr>
             </a:lvl1pPr>
             <a:lvl2pPr algn="l">
-              <a:buNone/>
               <a:defRPr sz="1050" b="1">
                 <a:solidFill>
                   <a:srgbClr val="BBD0DD"/>
@@ -8179,7 +7953,6 @@
               </a:defRPr>
             </a:lvl2pPr>
             <a:lvl3pPr algn="l">
-              <a:buNone/>
               <a:defRPr sz="1050" b="1">
                 <a:solidFill>
                   <a:srgbClr val="BBD0DD"/>
@@ -8190,7 +7963,6 @@
               </a:defRPr>
             </a:lvl3pPr>
             <a:lvl4pPr algn="l">
-              <a:buNone/>
               <a:defRPr sz="1050" b="1">
                 <a:solidFill>
                   <a:srgbClr val="BBD0DD"/>
@@ -8201,7 +7973,6 @@
               </a:defRPr>
             </a:lvl4pPr>
             <a:lvl5pPr algn="l">
-              <a:buNone/>
               <a:defRPr sz="1050" b="1">
                 <a:solidFill>
                   <a:srgbClr val="BBD0DD"/>
@@ -8212,7 +7983,6 @@
               </a:defRPr>
             </a:lvl5pPr>
             <a:lvl6pPr algn="l">
-              <a:buNone/>
               <a:defRPr sz="1050" b="1">
                 <a:solidFill>
                   <a:srgbClr val="BBD0DD"/>
@@ -8223,7 +7993,6 @@
               </a:defRPr>
             </a:lvl6pPr>
             <a:lvl7pPr algn="l">
-              <a:buNone/>
               <a:defRPr sz="1050" b="1">
                 <a:solidFill>
                   <a:srgbClr val="BBD0DD"/>
@@ -8234,7 +8003,6 @@
               </a:defRPr>
             </a:lvl7pPr>
             <a:lvl8pPr algn="l">
-              <a:buNone/>
               <a:defRPr sz="1050" b="1">
                 <a:solidFill>
                   <a:srgbClr val="BBD0DD"/>
@@ -8245,7 +8013,6 @@
               </a:defRPr>
             </a:lvl8pPr>
             <a:lvl9pPr algn="l">
-              <a:buNone/>
               <a:defRPr sz="1050" b="1">
                 <a:solidFill>
                   <a:srgbClr val="BBD0DD"/>
@@ -8258,7 +8025,6 @@
           </a:lstStyle>
           <a:p xmlns:a="http://schemas.openxmlformats.org/drawingml/2006/main">
             <a:pPr algn="l">
-              <a:buNone/>
               <a:defRPr sz="1050" b="1">
                 <a:solidFill>
                   <a:srgbClr val="BBD0DD"/>
@@ -8324,7 +8090,6 @@
               </a:defRPr>
             </a:defPPr>
             <a:lvl1pPr algn="l">
-              <a:buNone/>
               <a:defRPr sz="1875" b="1">
                 <a:solidFill>
                   <a:srgbClr val="FFFFFF"/>
@@ -8335,7 +8100,6 @@
               </a:defRPr>
             </a:lvl1pPr>
             <a:lvl2pPr algn="l">
-              <a:buNone/>
               <a:defRPr sz="1875" b="1">
                 <a:solidFill>
                   <a:srgbClr val="FFFFFF"/>
@@ -8346,7 +8110,6 @@
               </a:defRPr>
             </a:lvl2pPr>
             <a:lvl3pPr algn="l">
-              <a:buNone/>
               <a:defRPr sz="1875" b="1">
                 <a:solidFill>
                   <a:srgbClr val="FFFFFF"/>
@@ -8357,7 +8120,6 @@
               </a:defRPr>
             </a:lvl3pPr>
             <a:lvl4pPr algn="l">
-              <a:buNone/>
               <a:defRPr sz="1875" b="1">
                 <a:solidFill>
                   <a:srgbClr val="FFFFFF"/>
@@ -8368,7 +8130,6 @@
               </a:defRPr>
             </a:lvl4pPr>
             <a:lvl5pPr algn="l">
-              <a:buNone/>
               <a:defRPr sz="1875" b="1">
                 <a:solidFill>
                   <a:srgbClr val="FFFFFF"/>
@@ -8379,7 +8140,6 @@
               </a:defRPr>
             </a:lvl5pPr>
             <a:lvl6pPr algn="l">
-              <a:buNone/>
               <a:defRPr sz="1875" b="1">
                 <a:solidFill>
                   <a:srgbClr val="FFFFFF"/>
@@ -8390,7 +8150,6 @@
               </a:defRPr>
             </a:lvl6pPr>
             <a:lvl7pPr algn="l">
-              <a:buNone/>
               <a:defRPr sz="1875" b="1">
                 <a:solidFill>
                   <a:srgbClr val="FFFFFF"/>
@@ -8401,7 +8160,6 @@
               </a:defRPr>
             </a:lvl7pPr>
             <a:lvl8pPr algn="l">
-              <a:buNone/>
               <a:defRPr sz="1875" b="1">
                 <a:solidFill>
                   <a:srgbClr val="FFFFFF"/>
@@ -8412,7 +8170,6 @@
               </a:defRPr>
             </a:lvl8pPr>
             <a:lvl9pPr algn="l">
-              <a:buNone/>
               <a:defRPr sz="1875" b="1">
                 <a:solidFill>
                   <a:srgbClr val="FFFFFF"/>
@@ -8425,7 +8182,6 @@
           </a:lstStyle>
           <a:p xmlns:a="http://schemas.openxmlformats.org/drawingml/2006/main">
             <a:pPr algn="l">
-              <a:buNone/>
               <a:defRPr sz="1875" b="1">
                 <a:solidFill>
                   <a:srgbClr val="FFFFFF"/>
@@ -8524,7 +8280,6 @@
               </a:defRPr>
             </a:defPPr>
             <a:lvl1pPr algn="l">
-              <a:buNone/>
               <a:defRPr sz="1350" b="0">
                 <a:solidFill>
                   <a:srgbClr val="E3EDF2"/>
@@ -8535,7 +8290,6 @@
               </a:defRPr>
             </a:lvl1pPr>
             <a:lvl2pPr algn="l">
-              <a:buNone/>
               <a:defRPr sz="1350" b="0">
                 <a:solidFill>
                   <a:srgbClr val="E3EDF2"/>
@@ -8546,7 +8300,6 @@
               </a:defRPr>
             </a:lvl2pPr>
             <a:lvl3pPr algn="l">
-              <a:buNone/>
               <a:defRPr sz="1350" b="0">
                 <a:solidFill>
                   <a:srgbClr val="E3EDF2"/>
@@ -8557,7 +8310,6 @@
               </a:defRPr>
             </a:lvl3pPr>
             <a:lvl4pPr algn="l">
-              <a:buNone/>
               <a:defRPr sz="1350" b="0">
                 <a:solidFill>
                   <a:srgbClr val="E3EDF2"/>
@@ -8568,7 +8320,6 @@
               </a:defRPr>
             </a:lvl4pPr>
             <a:lvl5pPr algn="l">
-              <a:buNone/>
               <a:defRPr sz="1350" b="0">
                 <a:solidFill>
                   <a:srgbClr val="E3EDF2"/>
@@ -8579,7 +8330,6 @@
               </a:defRPr>
             </a:lvl5pPr>
             <a:lvl6pPr algn="l">
-              <a:buNone/>
               <a:defRPr sz="1350" b="0">
                 <a:solidFill>
                   <a:srgbClr val="E3EDF2"/>
@@ -8590,7 +8340,6 @@
               </a:defRPr>
             </a:lvl6pPr>
             <a:lvl7pPr algn="l">
-              <a:buNone/>
               <a:defRPr sz="1350" b="0">
                 <a:solidFill>
                   <a:srgbClr val="E3EDF2"/>
@@ -8601,7 +8350,6 @@
               </a:defRPr>
             </a:lvl7pPr>
             <a:lvl8pPr algn="l">
-              <a:buNone/>
               <a:defRPr sz="1350" b="0">
                 <a:solidFill>
                   <a:srgbClr val="E3EDF2"/>
@@ -8612,7 +8360,6 @@
               </a:defRPr>
             </a:lvl8pPr>
             <a:lvl9pPr algn="l">
-              <a:buNone/>
               <a:defRPr sz="1350" b="0">
                 <a:solidFill>
                   <a:srgbClr val="E3EDF2"/>
@@ -8625,7 +8372,6 @@
           </a:lstStyle>
           <a:p xmlns:a="http://schemas.openxmlformats.org/drawingml/2006/main">
             <a:pPr algn="l">
-              <a:buNone/>
               <a:defRPr sz="1350" b="0">
                 <a:solidFill>
                   <a:srgbClr val="E3EDF2"/>
@@ -8724,7 +8470,6 @@
               </a:defRPr>
             </a:defPPr>
             <a:lvl1pPr algn="l">
-              <a:buNone/>
               <a:defRPr sz="1350" b="0">
                 <a:solidFill>
                   <a:srgbClr val="E3EDF2"/>
@@ -8735,7 +8480,6 @@
               </a:defRPr>
             </a:lvl1pPr>
             <a:lvl2pPr algn="l">
-              <a:buNone/>
               <a:defRPr sz="1350" b="0">
                 <a:solidFill>
                   <a:srgbClr val="E3EDF2"/>
@@ -8746,7 +8490,6 @@
               </a:defRPr>
             </a:lvl2pPr>
             <a:lvl3pPr algn="l">
-              <a:buNone/>
               <a:defRPr sz="1350" b="0">
                 <a:solidFill>
                   <a:srgbClr val="E3EDF2"/>
@@ -8757,7 +8500,6 @@
               </a:defRPr>
             </a:lvl3pPr>
             <a:lvl4pPr algn="l">
-              <a:buNone/>
               <a:defRPr sz="1350" b="0">
                 <a:solidFill>
                   <a:srgbClr val="E3EDF2"/>
@@ -8768,7 +8510,6 @@
               </a:defRPr>
             </a:lvl4pPr>
             <a:lvl5pPr algn="l">
-              <a:buNone/>
               <a:defRPr sz="1350" b="0">
                 <a:solidFill>
                   <a:srgbClr val="E3EDF2"/>
@@ -8779,7 +8520,6 @@
               </a:defRPr>
             </a:lvl5pPr>
             <a:lvl6pPr algn="l">
-              <a:buNone/>
               <a:defRPr sz="1350" b="0">
                 <a:solidFill>
                   <a:srgbClr val="E3EDF2"/>
@@ -8790,7 +8530,6 @@
               </a:defRPr>
             </a:lvl6pPr>
             <a:lvl7pPr algn="l">
-              <a:buNone/>
               <a:defRPr sz="1350" b="0">
                 <a:solidFill>
                   <a:srgbClr val="E3EDF2"/>
@@ -8801,7 +8540,6 @@
               </a:defRPr>
             </a:lvl7pPr>
             <a:lvl8pPr algn="l">
-              <a:buNone/>
               <a:defRPr sz="1350" b="0">
                 <a:solidFill>
                   <a:srgbClr val="E3EDF2"/>
@@ -8812,7 +8550,6 @@
               </a:defRPr>
             </a:lvl8pPr>
             <a:lvl9pPr algn="l">
-              <a:buNone/>
               <a:defRPr sz="1350" b="0">
                 <a:solidFill>
                   <a:srgbClr val="E3EDF2"/>
@@ -8825,7 +8562,6 @@
           </a:lstStyle>
           <a:p xmlns:a="http://schemas.openxmlformats.org/drawingml/2006/main">
             <a:pPr algn="l">
-              <a:buNone/>
               <a:defRPr sz="1350" b="0">
                 <a:solidFill>
                   <a:srgbClr val="E3EDF2"/>
@@ -8924,7 +8660,6 @@
               </a:defRPr>
             </a:defPPr>
             <a:lvl1pPr algn="l">
-              <a:buNone/>
               <a:defRPr sz="1350" b="0">
                 <a:solidFill>
                   <a:srgbClr val="E3EDF2"/>
@@ -8935,7 +8670,6 @@
               </a:defRPr>
             </a:lvl1pPr>
             <a:lvl2pPr algn="l">
-              <a:buNone/>
               <a:defRPr sz="1350" b="0">
                 <a:solidFill>
                   <a:srgbClr val="E3EDF2"/>
@@ -8946,7 +8680,6 @@
               </a:defRPr>
             </a:lvl2pPr>
             <a:lvl3pPr algn="l">
-              <a:buNone/>
               <a:defRPr sz="1350" b="0">
                 <a:solidFill>
                   <a:srgbClr val="E3EDF2"/>
@@ -8957,7 +8690,6 @@
               </a:defRPr>
             </a:lvl3pPr>
             <a:lvl4pPr algn="l">
-              <a:buNone/>
               <a:defRPr sz="1350" b="0">
                 <a:solidFill>
                   <a:srgbClr val="E3EDF2"/>
@@ -8968,7 +8700,6 @@
               </a:defRPr>
             </a:lvl4pPr>
             <a:lvl5pPr algn="l">
-              <a:buNone/>
               <a:defRPr sz="1350" b="0">
                 <a:solidFill>
                   <a:srgbClr val="E3EDF2"/>
@@ -8979,7 +8710,6 @@
               </a:defRPr>
             </a:lvl5pPr>
             <a:lvl6pPr algn="l">
-              <a:buNone/>
               <a:defRPr sz="1350" b="0">
                 <a:solidFill>
                   <a:srgbClr val="E3EDF2"/>
@@ -8990,7 +8720,6 @@
               </a:defRPr>
             </a:lvl6pPr>
             <a:lvl7pPr algn="l">
-              <a:buNone/>
               <a:defRPr sz="1350" b="0">
                 <a:solidFill>
                   <a:srgbClr val="E3EDF2"/>
@@ -9001,7 +8730,6 @@
               </a:defRPr>
             </a:lvl7pPr>
             <a:lvl8pPr algn="l">
-              <a:buNone/>
               <a:defRPr sz="1350" b="0">
                 <a:solidFill>
                   <a:srgbClr val="E3EDF2"/>
@@ -9012,7 +8740,6 @@
               </a:defRPr>
             </a:lvl8pPr>
             <a:lvl9pPr algn="l">
-              <a:buNone/>
               <a:defRPr sz="1350" b="0">
                 <a:solidFill>
                   <a:srgbClr val="E3EDF2"/>
@@ -9025,7 +8752,6 @@
           </a:lstStyle>
           <a:p xmlns:a="http://schemas.openxmlformats.org/drawingml/2006/main">
             <a:pPr algn="l">
-              <a:buNone/>
               <a:defRPr sz="1350" b="0">
                 <a:solidFill>
                   <a:srgbClr val="E3EDF2"/>
@@ -9044,7 +8770,7 @@
                 <a:ea typeface="Arial"/>
                 <a:cs typeface="Arial"/>
               </a:rPr>
-              <a:t>Tutor includes verified lecture and notes snippets</a:t>
+              <a:t>Ask for hints grounded in course material</a:t>
             </a:r>
           </a:p>
         </p:txBody>
@@ -9124,7 +8850,6 @@
               </a:defRPr>
             </a:defPPr>
             <a:lvl1pPr algn="l">
-              <a:buNone/>
               <a:defRPr sz="1050" b="1">
                 <a:solidFill>
                   <a:srgbClr val="BBD0DD"/>
@@ -9135,7 +8860,6 @@
               </a:defRPr>
             </a:lvl1pPr>
             <a:lvl2pPr algn="l">
-              <a:buNone/>
               <a:defRPr sz="1050" b="1">
                 <a:solidFill>
                   <a:srgbClr val="BBD0DD"/>
@@ -9146,7 +8870,6 @@
               </a:defRPr>
             </a:lvl2pPr>
             <a:lvl3pPr algn="l">
-              <a:buNone/>
               <a:defRPr sz="1050" b="1">
                 <a:solidFill>
                   <a:srgbClr val="BBD0DD"/>
@@ -9157,7 +8880,6 @@
               </a:defRPr>
             </a:lvl3pPr>
             <a:lvl4pPr algn="l">
-              <a:buNone/>
               <a:defRPr sz="1050" b="1">
                 <a:solidFill>
                   <a:srgbClr val="BBD0DD"/>
@@ -9168,7 +8890,6 @@
               </a:defRPr>
             </a:lvl4pPr>
             <a:lvl5pPr algn="l">
-              <a:buNone/>
               <a:defRPr sz="1050" b="1">
                 <a:solidFill>
                   <a:srgbClr val="BBD0DD"/>
@@ -9179,7 +8900,6 @@
               </a:defRPr>
             </a:lvl5pPr>
             <a:lvl6pPr algn="l">
-              <a:buNone/>
               <a:defRPr sz="1050" b="1">
                 <a:solidFill>
                   <a:srgbClr val="BBD0DD"/>
@@ -9190,7 +8910,6 @@
               </a:defRPr>
             </a:lvl6pPr>
             <a:lvl7pPr algn="l">
-              <a:buNone/>
               <a:defRPr sz="1050" b="1">
                 <a:solidFill>
                   <a:srgbClr val="BBD0DD"/>
@@ -9201,7 +8920,6 @@
               </a:defRPr>
             </a:lvl7pPr>
             <a:lvl8pPr algn="l">
-              <a:buNone/>
               <a:defRPr sz="1050" b="1">
                 <a:solidFill>
                   <a:srgbClr val="BBD0DD"/>
@@ -9212,7 +8930,6 @@
               </a:defRPr>
             </a:lvl8pPr>
             <a:lvl9pPr algn="l">
-              <a:buNone/>
               <a:defRPr sz="1050" b="1">
                 <a:solidFill>
                   <a:srgbClr val="BBD0DD"/>
@@ -9225,7 +8942,6 @@
           </a:lstStyle>
           <a:p xmlns:a="http://schemas.openxmlformats.org/drawingml/2006/main">
             <a:pPr algn="l">
-              <a:buNone/>
               <a:defRPr sz="1050" b="1">
                 <a:solidFill>
                   <a:srgbClr val="BBD0DD"/>
@@ -9291,7 +9007,6 @@
               </a:defRPr>
             </a:defPPr>
             <a:lvl1pPr algn="l">
-              <a:buNone/>
               <a:defRPr sz="1875" b="1">
                 <a:solidFill>
                   <a:srgbClr val="FFFFFF"/>
@@ -9302,7 +9017,6 @@
               </a:defRPr>
             </a:lvl1pPr>
             <a:lvl2pPr algn="l">
-              <a:buNone/>
               <a:defRPr sz="1875" b="1">
                 <a:solidFill>
                   <a:srgbClr val="FFFFFF"/>
@@ -9313,7 +9027,6 @@
               </a:defRPr>
             </a:lvl2pPr>
             <a:lvl3pPr algn="l">
-              <a:buNone/>
               <a:defRPr sz="1875" b="1">
                 <a:solidFill>
                   <a:srgbClr val="FFFFFF"/>
@@ -9324,7 +9037,6 @@
               </a:defRPr>
             </a:lvl3pPr>
             <a:lvl4pPr algn="l">
-              <a:buNone/>
               <a:defRPr sz="1875" b="1">
                 <a:solidFill>
                   <a:srgbClr val="FFFFFF"/>
@@ -9335,7 +9047,6 @@
               </a:defRPr>
             </a:lvl4pPr>
             <a:lvl5pPr algn="l">
-              <a:buNone/>
               <a:defRPr sz="1875" b="1">
                 <a:solidFill>
                   <a:srgbClr val="FFFFFF"/>
@@ -9346,7 +9057,6 @@
               </a:defRPr>
             </a:lvl5pPr>
             <a:lvl6pPr algn="l">
-              <a:buNone/>
               <a:defRPr sz="1875" b="1">
                 <a:solidFill>
                   <a:srgbClr val="FFFFFF"/>
@@ -9357,7 +9067,6 @@
               </a:defRPr>
             </a:lvl6pPr>
             <a:lvl7pPr algn="l">
-              <a:buNone/>
               <a:defRPr sz="1875" b="1">
                 <a:solidFill>
                   <a:srgbClr val="FFFFFF"/>
@@ -9368,7 +9077,6 @@
               </a:defRPr>
             </a:lvl7pPr>
             <a:lvl8pPr algn="l">
-              <a:buNone/>
               <a:defRPr sz="1875" b="1">
                 <a:solidFill>
                   <a:srgbClr val="FFFFFF"/>
@@ -9379,7 +9087,6 @@
               </a:defRPr>
             </a:lvl8pPr>
             <a:lvl9pPr algn="l">
-              <a:buNone/>
               <a:defRPr sz="1875" b="1">
                 <a:solidFill>
                   <a:srgbClr val="FFFFFF"/>
@@ -9392,7 +9099,6 @@
           </a:lstStyle>
           <a:p xmlns:a="http://schemas.openxmlformats.org/drawingml/2006/main">
             <a:pPr algn="l">
-              <a:buNone/>
               <a:defRPr sz="1875" b="1">
                 <a:solidFill>
                   <a:srgbClr val="FFFFFF"/>
@@ -9491,7 +9197,6 @@
               </a:defRPr>
             </a:defPPr>
             <a:lvl1pPr algn="l">
-              <a:buNone/>
               <a:defRPr sz="1350" b="0">
                 <a:solidFill>
                   <a:srgbClr val="E3EDF2"/>
@@ -9502,7 +9207,6 @@
               </a:defRPr>
             </a:lvl1pPr>
             <a:lvl2pPr algn="l">
-              <a:buNone/>
               <a:defRPr sz="1350" b="0">
                 <a:solidFill>
                   <a:srgbClr val="E3EDF2"/>
@@ -9513,7 +9217,6 @@
               </a:defRPr>
             </a:lvl2pPr>
             <a:lvl3pPr algn="l">
-              <a:buNone/>
               <a:defRPr sz="1350" b="0">
                 <a:solidFill>
                   <a:srgbClr val="E3EDF2"/>
@@ -9524,7 +9227,6 @@
               </a:defRPr>
             </a:lvl3pPr>
             <a:lvl4pPr algn="l">
-              <a:buNone/>
               <a:defRPr sz="1350" b="0">
                 <a:solidFill>
                   <a:srgbClr val="E3EDF2"/>
@@ -9535,7 +9237,6 @@
               </a:defRPr>
             </a:lvl4pPr>
             <a:lvl5pPr algn="l">
-              <a:buNone/>
               <a:defRPr sz="1350" b="0">
                 <a:solidFill>
                   <a:srgbClr val="E3EDF2"/>
@@ -9546,7 +9247,6 @@
               </a:defRPr>
             </a:lvl5pPr>
             <a:lvl6pPr algn="l">
-              <a:buNone/>
               <a:defRPr sz="1350" b="0">
                 <a:solidFill>
                   <a:srgbClr val="E3EDF2"/>
@@ -9557,7 +9257,6 @@
               </a:defRPr>
             </a:lvl6pPr>
             <a:lvl7pPr algn="l">
-              <a:buNone/>
               <a:defRPr sz="1350" b="0">
                 <a:solidFill>
                   <a:srgbClr val="E3EDF2"/>
@@ -9568,7 +9267,6 @@
               </a:defRPr>
             </a:lvl7pPr>
             <a:lvl8pPr algn="l">
-              <a:buNone/>
               <a:defRPr sz="1350" b="0">
                 <a:solidFill>
                   <a:srgbClr val="E3EDF2"/>
@@ -9579,7 +9277,6 @@
               </a:defRPr>
             </a:lvl8pPr>
             <a:lvl9pPr algn="l">
-              <a:buNone/>
               <a:defRPr sz="1350" b="0">
                 <a:solidFill>
                   <a:srgbClr val="E3EDF2"/>
@@ -9592,7 +9289,6 @@
           </a:lstStyle>
           <a:p xmlns:a="http://schemas.openxmlformats.org/drawingml/2006/main">
             <a:pPr algn="l">
-              <a:buNone/>
               <a:defRPr sz="1350" b="0">
                 <a:solidFill>
                   <a:srgbClr val="E3EDF2"/>
@@ -9691,7 +9387,6 @@
               </a:defRPr>
             </a:defPPr>
             <a:lvl1pPr algn="l">
-              <a:buNone/>
               <a:defRPr sz="1350" b="0">
                 <a:solidFill>
                   <a:srgbClr val="E3EDF2"/>
@@ -9702,7 +9397,6 @@
               </a:defRPr>
             </a:lvl1pPr>
             <a:lvl2pPr algn="l">
-              <a:buNone/>
               <a:defRPr sz="1350" b="0">
                 <a:solidFill>
                   <a:srgbClr val="E3EDF2"/>
@@ -9713,7 +9407,6 @@
               </a:defRPr>
             </a:lvl2pPr>
             <a:lvl3pPr algn="l">
-              <a:buNone/>
               <a:defRPr sz="1350" b="0">
                 <a:solidFill>
                   <a:srgbClr val="E3EDF2"/>
@@ -9724,7 +9417,6 @@
               </a:defRPr>
             </a:lvl3pPr>
             <a:lvl4pPr algn="l">
-              <a:buNone/>
               <a:defRPr sz="1350" b="0">
                 <a:solidFill>
                   <a:srgbClr val="E3EDF2"/>
@@ -9735,7 +9427,6 @@
               </a:defRPr>
             </a:lvl4pPr>
             <a:lvl5pPr algn="l">
-              <a:buNone/>
               <a:defRPr sz="1350" b="0">
                 <a:solidFill>
                   <a:srgbClr val="E3EDF2"/>
@@ -9746,7 +9437,6 @@
               </a:defRPr>
             </a:lvl5pPr>
             <a:lvl6pPr algn="l">
-              <a:buNone/>
               <a:defRPr sz="1350" b="0">
                 <a:solidFill>
                   <a:srgbClr val="E3EDF2"/>
@@ -9757,7 +9447,6 @@
               </a:defRPr>
             </a:lvl6pPr>
             <a:lvl7pPr algn="l">
-              <a:buNone/>
               <a:defRPr sz="1350" b="0">
                 <a:solidFill>
                   <a:srgbClr val="E3EDF2"/>
@@ -9768,7 +9457,6 @@
               </a:defRPr>
             </a:lvl7pPr>
             <a:lvl8pPr algn="l">
-              <a:buNone/>
               <a:defRPr sz="1350" b="0">
                 <a:solidFill>
                   <a:srgbClr val="E3EDF2"/>
@@ -9779,7 +9467,6 @@
               </a:defRPr>
             </a:lvl8pPr>
             <a:lvl9pPr algn="l">
-              <a:buNone/>
               <a:defRPr sz="1350" b="0">
                 <a:solidFill>
                   <a:srgbClr val="E3EDF2"/>
@@ -9792,7 +9479,6 @@
           </a:lstStyle>
           <a:p xmlns:a="http://schemas.openxmlformats.org/drawingml/2006/main">
             <a:pPr algn="l">
-              <a:buNone/>
               <a:defRPr sz="1350" b="0">
                 <a:solidFill>
                   <a:srgbClr val="E3EDF2"/>
@@ -9891,7 +9577,6 @@
               </a:defRPr>
             </a:defPPr>
             <a:lvl1pPr algn="l">
-              <a:buNone/>
               <a:defRPr sz="1350" b="0">
                 <a:solidFill>
                   <a:srgbClr val="E3EDF2"/>
@@ -9902,7 +9587,6 @@
               </a:defRPr>
             </a:lvl1pPr>
             <a:lvl2pPr algn="l">
-              <a:buNone/>
               <a:defRPr sz="1350" b="0">
                 <a:solidFill>
                   <a:srgbClr val="E3EDF2"/>
@@ -9913,7 +9597,6 @@
               </a:defRPr>
             </a:lvl2pPr>
             <a:lvl3pPr algn="l">
-              <a:buNone/>
               <a:defRPr sz="1350" b="0">
                 <a:solidFill>
                   <a:srgbClr val="E3EDF2"/>
@@ -9924,7 +9607,6 @@
               </a:defRPr>
             </a:lvl3pPr>
             <a:lvl4pPr algn="l">
-              <a:buNone/>
               <a:defRPr sz="1350" b="0">
                 <a:solidFill>
                   <a:srgbClr val="E3EDF2"/>
@@ -9935,7 +9617,6 @@
               </a:defRPr>
             </a:lvl4pPr>
             <a:lvl5pPr algn="l">
-              <a:buNone/>
               <a:defRPr sz="1350" b="0">
                 <a:solidFill>
                   <a:srgbClr val="E3EDF2"/>
@@ -9946,7 +9627,6 @@
               </a:defRPr>
             </a:lvl5pPr>
             <a:lvl6pPr algn="l">
-              <a:buNone/>
               <a:defRPr sz="1350" b="0">
                 <a:solidFill>
                   <a:srgbClr val="E3EDF2"/>
@@ -9957,7 +9637,6 @@
               </a:defRPr>
             </a:lvl6pPr>
             <a:lvl7pPr algn="l">
-              <a:buNone/>
               <a:defRPr sz="1350" b="0">
                 <a:solidFill>
                   <a:srgbClr val="E3EDF2"/>
@@ -9968,7 +9647,6 @@
               </a:defRPr>
             </a:lvl7pPr>
             <a:lvl8pPr algn="l">
-              <a:buNone/>
               <a:defRPr sz="1350" b="0">
                 <a:solidFill>
                   <a:srgbClr val="E3EDF2"/>
@@ -9979,7 +9657,6 @@
               </a:defRPr>
             </a:lvl8pPr>
             <a:lvl9pPr algn="l">
-              <a:buNone/>
               <a:defRPr sz="1350" b="0">
                 <a:solidFill>
                   <a:srgbClr val="E3EDF2"/>
@@ -9992,7 +9669,6 @@
           </a:lstStyle>
           <a:p xmlns:a="http://schemas.openxmlformats.org/drawingml/2006/main">
             <a:pPr algn="l">
-              <a:buNone/>
               <a:defRPr sz="1350" b="0">
                 <a:solidFill>
                   <a:srgbClr val="E3EDF2"/>
@@ -10058,7 +9734,6 @@
               </a:defRPr>
             </a:defPPr>
             <a:lvl1pPr algn="ctr">
-              <a:buNone/>
               <a:defRPr sz="1350" b="0">
                 <a:solidFill>
                   <a:srgbClr val="DCE8EE"/>
@@ -10069,7 +9744,6 @@
               </a:defRPr>
             </a:lvl1pPr>
             <a:lvl2pPr algn="ctr">
-              <a:buNone/>
               <a:defRPr sz="1350" b="0">
                 <a:solidFill>
                   <a:srgbClr val="DCE8EE"/>
@@ -10080,7 +9754,6 @@
               </a:defRPr>
             </a:lvl2pPr>
             <a:lvl3pPr algn="ctr">
-              <a:buNone/>
               <a:defRPr sz="1350" b="0">
                 <a:solidFill>
                   <a:srgbClr val="DCE8EE"/>
@@ -10091,7 +9764,6 @@
               </a:defRPr>
             </a:lvl3pPr>
             <a:lvl4pPr algn="ctr">
-              <a:buNone/>
               <a:defRPr sz="1350" b="0">
                 <a:solidFill>
                   <a:srgbClr val="DCE8EE"/>
@@ -10102,7 +9774,6 @@
               </a:defRPr>
             </a:lvl4pPr>
             <a:lvl5pPr algn="ctr">
-              <a:buNone/>
               <a:defRPr sz="1350" b="0">
                 <a:solidFill>
                   <a:srgbClr val="DCE8EE"/>
@@ -10113,7 +9784,6 @@
               </a:defRPr>
             </a:lvl5pPr>
             <a:lvl6pPr algn="ctr">
-              <a:buNone/>
               <a:defRPr sz="1350" b="0">
                 <a:solidFill>
                   <a:srgbClr val="DCE8EE"/>
@@ -10124,7 +9794,6 @@
               </a:defRPr>
             </a:lvl6pPr>
             <a:lvl7pPr algn="ctr">
-              <a:buNone/>
               <a:defRPr sz="1350" b="0">
                 <a:solidFill>
                   <a:srgbClr val="DCE8EE"/>
@@ -10135,7 +9804,6 @@
               </a:defRPr>
             </a:lvl7pPr>
             <a:lvl8pPr algn="ctr">
-              <a:buNone/>
               <a:defRPr sz="1350" b="0">
                 <a:solidFill>
                   <a:srgbClr val="DCE8EE"/>
@@ -10146,7 +9814,6 @@
               </a:defRPr>
             </a:lvl8pPr>
             <a:lvl9pPr algn="ctr">
-              <a:buNone/>
               <a:defRPr sz="1350" b="0">
                 <a:solidFill>
                   <a:srgbClr val="DCE8EE"/>
@@ -10159,7 +9826,6 @@
           </a:lstStyle>
           <a:p xmlns:a="http://schemas.openxmlformats.org/drawingml/2006/main">
             <a:pPr algn="ctr">
-              <a:buNone/>
               <a:defRPr sz="1350" b="0">
                 <a:solidFill>
                   <a:srgbClr val="DCE8EE"/>
@@ -10178,7 +9844,7 @@
                 <a:ea typeface="Arial"/>
                 <a:cs typeface="Arial"/>
               </a:rPr>
-              <a:t>Tutor snippets are checked against retrieved material; student-session retrieval and assessment checks still govern replies.</a:t>
+              <a:t>The tutor uses a student session, retrieved course sources, assessment modes, and output checks before showing a reply.</a:t>
             </a:r>
           </a:p>
         </p:txBody>
@@ -10254,7 +9920,6 @@
               </a:defRPr>
             </a:defPPr>
             <a:lvl1pPr algn="l">
-              <a:buNone/>
               <a:defRPr sz="1050" b="1">
                 <a:solidFill>
                   <a:srgbClr val="0877B9"/>
@@ -10265,7 +9930,6 @@
               </a:defRPr>
             </a:lvl1pPr>
             <a:lvl2pPr algn="l">
-              <a:buNone/>
               <a:defRPr sz="1050" b="1">
                 <a:solidFill>
                   <a:srgbClr val="0877B9"/>
@@ -10276,7 +9940,6 @@
               </a:defRPr>
             </a:lvl2pPr>
             <a:lvl3pPr algn="l">
-              <a:buNone/>
               <a:defRPr sz="1050" b="1">
                 <a:solidFill>
                   <a:srgbClr val="0877B9"/>
@@ -10287,7 +9950,6 @@
               </a:defRPr>
             </a:lvl3pPr>
             <a:lvl4pPr algn="l">
-              <a:buNone/>
               <a:defRPr sz="1050" b="1">
                 <a:solidFill>
                   <a:srgbClr val="0877B9"/>
@@ -10298,7 +9960,6 @@
               </a:defRPr>
             </a:lvl4pPr>
             <a:lvl5pPr algn="l">
-              <a:buNone/>
               <a:defRPr sz="1050" b="1">
                 <a:solidFill>
                   <a:srgbClr val="0877B9"/>
@@ -10309,7 +9970,6 @@
               </a:defRPr>
             </a:lvl5pPr>
             <a:lvl6pPr algn="l">
-              <a:buNone/>
               <a:defRPr sz="1050" b="1">
                 <a:solidFill>
                   <a:srgbClr val="0877B9"/>
@@ -10320,7 +9980,6 @@
               </a:defRPr>
             </a:lvl6pPr>
             <a:lvl7pPr algn="l">
-              <a:buNone/>
               <a:defRPr sz="1050" b="1">
                 <a:solidFill>
                   <a:srgbClr val="0877B9"/>
@@ -10331,7 +9990,6 @@
               </a:defRPr>
             </a:lvl7pPr>
             <a:lvl8pPr algn="l">
-              <a:buNone/>
               <a:defRPr sz="1050" b="1">
                 <a:solidFill>
                   <a:srgbClr val="0877B9"/>
@@ -10342,7 +10000,6 @@
               </a:defRPr>
             </a:lvl8pPr>
             <a:lvl9pPr algn="l">
-              <a:buNone/>
               <a:defRPr sz="1050" b="1">
                 <a:solidFill>
                   <a:srgbClr val="0877B9"/>
@@ -10355,7 +10012,6 @@
           </a:lstStyle>
           <a:p xmlns:a="http://schemas.openxmlformats.org/drawingml/2006/main">
             <a:pPr algn="l">
-              <a:buNone/>
               <a:defRPr sz="1050" b="1">
                 <a:solidFill>
                   <a:srgbClr val="0877B9"/>
@@ -10421,7 +10077,6 @@
               </a:defRPr>
             </a:defPPr>
             <a:lvl1pPr algn="l">
-              <a:buNone/>
               <a:defRPr sz="2850" b="1">
                 <a:solidFill>
                   <a:srgbClr val="183044"/>
@@ -10432,7 +10087,6 @@
               </a:defRPr>
             </a:lvl1pPr>
             <a:lvl2pPr algn="l">
-              <a:buNone/>
               <a:defRPr sz="2850" b="1">
                 <a:solidFill>
                   <a:srgbClr val="183044"/>
@@ -10443,7 +10097,6 @@
               </a:defRPr>
             </a:lvl2pPr>
             <a:lvl3pPr algn="l">
-              <a:buNone/>
               <a:defRPr sz="2850" b="1">
                 <a:solidFill>
                   <a:srgbClr val="183044"/>
@@ -10454,7 +10107,6 @@
               </a:defRPr>
             </a:lvl3pPr>
             <a:lvl4pPr algn="l">
-              <a:buNone/>
               <a:defRPr sz="2850" b="1">
                 <a:solidFill>
                   <a:srgbClr val="183044"/>
@@ -10465,7 +10117,6 @@
               </a:defRPr>
             </a:lvl4pPr>
             <a:lvl5pPr algn="l">
-              <a:buNone/>
               <a:defRPr sz="2850" b="1">
                 <a:solidFill>
                   <a:srgbClr val="183044"/>
@@ -10476,7 +10127,6 @@
               </a:defRPr>
             </a:lvl5pPr>
             <a:lvl6pPr algn="l">
-              <a:buNone/>
               <a:defRPr sz="2850" b="1">
                 <a:solidFill>
                   <a:srgbClr val="183044"/>
@@ -10487,7 +10137,6 @@
               </a:defRPr>
             </a:lvl6pPr>
             <a:lvl7pPr algn="l">
-              <a:buNone/>
               <a:defRPr sz="2850" b="1">
                 <a:solidFill>
                   <a:srgbClr val="183044"/>
@@ -10498,7 +10147,6 @@
               </a:defRPr>
             </a:lvl7pPr>
             <a:lvl8pPr algn="l">
-              <a:buNone/>
               <a:defRPr sz="2850" b="1">
                 <a:solidFill>
                   <a:srgbClr val="183044"/>
@@ -10509,7 +10157,6 @@
               </a:defRPr>
             </a:lvl8pPr>
             <a:lvl9pPr algn="l">
-              <a:buNone/>
               <a:defRPr sz="2850" b="1">
                 <a:solidFill>
                   <a:srgbClr val="183044"/>
@@ -10522,7 +10169,6 @@
           </a:lstStyle>
           <a:p xmlns:a="http://schemas.openxmlformats.org/drawingml/2006/main">
             <a:pPr algn="l">
-              <a:buNone/>
               <a:defRPr sz="2850" b="1">
                 <a:solidFill>
                   <a:srgbClr val="183044"/>
@@ -10619,7 +10265,6 @@
               </a:defRPr>
             </a:defPPr>
             <a:lvl1pPr algn="l">
-              <a:buNone/>
               <a:defRPr sz="900" b="1">
                 <a:solidFill>
                   <a:srgbClr val="5C6F7D"/>
@@ -10630,7 +10275,6 @@
               </a:defRPr>
             </a:lvl1pPr>
             <a:lvl2pPr algn="l">
-              <a:buNone/>
               <a:defRPr sz="900" b="1">
                 <a:solidFill>
                   <a:srgbClr val="5C6F7D"/>
@@ -10641,7 +10285,6 @@
               </a:defRPr>
             </a:lvl2pPr>
             <a:lvl3pPr algn="l">
-              <a:buNone/>
               <a:defRPr sz="900" b="1">
                 <a:solidFill>
                   <a:srgbClr val="5C6F7D"/>
@@ -10652,7 +10295,6 @@
               </a:defRPr>
             </a:lvl3pPr>
             <a:lvl4pPr algn="l">
-              <a:buNone/>
               <a:defRPr sz="900" b="1">
                 <a:solidFill>
                   <a:srgbClr val="5C6F7D"/>
@@ -10663,7 +10305,6 @@
               </a:defRPr>
             </a:lvl4pPr>
             <a:lvl5pPr algn="l">
-              <a:buNone/>
               <a:defRPr sz="900" b="1">
                 <a:solidFill>
                   <a:srgbClr val="5C6F7D"/>
@@ -10674,7 +10315,6 @@
               </a:defRPr>
             </a:lvl5pPr>
             <a:lvl6pPr algn="l">
-              <a:buNone/>
               <a:defRPr sz="900" b="1">
                 <a:solidFill>
                   <a:srgbClr val="5C6F7D"/>
@@ -10685,7 +10325,6 @@
               </a:defRPr>
             </a:lvl6pPr>
             <a:lvl7pPr algn="l">
-              <a:buNone/>
               <a:defRPr sz="900" b="1">
                 <a:solidFill>
                   <a:srgbClr val="5C6F7D"/>
@@ -10696,7 +10335,6 @@
               </a:defRPr>
             </a:lvl7pPr>
             <a:lvl8pPr algn="l">
-              <a:buNone/>
               <a:defRPr sz="900" b="1">
                 <a:solidFill>
                   <a:srgbClr val="5C6F7D"/>
@@ -10707,7 +10345,6 @@
               </a:defRPr>
             </a:lvl8pPr>
             <a:lvl9pPr algn="l">
-              <a:buNone/>
               <a:defRPr sz="900" b="1">
                 <a:solidFill>
                   <a:srgbClr val="5C6F7D"/>
@@ -10720,7 +10357,6 @@
           </a:lstStyle>
           <a:p xmlns:a="http://schemas.openxmlformats.org/drawingml/2006/main">
             <a:pPr algn="l">
-              <a:buNone/>
               <a:defRPr sz="900" b="1">
                 <a:solidFill>
                   <a:srgbClr val="5C6F7D"/>
@@ -10786,7 +10422,6 @@
               </a:defRPr>
             </a:defPPr>
             <a:lvl1pPr algn="r">
-              <a:buNone/>
               <a:defRPr sz="900" b="0">
                 <a:solidFill>
                   <a:srgbClr val="5C6F7D"/>
@@ -10797,7 +10432,6 @@
               </a:defRPr>
             </a:lvl1pPr>
             <a:lvl2pPr algn="r">
-              <a:buNone/>
               <a:defRPr sz="900" b="0">
                 <a:solidFill>
                   <a:srgbClr val="5C6F7D"/>
@@ -10808,7 +10442,6 @@
               </a:defRPr>
             </a:lvl2pPr>
             <a:lvl3pPr algn="r">
-              <a:buNone/>
               <a:defRPr sz="900" b="0">
                 <a:solidFill>
                   <a:srgbClr val="5C6F7D"/>
@@ -10819,7 +10452,6 @@
               </a:defRPr>
             </a:lvl3pPr>
             <a:lvl4pPr algn="r">
-              <a:buNone/>
               <a:defRPr sz="900" b="0">
                 <a:solidFill>
                   <a:srgbClr val="5C6F7D"/>
@@ -10830,7 +10462,6 @@
               </a:defRPr>
             </a:lvl4pPr>
             <a:lvl5pPr algn="r">
-              <a:buNone/>
               <a:defRPr sz="900" b="0">
                 <a:solidFill>
                   <a:srgbClr val="5C6F7D"/>
@@ -10841,7 +10472,6 @@
               </a:defRPr>
             </a:lvl5pPr>
             <a:lvl6pPr algn="r">
-              <a:buNone/>
               <a:defRPr sz="900" b="0">
                 <a:solidFill>
                   <a:srgbClr val="5C6F7D"/>
@@ -10852,7 +10482,6 @@
               </a:defRPr>
             </a:lvl6pPr>
             <a:lvl7pPr algn="r">
-              <a:buNone/>
               <a:defRPr sz="900" b="0">
                 <a:solidFill>
                   <a:srgbClr val="5C6F7D"/>
@@ -10863,7 +10492,6 @@
               </a:defRPr>
             </a:lvl7pPr>
             <a:lvl8pPr algn="r">
-              <a:buNone/>
               <a:defRPr sz="900" b="0">
                 <a:solidFill>
                   <a:srgbClr val="5C6F7D"/>
@@ -10874,7 +10502,6 @@
               </a:defRPr>
             </a:lvl8pPr>
             <a:lvl9pPr algn="r">
-              <a:buNone/>
               <a:defRPr sz="900" b="0">
                 <a:solidFill>
                   <a:srgbClr val="5C6F7D"/>
@@ -10887,7 +10514,6 @@
           </a:lstStyle>
           <a:p xmlns:a="http://schemas.openxmlformats.org/drawingml/2006/main">
             <a:pPr algn="r">
-              <a:buNone/>
               <a:defRPr sz="900" b="0">
                 <a:solidFill>
                   <a:srgbClr val="5C6F7D"/>
@@ -10988,7 +10614,6 @@
               </a:defRPr>
             </a:defPPr>
             <a:lvl1pPr algn="l">
-              <a:buNone/>
               <a:defRPr sz="1050" b="1">
                 <a:solidFill>
                   <a:srgbClr val="0877B9"/>
@@ -10999,7 +10624,6 @@
               </a:defRPr>
             </a:lvl1pPr>
             <a:lvl2pPr algn="l">
-              <a:buNone/>
               <a:defRPr sz="1050" b="1">
                 <a:solidFill>
                   <a:srgbClr val="0877B9"/>
@@ -11010,7 +10634,6 @@
               </a:defRPr>
             </a:lvl2pPr>
             <a:lvl3pPr algn="l">
-              <a:buNone/>
               <a:defRPr sz="1050" b="1">
                 <a:solidFill>
                   <a:srgbClr val="0877B9"/>
@@ -11021,7 +10644,6 @@
               </a:defRPr>
             </a:lvl3pPr>
             <a:lvl4pPr algn="l">
-              <a:buNone/>
               <a:defRPr sz="1050" b="1">
                 <a:solidFill>
                   <a:srgbClr val="0877B9"/>
@@ -11032,7 +10654,6 @@
               </a:defRPr>
             </a:lvl4pPr>
             <a:lvl5pPr algn="l">
-              <a:buNone/>
               <a:defRPr sz="1050" b="1">
                 <a:solidFill>
                   <a:srgbClr val="0877B9"/>
@@ -11043,7 +10664,6 @@
               </a:defRPr>
             </a:lvl5pPr>
             <a:lvl6pPr algn="l">
-              <a:buNone/>
               <a:defRPr sz="1050" b="1">
                 <a:solidFill>
                   <a:srgbClr val="0877B9"/>
@@ -11054,7 +10674,6 @@
               </a:defRPr>
             </a:lvl6pPr>
             <a:lvl7pPr algn="l">
-              <a:buNone/>
               <a:defRPr sz="1050" b="1">
                 <a:solidFill>
                   <a:srgbClr val="0877B9"/>
@@ -11065,7 +10684,6 @@
               </a:defRPr>
             </a:lvl7pPr>
             <a:lvl8pPr algn="l">
-              <a:buNone/>
               <a:defRPr sz="1050" b="1">
                 <a:solidFill>
                   <a:srgbClr val="0877B9"/>
@@ -11076,7 +10694,6 @@
               </a:defRPr>
             </a:lvl8pPr>
             <a:lvl9pPr algn="l">
-              <a:buNone/>
               <a:defRPr sz="1050" b="1">
                 <a:solidFill>
                   <a:srgbClr val="0877B9"/>
@@ -11089,7 +10706,6 @@
           </a:lstStyle>
           <a:p xmlns:a="http://schemas.openxmlformats.org/drawingml/2006/main">
             <a:pPr algn="l">
-              <a:buNone/>
               <a:defRPr sz="1050" b="1">
                 <a:solidFill>
                   <a:srgbClr val="0877B9"/>
@@ -11155,7 +10771,6 @@
               </a:defRPr>
             </a:defPPr>
             <a:lvl1pPr algn="l">
-              <a:buNone/>
               <a:defRPr sz="1875" b="1">
                 <a:solidFill>
                   <a:srgbClr val="183044"/>
@@ -11166,7 +10781,6 @@
               </a:defRPr>
             </a:lvl1pPr>
             <a:lvl2pPr algn="l">
-              <a:buNone/>
               <a:defRPr sz="1875" b="1">
                 <a:solidFill>
                   <a:srgbClr val="183044"/>
@@ -11177,7 +10791,6 @@
               </a:defRPr>
             </a:lvl2pPr>
             <a:lvl3pPr algn="l">
-              <a:buNone/>
               <a:defRPr sz="1875" b="1">
                 <a:solidFill>
                   <a:srgbClr val="183044"/>
@@ -11188,7 +10801,6 @@
               </a:defRPr>
             </a:lvl3pPr>
             <a:lvl4pPr algn="l">
-              <a:buNone/>
               <a:defRPr sz="1875" b="1">
                 <a:solidFill>
                   <a:srgbClr val="183044"/>
@@ -11199,7 +10811,6 @@
               </a:defRPr>
             </a:lvl4pPr>
             <a:lvl5pPr algn="l">
-              <a:buNone/>
               <a:defRPr sz="1875" b="1">
                 <a:solidFill>
                   <a:srgbClr val="183044"/>
@@ -11210,7 +10821,6 @@
               </a:defRPr>
             </a:lvl5pPr>
             <a:lvl6pPr algn="l">
-              <a:buNone/>
               <a:defRPr sz="1875" b="1">
                 <a:solidFill>
                   <a:srgbClr val="183044"/>
@@ -11221,7 +10831,6 @@
               </a:defRPr>
             </a:lvl6pPr>
             <a:lvl7pPr algn="l">
-              <a:buNone/>
               <a:defRPr sz="1875" b="1">
                 <a:solidFill>
                   <a:srgbClr val="183044"/>
@@ -11232,7 +10841,6 @@
               </a:defRPr>
             </a:lvl7pPr>
             <a:lvl8pPr algn="l">
-              <a:buNone/>
               <a:defRPr sz="1875" b="1">
                 <a:solidFill>
                   <a:srgbClr val="183044"/>
@@ -11243,7 +10851,6 @@
               </a:defRPr>
             </a:lvl8pPr>
             <a:lvl9pPr algn="l">
-              <a:buNone/>
               <a:defRPr sz="1875" b="1">
                 <a:solidFill>
                   <a:srgbClr val="183044"/>
@@ -11256,7 +10863,6 @@
           </a:lstStyle>
           <a:p xmlns:a="http://schemas.openxmlformats.org/drawingml/2006/main">
             <a:pPr algn="l">
-              <a:buNone/>
               <a:defRPr sz="1875" b="1">
                 <a:solidFill>
                   <a:srgbClr val="183044"/>
@@ -11322,7 +10928,6 @@
               </a:defRPr>
             </a:defPPr>
             <a:lvl1pPr algn="l">
-              <a:buNone/>
               <a:defRPr sz="1275" b="0">
                 <a:solidFill>
                   <a:srgbClr val="5C6F7D"/>
@@ -11333,7 +10938,6 @@
               </a:defRPr>
             </a:lvl1pPr>
             <a:lvl2pPr algn="l">
-              <a:buNone/>
               <a:defRPr sz="1275" b="0">
                 <a:solidFill>
                   <a:srgbClr val="5C6F7D"/>
@@ -11344,7 +10948,6 @@
               </a:defRPr>
             </a:lvl2pPr>
             <a:lvl3pPr algn="l">
-              <a:buNone/>
               <a:defRPr sz="1275" b="0">
                 <a:solidFill>
                   <a:srgbClr val="5C6F7D"/>
@@ -11355,7 +10958,6 @@
               </a:defRPr>
             </a:lvl3pPr>
             <a:lvl4pPr algn="l">
-              <a:buNone/>
               <a:defRPr sz="1275" b="0">
                 <a:solidFill>
                   <a:srgbClr val="5C6F7D"/>
@@ -11366,7 +10968,6 @@
               </a:defRPr>
             </a:lvl4pPr>
             <a:lvl5pPr algn="l">
-              <a:buNone/>
               <a:defRPr sz="1275" b="0">
                 <a:solidFill>
                   <a:srgbClr val="5C6F7D"/>
@@ -11377,7 +10978,6 @@
               </a:defRPr>
             </a:lvl5pPr>
             <a:lvl6pPr algn="l">
-              <a:buNone/>
               <a:defRPr sz="1275" b="0">
                 <a:solidFill>
                   <a:srgbClr val="5C6F7D"/>
@@ -11388,7 +10988,6 @@
               </a:defRPr>
             </a:lvl6pPr>
             <a:lvl7pPr algn="l">
-              <a:buNone/>
               <a:defRPr sz="1275" b="0">
                 <a:solidFill>
                   <a:srgbClr val="5C6F7D"/>
@@ -11399,7 +10998,6 @@
               </a:defRPr>
             </a:lvl7pPr>
             <a:lvl8pPr algn="l">
-              <a:buNone/>
               <a:defRPr sz="1275" b="0">
                 <a:solidFill>
                   <a:srgbClr val="5C6F7D"/>
@@ -11410,7 +11008,6 @@
               </a:defRPr>
             </a:lvl8pPr>
             <a:lvl9pPr algn="l">
-              <a:buNone/>
               <a:defRPr sz="1275" b="0">
                 <a:solidFill>
                   <a:srgbClr val="5C6F7D"/>
@@ -11423,7 +11020,6 @@
           </a:lstStyle>
           <a:p xmlns:a="http://schemas.openxmlformats.org/drawingml/2006/main">
             <a:pPr algn="l">
-              <a:buNone/>
               <a:defRPr sz="1275" b="0">
                 <a:solidFill>
                   <a:srgbClr val="5C6F7D"/>
@@ -11447,7 +11043,6 @@
           </a:p>
           <a:p xmlns:a="http://schemas.openxmlformats.org/drawingml/2006/main">
             <a:pPr algn="l">
-              <a:buNone/>
               <a:defRPr sz="1275" b="0">
                 <a:solidFill>
                   <a:srgbClr val="5C6F7D"/>
@@ -11548,7 +11143,6 @@
               </a:defRPr>
             </a:defPPr>
             <a:lvl1pPr algn="l">
-              <a:buNone/>
               <a:defRPr sz="1050" b="1">
                 <a:solidFill>
                   <a:srgbClr val="BBD0DD"/>
@@ -11559,7 +11153,6 @@
               </a:defRPr>
             </a:lvl1pPr>
             <a:lvl2pPr algn="l">
-              <a:buNone/>
               <a:defRPr sz="1050" b="1">
                 <a:solidFill>
                   <a:srgbClr val="BBD0DD"/>
@@ -11570,7 +11163,6 @@
               </a:defRPr>
             </a:lvl2pPr>
             <a:lvl3pPr algn="l">
-              <a:buNone/>
               <a:defRPr sz="1050" b="1">
                 <a:solidFill>
                   <a:srgbClr val="BBD0DD"/>
@@ -11581,7 +11173,6 @@
               </a:defRPr>
             </a:lvl3pPr>
             <a:lvl4pPr algn="l">
-              <a:buNone/>
               <a:defRPr sz="1050" b="1">
                 <a:solidFill>
                   <a:srgbClr val="BBD0DD"/>
@@ -11592,7 +11183,6 @@
               </a:defRPr>
             </a:lvl4pPr>
             <a:lvl5pPr algn="l">
-              <a:buNone/>
               <a:defRPr sz="1050" b="1">
                 <a:solidFill>
                   <a:srgbClr val="BBD0DD"/>
@@ -11603,7 +11193,6 @@
               </a:defRPr>
             </a:lvl5pPr>
             <a:lvl6pPr algn="l">
-              <a:buNone/>
               <a:defRPr sz="1050" b="1">
                 <a:solidFill>
                   <a:srgbClr val="BBD0DD"/>
@@ -11614,7 +11203,6 @@
               </a:defRPr>
             </a:lvl6pPr>
             <a:lvl7pPr algn="l">
-              <a:buNone/>
               <a:defRPr sz="1050" b="1">
                 <a:solidFill>
                   <a:srgbClr val="BBD0DD"/>
@@ -11625,7 +11213,6 @@
               </a:defRPr>
             </a:lvl7pPr>
             <a:lvl8pPr algn="l">
-              <a:buNone/>
               <a:defRPr sz="1050" b="1">
                 <a:solidFill>
                   <a:srgbClr val="BBD0DD"/>
@@ -11636,7 +11223,6 @@
               </a:defRPr>
             </a:lvl8pPr>
             <a:lvl9pPr algn="l">
-              <a:buNone/>
               <a:defRPr sz="1050" b="1">
                 <a:solidFill>
                   <a:srgbClr val="BBD0DD"/>
@@ -11649,7 +11235,6 @@
           </a:lstStyle>
           <a:p xmlns:a="http://schemas.openxmlformats.org/drawingml/2006/main">
             <a:pPr algn="l">
-              <a:buNone/>
               <a:defRPr sz="1050" b="1">
                 <a:solidFill>
                   <a:srgbClr val="BBD0DD"/>
@@ -11715,7 +11300,6 @@
               </a:defRPr>
             </a:defPPr>
             <a:lvl1pPr algn="l">
-              <a:buNone/>
               <a:defRPr sz="1875" b="1">
                 <a:solidFill>
                   <a:srgbClr val="FFFFFF"/>
@@ -11726,7 +11310,6 @@
               </a:defRPr>
             </a:lvl1pPr>
             <a:lvl2pPr algn="l">
-              <a:buNone/>
               <a:defRPr sz="1875" b="1">
                 <a:solidFill>
                   <a:srgbClr val="FFFFFF"/>
@@ -11737,7 +11320,6 @@
               </a:defRPr>
             </a:lvl2pPr>
             <a:lvl3pPr algn="l">
-              <a:buNone/>
               <a:defRPr sz="1875" b="1">
                 <a:solidFill>
                   <a:srgbClr val="FFFFFF"/>
@@ -11748,7 +11330,6 @@
               </a:defRPr>
             </a:lvl3pPr>
             <a:lvl4pPr algn="l">
-              <a:buNone/>
               <a:defRPr sz="1875" b="1">
                 <a:solidFill>
                   <a:srgbClr val="FFFFFF"/>
@@ -11759,7 +11340,6 @@
               </a:defRPr>
             </a:lvl4pPr>
             <a:lvl5pPr algn="l">
-              <a:buNone/>
               <a:defRPr sz="1875" b="1">
                 <a:solidFill>
                   <a:srgbClr val="FFFFFF"/>
@@ -11770,7 +11350,6 @@
               </a:defRPr>
             </a:lvl5pPr>
             <a:lvl6pPr algn="l">
-              <a:buNone/>
               <a:defRPr sz="1875" b="1">
                 <a:solidFill>
                   <a:srgbClr val="FFFFFF"/>
@@ -11781,7 +11360,6 @@
               </a:defRPr>
             </a:lvl6pPr>
             <a:lvl7pPr algn="l">
-              <a:buNone/>
               <a:defRPr sz="1875" b="1">
                 <a:solidFill>
                   <a:srgbClr val="FFFFFF"/>
@@ -11792,7 +11370,6 @@
               </a:defRPr>
             </a:lvl7pPr>
             <a:lvl8pPr algn="l">
-              <a:buNone/>
               <a:defRPr sz="1875" b="1">
                 <a:solidFill>
                   <a:srgbClr val="FFFFFF"/>
@@ -11803,7 +11380,6 @@
               </a:defRPr>
             </a:lvl8pPr>
             <a:lvl9pPr algn="l">
-              <a:buNone/>
               <a:defRPr sz="1875" b="1">
                 <a:solidFill>
                   <a:srgbClr val="FFFFFF"/>
@@ -11816,7 +11392,6 @@
           </a:lstStyle>
           <a:p xmlns:a="http://schemas.openxmlformats.org/drawingml/2006/main">
             <a:pPr algn="l">
-              <a:buNone/>
               <a:defRPr sz="1875" b="1">
                 <a:solidFill>
                   <a:srgbClr val="FFFFFF"/>
@@ -11882,7 +11457,6 @@
               </a:defRPr>
             </a:defPPr>
             <a:lvl1pPr algn="l">
-              <a:buNone/>
               <a:defRPr sz="1275" b="0">
                 <a:solidFill>
                   <a:srgbClr val="DCE8EE"/>
@@ -11893,7 +11467,6 @@
               </a:defRPr>
             </a:lvl1pPr>
             <a:lvl2pPr algn="l">
-              <a:buNone/>
               <a:defRPr sz="1275" b="0">
                 <a:solidFill>
                   <a:srgbClr val="DCE8EE"/>
@@ -11904,7 +11477,6 @@
               </a:defRPr>
             </a:lvl2pPr>
             <a:lvl3pPr algn="l">
-              <a:buNone/>
               <a:defRPr sz="1275" b="0">
                 <a:solidFill>
                   <a:srgbClr val="DCE8EE"/>
@@ -11915,7 +11487,6 @@
               </a:defRPr>
             </a:lvl3pPr>
             <a:lvl4pPr algn="l">
-              <a:buNone/>
               <a:defRPr sz="1275" b="0">
                 <a:solidFill>
                   <a:srgbClr val="DCE8EE"/>
@@ -11926,7 +11497,6 @@
               </a:defRPr>
             </a:lvl4pPr>
             <a:lvl5pPr algn="l">
-              <a:buNone/>
               <a:defRPr sz="1275" b="0">
                 <a:solidFill>
                   <a:srgbClr val="DCE8EE"/>
@@ -11937,7 +11507,6 @@
               </a:defRPr>
             </a:lvl5pPr>
             <a:lvl6pPr algn="l">
-              <a:buNone/>
               <a:defRPr sz="1275" b="0">
                 <a:solidFill>
                   <a:srgbClr val="DCE8EE"/>
@@ -11948,7 +11517,6 @@
               </a:defRPr>
             </a:lvl6pPr>
             <a:lvl7pPr algn="l">
-              <a:buNone/>
               <a:defRPr sz="1275" b="0">
                 <a:solidFill>
                   <a:srgbClr val="DCE8EE"/>
@@ -11959,7 +11527,6 @@
               </a:defRPr>
             </a:lvl7pPr>
             <a:lvl8pPr algn="l">
-              <a:buNone/>
               <a:defRPr sz="1275" b="0">
                 <a:solidFill>
                   <a:srgbClr val="DCE8EE"/>
@@ -11970,7 +11537,6 @@
               </a:defRPr>
             </a:lvl8pPr>
             <a:lvl9pPr algn="l">
-              <a:buNone/>
               <a:defRPr sz="1275" b="0">
                 <a:solidFill>
                   <a:srgbClr val="DCE8EE"/>
@@ -11983,7 +11549,6 @@
           </a:lstStyle>
           <a:p xmlns:a="http://schemas.openxmlformats.org/drawingml/2006/main">
             <a:pPr algn="l">
-              <a:buNone/>
               <a:defRPr sz="1275" b="0">
                 <a:solidFill>
                   <a:srgbClr val="DCE8EE"/>
@@ -12007,7 +11572,6 @@
           </a:p>
           <a:p xmlns:a="http://schemas.openxmlformats.org/drawingml/2006/main">
             <a:pPr algn="l">
-              <a:buNone/>
               <a:defRPr sz="1275" b="0">
                 <a:solidFill>
                   <a:srgbClr val="DCE8EE"/>
@@ -12108,7 +11672,6 @@
               </a:defRPr>
             </a:defPPr>
             <a:lvl1pPr algn="l">
-              <a:buNone/>
               <a:defRPr sz="1050" b="1">
                 <a:solidFill>
                   <a:srgbClr val="0877B9"/>
@@ -12119,7 +11682,6 @@
               </a:defRPr>
             </a:lvl1pPr>
             <a:lvl2pPr algn="l">
-              <a:buNone/>
               <a:defRPr sz="1050" b="1">
                 <a:solidFill>
                   <a:srgbClr val="0877B9"/>
@@ -12130,7 +11692,6 @@
               </a:defRPr>
             </a:lvl2pPr>
             <a:lvl3pPr algn="l">
-              <a:buNone/>
               <a:defRPr sz="1050" b="1">
                 <a:solidFill>
                   <a:srgbClr val="0877B9"/>
@@ -12141,7 +11702,6 @@
               </a:defRPr>
             </a:lvl3pPr>
             <a:lvl4pPr algn="l">
-              <a:buNone/>
               <a:defRPr sz="1050" b="1">
                 <a:solidFill>
                   <a:srgbClr val="0877B9"/>
@@ -12152,7 +11712,6 @@
               </a:defRPr>
             </a:lvl4pPr>
             <a:lvl5pPr algn="l">
-              <a:buNone/>
               <a:defRPr sz="1050" b="1">
                 <a:solidFill>
                   <a:srgbClr val="0877B9"/>
@@ -12163,7 +11722,6 @@
               </a:defRPr>
             </a:lvl5pPr>
             <a:lvl6pPr algn="l">
-              <a:buNone/>
               <a:defRPr sz="1050" b="1">
                 <a:solidFill>
                   <a:srgbClr val="0877B9"/>
@@ -12174,7 +11732,6 @@
               </a:defRPr>
             </a:lvl6pPr>
             <a:lvl7pPr algn="l">
-              <a:buNone/>
               <a:defRPr sz="1050" b="1">
                 <a:solidFill>
                   <a:srgbClr val="0877B9"/>
@@ -12185,7 +11742,6 @@
               </a:defRPr>
             </a:lvl7pPr>
             <a:lvl8pPr algn="l">
-              <a:buNone/>
               <a:defRPr sz="1050" b="1">
                 <a:solidFill>
                   <a:srgbClr val="0877B9"/>
@@ -12196,7 +11752,6 @@
               </a:defRPr>
             </a:lvl8pPr>
             <a:lvl9pPr algn="l">
-              <a:buNone/>
               <a:defRPr sz="1050" b="1">
                 <a:solidFill>
                   <a:srgbClr val="0877B9"/>
@@ -12209,7 +11764,6 @@
           </a:lstStyle>
           <a:p xmlns:a="http://schemas.openxmlformats.org/drawingml/2006/main">
             <a:pPr algn="l">
-              <a:buNone/>
               <a:defRPr sz="1050" b="1">
                 <a:solidFill>
                   <a:srgbClr val="0877B9"/>
@@ -12275,7 +11829,6 @@
               </a:defRPr>
             </a:defPPr>
             <a:lvl1pPr algn="l">
-              <a:buNone/>
               <a:defRPr sz="1875" b="1">
                 <a:solidFill>
                   <a:srgbClr val="183044"/>
@@ -12286,7 +11839,6 @@
               </a:defRPr>
             </a:lvl1pPr>
             <a:lvl2pPr algn="l">
-              <a:buNone/>
               <a:defRPr sz="1875" b="1">
                 <a:solidFill>
                   <a:srgbClr val="183044"/>
@@ -12297,7 +11849,6 @@
               </a:defRPr>
             </a:lvl2pPr>
             <a:lvl3pPr algn="l">
-              <a:buNone/>
               <a:defRPr sz="1875" b="1">
                 <a:solidFill>
                   <a:srgbClr val="183044"/>
@@ -12308,7 +11859,6 @@
               </a:defRPr>
             </a:lvl3pPr>
             <a:lvl4pPr algn="l">
-              <a:buNone/>
               <a:defRPr sz="1875" b="1">
                 <a:solidFill>
                   <a:srgbClr val="183044"/>
@@ -12319,7 +11869,6 @@
               </a:defRPr>
             </a:lvl4pPr>
             <a:lvl5pPr algn="l">
-              <a:buNone/>
               <a:defRPr sz="1875" b="1">
                 <a:solidFill>
                   <a:srgbClr val="183044"/>
@@ -12330,7 +11879,6 @@
               </a:defRPr>
             </a:lvl5pPr>
             <a:lvl6pPr algn="l">
-              <a:buNone/>
               <a:defRPr sz="1875" b="1">
                 <a:solidFill>
                   <a:srgbClr val="183044"/>
@@ -12341,7 +11889,6 @@
               </a:defRPr>
             </a:lvl6pPr>
             <a:lvl7pPr algn="l">
-              <a:buNone/>
               <a:defRPr sz="1875" b="1">
                 <a:solidFill>
                   <a:srgbClr val="183044"/>
@@ -12352,7 +11899,6 @@
               </a:defRPr>
             </a:lvl7pPr>
             <a:lvl8pPr algn="l">
-              <a:buNone/>
               <a:defRPr sz="1875" b="1">
                 <a:solidFill>
                   <a:srgbClr val="183044"/>
@@ -12363,7 +11909,6 @@
               </a:defRPr>
             </a:lvl8pPr>
             <a:lvl9pPr algn="l">
-              <a:buNone/>
               <a:defRPr sz="1875" b="1">
                 <a:solidFill>
                   <a:srgbClr val="183044"/>
@@ -12376,7 +11921,6 @@
           </a:lstStyle>
           <a:p xmlns:a="http://schemas.openxmlformats.org/drawingml/2006/main">
             <a:pPr algn="l">
-              <a:buNone/>
               <a:defRPr sz="1875" b="1">
                 <a:solidFill>
                   <a:srgbClr val="183044"/>
@@ -12442,7 +11986,6 @@
               </a:defRPr>
             </a:defPPr>
             <a:lvl1pPr algn="l">
-              <a:buNone/>
               <a:defRPr sz="1275" b="0">
                 <a:solidFill>
                   <a:srgbClr val="5C6F7D"/>
@@ -12453,7 +11996,6 @@
               </a:defRPr>
             </a:lvl1pPr>
             <a:lvl2pPr algn="l">
-              <a:buNone/>
               <a:defRPr sz="1275" b="0">
                 <a:solidFill>
                   <a:srgbClr val="5C6F7D"/>
@@ -12464,7 +12006,6 @@
               </a:defRPr>
             </a:lvl2pPr>
             <a:lvl3pPr algn="l">
-              <a:buNone/>
               <a:defRPr sz="1275" b="0">
                 <a:solidFill>
                   <a:srgbClr val="5C6F7D"/>
@@ -12475,7 +12016,6 @@
               </a:defRPr>
             </a:lvl3pPr>
             <a:lvl4pPr algn="l">
-              <a:buNone/>
               <a:defRPr sz="1275" b="0">
                 <a:solidFill>
                   <a:srgbClr val="5C6F7D"/>
@@ -12486,7 +12026,6 @@
               </a:defRPr>
             </a:lvl4pPr>
             <a:lvl5pPr algn="l">
-              <a:buNone/>
               <a:defRPr sz="1275" b="0">
                 <a:solidFill>
                   <a:srgbClr val="5C6F7D"/>
@@ -12497,7 +12036,6 @@
               </a:defRPr>
             </a:lvl5pPr>
             <a:lvl6pPr algn="l">
-              <a:buNone/>
               <a:defRPr sz="1275" b="0">
                 <a:solidFill>
                   <a:srgbClr val="5C6F7D"/>
@@ -12508,7 +12046,6 @@
               </a:defRPr>
             </a:lvl6pPr>
             <a:lvl7pPr algn="l">
-              <a:buNone/>
               <a:defRPr sz="1275" b="0">
                 <a:solidFill>
                   <a:srgbClr val="5C6F7D"/>
@@ -12519,7 +12056,6 @@
               </a:defRPr>
             </a:lvl7pPr>
             <a:lvl8pPr algn="l">
-              <a:buNone/>
               <a:defRPr sz="1275" b="0">
                 <a:solidFill>
                   <a:srgbClr val="5C6F7D"/>
@@ -12530,7 +12066,6 @@
               </a:defRPr>
             </a:lvl8pPr>
             <a:lvl9pPr algn="l">
-              <a:buNone/>
               <a:defRPr sz="1275" b="0">
                 <a:solidFill>
                   <a:srgbClr val="5C6F7D"/>
@@ -12543,7 +12078,6 @@
           </a:lstStyle>
           <a:p xmlns:a="http://schemas.openxmlformats.org/drawingml/2006/main">
             <a:pPr algn="l">
-              <a:buNone/>
               <a:defRPr sz="1275" b="0">
                 <a:solidFill>
                   <a:srgbClr val="5C6F7D"/>
@@ -12567,7 +12101,6 @@
           </a:p>
           <a:p xmlns:a="http://schemas.openxmlformats.org/drawingml/2006/main">
             <a:pPr algn="l">
-              <a:buNone/>
               <a:defRPr sz="1275" b="0">
                 <a:solidFill>
                   <a:srgbClr val="5C6F7D"/>
@@ -12728,7 +12261,6 @@
               </a:defRPr>
             </a:defPPr>
             <a:lvl1pPr algn="l">
-              <a:buNone/>
               <a:defRPr sz="1050" b="1">
                 <a:solidFill>
                   <a:srgbClr val="0877B9"/>
@@ -12739,7 +12271,6 @@
               </a:defRPr>
             </a:lvl1pPr>
             <a:lvl2pPr algn="l">
-              <a:buNone/>
               <a:defRPr sz="1050" b="1">
                 <a:solidFill>
                   <a:srgbClr val="0877B9"/>
@@ -12750,7 +12281,6 @@
               </a:defRPr>
             </a:lvl2pPr>
             <a:lvl3pPr algn="l">
-              <a:buNone/>
               <a:defRPr sz="1050" b="1">
                 <a:solidFill>
                   <a:srgbClr val="0877B9"/>
@@ -12761,7 +12291,6 @@
               </a:defRPr>
             </a:lvl3pPr>
             <a:lvl4pPr algn="l">
-              <a:buNone/>
               <a:defRPr sz="1050" b="1">
                 <a:solidFill>
                   <a:srgbClr val="0877B9"/>
@@ -12772,7 +12301,6 @@
               </a:defRPr>
             </a:lvl4pPr>
             <a:lvl5pPr algn="l">
-              <a:buNone/>
               <a:defRPr sz="1050" b="1">
                 <a:solidFill>
                   <a:srgbClr val="0877B9"/>
@@ -12783,7 +12311,6 @@
               </a:defRPr>
             </a:lvl5pPr>
             <a:lvl6pPr algn="l">
-              <a:buNone/>
               <a:defRPr sz="1050" b="1">
                 <a:solidFill>
                   <a:srgbClr val="0877B9"/>
@@ -12794,7 +12321,6 @@
               </a:defRPr>
             </a:lvl6pPr>
             <a:lvl7pPr algn="l">
-              <a:buNone/>
               <a:defRPr sz="1050" b="1">
                 <a:solidFill>
                   <a:srgbClr val="0877B9"/>
@@ -12805,7 +12331,6 @@
               </a:defRPr>
             </a:lvl7pPr>
             <a:lvl8pPr algn="l">
-              <a:buNone/>
               <a:defRPr sz="1050" b="1">
                 <a:solidFill>
                   <a:srgbClr val="0877B9"/>
@@ -12816,7 +12341,6 @@
               </a:defRPr>
             </a:lvl8pPr>
             <a:lvl9pPr algn="l">
-              <a:buNone/>
               <a:defRPr sz="1050" b="1">
                 <a:solidFill>
                   <a:srgbClr val="0877B9"/>
@@ -12829,7 +12353,6 @@
           </a:lstStyle>
           <a:p xmlns:a="http://schemas.openxmlformats.org/drawingml/2006/main">
             <a:pPr algn="l">
-              <a:buNone/>
               <a:defRPr sz="1050" b="1">
                 <a:solidFill>
                   <a:srgbClr val="0877B9"/>
@@ -12895,7 +12418,6 @@
               </a:defRPr>
             </a:defPPr>
             <a:lvl1pPr algn="l">
-              <a:buNone/>
               <a:defRPr sz="1275" b="0">
                 <a:solidFill>
                   <a:srgbClr val="203040"/>
@@ -12906,7 +12428,6 @@
               </a:defRPr>
             </a:lvl1pPr>
             <a:lvl2pPr algn="l">
-              <a:buNone/>
               <a:defRPr sz="1275" b="0">
                 <a:solidFill>
                   <a:srgbClr val="203040"/>
@@ -12917,7 +12438,6 @@
               </a:defRPr>
             </a:lvl2pPr>
             <a:lvl3pPr algn="l">
-              <a:buNone/>
               <a:defRPr sz="1275" b="0">
                 <a:solidFill>
                   <a:srgbClr val="203040"/>
@@ -12928,7 +12448,6 @@
               </a:defRPr>
             </a:lvl3pPr>
             <a:lvl4pPr algn="l">
-              <a:buNone/>
               <a:defRPr sz="1275" b="0">
                 <a:solidFill>
                   <a:srgbClr val="203040"/>
@@ -12939,7 +12458,6 @@
               </a:defRPr>
             </a:lvl4pPr>
             <a:lvl5pPr algn="l">
-              <a:buNone/>
               <a:defRPr sz="1275" b="0">
                 <a:solidFill>
                   <a:srgbClr val="203040"/>
@@ -12950,7 +12468,6 @@
               </a:defRPr>
             </a:lvl5pPr>
             <a:lvl6pPr algn="l">
-              <a:buNone/>
               <a:defRPr sz="1275" b="0">
                 <a:solidFill>
                   <a:srgbClr val="203040"/>
@@ -12961,7 +12478,6 @@
               </a:defRPr>
             </a:lvl6pPr>
             <a:lvl7pPr algn="l">
-              <a:buNone/>
               <a:defRPr sz="1275" b="0">
                 <a:solidFill>
                   <a:srgbClr val="203040"/>
@@ -12972,7 +12488,6 @@
               </a:defRPr>
             </a:lvl7pPr>
             <a:lvl8pPr algn="l">
-              <a:buNone/>
               <a:defRPr sz="1275" b="0">
                 <a:solidFill>
                   <a:srgbClr val="203040"/>
@@ -12983,7 +12498,6 @@
               </a:defRPr>
             </a:lvl8pPr>
             <a:lvl9pPr algn="l">
-              <a:buNone/>
               <a:defRPr sz="1275" b="0">
                 <a:solidFill>
                   <a:srgbClr val="203040"/>
@@ -12996,7 +12510,6 @@
           </a:lstStyle>
           <a:p xmlns:a="http://schemas.openxmlformats.org/drawingml/2006/main">
             <a:pPr algn="l">
-              <a:buNone/>
               <a:defRPr sz="1275" b="0">
                 <a:solidFill>
                   <a:srgbClr val="203040"/>
@@ -13062,7 +12575,6 @@
               </a:defRPr>
             </a:defPPr>
             <a:lvl1pPr algn="l">
-              <a:buNone/>
               <a:defRPr sz="1275" b="0">
                 <a:solidFill>
                   <a:srgbClr val="203040"/>
@@ -13073,7 +12585,6 @@
               </a:defRPr>
             </a:lvl1pPr>
             <a:lvl2pPr algn="l">
-              <a:buNone/>
               <a:defRPr sz="1275" b="0">
                 <a:solidFill>
                   <a:srgbClr val="203040"/>
@@ -13084,7 +12595,6 @@
               </a:defRPr>
             </a:lvl2pPr>
             <a:lvl3pPr algn="l">
-              <a:buNone/>
               <a:defRPr sz="1275" b="0">
                 <a:solidFill>
                   <a:srgbClr val="203040"/>
@@ -13095,7 +12605,6 @@
               </a:defRPr>
             </a:lvl3pPr>
             <a:lvl4pPr algn="l">
-              <a:buNone/>
               <a:defRPr sz="1275" b="0">
                 <a:solidFill>
                   <a:srgbClr val="203040"/>
@@ -13106,7 +12615,6 @@
               </a:defRPr>
             </a:lvl4pPr>
             <a:lvl5pPr algn="l">
-              <a:buNone/>
               <a:defRPr sz="1275" b="0">
                 <a:solidFill>
                   <a:srgbClr val="203040"/>
@@ -13117,7 +12625,6 @@
               </a:defRPr>
             </a:lvl5pPr>
             <a:lvl6pPr algn="l">
-              <a:buNone/>
               <a:defRPr sz="1275" b="0">
                 <a:solidFill>
                   <a:srgbClr val="203040"/>
@@ -13128,7 +12635,6 @@
               </a:defRPr>
             </a:lvl6pPr>
             <a:lvl7pPr algn="l">
-              <a:buNone/>
               <a:defRPr sz="1275" b="0">
                 <a:solidFill>
                   <a:srgbClr val="203040"/>
@@ -13139,7 +12645,6 @@
               </a:defRPr>
             </a:lvl7pPr>
             <a:lvl8pPr algn="l">
-              <a:buNone/>
               <a:defRPr sz="1275" b="0">
                 <a:solidFill>
                   <a:srgbClr val="203040"/>
@@ -13150,7 +12655,6 @@
               </a:defRPr>
             </a:lvl8pPr>
             <a:lvl9pPr algn="l">
-              <a:buNone/>
               <a:defRPr sz="1275" b="0">
                 <a:solidFill>
                   <a:srgbClr val="203040"/>
@@ -13163,7 +12667,6 @@
           </a:lstStyle>
           <a:p xmlns:a="http://schemas.openxmlformats.org/drawingml/2006/main">
             <a:pPr algn="l">
-              <a:buNone/>
               <a:defRPr sz="1275" b="0">
                 <a:solidFill>
                   <a:srgbClr val="203040"/>
@@ -13229,7 +12732,6 @@
               </a:defRPr>
             </a:defPPr>
             <a:lvl1pPr algn="l">
-              <a:buNone/>
               <a:defRPr sz="1275" b="0">
                 <a:solidFill>
                   <a:srgbClr val="203040"/>
@@ -13240,7 +12742,6 @@
               </a:defRPr>
             </a:lvl1pPr>
             <a:lvl2pPr algn="l">
-              <a:buNone/>
               <a:defRPr sz="1275" b="0">
                 <a:solidFill>
                   <a:srgbClr val="203040"/>
@@ -13251,7 +12752,6 @@
               </a:defRPr>
             </a:lvl2pPr>
             <a:lvl3pPr algn="l">
-              <a:buNone/>
               <a:defRPr sz="1275" b="0">
                 <a:solidFill>
                   <a:srgbClr val="203040"/>
@@ -13262,7 +12762,6 @@
               </a:defRPr>
             </a:lvl3pPr>
             <a:lvl4pPr algn="l">
-              <a:buNone/>
               <a:defRPr sz="1275" b="0">
                 <a:solidFill>
                   <a:srgbClr val="203040"/>
@@ -13273,7 +12772,6 @@
               </a:defRPr>
             </a:lvl4pPr>
             <a:lvl5pPr algn="l">
-              <a:buNone/>
               <a:defRPr sz="1275" b="0">
                 <a:solidFill>
                   <a:srgbClr val="203040"/>
@@ -13284,7 +12782,6 @@
               </a:defRPr>
             </a:lvl5pPr>
             <a:lvl6pPr algn="l">
-              <a:buNone/>
               <a:defRPr sz="1275" b="0">
                 <a:solidFill>
                   <a:srgbClr val="203040"/>
@@ -13295,7 +12792,6 @@
               </a:defRPr>
             </a:lvl6pPr>
             <a:lvl7pPr algn="l">
-              <a:buNone/>
               <a:defRPr sz="1275" b="0">
                 <a:solidFill>
                   <a:srgbClr val="203040"/>
@@ -13306,7 +12802,6 @@
               </a:defRPr>
             </a:lvl7pPr>
             <a:lvl8pPr algn="l">
-              <a:buNone/>
               <a:defRPr sz="1275" b="0">
                 <a:solidFill>
                   <a:srgbClr val="203040"/>
@@ -13317,7 +12812,6 @@
               </a:defRPr>
             </a:lvl8pPr>
             <a:lvl9pPr algn="l">
-              <a:buNone/>
               <a:defRPr sz="1275" b="0">
                 <a:solidFill>
                   <a:srgbClr val="203040"/>
@@ -13330,7 +12824,6 @@
           </a:lstStyle>
           <a:p xmlns:a="http://schemas.openxmlformats.org/drawingml/2006/main">
             <a:pPr algn="l">
-              <a:buNone/>
               <a:defRPr sz="1275" b="0">
                 <a:solidFill>
                   <a:srgbClr val="203040"/>
@@ -13396,7 +12889,6 @@
               </a:defRPr>
             </a:defPPr>
             <a:lvl1pPr algn="l">
-              <a:buNone/>
               <a:defRPr sz="1275" b="0">
                 <a:solidFill>
                   <a:srgbClr val="203040"/>
@@ -13407,7 +12899,6 @@
               </a:defRPr>
             </a:lvl1pPr>
             <a:lvl2pPr algn="l">
-              <a:buNone/>
               <a:defRPr sz="1275" b="0">
                 <a:solidFill>
                   <a:srgbClr val="203040"/>
@@ -13418,7 +12909,6 @@
               </a:defRPr>
             </a:lvl2pPr>
             <a:lvl3pPr algn="l">
-              <a:buNone/>
               <a:defRPr sz="1275" b="0">
                 <a:solidFill>
                   <a:srgbClr val="203040"/>
@@ -13429,7 +12919,6 @@
               </a:defRPr>
             </a:lvl3pPr>
             <a:lvl4pPr algn="l">
-              <a:buNone/>
               <a:defRPr sz="1275" b="0">
                 <a:solidFill>
                   <a:srgbClr val="203040"/>
@@ -13440,7 +12929,6 @@
               </a:defRPr>
             </a:lvl4pPr>
             <a:lvl5pPr algn="l">
-              <a:buNone/>
               <a:defRPr sz="1275" b="0">
                 <a:solidFill>
                   <a:srgbClr val="203040"/>
@@ -13451,7 +12939,6 @@
               </a:defRPr>
             </a:lvl5pPr>
             <a:lvl6pPr algn="l">
-              <a:buNone/>
               <a:defRPr sz="1275" b="0">
                 <a:solidFill>
                   <a:srgbClr val="203040"/>
@@ -13462,7 +12949,6 @@
               </a:defRPr>
             </a:lvl6pPr>
             <a:lvl7pPr algn="l">
-              <a:buNone/>
               <a:defRPr sz="1275" b="0">
                 <a:solidFill>
                   <a:srgbClr val="203040"/>
@@ -13473,7 +12959,6 @@
               </a:defRPr>
             </a:lvl7pPr>
             <a:lvl8pPr algn="l">
-              <a:buNone/>
               <a:defRPr sz="1275" b="0">
                 <a:solidFill>
                   <a:srgbClr val="203040"/>
@@ -13484,7 +12969,6 @@
               </a:defRPr>
             </a:lvl8pPr>
             <a:lvl9pPr algn="l">
-              <a:buNone/>
               <a:defRPr sz="1275" b="0">
                 <a:solidFill>
                   <a:srgbClr val="203040"/>
@@ -13497,7 +12981,6 @@
           </a:lstStyle>
           <a:p xmlns:a="http://schemas.openxmlformats.org/drawingml/2006/main">
             <a:pPr algn="l">
-              <a:buNone/>
               <a:defRPr sz="1275" b="0">
                 <a:solidFill>
                   <a:srgbClr val="203040"/>
@@ -13563,7 +13046,6 @@
               </a:defRPr>
             </a:defPPr>
             <a:lvl1pPr algn="l">
-              <a:buNone/>
               <a:defRPr sz="1200" b="0">
                 <a:solidFill>
                   <a:srgbClr val="5C6F7D"/>
@@ -13574,7 +13056,6 @@
               </a:defRPr>
             </a:lvl1pPr>
             <a:lvl2pPr algn="l">
-              <a:buNone/>
               <a:defRPr sz="1200" b="0">
                 <a:solidFill>
                   <a:srgbClr val="5C6F7D"/>
@@ -13585,7 +13066,6 @@
               </a:defRPr>
             </a:lvl2pPr>
             <a:lvl3pPr algn="l">
-              <a:buNone/>
               <a:defRPr sz="1200" b="0">
                 <a:solidFill>
                   <a:srgbClr val="5C6F7D"/>
@@ -13596,7 +13076,6 @@
               </a:defRPr>
             </a:lvl3pPr>
             <a:lvl4pPr algn="l">
-              <a:buNone/>
               <a:defRPr sz="1200" b="0">
                 <a:solidFill>
                   <a:srgbClr val="5C6F7D"/>
@@ -13607,7 +13086,6 @@
               </a:defRPr>
             </a:lvl4pPr>
             <a:lvl5pPr algn="l">
-              <a:buNone/>
               <a:defRPr sz="1200" b="0">
                 <a:solidFill>
                   <a:srgbClr val="5C6F7D"/>
@@ -13618,7 +13096,6 @@
               </a:defRPr>
             </a:lvl5pPr>
             <a:lvl6pPr algn="l">
-              <a:buNone/>
               <a:defRPr sz="1200" b="0">
                 <a:solidFill>
                   <a:srgbClr val="5C6F7D"/>
@@ -13629,7 +13106,6 @@
               </a:defRPr>
             </a:lvl6pPr>
             <a:lvl7pPr algn="l">
-              <a:buNone/>
               <a:defRPr sz="1200" b="0">
                 <a:solidFill>
                   <a:srgbClr val="5C6F7D"/>
@@ -13640,7 +13116,6 @@
               </a:defRPr>
             </a:lvl7pPr>
             <a:lvl8pPr algn="l">
-              <a:buNone/>
               <a:defRPr sz="1200" b="0">
                 <a:solidFill>
                   <a:srgbClr val="5C6F7D"/>
@@ -13651,7 +13126,6 @@
               </a:defRPr>
             </a:lvl8pPr>
             <a:lvl9pPr algn="l">
-              <a:buNone/>
               <a:defRPr sz="1200" b="0">
                 <a:solidFill>
                   <a:srgbClr val="5C6F7D"/>
@@ -13664,7 +13138,6 @@
           </a:lstStyle>
           <a:p xmlns:a="http://schemas.openxmlformats.org/drawingml/2006/main">
             <a:pPr algn="l">
-              <a:buNone/>
               <a:defRPr sz="1200" b="0">
                 <a:solidFill>
                   <a:srgbClr val="5C6F7D"/>
@@ -13683,7 +13156,7 @@
                 <a:ea typeface="Arial"/>
                 <a:cs typeface="Arial"/>
               </a:rPr>
-              <a:t>Faster tutor replies. Amazon Nova on Bedrock can use AWS credits instead of the Claude API; quiz-protection checks stay in code.</a:t>
+              <a:t>The local demo uses synthetic records and demo tokens. Shared Supabase and tutor flows require course and provider configuration.</a:t>
             </a:r>
           </a:p>
         </p:txBody>
@@ -13759,7 +13232,6 @@
               </a:defRPr>
             </a:defPPr>
             <a:lvl1pPr algn="l">
-              <a:buNone/>
               <a:defRPr sz="1050" b="1">
                 <a:solidFill>
                   <a:srgbClr val="BBD0DD"/>
@@ -13770,7 +13242,6 @@
               </a:defRPr>
             </a:lvl1pPr>
             <a:lvl2pPr algn="l">
-              <a:buNone/>
               <a:defRPr sz="1050" b="1">
                 <a:solidFill>
                   <a:srgbClr val="BBD0DD"/>
@@ -13781,7 +13252,6 @@
               </a:defRPr>
             </a:lvl2pPr>
             <a:lvl3pPr algn="l">
-              <a:buNone/>
               <a:defRPr sz="1050" b="1">
                 <a:solidFill>
                   <a:srgbClr val="BBD0DD"/>
@@ -13792,7 +13262,6 @@
               </a:defRPr>
             </a:lvl3pPr>
             <a:lvl4pPr algn="l">
-              <a:buNone/>
               <a:defRPr sz="1050" b="1">
                 <a:solidFill>
                   <a:srgbClr val="BBD0DD"/>
@@ -13803,7 +13272,6 @@
               </a:defRPr>
             </a:lvl4pPr>
             <a:lvl5pPr algn="l">
-              <a:buNone/>
               <a:defRPr sz="1050" b="1">
                 <a:solidFill>
                   <a:srgbClr val="BBD0DD"/>
@@ -13814,7 +13282,6 @@
               </a:defRPr>
             </a:lvl5pPr>
             <a:lvl6pPr algn="l">
-              <a:buNone/>
               <a:defRPr sz="1050" b="1">
                 <a:solidFill>
                   <a:srgbClr val="BBD0DD"/>
@@ -13825,7 +13292,6 @@
               </a:defRPr>
             </a:lvl6pPr>
             <a:lvl7pPr algn="l">
-              <a:buNone/>
               <a:defRPr sz="1050" b="1">
                 <a:solidFill>
                   <a:srgbClr val="BBD0DD"/>
@@ -13836,7 +13302,6 @@
               </a:defRPr>
             </a:lvl7pPr>
             <a:lvl8pPr algn="l">
-              <a:buNone/>
               <a:defRPr sz="1050" b="1">
                 <a:solidFill>
                   <a:srgbClr val="BBD0DD"/>
@@ -13847,7 +13312,6 @@
               </a:defRPr>
             </a:lvl8pPr>
             <a:lvl9pPr algn="l">
-              <a:buNone/>
               <a:defRPr sz="1050" b="1">
                 <a:solidFill>
                   <a:srgbClr val="BBD0DD"/>
@@ -13860,7 +13324,6 @@
           </a:lstStyle>
           <a:p xmlns:a="http://schemas.openxmlformats.org/drawingml/2006/main">
             <a:pPr algn="l">
-              <a:buNone/>
               <a:defRPr sz="1050" b="1">
                 <a:solidFill>
                   <a:srgbClr val="BBD0DD"/>
@@ -13926,7 +13389,6 @@
               </a:defRPr>
             </a:defPPr>
             <a:lvl1pPr algn="l">
-              <a:buNone/>
               <a:defRPr sz="2850" b="1">
                 <a:solidFill>
                   <a:srgbClr val="FFFFFF"/>
@@ -13937,7 +13399,6 @@
               </a:defRPr>
             </a:lvl1pPr>
             <a:lvl2pPr algn="l">
-              <a:buNone/>
               <a:defRPr sz="2850" b="1">
                 <a:solidFill>
                   <a:srgbClr val="FFFFFF"/>
@@ -13948,7 +13409,6 @@
               </a:defRPr>
             </a:lvl2pPr>
             <a:lvl3pPr algn="l">
-              <a:buNone/>
               <a:defRPr sz="2850" b="1">
                 <a:solidFill>
                   <a:srgbClr val="FFFFFF"/>
@@ -13959,7 +13419,6 @@
               </a:defRPr>
             </a:lvl3pPr>
             <a:lvl4pPr algn="l">
-              <a:buNone/>
               <a:defRPr sz="2850" b="1">
                 <a:solidFill>
                   <a:srgbClr val="FFFFFF"/>
@@ -13970,7 +13429,6 @@
               </a:defRPr>
             </a:lvl4pPr>
             <a:lvl5pPr algn="l">
-              <a:buNone/>
               <a:defRPr sz="2850" b="1">
                 <a:solidFill>
                   <a:srgbClr val="FFFFFF"/>
@@ -13981,7 +13439,6 @@
               </a:defRPr>
             </a:lvl5pPr>
             <a:lvl6pPr algn="l">
-              <a:buNone/>
               <a:defRPr sz="2850" b="1">
                 <a:solidFill>
                   <a:srgbClr val="FFFFFF"/>
@@ -13992,7 +13449,6 @@
               </a:defRPr>
             </a:lvl6pPr>
             <a:lvl7pPr algn="l">
-              <a:buNone/>
               <a:defRPr sz="2850" b="1">
                 <a:solidFill>
                   <a:srgbClr val="FFFFFF"/>
@@ -14003,7 +13459,6 @@
               </a:defRPr>
             </a:lvl7pPr>
             <a:lvl8pPr algn="l">
-              <a:buNone/>
               <a:defRPr sz="2850" b="1">
                 <a:solidFill>
                   <a:srgbClr val="FFFFFF"/>
@@ -14014,7 +13469,6 @@
               </a:defRPr>
             </a:lvl8pPr>
             <a:lvl9pPr algn="l">
-              <a:buNone/>
               <a:defRPr sz="2850" b="1">
                 <a:solidFill>
                   <a:srgbClr val="FFFFFF"/>
@@ -14027,7 +13481,6 @@
           </a:lstStyle>
           <a:p xmlns:a="http://schemas.openxmlformats.org/drawingml/2006/main">
             <a:pPr algn="l">
-              <a:buNone/>
               <a:defRPr sz="2850" b="1">
                 <a:solidFill>
                   <a:srgbClr val="FFFFFF"/>
@@ -14124,7 +13577,6 @@
               </a:defRPr>
             </a:defPPr>
             <a:lvl1pPr algn="l">
-              <a:buNone/>
               <a:defRPr sz="900" b="1">
                 <a:solidFill>
                   <a:srgbClr val="AFC7D7"/>
@@ -14135,7 +13587,6 @@
               </a:defRPr>
             </a:lvl1pPr>
             <a:lvl2pPr algn="l">
-              <a:buNone/>
               <a:defRPr sz="900" b="1">
                 <a:solidFill>
                   <a:srgbClr val="AFC7D7"/>
@@ -14146,7 +13597,6 @@
               </a:defRPr>
             </a:lvl2pPr>
             <a:lvl3pPr algn="l">
-              <a:buNone/>
               <a:defRPr sz="900" b="1">
                 <a:solidFill>
                   <a:srgbClr val="AFC7D7"/>
@@ -14157,7 +13607,6 @@
               </a:defRPr>
             </a:lvl3pPr>
             <a:lvl4pPr algn="l">
-              <a:buNone/>
               <a:defRPr sz="900" b="1">
                 <a:solidFill>
                   <a:srgbClr val="AFC7D7"/>
@@ -14168,7 +13617,6 @@
               </a:defRPr>
             </a:lvl4pPr>
             <a:lvl5pPr algn="l">
-              <a:buNone/>
               <a:defRPr sz="900" b="1">
                 <a:solidFill>
                   <a:srgbClr val="AFC7D7"/>
@@ -14179,7 +13627,6 @@
               </a:defRPr>
             </a:lvl5pPr>
             <a:lvl6pPr algn="l">
-              <a:buNone/>
               <a:defRPr sz="900" b="1">
                 <a:solidFill>
                   <a:srgbClr val="AFC7D7"/>
@@ -14190,7 +13637,6 @@
               </a:defRPr>
             </a:lvl6pPr>
             <a:lvl7pPr algn="l">
-              <a:buNone/>
               <a:defRPr sz="900" b="1">
                 <a:solidFill>
                   <a:srgbClr val="AFC7D7"/>
@@ -14201,7 +13647,6 @@
               </a:defRPr>
             </a:lvl7pPr>
             <a:lvl8pPr algn="l">
-              <a:buNone/>
               <a:defRPr sz="900" b="1">
                 <a:solidFill>
                   <a:srgbClr val="AFC7D7"/>
@@ -14212,7 +13657,6 @@
               </a:defRPr>
             </a:lvl8pPr>
             <a:lvl9pPr algn="l">
-              <a:buNone/>
               <a:defRPr sz="900" b="1">
                 <a:solidFill>
                   <a:srgbClr val="AFC7D7"/>
@@ -14225,7 +13669,6 @@
           </a:lstStyle>
           <a:p xmlns:a="http://schemas.openxmlformats.org/drawingml/2006/main">
             <a:pPr algn="l">
-              <a:buNone/>
               <a:defRPr sz="900" b="1">
                 <a:solidFill>
                   <a:srgbClr val="AFC7D7"/>
@@ -14291,7 +13734,6 @@
               </a:defRPr>
             </a:defPPr>
             <a:lvl1pPr algn="r">
-              <a:buNone/>
               <a:defRPr sz="900" b="0">
                 <a:solidFill>
                   <a:srgbClr val="AFC7D7"/>
@@ -14302,7 +13744,6 @@
               </a:defRPr>
             </a:lvl1pPr>
             <a:lvl2pPr algn="r">
-              <a:buNone/>
               <a:defRPr sz="900" b="0">
                 <a:solidFill>
                   <a:srgbClr val="AFC7D7"/>
@@ -14313,7 +13754,6 @@
               </a:defRPr>
             </a:lvl2pPr>
             <a:lvl3pPr algn="r">
-              <a:buNone/>
               <a:defRPr sz="900" b="0">
                 <a:solidFill>
                   <a:srgbClr val="AFC7D7"/>
@@ -14324,7 +13764,6 @@
               </a:defRPr>
             </a:lvl3pPr>
             <a:lvl4pPr algn="r">
-              <a:buNone/>
               <a:defRPr sz="900" b="0">
                 <a:solidFill>
                   <a:srgbClr val="AFC7D7"/>
@@ -14335,7 +13774,6 @@
               </a:defRPr>
             </a:lvl4pPr>
             <a:lvl5pPr algn="r">
-              <a:buNone/>
               <a:defRPr sz="900" b="0">
                 <a:solidFill>
                   <a:srgbClr val="AFC7D7"/>
@@ -14346,7 +13784,6 @@
               </a:defRPr>
             </a:lvl5pPr>
             <a:lvl6pPr algn="r">
-              <a:buNone/>
               <a:defRPr sz="900" b="0">
                 <a:solidFill>
                   <a:srgbClr val="AFC7D7"/>
@@ -14357,7 +13794,6 @@
               </a:defRPr>
             </a:lvl6pPr>
             <a:lvl7pPr algn="r">
-              <a:buNone/>
               <a:defRPr sz="900" b="0">
                 <a:solidFill>
                   <a:srgbClr val="AFC7D7"/>
@@ -14368,7 +13804,6 @@
               </a:defRPr>
             </a:lvl7pPr>
             <a:lvl8pPr algn="r">
-              <a:buNone/>
               <a:defRPr sz="900" b="0">
                 <a:solidFill>
                   <a:srgbClr val="AFC7D7"/>
@@ -14379,7 +13814,6 @@
               </a:defRPr>
             </a:lvl8pPr>
             <a:lvl9pPr algn="r">
-              <a:buNone/>
               <a:defRPr sz="900" b="0">
                 <a:solidFill>
                   <a:srgbClr val="AFC7D7"/>
@@ -14392,7 +13826,6 @@
           </a:lstStyle>
           <a:p xmlns:a="http://schemas.openxmlformats.org/drawingml/2006/main">
             <a:pPr algn="r">
-              <a:buNone/>
               <a:defRPr sz="900" b="0">
                 <a:solidFill>
                   <a:srgbClr val="AFC7D7"/>
@@ -14458,7 +13891,6 @@
               </a:defRPr>
             </a:defPPr>
             <a:lvl1pPr algn="l">
-              <a:buNone/>
               <a:defRPr sz="1350" b="0">
                 <a:solidFill>
                   <a:srgbClr val="DCE8EE"/>
@@ -14469,7 +13901,6 @@
               </a:defRPr>
             </a:lvl1pPr>
             <a:lvl2pPr algn="l">
-              <a:buNone/>
               <a:defRPr sz="1350" b="0">
                 <a:solidFill>
                   <a:srgbClr val="DCE8EE"/>
@@ -14480,7 +13911,6 @@
               </a:defRPr>
             </a:lvl2pPr>
             <a:lvl3pPr algn="l">
-              <a:buNone/>
               <a:defRPr sz="1350" b="0">
                 <a:solidFill>
                   <a:srgbClr val="DCE8EE"/>
@@ -14491,7 +13921,6 @@
               </a:defRPr>
             </a:lvl3pPr>
             <a:lvl4pPr algn="l">
-              <a:buNone/>
               <a:defRPr sz="1350" b="0">
                 <a:solidFill>
                   <a:srgbClr val="DCE8EE"/>
@@ -14502,7 +13931,6 @@
               </a:defRPr>
             </a:lvl4pPr>
             <a:lvl5pPr algn="l">
-              <a:buNone/>
               <a:defRPr sz="1350" b="0">
                 <a:solidFill>
                   <a:srgbClr val="DCE8EE"/>
@@ -14513,7 +13941,6 @@
               </a:defRPr>
             </a:lvl5pPr>
             <a:lvl6pPr algn="l">
-              <a:buNone/>
               <a:defRPr sz="1350" b="0">
                 <a:solidFill>
                   <a:srgbClr val="DCE8EE"/>
@@ -14524,7 +13951,6 @@
               </a:defRPr>
             </a:lvl6pPr>
             <a:lvl7pPr algn="l">
-              <a:buNone/>
               <a:defRPr sz="1350" b="0">
                 <a:solidFill>
                   <a:srgbClr val="DCE8EE"/>
@@ -14535,7 +13961,6 @@
               </a:defRPr>
             </a:lvl7pPr>
             <a:lvl8pPr algn="l">
-              <a:buNone/>
               <a:defRPr sz="1350" b="0">
                 <a:solidFill>
                   <a:srgbClr val="DCE8EE"/>
@@ -14546,7 +13971,6 @@
               </a:defRPr>
             </a:lvl8pPr>
             <a:lvl9pPr algn="l">
-              <a:buNone/>
               <a:defRPr sz="1350" b="0">
                 <a:solidFill>
                   <a:srgbClr val="DCE8EE"/>
@@ -14559,7 +13983,6 @@
           </a:lstStyle>
           <a:p xmlns:a="http://schemas.openxmlformats.org/drawingml/2006/main">
             <a:pPr algn="l">
-              <a:buNone/>
               <a:defRPr sz="1350" b="0">
                 <a:solidFill>
                   <a:srgbClr val="DCE8EE"/>
@@ -14625,7 +14048,6 @@
               </a:defRPr>
             </a:defPPr>
             <a:lvl1pPr algn="l">
-              <a:buNone/>
               <a:defRPr sz="975" b="1">
                 <a:solidFill>
                   <a:srgbClr val="BBD0DD"/>
@@ -14636,7 +14058,6 @@
               </a:defRPr>
             </a:lvl1pPr>
             <a:lvl2pPr algn="l">
-              <a:buNone/>
               <a:defRPr sz="975" b="1">
                 <a:solidFill>
                   <a:srgbClr val="BBD0DD"/>
@@ -14647,7 +14068,6 @@
               </a:defRPr>
             </a:lvl2pPr>
             <a:lvl3pPr algn="l">
-              <a:buNone/>
               <a:defRPr sz="975" b="1">
                 <a:solidFill>
                   <a:srgbClr val="BBD0DD"/>
@@ -14658,7 +14078,6 @@
               </a:defRPr>
             </a:lvl3pPr>
             <a:lvl4pPr algn="l">
-              <a:buNone/>
               <a:defRPr sz="975" b="1">
                 <a:solidFill>
                   <a:srgbClr val="BBD0DD"/>
@@ -14669,7 +14088,6 @@
               </a:defRPr>
             </a:lvl4pPr>
             <a:lvl5pPr algn="l">
-              <a:buNone/>
               <a:defRPr sz="975" b="1">
                 <a:solidFill>
                   <a:srgbClr val="BBD0DD"/>
@@ -14680,7 +14098,6 @@
               </a:defRPr>
             </a:lvl5pPr>
             <a:lvl6pPr algn="l">
-              <a:buNone/>
               <a:defRPr sz="975" b="1">
                 <a:solidFill>
                   <a:srgbClr val="BBD0DD"/>
@@ -14691,7 +14108,6 @@
               </a:defRPr>
             </a:lvl6pPr>
             <a:lvl7pPr algn="l">
-              <a:buNone/>
               <a:defRPr sz="975" b="1">
                 <a:solidFill>
                   <a:srgbClr val="BBD0DD"/>
@@ -14702,7 +14118,6 @@
               </a:defRPr>
             </a:lvl7pPr>
             <a:lvl8pPr algn="l">
-              <a:buNone/>
               <a:defRPr sz="975" b="1">
                 <a:solidFill>
                   <a:srgbClr val="BBD0DD"/>
@@ -14713,7 +14128,6 @@
               </a:defRPr>
             </a:lvl8pPr>
             <a:lvl9pPr algn="l">
-              <a:buNone/>
               <a:defRPr sz="975" b="1">
                 <a:solidFill>
                   <a:srgbClr val="BBD0DD"/>
@@ -14726,7 +14140,6 @@
           </a:lstStyle>
           <a:p xmlns:a="http://schemas.openxmlformats.org/drawingml/2006/main">
             <a:pPr algn="l">
-              <a:buNone/>
               <a:defRPr sz="975" b="1">
                 <a:solidFill>
                   <a:srgbClr val="BBD0DD"/>
@@ -14755,7 +14168,7 @@
           <p:cNvPr id="8" name="">
             <a:extLst xmlns:a="http://schemas.openxmlformats.org/drawingml/2006/main">
               <a:ext uri="{FF2B5EF4-FFF2-40B4-BE49-F238E27FC236}">
-                <a16:creationId xmlns:a16="http://schemas.microsoft.com/office/drawing/2014/main" id="{C13F06DB-B8DB-4F66-A212-5E748B61391E}"/>
+                <a16:creationId xmlns:a16="http://schemas.microsoft.com/office/drawing/2014/main" id="{3ED1A31E-0BCE-495E-82CE-E90F09C98D86}"/>
               </a:ext>
             </a:extLst>
           </p:cNvPr>
@@ -14765,7 +14178,7 @@
           <p:nvPr/>
         </p:nvPicPr>
         <p:blipFill>
-          <a:blip xmlns:r="http://schemas.openxmlformats.org/officeDocument/2006/relationships" xmlns:a="http://schemas.openxmlformats.org/drawingml/2006/main" r:embed="Rd8c69d21ec1241fe"/>
+          <a:blip xmlns:r="http://schemas.openxmlformats.org/officeDocument/2006/relationships" xmlns:a="http://schemas.openxmlformats.org/drawingml/2006/main" r:embed="R841aad975c1d4b87"/>
           <a:srcRect xmlns:a="http://schemas.openxmlformats.org/drawingml/2006/main" l="21500" t="13000" r="24500" b="28000"/>
           <a:stretch xmlns:a="http://schemas.openxmlformats.org/drawingml/2006/main"/>
         </p:blipFill>
@@ -14889,7 +14302,6 @@
               </a:defRPr>
             </a:defPPr>
             <a:lvl1pPr algn="ctr">
-              <a:buNone/>
               <a:defRPr sz="975" b="1">
                 <a:solidFill>
                   <a:srgbClr val="FFFFFF"/>
@@ -14900,7 +14312,6 @@
               </a:defRPr>
             </a:lvl1pPr>
             <a:lvl2pPr algn="ctr">
-              <a:buNone/>
               <a:defRPr sz="975" b="1">
                 <a:solidFill>
                   <a:srgbClr val="FFFFFF"/>
@@ -14911,7 +14322,6 @@
               </a:defRPr>
             </a:lvl2pPr>
             <a:lvl3pPr algn="ctr">
-              <a:buNone/>
               <a:defRPr sz="975" b="1">
                 <a:solidFill>
                   <a:srgbClr val="FFFFFF"/>
@@ -14922,7 +14332,6 @@
               </a:defRPr>
             </a:lvl3pPr>
             <a:lvl4pPr algn="ctr">
-              <a:buNone/>
               <a:defRPr sz="975" b="1">
                 <a:solidFill>
                   <a:srgbClr val="FFFFFF"/>
@@ -14933,7 +14342,6 @@
               </a:defRPr>
             </a:lvl4pPr>
             <a:lvl5pPr algn="ctr">
-              <a:buNone/>
               <a:defRPr sz="975" b="1">
                 <a:solidFill>
                   <a:srgbClr val="FFFFFF"/>
@@ -14944,7 +14352,6 @@
               </a:defRPr>
             </a:lvl5pPr>
             <a:lvl6pPr algn="ctr">
-              <a:buNone/>
               <a:defRPr sz="975" b="1">
                 <a:solidFill>
                   <a:srgbClr val="FFFFFF"/>
@@ -14955,7 +14362,6 @@
               </a:defRPr>
             </a:lvl6pPr>
             <a:lvl7pPr algn="ctr">
-              <a:buNone/>
               <a:defRPr sz="975" b="1">
                 <a:solidFill>
                   <a:srgbClr val="FFFFFF"/>
@@ -14966,7 +14372,6 @@
               </a:defRPr>
             </a:lvl7pPr>
             <a:lvl8pPr algn="ctr">
-              <a:buNone/>
               <a:defRPr sz="975" b="1">
                 <a:solidFill>
                   <a:srgbClr val="FFFFFF"/>
@@ -14977,7 +14382,6 @@
               </a:defRPr>
             </a:lvl8pPr>
             <a:lvl9pPr algn="ctr">
-              <a:buNone/>
               <a:defRPr sz="975" b="1">
                 <a:solidFill>
                   <a:srgbClr val="FFFFFF"/>
@@ -14990,7 +14394,6 @@
           </a:lstStyle>
           <a:p xmlns:a="http://schemas.openxmlformats.org/drawingml/2006/main">
             <a:pPr algn="ctr">
-              <a:buNone/>
               <a:defRPr sz="975" b="1">
                 <a:solidFill>
                   <a:srgbClr val="FFFFFF"/>
@@ -15056,7 +14459,6 @@
               </a:defRPr>
             </a:defPPr>
             <a:lvl1pPr algn="l">
-              <a:buNone/>
               <a:defRPr sz="1275" b="1">
                 <a:solidFill>
                   <a:srgbClr val="FFFFFF"/>
@@ -15067,7 +14469,6 @@
               </a:defRPr>
             </a:lvl1pPr>
             <a:lvl2pPr algn="l">
-              <a:buNone/>
               <a:defRPr sz="1275" b="1">
                 <a:solidFill>
                   <a:srgbClr val="FFFFFF"/>
@@ -15078,7 +14479,6 @@
               </a:defRPr>
             </a:lvl2pPr>
             <a:lvl3pPr algn="l">
-              <a:buNone/>
               <a:defRPr sz="1275" b="1">
                 <a:solidFill>
                   <a:srgbClr val="FFFFFF"/>
@@ -15089,7 +14489,6 @@
               </a:defRPr>
             </a:lvl3pPr>
             <a:lvl4pPr algn="l">
-              <a:buNone/>
               <a:defRPr sz="1275" b="1">
                 <a:solidFill>
                   <a:srgbClr val="FFFFFF"/>
@@ -15100,7 +14499,6 @@
               </a:defRPr>
             </a:lvl4pPr>
             <a:lvl5pPr algn="l">
-              <a:buNone/>
               <a:defRPr sz="1275" b="1">
                 <a:solidFill>
                   <a:srgbClr val="FFFFFF"/>
@@ -15111,7 +14509,6 @@
               </a:defRPr>
             </a:lvl5pPr>
             <a:lvl6pPr algn="l">
-              <a:buNone/>
               <a:defRPr sz="1275" b="1">
                 <a:solidFill>
                   <a:srgbClr val="FFFFFF"/>
@@ -15122,7 +14519,6 @@
               </a:defRPr>
             </a:lvl6pPr>
             <a:lvl7pPr algn="l">
-              <a:buNone/>
               <a:defRPr sz="1275" b="1">
                 <a:solidFill>
                   <a:srgbClr val="FFFFFF"/>
@@ -15133,7 +14529,6 @@
               </a:defRPr>
             </a:lvl7pPr>
             <a:lvl8pPr algn="l">
-              <a:buNone/>
               <a:defRPr sz="1275" b="1">
                 <a:solidFill>
                   <a:srgbClr val="FFFFFF"/>
@@ -15144,7 +14539,6 @@
               </a:defRPr>
             </a:lvl8pPr>
             <a:lvl9pPr algn="l">
-              <a:buNone/>
               <a:defRPr sz="1275" b="1">
                 <a:solidFill>
                   <a:srgbClr val="FFFFFF"/>
@@ -15157,7 +14551,6 @@
           </a:lstStyle>
           <a:p xmlns:a="http://schemas.openxmlformats.org/drawingml/2006/main">
             <a:pPr algn="l">
-              <a:buNone/>
               <a:defRPr sz="1275" b="1">
                 <a:solidFill>
                   <a:srgbClr val="FFFFFF"/>
@@ -15223,7 +14616,6 @@
               </a:defRPr>
             </a:defPPr>
             <a:lvl1pPr algn="l">
-              <a:buNone/>
               <a:defRPr sz="975" b="1">
                 <a:solidFill>
                   <a:srgbClr val="BBD0DD"/>
@@ -15234,7 +14626,6 @@
               </a:defRPr>
             </a:lvl1pPr>
             <a:lvl2pPr algn="l">
-              <a:buNone/>
               <a:defRPr sz="975" b="1">
                 <a:solidFill>
                   <a:srgbClr val="BBD0DD"/>
@@ -15245,7 +14636,6 @@
               </a:defRPr>
             </a:lvl2pPr>
             <a:lvl3pPr algn="l">
-              <a:buNone/>
               <a:defRPr sz="975" b="1">
                 <a:solidFill>
                   <a:srgbClr val="BBD0DD"/>
@@ -15256,7 +14646,6 @@
               </a:defRPr>
             </a:lvl3pPr>
             <a:lvl4pPr algn="l">
-              <a:buNone/>
               <a:defRPr sz="975" b="1">
                 <a:solidFill>
                   <a:srgbClr val="BBD0DD"/>
@@ -15267,7 +14656,6 @@
               </a:defRPr>
             </a:lvl4pPr>
             <a:lvl5pPr algn="l">
-              <a:buNone/>
               <a:defRPr sz="975" b="1">
                 <a:solidFill>
                   <a:srgbClr val="BBD0DD"/>
@@ -15278,7 +14666,6 @@
               </a:defRPr>
             </a:lvl5pPr>
             <a:lvl6pPr algn="l">
-              <a:buNone/>
               <a:defRPr sz="975" b="1">
                 <a:solidFill>
                   <a:srgbClr val="BBD0DD"/>
@@ -15289,7 +14676,6 @@
               </a:defRPr>
             </a:lvl6pPr>
             <a:lvl7pPr algn="l">
-              <a:buNone/>
               <a:defRPr sz="975" b="1">
                 <a:solidFill>
                   <a:srgbClr val="BBD0DD"/>
@@ -15300,7 +14686,6 @@
               </a:defRPr>
             </a:lvl7pPr>
             <a:lvl8pPr algn="l">
-              <a:buNone/>
               <a:defRPr sz="975" b="1">
                 <a:solidFill>
                   <a:srgbClr val="BBD0DD"/>
@@ -15311,7 +14696,6 @@
               </a:defRPr>
             </a:lvl8pPr>
             <a:lvl9pPr algn="l">
-              <a:buNone/>
               <a:defRPr sz="975" b="1">
                 <a:solidFill>
                   <a:srgbClr val="BBD0DD"/>
@@ -15324,7 +14708,6 @@
           </a:lstStyle>
           <a:p xmlns:a="http://schemas.openxmlformats.org/drawingml/2006/main">
             <a:pPr algn="l">
-              <a:buNone/>
               <a:defRPr sz="975" b="1">
                 <a:solidFill>
                   <a:srgbClr val="BBD0DD"/>
@@ -15353,7 +14736,7 @@
           <p:cNvPr id="14" name="">
             <a:extLst xmlns:a="http://schemas.openxmlformats.org/drawingml/2006/main">
               <a:ext uri="{FF2B5EF4-FFF2-40B4-BE49-F238E27FC236}">
-                <a16:creationId xmlns:a16="http://schemas.microsoft.com/office/drawing/2014/main" id="{10D0A87E-DCC2-4F61-96E2-D6241452584F}"/>
+                <a16:creationId xmlns:a16="http://schemas.microsoft.com/office/drawing/2014/main" id="{8E4AA383-467C-4674-9F6F-ACD07CF5CC5C}"/>
               </a:ext>
             </a:extLst>
           </p:cNvPr>
@@ -15363,7 +14746,7 @@
           <p:nvPr/>
         </p:nvPicPr>
         <p:blipFill>
-          <a:blip xmlns:r="http://schemas.openxmlformats.org/officeDocument/2006/relationships" xmlns:a="http://schemas.openxmlformats.org/drawingml/2006/main" r:embed="Rbd6ba1cd08314f67"/>
+          <a:blip xmlns:r="http://schemas.openxmlformats.org/officeDocument/2006/relationships" xmlns:a="http://schemas.openxmlformats.org/drawingml/2006/main" r:embed="Rf10e2d97c06b49db"/>
           <a:srcRect xmlns:a="http://schemas.openxmlformats.org/drawingml/2006/main" l="20500" t="29000" r="18000" b="10000"/>
           <a:stretch xmlns:a="http://schemas.openxmlformats.org/drawingml/2006/main"/>
         </p:blipFill>
@@ -15487,7 +14870,6 @@
               </a:defRPr>
             </a:defPPr>
             <a:lvl1pPr algn="ctr">
-              <a:buNone/>
               <a:defRPr sz="975" b="1">
                 <a:solidFill>
                   <a:srgbClr val="FFFFFF"/>
@@ -15498,7 +14880,6 @@
               </a:defRPr>
             </a:lvl1pPr>
             <a:lvl2pPr algn="ctr">
-              <a:buNone/>
               <a:defRPr sz="975" b="1">
                 <a:solidFill>
                   <a:srgbClr val="FFFFFF"/>
@@ -15509,7 +14890,6 @@
               </a:defRPr>
             </a:lvl2pPr>
             <a:lvl3pPr algn="ctr">
-              <a:buNone/>
               <a:defRPr sz="975" b="1">
                 <a:solidFill>
                   <a:srgbClr val="FFFFFF"/>
@@ -15520,7 +14900,6 @@
               </a:defRPr>
             </a:lvl3pPr>
             <a:lvl4pPr algn="ctr">
-              <a:buNone/>
               <a:defRPr sz="975" b="1">
                 <a:solidFill>
                   <a:srgbClr val="FFFFFF"/>
@@ -15531,7 +14910,6 @@
               </a:defRPr>
             </a:lvl4pPr>
             <a:lvl5pPr algn="ctr">
-              <a:buNone/>
               <a:defRPr sz="975" b="1">
                 <a:solidFill>
                   <a:srgbClr val="FFFFFF"/>
@@ -15542,7 +14920,6 @@
               </a:defRPr>
             </a:lvl5pPr>
             <a:lvl6pPr algn="ctr">
-              <a:buNone/>
               <a:defRPr sz="975" b="1">
                 <a:solidFill>
                   <a:srgbClr val="FFFFFF"/>
@@ -15553,7 +14930,6 @@
               </a:defRPr>
             </a:lvl6pPr>
             <a:lvl7pPr algn="ctr">
-              <a:buNone/>
               <a:defRPr sz="975" b="1">
                 <a:solidFill>
                   <a:srgbClr val="FFFFFF"/>
@@ -15564,7 +14940,6 @@
               </a:defRPr>
             </a:lvl7pPr>
             <a:lvl8pPr algn="ctr">
-              <a:buNone/>
               <a:defRPr sz="975" b="1">
                 <a:solidFill>
                   <a:srgbClr val="FFFFFF"/>
@@ -15575,7 +14950,6 @@
               </a:defRPr>
             </a:lvl8pPr>
             <a:lvl9pPr algn="ctr">
-              <a:buNone/>
               <a:defRPr sz="975" b="1">
                 <a:solidFill>
                   <a:srgbClr val="FFFFFF"/>
@@ -15588,7 +14962,6 @@
           </a:lstStyle>
           <a:p xmlns:a="http://schemas.openxmlformats.org/drawingml/2006/main">
             <a:pPr algn="ctr">
-              <a:buNone/>
               <a:defRPr sz="975" b="1">
                 <a:solidFill>
                   <a:srgbClr val="FFFFFF"/>
@@ -15654,7 +15027,6 @@
               </a:defRPr>
             </a:defPPr>
             <a:lvl1pPr algn="l">
-              <a:buNone/>
               <a:defRPr sz="1275" b="1">
                 <a:solidFill>
                   <a:srgbClr val="FFFFFF"/>
@@ -15665,7 +15037,6 @@
               </a:defRPr>
             </a:lvl1pPr>
             <a:lvl2pPr algn="l">
-              <a:buNone/>
               <a:defRPr sz="1275" b="1">
                 <a:solidFill>
                   <a:srgbClr val="FFFFFF"/>
@@ -15676,7 +15047,6 @@
               </a:defRPr>
             </a:lvl2pPr>
             <a:lvl3pPr algn="l">
-              <a:buNone/>
               <a:defRPr sz="1275" b="1">
                 <a:solidFill>
                   <a:srgbClr val="FFFFFF"/>
@@ -15687,7 +15057,6 @@
               </a:defRPr>
             </a:lvl3pPr>
             <a:lvl4pPr algn="l">
-              <a:buNone/>
               <a:defRPr sz="1275" b="1">
                 <a:solidFill>
                   <a:srgbClr val="FFFFFF"/>
@@ -15698,7 +15067,6 @@
               </a:defRPr>
             </a:lvl4pPr>
             <a:lvl5pPr algn="l">
-              <a:buNone/>
               <a:defRPr sz="1275" b="1">
                 <a:solidFill>
                   <a:srgbClr val="FFFFFF"/>
@@ -15709,7 +15077,6 @@
               </a:defRPr>
             </a:lvl5pPr>
             <a:lvl6pPr algn="l">
-              <a:buNone/>
               <a:defRPr sz="1275" b="1">
                 <a:solidFill>
                   <a:srgbClr val="FFFFFF"/>
@@ -15720,7 +15087,6 @@
               </a:defRPr>
             </a:lvl6pPr>
             <a:lvl7pPr algn="l">
-              <a:buNone/>
               <a:defRPr sz="1275" b="1">
                 <a:solidFill>
                   <a:srgbClr val="FFFFFF"/>
@@ -15731,7 +15097,6 @@
               </a:defRPr>
             </a:lvl7pPr>
             <a:lvl8pPr algn="l">
-              <a:buNone/>
               <a:defRPr sz="1275" b="1">
                 <a:solidFill>
                   <a:srgbClr val="FFFFFF"/>
@@ -15742,7 +15107,6 @@
               </a:defRPr>
             </a:lvl8pPr>
             <a:lvl9pPr algn="l">
-              <a:buNone/>
               <a:defRPr sz="1275" b="1">
                 <a:solidFill>
                   <a:srgbClr val="FFFFFF"/>
@@ -15755,7 +15119,6 @@
           </a:lstStyle>
           <a:p xmlns:a="http://schemas.openxmlformats.org/drawingml/2006/main">
             <a:pPr algn="l">
-              <a:buNone/>
               <a:defRPr sz="1275" b="1">
                 <a:solidFill>
                   <a:srgbClr val="FFFFFF"/>
@@ -15821,7 +15184,6 @@
               </a:defRPr>
             </a:defPPr>
             <a:lvl1pPr algn="l">
-              <a:buNone/>
               <a:defRPr sz="975" b="1">
                 <a:solidFill>
                   <a:srgbClr val="BBD0DD"/>
@@ -15832,7 +15194,6 @@
               </a:defRPr>
             </a:lvl1pPr>
             <a:lvl2pPr algn="l">
-              <a:buNone/>
               <a:defRPr sz="975" b="1">
                 <a:solidFill>
                   <a:srgbClr val="BBD0DD"/>
@@ -15843,7 +15204,6 @@
               </a:defRPr>
             </a:lvl2pPr>
             <a:lvl3pPr algn="l">
-              <a:buNone/>
               <a:defRPr sz="975" b="1">
                 <a:solidFill>
                   <a:srgbClr val="BBD0DD"/>
@@ -15854,7 +15214,6 @@
               </a:defRPr>
             </a:lvl3pPr>
             <a:lvl4pPr algn="l">
-              <a:buNone/>
               <a:defRPr sz="975" b="1">
                 <a:solidFill>
                   <a:srgbClr val="BBD0DD"/>
@@ -15865,7 +15224,6 @@
               </a:defRPr>
             </a:lvl4pPr>
             <a:lvl5pPr algn="l">
-              <a:buNone/>
               <a:defRPr sz="975" b="1">
                 <a:solidFill>
                   <a:srgbClr val="BBD0DD"/>
@@ -15876,7 +15234,6 @@
               </a:defRPr>
             </a:lvl5pPr>
             <a:lvl6pPr algn="l">
-              <a:buNone/>
               <a:defRPr sz="975" b="1">
                 <a:solidFill>
                   <a:srgbClr val="BBD0DD"/>
@@ -15887,7 +15244,6 @@
               </a:defRPr>
             </a:lvl6pPr>
             <a:lvl7pPr algn="l">
-              <a:buNone/>
               <a:defRPr sz="975" b="1">
                 <a:solidFill>
                   <a:srgbClr val="BBD0DD"/>
@@ -15898,7 +15254,6 @@
               </a:defRPr>
             </a:lvl7pPr>
             <a:lvl8pPr algn="l">
-              <a:buNone/>
               <a:defRPr sz="975" b="1">
                 <a:solidFill>
                   <a:srgbClr val="BBD0DD"/>
@@ -15909,7 +15264,6 @@
               </a:defRPr>
             </a:lvl8pPr>
             <a:lvl9pPr algn="l">
-              <a:buNone/>
               <a:defRPr sz="975" b="1">
                 <a:solidFill>
                   <a:srgbClr val="BBD0DD"/>
@@ -15922,7 +15276,6 @@
           </a:lstStyle>
           <a:p xmlns:a="http://schemas.openxmlformats.org/drawingml/2006/main">
             <a:pPr algn="l">
-              <a:buNone/>
               <a:defRPr sz="975" b="1">
                 <a:solidFill>
                   <a:srgbClr val="BBD0DD"/>
@@ -15951,7 +15304,7 @@
           <p:cNvPr id="20" name="">
             <a:extLst xmlns:a="http://schemas.openxmlformats.org/drawingml/2006/main">
               <a:ext uri="{FF2B5EF4-FFF2-40B4-BE49-F238E27FC236}">
-                <a16:creationId xmlns:a16="http://schemas.microsoft.com/office/drawing/2014/main" id="{44190EDE-433B-4A27-A776-13CB3158CF1E}"/>
+                <a16:creationId xmlns:a16="http://schemas.microsoft.com/office/drawing/2014/main" id="{0353C0FC-1B37-4A26-847C-8905086C1652}"/>
               </a:ext>
             </a:extLst>
           </p:cNvPr>
@@ -15961,7 +15314,7 @@
           <p:nvPr/>
         </p:nvPicPr>
         <p:blipFill>
-          <a:blip xmlns:r="http://schemas.openxmlformats.org/officeDocument/2006/relationships" xmlns:a="http://schemas.openxmlformats.org/drawingml/2006/main" r:embed="R3174fe8f08fb4b51"/>
+          <a:blip xmlns:r="http://schemas.openxmlformats.org/officeDocument/2006/relationships" xmlns:a="http://schemas.openxmlformats.org/drawingml/2006/main" r:embed="R7358f999c03b4e4d"/>
           <a:srcRect xmlns:a="http://schemas.openxmlformats.org/drawingml/2006/main" l="59000" t="39000" r="0" b="18000"/>
           <a:stretch xmlns:a="http://schemas.openxmlformats.org/drawingml/2006/main"/>
         </p:blipFill>
@@ -16085,7 +15438,6 @@
               </a:defRPr>
             </a:defPPr>
             <a:lvl1pPr algn="ctr">
-              <a:buNone/>
               <a:defRPr sz="975" b="1">
                 <a:solidFill>
                   <a:srgbClr val="FFFFFF"/>
@@ -16096,7 +15448,6 @@
               </a:defRPr>
             </a:lvl1pPr>
             <a:lvl2pPr algn="ctr">
-              <a:buNone/>
               <a:defRPr sz="975" b="1">
                 <a:solidFill>
                   <a:srgbClr val="FFFFFF"/>
@@ -16107,7 +15458,6 @@
               </a:defRPr>
             </a:lvl2pPr>
             <a:lvl3pPr algn="ctr">
-              <a:buNone/>
               <a:defRPr sz="975" b="1">
                 <a:solidFill>
                   <a:srgbClr val="FFFFFF"/>
@@ -16118,7 +15468,6 @@
               </a:defRPr>
             </a:lvl3pPr>
             <a:lvl4pPr algn="ctr">
-              <a:buNone/>
               <a:defRPr sz="975" b="1">
                 <a:solidFill>
                   <a:srgbClr val="FFFFFF"/>
@@ -16129,7 +15478,6 @@
               </a:defRPr>
             </a:lvl4pPr>
             <a:lvl5pPr algn="ctr">
-              <a:buNone/>
               <a:defRPr sz="975" b="1">
                 <a:solidFill>
                   <a:srgbClr val="FFFFFF"/>
@@ -16140,7 +15488,6 @@
               </a:defRPr>
             </a:lvl5pPr>
             <a:lvl6pPr algn="ctr">
-              <a:buNone/>
               <a:defRPr sz="975" b="1">
                 <a:solidFill>
                   <a:srgbClr val="FFFFFF"/>
@@ -16151,7 +15498,6 @@
               </a:defRPr>
             </a:lvl6pPr>
             <a:lvl7pPr algn="ctr">
-              <a:buNone/>
               <a:defRPr sz="975" b="1">
                 <a:solidFill>
                   <a:srgbClr val="FFFFFF"/>
@@ -16162,7 +15508,6 @@
               </a:defRPr>
             </a:lvl7pPr>
             <a:lvl8pPr algn="ctr">
-              <a:buNone/>
               <a:defRPr sz="975" b="1">
                 <a:solidFill>
                   <a:srgbClr val="FFFFFF"/>
@@ -16173,7 +15518,6 @@
               </a:defRPr>
             </a:lvl8pPr>
             <a:lvl9pPr algn="ctr">
-              <a:buNone/>
               <a:defRPr sz="975" b="1">
                 <a:solidFill>
                   <a:srgbClr val="FFFFFF"/>
@@ -16186,7 +15530,6 @@
           </a:lstStyle>
           <a:p xmlns:a="http://schemas.openxmlformats.org/drawingml/2006/main">
             <a:pPr algn="ctr">
-              <a:buNone/>
               <a:defRPr sz="975" b="1">
                 <a:solidFill>
                   <a:srgbClr val="FFFFFF"/>
@@ -16252,7 +15595,6 @@
               </a:defRPr>
             </a:defPPr>
             <a:lvl1pPr algn="l">
-              <a:buNone/>
               <a:defRPr sz="1275" b="1">
                 <a:solidFill>
                   <a:srgbClr val="FFFFFF"/>
@@ -16263,7 +15605,6 @@
               </a:defRPr>
             </a:lvl1pPr>
             <a:lvl2pPr algn="l">
-              <a:buNone/>
               <a:defRPr sz="1275" b="1">
                 <a:solidFill>
                   <a:srgbClr val="FFFFFF"/>
@@ -16274,7 +15615,6 @@
               </a:defRPr>
             </a:lvl2pPr>
             <a:lvl3pPr algn="l">
-              <a:buNone/>
               <a:defRPr sz="1275" b="1">
                 <a:solidFill>
                   <a:srgbClr val="FFFFFF"/>
@@ -16285,7 +15625,6 @@
               </a:defRPr>
             </a:lvl3pPr>
             <a:lvl4pPr algn="l">
-              <a:buNone/>
               <a:defRPr sz="1275" b="1">
                 <a:solidFill>
                   <a:srgbClr val="FFFFFF"/>
@@ -16296,7 +15635,6 @@
               </a:defRPr>
             </a:lvl4pPr>
             <a:lvl5pPr algn="l">
-              <a:buNone/>
               <a:defRPr sz="1275" b="1">
                 <a:solidFill>
                   <a:srgbClr val="FFFFFF"/>
@@ -16307,7 +15645,6 @@
               </a:defRPr>
             </a:lvl5pPr>
             <a:lvl6pPr algn="l">
-              <a:buNone/>
               <a:defRPr sz="1275" b="1">
                 <a:solidFill>
                   <a:srgbClr val="FFFFFF"/>
@@ -16318,7 +15655,6 @@
               </a:defRPr>
             </a:lvl6pPr>
             <a:lvl7pPr algn="l">
-              <a:buNone/>
               <a:defRPr sz="1275" b="1">
                 <a:solidFill>
                   <a:srgbClr val="FFFFFF"/>
@@ -16329,7 +15665,6 @@
               </a:defRPr>
             </a:lvl7pPr>
             <a:lvl8pPr algn="l">
-              <a:buNone/>
               <a:defRPr sz="1275" b="1">
                 <a:solidFill>
                   <a:srgbClr val="FFFFFF"/>
@@ -16340,7 +15675,6 @@
               </a:defRPr>
             </a:lvl8pPr>
             <a:lvl9pPr algn="l">
-              <a:buNone/>
               <a:defRPr sz="1275" b="1">
                 <a:solidFill>
                   <a:srgbClr val="FFFFFF"/>
@@ -16353,7 +15687,6 @@
           </a:lstStyle>
           <a:p xmlns:a="http://schemas.openxmlformats.org/drawingml/2006/main">
             <a:pPr algn="l">
-              <a:buNone/>
               <a:defRPr sz="1275" b="1">
                 <a:solidFill>
                   <a:srgbClr val="FFFFFF"/>
@@ -16419,7 +15752,6 @@
               </a:defRPr>
             </a:defPPr>
             <a:lvl1pPr algn="l">
-              <a:buNone/>
               <a:defRPr sz="1200" b="0">
                 <a:solidFill>
                   <a:srgbClr val="BBD0DD"/>
@@ -16430,7 +15762,6 @@
               </a:defRPr>
             </a:lvl1pPr>
             <a:lvl2pPr algn="l">
-              <a:buNone/>
               <a:defRPr sz="1200" b="0">
                 <a:solidFill>
                   <a:srgbClr val="BBD0DD"/>
@@ -16441,7 +15772,6 @@
               </a:defRPr>
             </a:lvl2pPr>
             <a:lvl3pPr algn="l">
-              <a:buNone/>
               <a:defRPr sz="1200" b="0">
                 <a:solidFill>
                   <a:srgbClr val="BBD0DD"/>
@@ -16452,7 +15782,6 @@
               </a:defRPr>
             </a:lvl3pPr>
             <a:lvl4pPr algn="l">
-              <a:buNone/>
               <a:defRPr sz="1200" b="0">
                 <a:solidFill>
                   <a:srgbClr val="BBD0DD"/>
@@ -16463,7 +15792,6 @@
               </a:defRPr>
             </a:lvl4pPr>
             <a:lvl5pPr algn="l">
-              <a:buNone/>
               <a:defRPr sz="1200" b="0">
                 <a:solidFill>
                   <a:srgbClr val="BBD0DD"/>
@@ -16474,7 +15802,6 @@
               </a:defRPr>
             </a:lvl5pPr>
             <a:lvl6pPr algn="l">
-              <a:buNone/>
               <a:defRPr sz="1200" b="0">
                 <a:solidFill>
                   <a:srgbClr val="BBD0DD"/>
@@ -16485,7 +15812,6 @@
               </a:defRPr>
             </a:lvl6pPr>
             <a:lvl7pPr algn="l">
-              <a:buNone/>
               <a:defRPr sz="1200" b="0">
                 <a:solidFill>
                   <a:srgbClr val="BBD0DD"/>
@@ -16496,7 +15822,6 @@
               </a:defRPr>
             </a:lvl7pPr>
             <a:lvl8pPr algn="l">
-              <a:buNone/>
               <a:defRPr sz="1200" b="0">
                 <a:solidFill>
                   <a:srgbClr val="BBD0DD"/>
@@ -16507,7 +15832,6 @@
               </a:defRPr>
             </a:lvl8pPr>
             <a:lvl9pPr algn="l">
-              <a:buNone/>
               <a:defRPr sz="1200" b="0">
                 <a:solidFill>
                   <a:srgbClr val="BBD0DD"/>
@@ -16520,7 +15844,6 @@
           </a:lstStyle>
           <a:p xmlns:a="http://schemas.openxmlformats.org/drawingml/2006/main">
             <a:pPr algn="l">
-              <a:buNone/>
               <a:defRPr sz="1200" b="0">
                 <a:solidFill>
                   <a:srgbClr val="BBD0DD"/>
@@ -16586,7 +15909,6 @@
               </a:defRPr>
             </a:defPPr>
             <a:lvl1pPr algn="r">
-              <a:buNone/>
               <a:defRPr sz="1200" b="1">
                 <a:solidFill>
                   <a:srgbClr val="FFFFFF"/>
@@ -16597,7 +15919,6 @@
               </a:defRPr>
             </a:lvl1pPr>
             <a:lvl2pPr algn="r">
-              <a:buNone/>
               <a:defRPr sz="1200" b="1">
                 <a:solidFill>
                   <a:srgbClr val="FFFFFF"/>
@@ -16608,7 +15929,6 @@
               </a:defRPr>
             </a:lvl2pPr>
             <a:lvl3pPr algn="r">
-              <a:buNone/>
               <a:defRPr sz="1200" b="1">
                 <a:solidFill>
                   <a:srgbClr val="FFFFFF"/>
@@ -16619,7 +15939,6 @@
               </a:defRPr>
             </a:lvl3pPr>
             <a:lvl4pPr algn="r">
-              <a:buNone/>
               <a:defRPr sz="1200" b="1">
                 <a:solidFill>
                   <a:srgbClr val="FFFFFF"/>
@@ -16630,7 +15949,6 @@
               </a:defRPr>
             </a:lvl4pPr>
             <a:lvl5pPr algn="r">
-              <a:buNone/>
               <a:defRPr sz="1200" b="1">
                 <a:solidFill>
                   <a:srgbClr val="FFFFFF"/>
@@ -16641,7 +15959,6 @@
               </a:defRPr>
             </a:lvl5pPr>
             <a:lvl6pPr algn="r">
-              <a:buNone/>
               <a:defRPr sz="1200" b="1">
                 <a:solidFill>
                   <a:srgbClr val="FFFFFF"/>
@@ -16652,7 +15969,6 @@
               </a:defRPr>
             </a:lvl6pPr>
             <a:lvl7pPr algn="r">
-              <a:buNone/>
               <a:defRPr sz="1200" b="1">
                 <a:solidFill>
                   <a:srgbClr val="FFFFFF"/>
@@ -16663,7 +15979,6 @@
               </a:defRPr>
             </a:lvl7pPr>
             <a:lvl8pPr algn="r">
-              <a:buNone/>
               <a:defRPr sz="1200" b="1">
                 <a:solidFill>
                   <a:srgbClr val="FFFFFF"/>
@@ -16674,7 +15989,6 @@
               </a:defRPr>
             </a:lvl8pPr>
             <a:lvl9pPr algn="r">
-              <a:buNone/>
               <a:defRPr sz="1200" b="1">
                 <a:solidFill>
                   <a:srgbClr val="FFFFFF"/>
@@ -16687,7 +16001,6 @@
           </a:lstStyle>
           <a:p xmlns:a="http://schemas.openxmlformats.org/drawingml/2006/main">
             <a:pPr algn="r">
-              <a:buNone/>
               <a:defRPr sz="1200" b="1">
                 <a:solidFill>
                   <a:srgbClr val="FFFFFF"/>
@@ -16782,7 +16095,6 @@
               </a:defRPr>
             </a:defPPr>
             <a:lvl1pPr algn="l">
-              <a:buNone/>
               <a:defRPr sz="1050" b="1">
                 <a:solidFill>
                   <a:srgbClr val="0877B9"/>
@@ -16793,7 +16105,6 @@
               </a:defRPr>
             </a:lvl1pPr>
             <a:lvl2pPr algn="l">
-              <a:buNone/>
               <a:defRPr sz="1050" b="1">
                 <a:solidFill>
                   <a:srgbClr val="0877B9"/>
@@ -16804,7 +16115,6 @@
               </a:defRPr>
             </a:lvl2pPr>
             <a:lvl3pPr algn="l">
-              <a:buNone/>
               <a:defRPr sz="1050" b="1">
                 <a:solidFill>
                   <a:srgbClr val="0877B9"/>
@@ -16815,7 +16125,6 @@
               </a:defRPr>
             </a:lvl3pPr>
             <a:lvl4pPr algn="l">
-              <a:buNone/>
               <a:defRPr sz="1050" b="1">
                 <a:solidFill>
                   <a:srgbClr val="0877B9"/>
@@ -16826,7 +16135,6 @@
               </a:defRPr>
             </a:lvl4pPr>
             <a:lvl5pPr algn="l">
-              <a:buNone/>
               <a:defRPr sz="1050" b="1">
                 <a:solidFill>
                   <a:srgbClr val="0877B9"/>
@@ -16837,7 +16145,6 @@
               </a:defRPr>
             </a:lvl5pPr>
             <a:lvl6pPr algn="l">
-              <a:buNone/>
               <a:defRPr sz="1050" b="1">
                 <a:solidFill>
                   <a:srgbClr val="0877B9"/>
@@ -16848,7 +16155,6 @@
               </a:defRPr>
             </a:lvl6pPr>
             <a:lvl7pPr algn="l">
-              <a:buNone/>
               <a:defRPr sz="1050" b="1">
                 <a:solidFill>
                   <a:srgbClr val="0877B9"/>
@@ -16859,7 +16165,6 @@
               </a:defRPr>
             </a:lvl7pPr>
             <a:lvl8pPr algn="l">
-              <a:buNone/>
               <a:defRPr sz="1050" b="1">
                 <a:solidFill>
                   <a:srgbClr val="0877B9"/>
@@ -16870,7 +16175,6 @@
               </a:defRPr>
             </a:lvl8pPr>
             <a:lvl9pPr algn="l">
-              <a:buNone/>
               <a:defRPr sz="1050" b="1">
                 <a:solidFill>
                   <a:srgbClr val="0877B9"/>
@@ -16883,7 +16187,6 @@
           </a:lstStyle>
           <a:p xmlns:a="http://schemas.openxmlformats.org/drawingml/2006/main">
             <a:pPr algn="l">
-              <a:buNone/>
               <a:defRPr sz="1050" b="1">
                 <a:solidFill>
                   <a:srgbClr val="0877B9"/>
@@ -16949,7 +16252,6 @@
               </a:defRPr>
             </a:defPPr>
             <a:lvl1pPr algn="l">
-              <a:buNone/>
               <a:defRPr sz="2850" b="1">
                 <a:solidFill>
                   <a:srgbClr val="183044"/>
@@ -16960,7 +16262,6 @@
               </a:defRPr>
             </a:lvl1pPr>
             <a:lvl2pPr algn="l">
-              <a:buNone/>
               <a:defRPr sz="2850" b="1">
                 <a:solidFill>
                   <a:srgbClr val="183044"/>
@@ -16971,7 +16272,6 @@
               </a:defRPr>
             </a:lvl2pPr>
             <a:lvl3pPr algn="l">
-              <a:buNone/>
               <a:defRPr sz="2850" b="1">
                 <a:solidFill>
                   <a:srgbClr val="183044"/>
@@ -16982,7 +16282,6 @@
               </a:defRPr>
             </a:lvl3pPr>
             <a:lvl4pPr algn="l">
-              <a:buNone/>
               <a:defRPr sz="2850" b="1">
                 <a:solidFill>
                   <a:srgbClr val="183044"/>
@@ -16993,7 +16292,6 @@
               </a:defRPr>
             </a:lvl4pPr>
             <a:lvl5pPr algn="l">
-              <a:buNone/>
               <a:defRPr sz="2850" b="1">
                 <a:solidFill>
                   <a:srgbClr val="183044"/>
@@ -17004,7 +16302,6 @@
               </a:defRPr>
             </a:lvl5pPr>
             <a:lvl6pPr algn="l">
-              <a:buNone/>
               <a:defRPr sz="2850" b="1">
                 <a:solidFill>
                   <a:srgbClr val="183044"/>
@@ -17015,7 +16312,6 @@
               </a:defRPr>
             </a:lvl6pPr>
             <a:lvl7pPr algn="l">
-              <a:buNone/>
               <a:defRPr sz="2850" b="1">
                 <a:solidFill>
                   <a:srgbClr val="183044"/>
@@ -17026,7 +16322,6 @@
               </a:defRPr>
             </a:lvl7pPr>
             <a:lvl8pPr algn="l">
-              <a:buNone/>
               <a:defRPr sz="2850" b="1">
                 <a:solidFill>
                   <a:srgbClr val="183044"/>
@@ -17037,7 +16332,6 @@
               </a:defRPr>
             </a:lvl8pPr>
             <a:lvl9pPr algn="l">
-              <a:buNone/>
               <a:defRPr sz="2850" b="1">
                 <a:solidFill>
                   <a:srgbClr val="183044"/>
@@ -17050,7 +16344,6 @@
           </a:lstStyle>
           <a:p xmlns:a="http://schemas.openxmlformats.org/drawingml/2006/main">
             <a:pPr algn="l">
-              <a:buNone/>
               <a:defRPr sz="2850" b="1">
                 <a:solidFill>
                   <a:srgbClr val="183044"/>
@@ -17147,7 +16440,6 @@
               </a:defRPr>
             </a:defPPr>
             <a:lvl1pPr algn="l">
-              <a:buNone/>
               <a:defRPr sz="900" b="1">
                 <a:solidFill>
                   <a:srgbClr val="5C6F7D"/>
@@ -17158,7 +16450,6 @@
               </a:defRPr>
             </a:lvl1pPr>
             <a:lvl2pPr algn="l">
-              <a:buNone/>
               <a:defRPr sz="900" b="1">
                 <a:solidFill>
                   <a:srgbClr val="5C6F7D"/>
@@ -17169,7 +16460,6 @@
               </a:defRPr>
             </a:lvl2pPr>
             <a:lvl3pPr algn="l">
-              <a:buNone/>
               <a:defRPr sz="900" b="1">
                 <a:solidFill>
                   <a:srgbClr val="5C6F7D"/>
@@ -17180,7 +16470,6 @@
               </a:defRPr>
             </a:lvl3pPr>
             <a:lvl4pPr algn="l">
-              <a:buNone/>
               <a:defRPr sz="900" b="1">
                 <a:solidFill>
                   <a:srgbClr val="5C6F7D"/>
@@ -17191,7 +16480,6 @@
               </a:defRPr>
             </a:lvl4pPr>
             <a:lvl5pPr algn="l">
-              <a:buNone/>
               <a:defRPr sz="900" b="1">
                 <a:solidFill>
                   <a:srgbClr val="5C6F7D"/>
@@ -17202,7 +16490,6 @@
               </a:defRPr>
             </a:lvl5pPr>
             <a:lvl6pPr algn="l">
-              <a:buNone/>
               <a:defRPr sz="900" b="1">
                 <a:solidFill>
                   <a:srgbClr val="5C6F7D"/>
@@ -17213,7 +16500,6 @@
               </a:defRPr>
             </a:lvl6pPr>
             <a:lvl7pPr algn="l">
-              <a:buNone/>
               <a:defRPr sz="900" b="1">
                 <a:solidFill>
                   <a:srgbClr val="5C6F7D"/>
@@ -17224,7 +16510,6 @@
               </a:defRPr>
             </a:lvl7pPr>
             <a:lvl8pPr algn="l">
-              <a:buNone/>
               <a:defRPr sz="900" b="1">
                 <a:solidFill>
                   <a:srgbClr val="5C6F7D"/>
@@ -17235,7 +16520,6 @@
               </a:defRPr>
             </a:lvl8pPr>
             <a:lvl9pPr algn="l">
-              <a:buNone/>
               <a:defRPr sz="900" b="1">
                 <a:solidFill>
                   <a:srgbClr val="5C6F7D"/>
@@ -17248,7 +16532,6 @@
           </a:lstStyle>
           <a:p xmlns:a="http://schemas.openxmlformats.org/drawingml/2006/main">
             <a:pPr algn="l">
-              <a:buNone/>
               <a:defRPr sz="900" b="1">
                 <a:solidFill>
                   <a:srgbClr val="5C6F7D"/>
@@ -17314,7 +16597,6 @@
               </a:defRPr>
             </a:defPPr>
             <a:lvl1pPr algn="r">
-              <a:buNone/>
               <a:defRPr sz="900" b="0">
                 <a:solidFill>
                   <a:srgbClr val="5C6F7D"/>
@@ -17325,7 +16607,6 @@
               </a:defRPr>
             </a:lvl1pPr>
             <a:lvl2pPr algn="r">
-              <a:buNone/>
               <a:defRPr sz="900" b="0">
                 <a:solidFill>
                   <a:srgbClr val="5C6F7D"/>
@@ -17336,7 +16617,6 @@
               </a:defRPr>
             </a:lvl2pPr>
             <a:lvl3pPr algn="r">
-              <a:buNone/>
               <a:defRPr sz="900" b="0">
                 <a:solidFill>
                   <a:srgbClr val="5C6F7D"/>
@@ -17347,7 +16627,6 @@
               </a:defRPr>
             </a:lvl3pPr>
             <a:lvl4pPr algn="r">
-              <a:buNone/>
               <a:defRPr sz="900" b="0">
                 <a:solidFill>
                   <a:srgbClr val="5C6F7D"/>
@@ -17358,7 +16637,6 @@
               </a:defRPr>
             </a:lvl4pPr>
             <a:lvl5pPr algn="r">
-              <a:buNone/>
               <a:defRPr sz="900" b="0">
                 <a:solidFill>
                   <a:srgbClr val="5C6F7D"/>
@@ -17369,7 +16647,6 @@
               </a:defRPr>
             </a:lvl5pPr>
             <a:lvl6pPr algn="r">
-              <a:buNone/>
               <a:defRPr sz="900" b="0">
                 <a:solidFill>
                   <a:srgbClr val="5C6F7D"/>
@@ -17380,7 +16657,6 @@
               </a:defRPr>
             </a:lvl6pPr>
             <a:lvl7pPr algn="r">
-              <a:buNone/>
               <a:defRPr sz="900" b="0">
                 <a:solidFill>
                   <a:srgbClr val="5C6F7D"/>
@@ -17391,7 +16667,6 @@
               </a:defRPr>
             </a:lvl7pPr>
             <a:lvl8pPr algn="r">
-              <a:buNone/>
               <a:defRPr sz="900" b="0">
                 <a:solidFill>
                   <a:srgbClr val="5C6F7D"/>
@@ -17402,7 +16677,6 @@
               </a:defRPr>
             </a:lvl8pPr>
             <a:lvl9pPr algn="r">
-              <a:buNone/>
               <a:defRPr sz="900" b="0">
                 <a:solidFill>
                   <a:srgbClr val="5C6F7D"/>
@@ -17415,7 +16689,6 @@
           </a:lstStyle>
           <a:p xmlns:a="http://schemas.openxmlformats.org/drawingml/2006/main">
             <a:pPr algn="r">
-              <a:buNone/>
               <a:defRPr sz="900" b="0">
                 <a:solidFill>
                   <a:srgbClr val="5C6F7D"/>
@@ -17549,7 +16822,6 @@
               </a:defRPr>
             </a:defPPr>
             <a:lvl1pPr algn="l">
-              <a:buNone/>
               <a:defRPr sz="1050" b="1">
                 <a:solidFill>
                   <a:srgbClr val="0877B9"/>
@@ -17560,7 +16832,6 @@
               </a:defRPr>
             </a:lvl1pPr>
             <a:lvl2pPr algn="l">
-              <a:buNone/>
               <a:defRPr sz="1050" b="1">
                 <a:solidFill>
                   <a:srgbClr val="0877B9"/>
@@ -17571,7 +16842,6 @@
               </a:defRPr>
             </a:lvl2pPr>
             <a:lvl3pPr algn="l">
-              <a:buNone/>
               <a:defRPr sz="1050" b="1">
                 <a:solidFill>
                   <a:srgbClr val="0877B9"/>
@@ -17582,7 +16852,6 @@
               </a:defRPr>
             </a:lvl3pPr>
             <a:lvl4pPr algn="l">
-              <a:buNone/>
               <a:defRPr sz="1050" b="1">
                 <a:solidFill>
                   <a:srgbClr val="0877B9"/>
@@ -17593,7 +16862,6 @@
               </a:defRPr>
             </a:lvl4pPr>
             <a:lvl5pPr algn="l">
-              <a:buNone/>
               <a:defRPr sz="1050" b="1">
                 <a:solidFill>
                   <a:srgbClr val="0877B9"/>
@@ -17604,7 +16872,6 @@
               </a:defRPr>
             </a:lvl5pPr>
             <a:lvl6pPr algn="l">
-              <a:buNone/>
               <a:defRPr sz="1050" b="1">
                 <a:solidFill>
                   <a:srgbClr val="0877B9"/>
@@ -17615,7 +16882,6 @@
               </a:defRPr>
             </a:lvl6pPr>
             <a:lvl7pPr algn="l">
-              <a:buNone/>
               <a:defRPr sz="1050" b="1">
                 <a:solidFill>
                   <a:srgbClr val="0877B9"/>
@@ -17626,7 +16892,6 @@
               </a:defRPr>
             </a:lvl7pPr>
             <a:lvl8pPr algn="l">
-              <a:buNone/>
               <a:defRPr sz="1050" b="1">
                 <a:solidFill>
                   <a:srgbClr val="0877B9"/>
@@ -17637,7 +16902,6 @@
               </a:defRPr>
             </a:lvl8pPr>
             <a:lvl9pPr algn="l">
-              <a:buNone/>
               <a:defRPr sz="1050" b="1">
                 <a:solidFill>
                   <a:srgbClr val="0877B9"/>
@@ -17650,7 +16914,6 @@
           </a:lstStyle>
           <a:p xmlns:a="http://schemas.openxmlformats.org/drawingml/2006/main">
             <a:pPr algn="l">
-              <a:buNone/>
               <a:defRPr sz="1050" b="1">
                 <a:solidFill>
                   <a:srgbClr val="0877B9"/>
@@ -17749,7 +17012,6 @@
               </a:defRPr>
             </a:defPPr>
             <a:lvl1pPr algn="l">
-              <a:buNone/>
               <a:defRPr sz="1275" b="0">
                 <a:solidFill>
                   <a:srgbClr val="203040"/>
@@ -17760,7 +17022,6 @@
               </a:defRPr>
             </a:lvl1pPr>
             <a:lvl2pPr algn="l">
-              <a:buNone/>
               <a:defRPr sz="1275" b="0">
                 <a:solidFill>
                   <a:srgbClr val="203040"/>
@@ -17771,7 +17032,6 @@
               </a:defRPr>
             </a:lvl2pPr>
             <a:lvl3pPr algn="l">
-              <a:buNone/>
               <a:defRPr sz="1275" b="0">
                 <a:solidFill>
                   <a:srgbClr val="203040"/>
@@ -17782,7 +17042,6 @@
               </a:defRPr>
             </a:lvl3pPr>
             <a:lvl4pPr algn="l">
-              <a:buNone/>
               <a:defRPr sz="1275" b="0">
                 <a:solidFill>
                   <a:srgbClr val="203040"/>
@@ -17793,7 +17052,6 @@
               </a:defRPr>
             </a:lvl4pPr>
             <a:lvl5pPr algn="l">
-              <a:buNone/>
               <a:defRPr sz="1275" b="0">
                 <a:solidFill>
                   <a:srgbClr val="203040"/>
@@ -17804,7 +17062,6 @@
               </a:defRPr>
             </a:lvl5pPr>
             <a:lvl6pPr algn="l">
-              <a:buNone/>
               <a:defRPr sz="1275" b="0">
                 <a:solidFill>
                   <a:srgbClr val="203040"/>
@@ -17815,7 +17072,6 @@
               </a:defRPr>
             </a:lvl6pPr>
             <a:lvl7pPr algn="l">
-              <a:buNone/>
               <a:defRPr sz="1275" b="0">
                 <a:solidFill>
                   <a:srgbClr val="203040"/>
@@ -17826,7 +17082,6 @@
               </a:defRPr>
             </a:lvl7pPr>
             <a:lvl8pPr algn="l">
-              <a:buNone/>
               <a:defRPr sz="1275" b="0">
                 <a:solidFill>
                   <a:srgbClr val="203040"/>
@@ -17837,7 +17092,6 @@
               </a:defRPr>
             </a:lvl8pPr>
             <a:lvl9pPr algn="l">
-              <a:buNone/>
               <a:defRPr sz="1275" b="0">
                 <a:solidFill>
                   <a:srgbClr val="203040"/>
@@ -17850,7 +17104,6 @@
           </a:lstStyle>
           <a:p xmlns:a="http://schemas.openxmlformats.org/drawingml/2006/main">
             <a:pPr algn="l">
-              <a:buNone/>
               <a:defRPr sz="1275" b="0">
                 <a:solidFill>
                   <a:srgbClr val="203040"/>
@@ -17949,7 +17202,6 @@
               </a:defRPr>
             </a:defPPr>
             <a:lvl1pPr algn="l">
-              <a:buNone/>
               <a:defRPr sz="1275" b="0">
                 <a:solidFill>
                   <a:srgbClr val="203040"/>
@@ -17960,7 +17212,6 @@
               </a:defRPr>
             </a:lvl1pPr>
             <a:lvl2pPr algn="l">
-              <a:buNone/>
               <a:defRPr sz="1275" b="0">
                 <a:solidFill>
                   <a:srgbClr val="203040"/>
@@ -17971,7 +17222,6 @@
               </a:defRPr>
             </a:lvl2pPr>
             <a:lvl3pPr algn="l">
-              <a:buNone/>
               <a:defRPr sz="1275" b="0">
                 <a:solidFill>
                   <a:srgbClr val="203040"/>
@@ -17982,7 +17232,6 @@
               </a:defRPr>
             </a:lvl3pPr>
             <a:lvl4pPr algn="l">
-              <a:buNone/>
               <a:defRPr sz="1275" b="0">
                 <a:solidFill>
                   <a:srgbClr val="203040"/>
@@ -17993,7 +17242,6 @@
               </a:defRPr>
             </a:lvl4pPr>
             <a:lvl5pPr algn="l">
-              <a:buNone/>
               <a:defRPr sz="1275" b="0">
                 <a:solidFill>
                   <a:srgbClr val="203040"/>
@@ -18004,7 +17252,6 @@
               </a:defRPr>
             </a:lvl5pPr>
             <a:lvl6pPr algn="l">
-              <a:buNone/>
               <a:defRPr sz="1275" b="0">
                 <a:solidFill>
                   <a:srgbClr val="203040"/>
@@ -18015,7 +17262,6 @@
               </a:defRPr>
             </a:lvl6pPr>
             <a:lvl7pPr algn="l">
-              <a:buNone/>
               <a:defRPr sz="1275" b="0">
                 <a:solidFill>
                   <a:srgbClr val="203040"/>
@@ -18026,7 +17272,6 @@
               </a:defRPr>
             </a:lvl7pPr>
             <a:lvl8pPr algn="l">
-              <a:buNone/>
               <a:defRPr sz="1275" b="0">
                 <a:solidFill>
                   <a:srgbClr val="203040"/>
@@ -18037,7 +17282,6 @@
               </a:defRPr>
             </a:lvl8pPr>
             <a:lvl9pPr algn="l">
-              <a:buNone/>
               <a:defRPr sz="1275" b="0">
                 <a:solidFill>
                   <a:srgbClr val="203040"/>
@@ -18050,7 +17294,6 @@
           </a:lstStyle>
           <a:p xmlns:a="http://schemas.openxmlformats.org/drawingml/2006/main">
             <a:pPr algn="l">
-              <a:buNone/>
               <a:defRPr sz="1275" b="0">
                 <a:solidFill>
                   <a:srgbClr val="203040"/>
@@ -18149,7 +17392,6 @@
               </a:defRPr>
             </a:defPPr>
             <a:lvl1pPr algn="l">
-              <a:buNone/>
               <a:defRPr sz="1275" b="0">
                 <a:solidFill>
                   <a:srgbClr val="203040"/>
@@ -18160,7 +17402,6 @@
               </a:defRPr>
             </a:lvl1pPr>
             <a:lvl2pPr algn="l">
-              <a:buNone/>
               <a:defRPr sz="1275" b="0">
                 <a:solidFill>
                   <a:srgbClr val="203040"/>
@@ -18171,7 +17412,6 @@
               </a:defRPr>
             </a:lvl2pPr>
             <a:lvl3pPr algn="l">
-              <a:buNone/>
               <a:defRPr sz="1275" b="0">
                 <a:solidFill>
                   <a:srgbClr val="203040"/>
@@ -18182,7 +17422,6 @@
               </a:defRPr>
             </a:lvl3pPr>
             <a:lvl4pPr algn="l">
-              <a:buNone/>
               <a:defRPr sz="1275" b="0">
                 <a:solidFill>
                   <a:srgbClr val="203040"/>
@@ -18193,7 +17432,6 @@
               </a:defRPr>
             </a:lvl4pPr>
             <a:lvl5pPr algn="l">
-              <a:buNone/>
               <a:defRPr sz="1275" b="0">
                 <a:solidFill>
                   <a:srgbClr val="203040"/>
@@ -18204,7 +17442,6 @@
               </a:defRPr>
             </a:lvl5pPr>
             <a:lvl6pPr algn="l">
-              <a:buNone/>
               <a:defRPr sz="1275" b="0">
                 <a:solidFill>
                   <a:srgbClr val="203040"/>
@@ -18215,7 +17452,6 @@
               </a:defRPr>
             </a:lvl6pPr>
             <a:lvl7pPr algn="l">
-              <a:buNone/>
               <a:defRPr sz="1275" b="0">
                 <a:solidFill>
                   <a:srgbClr val="203040"/>
@@ -18226,7 +17462,6 @@
               </a:defRPr>
             </a:lvl7pPr>
             <a:lvl8pPr algn="l">
-              <a:buNone/>
               <a:defRPr sz="1275" b="0">
                 <a:solidFill>
                   <a:srgbClr val="203040"/>
@@ -18237,7 +17472,6 @@
               </a:defRPr>
             </a:lvl8pPr>
             <a:lvl9pPr algn="l">
-              <a:buNone/>
               <a:defRPr sz="1275" b="0">
                 <a:solidFill>
                   <a:srgbClr val="203040"/>
@@ -18250,7 +17484,6 @@
           </a:lstStyle>
           <a:p xmlns:a="http://schemas.openxmlformats.org/drawingml/2006/main">
             <a:pPr algn="l">
-              <a:buNone/>
               <a:defRPr sz="1275" b="0">
                 <a:solidFill>
                   <a:srgbClr val="203040"/>
@@ -18349,7 +17582,6 @@
               </a:defRPr>
             </a:defPPr>
             <a:lvl1pPr algn="l">
-              <a:buNone/>
               <a:defRPr sz="1275" b="0">
                 <a:solidFill>
                   <a:srgbClr val="203040"/>
@@ -18360,7 +17592,6 @@
               </a:defRPr>
             </a:lvl1pPr>
             <a:lvl2pPr algn="l">
-              <a:buNone/>
               <a:defRPr sz="1275" b="0">
                 <a:solidFill>
                   <a:srgbClr val="203040"/>
@@ -18371,7 +17602,6 @@
               </a:defRPr>
             </a:lvl2pPr>
             <a:lvl3pPr algn="l">
-              <a:buNone/>
               <a:defRPr sz="1275" b="0">
                 <a:solidFill>
                   <a:srgbClr val="203040"/>
@@ -18382,7 +17612,6 @@
               </a:defRPr>
             </a:lvl3pPr>
             <a:lvl4pPr algn="l">
-              <a:buNone/>
               <a:defRPr sz="1275" b="0">
                 <a:solidFill>
                   <a:srgbClr val="203040"/>
@@ -18393,7 +17622,6 @@
               </a:defRPr>
             </a:lvl4pPr>
             <a:lvl5pPr algn="l">
-              <a:buNone/>
               <a:defRPr sz="1275" b="0">
                 <a:solidFill>
                   <a:srgbClr val="203040"/>
@@ -18404,7 +17632,6 @@
               </a:defRPr>
             </a:lvl5pPr>
             <a:lvl6pPr algn="l">
-              <a:buNone/>
               <a:defRPr sz="1275" b="0">
                 <a:solidFill>
                   <a:srgbClr val="203040"/>
@@ -18415,7 +17642,6 @@
               </a:defRPr>
             </a:lvl6pPr>
             <a:lvl7pPr algn="l">
-              <a:buNone/>
               <a:defRPr sz="1275" b="0">
                 <a:solidFill>
                   <a:srgbClr val="203040"/>
@@ -18426,7 +17652,6 @@
               </a:defRPr>
             </a:lvl7pPr>
             <a:lvl8pPr algn="l">
-              <a:buNone/>
               <a:defRPr sz="1275" b="0">
                 <a:solidFill>
                   <a:srgbClr val="203040"/>
@@ -18437,7 +17662,6 @@
               </a:defRPr>
             </a:lvl8pPr>
             <a:lvl9pPr algn="l">
-              <a:buNone/>
               <a:defRPr sz="1275" b="0">
                 <a:solidFill>
                   <a:srgbClr val="203040"/>
@@ -18450,7 +17674,6 @@
           </a:lstStyle>
           <a:p xmlns:a="http://schemas.openxmlformats.org/drawingml/2006/main">
             <a:pPr algn="l">
-              <a:buNone/>
               <a:defRPr sz="1275" b="0">
                 <a:solidFill>
                   <a:srgbClr val="203040"/>
@@ -18469,7 +17692,7 @@
                 <a:ea typeface="Arial"/>
                 <a:cs typeface="Arial"/>
               </a:rPr>
-              <a:t>Tutor snippets, demo sign-ins, and Bedrock option added</a:t>
+              <a:t>Integrity-aware, course-grounded tutor module</a:t>
             </a:r>
           </a:p>
         </p:txBody>
@@ -18516,7 +17739,6 @@
               </a:defRPr>
             </a:defPPr>
             <a:lvl1pPr algn="l">
-              <a:buNone/>
               <a:defRPr sz="1050" b="1">
                 <a:solidFill>
                   <a:srgbClr val="0877B9"/>
@@ -18527,7 +17749,6 @@
               </a:defRPr>
             </a:lvl1pPr>
             <a:lvl2pPr algn="l">
-              <a:buNone/>
               <a:defRPr sz="1050" b="1">
                 <a:solidFill>
                   <a:srgbClr val="0877B9"/>
@@ -18538,7 +17759,6 @@
               </a:defRPr>
             </a:lvl2pPr>
             <a:lvl3pPr algn="l">
-              <a:buNone/>
               <a:defRPr sz="1050" b="1">
                 <a:solidFill>
                   <a:srgbClr val="0877B9"/>
@@ -18549,7 +17769,6 @@
               </a:defRPr>
             </a:lvl3pPr>
             <a:lvl4pPr algn="l">
-              <a:buNone/>
               <a:defRPr sz="1050" b="1">
                 <a:solidFill>
                   <a:srgbClr val="0877B9"/>
@@ -18560,7 +17779,6 @@
               </a:defRPr>
             </a:lvl4pPr>
             <a:lvl5pPr algn="l">
-              <a:buNone/>
               <a:defRPr sz="1050" b="1">
                 <a:solidFill>
                   <a:srgbClr val="0877B9"/>
@@ -18571,7 +17789,6 @@
               </a:defRPr>
             </a:lvl5pPr>
             <a:lvl6pPr algn="l">
-              <a:buNone/>
               <a:defRPr sz="1050" b="1">
                 <a:solidFill>
                   <a:srgbClr val="0877B9"/>
@@ -18582,7 +17799,6 @@
               </a:defRPr>
             </a:lvl6pPr>
             <a:lvl7pPr algn="l">
-              <a:buNone/>
               <a:defRPr sz="1050" b="1">
                 <a:solidFill>
                   <a:srgbClr val="0877B9"/>
@@ -18593,7 +17809,6 @@
               </a:defRPr>
             </a:lvl7pPr>
             <a:lvl8pPr algn="l">
-              <a:buNone/>
               <a:defRPr sz="1050" b="1">
                 <a:solidFill>
                   <a:srgbClr val="0877B9"/>
@@ -18604,7 +17819,6 @@
               </a:defRPr>
             </a:lvl8pPr>
             <a:lvl9pPr algn="l">
-              <a:buNone/>
               <a:defRPr sz="1050" b="1">
                 <a:solidFill>
                   <a:srgbClr val="0877B9"/>
@@ -18617,7 +17831,6 @@
           </a:lstStyle>
           <a:p xmlns:a="http://schemas.openxmlformats.org/drawingml/2006/main">
             <a:pPr algn="l">
-              <a:buNone/>
               <a:defRPr sz="1050" b="1">
                 <a:solidFill>
                   <a:srgbClr val="0877B9"/>
@@ -18683,7 +17896,6 @@
               </a:defRPr>
             </a:defPPr>
             <a:lvl1pPr algn="l">
-              <a:buNone/>
               <a:defRPr sz="1725" b="1">
                 <a:solidFill>
                   <a:srgbClr val="183044"/>
@@ -18694,7 +17906,6 @@
               </a:defRPr>
             </a:lvl1pPr>
             <a:lvl2pPr algn="l">
-              <a:buNone/>
               <a:defRPr sz="1725" b="1">
                 <a:solidFill>
                   <a:srgbClr val="183044"/>
@@ -18705,7 +17916,6 @@
               </a:defRPr>
             </a:lvl2pPr>
             <a:lvl3pPr algn="l">
-              <a:buNone/>
               <a:defRPr sz="1725" b="1">
                 <a:solidFill>
                   <a:srgbClr val="183044"/>
@@ -18716,7 +17926,6 @@
               </a:defRPr>
             </a:lvl3pPr>
             <a:lvl4pPr algn="l">
-              <a:buNone/>
               <a:defRPr sz="1725" b="1">
                 <a:solidFill>
                   <a:srgbClr val="183044"/>
@@ -18727,7 +17936,6 @@
               </a:defRPr>
             </a:lvl4pPr>
             <a:lvl5pPr algn="l">
-              <a:buNone/>
               <a:defRPr sz="1725" b="1">
                 <a:solidFill>
                   <a:srgbClr val="183044"/>
@@ -18738,7 +17946,6 @@
               </a:defRPr>
             </a:lvl5pPr>
             <a:lvl6pPr algn="l">
-              <a:buNone/>
               <a:defRPr sz="1725" b="1">
                 <a:solidFill>
                   <a:srgbClr val="183044"/>
@@ -18749,7 +17956,6 @@
               </a:defRPr>
             </a:lvl6pPr>
             <a:lvl7pPr algn="l">
-              <a:buNone/>
               <a:defRPr sz="1725" b="1">
                 <a:solidFill>
                   <a:srgbClr val="183044"/>
@@ -18760,7 +17966,6 @@
               </a:defRPr>
             </a:lvl7pPr>
             <a:lvl8pPr algn="l">
-              <a:buNone/>
               <a:defRPr sz="1725" b="1">
                 <a:solidFill>
                   <a:srgbClr val="183044"/>
@@ -18771,7 +17976,6 @@
               </a:defRPr>
             </a:lvl8pPr>
             <a:lvl9pPr algn="l">
-              <a:buNone/>
               <a:defRPr sz="1725" b="1">
                 <a:solidFill>
                   <a:srgbClr val="183044"/>
@@ -18784,7 +17988,6 @@
           </a:lstStyle>
           <a:p xmlns:a="http://schemas.openxmlformats.org/drawingml/2006/main">
             <a:pPr algn="l">
-              <a:buNone/>
               <a:defRPr sz="1725" b="1">
                 <a:solidFill>
                   <a:srgbClr val="183044"/>
@@ -18850,7 +18053,6 @@
               </a:defRPr>
             </a:defPPr>
             <a:lvl1pPr algn="l">
-              <a:buNone/>
               <a:defRPr sz="1275" b="0">
                 <a:solidFill>
                   <a:srgbClr val="5C6F7D"/>
@@ -18861,7 +18063,6 @@
               </a:defRPr>
             </a:lvl1pPr>
             <a:lvl2pPr algn="l">
-              <a:buNone/>
               <a:defRPr sz="1275" b="0">
                 <a:solidFill>
                   <a:srgbClr val="5C6F7D"/>
@@ -18872,7 +18073,6 @@
               </a:defRPr>
             </a:lvl2pPr>
             <a:lvl3pPr algn="l">
-              <a:buNone/>
               <a:defRPr sz="1275" b="0">
                 <a:solidFill>
                   <a:srgbClr val="5C6F7D"/>
@@ -18883,7 +18083,6 @@
               </a:defRPr>
             </a:lvl3pPr>
             <a:lvl4pPr algn="l">
-              <a:buNone/>
               <a:defRPr sz="1275" b="0">
                 <a:solidFill>
                   <a:srgbClr val="5C6F7D"/>
@@ -18894,7 +18093,6 @@
               </a:defRPr>
             </a:lvl4pPr>
             <a:lvl5pPr algn="l">
-              <a:buNone/>
               <a:defRPr sz="1275" b="0">
                 <a:solidFill>
                   <a:srgbClr val="5C6F7D"/>
@@ -18905,7 +18103,6 @@
               </a:defRPr>
             </a:lvl5pPr>
             <a:lvl6pPr algn="l">
-              <a:buNone/>
               <a:defRPr sz="1275" b="0">
                 <a:solidFill>
                   <a:srgbClr val="5C6F7D"/>
@@ -18916,7 +18113,6 @@
               </a:defRPr>
             </a:lvl6pPr>
             <a:lvl7pPr algn="l">
-              <a:buNone/>
               <a:defRPr sz="1275" b="0">
                 <a:solidFill>
                   <a:srgbClr val="5C6F7D"/>
@@ -18927,7 +18123,6 @@
               </a:defRPr>
             </a:lvl7pPr>
             <a:lvl8pPr algn="l">
-              <a:buNone/>
               <a:defRPr sz="1275" b="0">
                 <a:solidFill>
                   <a:srgbClr val="5C6F7D"/>
@@ -18938,7 +18133,6 @@
               </a:defRPr>
             </a:lvl8pPr>
             <a:lvl9pPr algn="l">
-              <a:buNone/>
               <a:defRPr sz="1275" b="0">
                 <a:solidFill>
                   <a:srgbClr val="5C6F7D"/>
@@ -18951,7 +18145,6 @@
           </a:lstStyle>
           <a:p xmlns:a="http://schemas.openxmlformats.org/drawingml/2006/main">
             <a:pPr algn="l">
-              <a:buNone/>
               <a:defRPr sz="1275" b="0">
                 <a:solidFill>
                   <a:srgbClr val="5C6F7D"/>
@@ -19050,7 +18243,6 @@
               </a:defRPr>
             </a:defPPr>
             <a:lvl1pPr algn="ctr">
-              <a:buNone/>
               <a:defRPr sz="1275" b="1">
                 <a:solidFill>
                   <a:srgbClr val="FFFFFF"/>
@@ -19061,7 +18253,6 @@
               </a:defRPr>
             </a:lvl1pPr>
             <a:lvl2pPr algn="ctr">
-              <a:buNone/>
               <a:defRPr sz="1275" b="1">
                 <a:solidFill>
                   <a:srgbClr val="FFFFFF"/>
@@ -19072,7 +18263,6 @@
               </a:defRPr>
             </a:lvl2pPr>
             <a:lvl3pPr algn="ctr">
-              <a:buNone/>
               <a:defRPr sz="1275" b="1">
                 <a:solidFill>
                   <a:srgbClr val="FFFFFF"/>
@@ -19083,7 +18273,6 @@
               </a:defRPr>
             </a:lvl3pPr>
             <a:lvl4pPr algn="ctr">
-              <a:buNone/>
               <a:defRPr sz="1275" b="1">
                 <a:solidFill>
                   <a:srgbClr val="FFFFFF"/>
@@ -19094,7 +18283,6 @@
               </a:defRPr>
             </a:lvl4pPr>
             <a:lvl5pPr algn="ctr">
-              <a:buNone/>
               <a:defRPr sz="1275" b="1">
                 <a:solidFill>
                   <a:srgbClr val="FFFFFF"/>
@@ -19105,7 +18293,6 @@
               </a:defRPr>
             </a:lvl5pPr>
             <a:lvl6pPr algn="ctr">
-              <a:buNone/>
               <a:defRPr sz="1275" b="1">
                 <a:solidFill>
                   <a:srgbClr val="FFFFFF"/>
@@ -19116,7 +18303,6 @@
               </a:defRPr>
             </a:lvl6pPr>
             <a:lvl7pPr algn="ctr">
-              <a:buNone/>
               <a:defRPr sz="1275" b="1">
                 <a:solidFill>
                   <a:srgbClr val="FFFFFF"/>
@@ -19127,7 +18313,6 @@
               </a:defRPr>
             </a:lvl7pPr>
             <a:lvl8pPr algn="ctr">
-              <a:buNone/>
               <a:defRPr sz="1275" b="1">
                 <a:solidFill>
                   <a:srgbClr val="FFFFFF"/>
@@ -19138,7 +18323,6 @@
               </a:defRPr>
             </a:lvl8pPr>
             <a:lvl9pPr algn="ctr">
-              <a:buNone/>
               <a:defRPr sz="1275" b="1">
                 <a:solidFill>
                   <a:srgbClr val="FFFFFF"/>
@@ -19151,7 +18335,6 @@
           </a:lstStyle>
           <a:p xmlns:a="http://schemas.openxmlformats.org/drawingml/2006/main">
             <a:pPr algn="ctr">
-              <a:buNone/>
               <a:defRPr sz="1275" b="1">
                 <a:solidFill>
                   <a:srgbClr val="FFFFFF"/>
